--- a/decks/Chem_05_Toxicology-TDM-POCT.pptx
+++ b/decks/Chem_05_Toxicology-TDM-POCT.pptx
@@ -26,9 +26,13 @@
     <p:sldId id="274" r:id="rId20"/>
     <p:sldId id="275" r:id="rId21"/>
     <p:sldId id="276" r:id="rId22"/>
+    <p:sldId id="277" r:id="rId23"/>
+    <p:sldId id="278" r:id="rId24"/>
+    <p:sldId id="279" r:id="rId25"/>
+    <p:sldId id="280" r:id="rId26"/>
   </p:sldIdLst>
   <p:notesMasterIdLst>
-    <p:notesMasterId r:id="rId23"/>
+    <p:notesMasterId r:id="rId27"/>
   </p:notesMasterIdLst>
   <p:sldSz cx="12191695" cy="6858000"/>
   <p:notesSz cx="6858000" cy="12191695"/>
@@ -1690,6 +1694,358 @@
             <a:fld id="{F7021451-1387-4CA6-816F-3879F97B5CBC}" type="slidenum">
               <a:rPr lang="en-US"/>
               <a:t>21</a:t>
+            </a:fld>
+            <a:endParaRPr lang="en-US"/>
+          </a:p>
+        </p:txBody>
+      </p:sp>
+    </p:spTree>
+    <p:extLst>
+      <p:ext uri="{BB962C8B-B14F-4D97-AF65-F5344CB8AC3E}">
+        <p14:creationId xmlns:p14="http://schemas.microsoft.com/office/powerpoint/2010/main" val="1024086991"/>
+      </p:ext>
+    </p:extLst>
+  </p:cSld>
+  <p:clrMapOvr>
+    <a:masterClrMapping/>
+  </p:clrMapOvr>
+</p:notes>
+</file>
+
+<file path=ppt/notesSlides/notesSlide22.xml><?xml version="1.0" encoding="utf-8"?>
+<p:notes xmlns:a="http://schemas.openxmlformats.org/drawingml/2006/main" xmlns:r="http://schemas.openxmlformats.org/officeDocument/2006/relationships" xmlns:p="http://schemas.openxmlformats.org/presentationml/2006/main">
+  <p:cSld>
+    <p:spTree>
+      <p:nvGrpSpPr>
+        <p:cNvPr id="1" name=""/>
+        <p:cNvGrpSpPr/>
+        <p:nvPr/>
+      </p:nvGrpSpPr>
+      <p:grpSpPr>
+        <a:xfrm>
+          <a:off x="0" y="0"/>
+          <a:ext cx="0" cy="0"/>
+          <a:chOff x="0" y="0"/>
+          <a:chExt cx="0" cy="0"/>
+        </a:xfrm>
+      </p:grpSpPr>
+      <p:sp>
+        <p:nvSpPr>
+          <p:cNvPr id="2" name="Slide Image Placeholder 1"/>
+          <p:cNvSpPr>
+            <a:spLocks noGrp="1" noRot="1" noChangeAspect="1"/>
+          </p:cNvSpPr>
+          <p:nvPr>
+            <p:ph type="sldImg"/>
+          </p:nvPr>
+        </p:nvSpPr>
+        <p:spPr/>
+      </p:sp>
+      <p:sp>
+        <p:nvSpPr>
+          <p:cNvPr id="3" name="Notes Placeholder 2"/>
+          <p:cNvSpPr>
+            <a:spLocks noGrp="1"/>
+          </p:cNvSpPr>
+          <p:nvPr>
+            <p:ph type="body" idx="1"/>
+          </p:nvPr>
+        </p:nvSpPr>
+        <p:spPr/>
+        <p:txBody>
+          <a:bodyPr/>
+          <a:lstStyle/>
+          <a:p>
+            <a:r>
+              <a:rPr lang="en-US" dirty="0"/>
+              <a:t/>
+            </a:r>
+            <a:endParaRPr lang="en-US" dirty="0"/>
+          </a:p>
+        </p:txBody>
+      </p:sp>
+      <p:sp>
+        <p:nvSpPr>
+          <p:cNvPr id="4" name="Slide Number Placeholder 3"/>
+          <p:cNvSpPr>
+            <a:spLocks noGrp="1"/>
+          </p:cNvSpPr>
+          <p:nvPr>
+            <p:ph type="sldNum" sz="quarter" idx="10"/>
+          </p:nvPr>
+        </p:nvSpPr>
+        <p:spPr/>
+        <p:txBody>
+          <a:bodyPr/>
+          <a:lstStyle/>
+          <a:p>
+            <a:fld id="{F7021451-1387-4CA6-816F-3879F97B5CBC}" type="slidenum">
+              <a:rPr lang="en-US"/>
+              <a:t>22</a:t>
+            </a:fld>
+            <a:endParaRPr lang="en-US"/>
+          </a:p>
+        </p:txBody>
+      </p:sp>
+    </p:spTree>
+    <p:extLst>
+      <p:ext uri="{BB962C8B-B14F-4D97-AF65-F5344CB8AC3E}">
+        <p14:creationId xmlns:p14="http://schemas.microsoft.com/office/powerpoint/2010/main" val="1024086991"/>
+      </p:ext>
+    </p:extLst>
+  </p:cSld>
+  <p:clrMapOvr>
+    <a:masterClrMapping/>
+  </p:clrMapOvr>
+</p:notes>
+</file>
+
+<file path=ppt/notesSlides/notesSlide23.xml><?xml version="1.0" encoding="utf-8"?>
+<p:notes xmlns:a="http://schemas.openxmlformats.org/drawingml/2006/main" xmlns:r="http://schemas.openxmlformats.org/officeDocument/2006/relationships" xmlns:p="http://schemas.openxmlformats.org/presentationml/2006/main">
+  <p:cSld>
+    <p:spTree>
+      <p:nvGrpSpPr>
+        <p:cNvPr id="1" name=""/>
+        <p:cNvGrpSpPr/>
+        <p:nvPr/>
+      </p:nvGrpSpPr>
+      <p:grpSpPr>
+        <a:xfrm>
+          <a:off x="0" y="0"/>
+          <a:ext cx="0" cy="0"/>
+          <a:chOff x="0" y="0"/>
+          <a:chExt cx="0" cy="0"/>
+        </a:xfrm>
+      </p:grpSpPr>
+      <p:sp>
+        <p:nvSpPr>
+          <p:cNvPr id="2" name="Slide Image Placeholder 1"/>
+          <p:cNvSpPr>
+            <a:spLocks noGrp="1" noRot="1" noChangeAspect="1"/>
+          </p:cNvSpPr>
+          <p:nvPr>
+            <p:ph type="sldImg"/>
+          </p:nvPr>
+        </p:nvSpPr>
+        <p:spPr/>
+      </p:sp>
+      <p:sp>
+        <p:nvSpPr>
+          <p:cNvPr id="3" name="Notes Placeholder 2"/>
+          <p:cNvSpPr>
+            <a:spLocks noGrp="1"/>
+          </p:cNvSpPr>
+          <p:nvPr>
+            <p:ph type="body" idx="1"/>
+          </p:nvPr>
+        </p:nvSpPr>
+        <p:spPr/>
+        <p:txBody>
+          <a:bodyPr/>
+          <a:lstStyle/>
+          <a:p>
+            <a:r>
+              <a:rPr lang="en-US" dirty="0"/>
+              <a:t/>
+            </a:r>
+            <a:endParaRPr lang="en-US" dirty="0"/>
+          </a:p>
+        </p:txBody>
+      </p:sp>
+      <p:sp>
+        <p:nvSpPr>
+          <p:cNvPr id="4" name="Slide Number Placeholder 3"/>
+          <p:cNvSpPr>
+            <a:spLocks noGrp="1"/>
+          </p:cNvSpPr>
+          <p:nvPr>
+            <p:ph type="sldNum" sz="quarter" idx="10"/>
+          </p:nvPr>
+        </p:nvSpPr>
+        <p:spPr/>
+        <p:txBody>
+          <a:bodyPr/>
+          <a:lstStyle/>
+          <a:p>
+            <a:fld id="{F7021451-1387-4CA6-816F-3879F97B5CBC}" type="slidenum">
+              <a:rPr lang="en-US"/>
+              <a:t>23</a:t>
+            </a:fld>
+            <a:endParaRPr lang="en-US"/>
+          </a:p>
+        </p:txBody>
+      </p:sp>
+    </p:spTree>
+    <p:extLst>
+      <p:ext uri="{BB962C8B-B14F-4D97-AF65-F5344CB8AC3E}">
+        <p14:creationId xmlns:p14="http://schemas.microsoft.com/office/powerpoint/2010/main" val="1024086991"/>
+      </p:ext>
+    </p:extLst>
+  </p:cSld>
+  <p:clrMapOvr>
+    <a:masterClrMapping/>
+  </p:clrMapOvr>
+</p:notes>
+</file>
+
+<file path=ppt/notesSlides/notesSlide24.xml><?xml version="1.0" encoding="utf-8"?>
+<p:notes xmlns:a="http://schemas.openxmlformats.org/drawingml/2006/main" xmlns:r="http://schemas.openxmlformats.org/officeDocument/2006/relationships" xmlns:p="http://schemas.openxmlformats.org/presentationml/2006/main">
+  <p:cSld>
+    <p:spTree>
+      <p:nvGrpSpPr>
+        <p:cNvPr id="1" name=""/>
+        <p:cNvGrpSpPr/>
+        <p:nvPr/>
+      </p:nvGrpSpPr>
+      <p:grpSpPr>
+        <a:xfrm>
+          <a:off x="0" y="0"/>
+          <a:ext cx="0" cy="0"/>
+          <a:chOff x="0" y="0"/>
+          <a:chExt cx="0" cy="0"/>
+        </a:xfrm>
+      </p:grpSpPr>
+      <p:sp>
+        <p:nvSpPr>
+          <p:cNvPr id="2" name="Slide Image Placeholder 1"/>
+          <p:cNvSpPr>
+            <a:spLocks noGrp="1" noRot="1" noChangeAspect="1"/>
+          </p:cNvSpPr>
+          <p:nvPr>
+            <p:ph type="sldImg"/>
+          </p:nvPr>
+        </p:nvSpPr>
+        <p:spPr/>
+      </p:sp>
+      <p:sp>
+        <p:nvSpPr>
+          <p:cNvPr id="3" name="Notes Placeholder 2"/>
+          <p:cNvSpPr>
+            <a:spLocks noGrp="1"/>
+          </p:cNvSpPr>
+          <p:nvPr>
+            <p:ph type="body" idx="1"/>
+          </p:nvPr>
+        </p:nvSpPr>
+        <p:spPr/>
+        <p:txBody>
+          <a:bodyPr/>
+          <a:lstStyle/>
+          <a:p>
+            <a:r>
+              <a:rPr lang="en-US" dirty="0"/>
+              <a:t/>
+            </a:r>
+            <a:endParaRPr lang="en-US" dirty="0"/>
+          </a:p>
+        </p:txBody>
+      </p:sp>
+      <p:sp>
+        <p:nvSpPr>
+          <p:cNvPr id="4" name="Slide Number Placeholder 3"/>
+          <p:cNvSpPr>
+            <a:spLocks noGrp="1"/>
+          </p:cNvSpPr>
+          <p:nvPr>
+            <p:ph type="sldNum" sz="quarter" idx="10"/>
+          </p:nvPr>
+        </p:nvSpPr>
+        <p:spPr/>
+        <p:txBody>
+          <a:bodyPr/>
+          <a:lstStyle/>
+          <a:p>
+            <a:fld id="{F7021451-1387-4CA6-816F-3879F97B5CBC}" type="slidenum">
+              <a:rPr lang="en-US"/>
+              <a:t>24</a:t>
+            </a:fld>
+            <a:endParaRPr lang="en-US"/>
+          </a:p>
+        </p:txBody>
+      </p:sp>
+    </p:spTree>
+    <p:extLst>
+      <p:ext uri="{BB962C8B-B14F-4D97-AF65-F5344CB8AC3E}">
+        <p14:creationId xmlns:p14="http://schemas.microsoft.com/office/powerpoint/2010/main" val="1024086991"/>
+      </p:ext>
+    </p:extLst>
+  </p:cSld>
+  <p:clrMapOvr>
+    <a:masterClrMapping/>
+  </p:clrMapOvr>
+</p:notes>
+</file>
+
+<file path=ppt/notesSlides/notesSlide25.xml><?xml version="1.0" encoding="utf-8"?>
+<p:notes xmlns:a="http://schemas.openxmlformats.org/drawingml/2006/main" xmlns:r="http://schemas.openxmlformats.org/officeDocument/2006/relationships" xmlns:p="http://schemas.openxmlformats.org/presentationml/2006/main">
+  <p:cSld>
+    <p:spTree>
+      <p:nvGrpSpPr>
+        <p:cNvPr id="1" name=""/>
+        <p:cNvGrpSpPr/>
+        <p:nvPr/>
+      </p:nvGrpSpPr>
+      <p:grpSpPr>
+        <a:xfrm>
+          <a:off x="0" y="0"/>
+          <a:ext cx="0" cy="0"/>
+          <a:chOff x="0" y="0"/>
+          <a:chExt cx="0" cy="0"/>
+        </a:xfrm>
+      </p:grpSpPr>
+      <p:sp>
+        <p:nvSpPr>
+          <p:cNvPr id="2" name="Slide Image Placeholder 1"/>
+          <p:cNvSpPr>
+            <a:spLocks noGrp="1" noRot="1" noChangeAspect="1"/>
+          </p:cNvSpPr>
+          <p:nvPr>
+            <p:ph type="sldImg"/>
+          </p:nvPr>
+        </p:nvSpPr>
+        <p:spPr/>
+      </p:sp>
+      <p:sp>
+        <p:nvSpPr>
+          <p:cNvPr id="3" name="Notes Placeholder 2"/>
+          <p:cNvSpPr>
+            <a:spLocks noGrp="1"/>
+          </p:cNvSpPr>
+          <p:nvPr>
+            <p:ph type="body" idx="1"/>
+          </p:nvPr>
+        </p:nvSpPr>
+        <p:spPr/>
+        <p:txBody>
+          <a:bodyPr/>
+          <a:lstStyle/>
+          <a:p>
+            <a:r>
+              <a:rPr lang="en-US" dirty="0"/>
+              <a:t/>
+            </a:r>
+            <a:endParaRPr lang="en-US" dirty="0"/>
+          </a:p>
+        </p:txBody>
+      </p:sp>
+      <p:sp>
+        <p:nvSpPr>
+          <p:cNvPr id="4" name="Slide Number Placeholder 3"/>
+          <p:cNvSpPr>
+            <a:spLocks noGrp="1"/>
+          </p:cNvSpPr>
+          <p:nvPr>
+            <p:ph type="sldNum" sz="quarter" idx="10"/>
+          </p:nvPr>
+        </p:nvSpPr>
+        <p:spPr/>
+        <p:txBody>
+          <a:bodyPr/>
+          <a:lstStyle/>
+          <a:p>
+            <a:fld id="{F7021451-1387-4CA6-816F-3879F97B5CBC}" type="slidenum">
+              <a:rPr lang="en-US"/>
+              <a:t>25</a:t>
             </a:fld>
             <a:endParaRPr lang="en-US"/>
           </a:p>
@@ -3085,7 +3441,7 @@
                 <a:ea typeface="Calibri" pitchFamily="34" charset="-122"/>
                 <a:cs typeface="Calibri" pitchFamily="34" charset="-120"/>
               </a:rPr>
-              <a:t>CLINICAL CHEMISTRY   ·   POCT</a:t>
+              <a:t>CLINICAL CHEMISTRY   ·   TDM</a:t>
             </a:r>
             <a:endParaRPr lang="en-US" sz="1100" dirty="0"/>
           </a:p>
@@ -3124,7 +3480,7 @@
                 <a:ea typeface="Calibri" pitchFamily="34" charset="-122"/>
                 <a:cs typeface="Calibri" pitchFamily="34" charset="-120"/>
               </a:rPr>
-              <a:t>Point-of-Care Testing Governance</a:t>
+              <a:t>Principles of Drug Monitoring</a:t>
             </a:r>
             <a:endParaRPr lang="en-US" sz="3000" dirty="0"/>
           </a:p>
@@ -3192,7 +3548,7 @@
                 <a:ea typeface="Calibri" pitchFamily="34" charset="-122"/>
                 <a:cs typeface="Calibri" pitchFamily="34" charset="-120"/>
               </a:rPr>
-              <a:t>WHY GOVERNANCE MATTERS</a:t>
+              <a:t>WHEN AND WHAT TO SAMPLE</a:t>
             </a:r>
             <a:endParaRPr lang="en-US" sz="1200" dirty="0"/>
           </a:p>
@@ -3235,7 +3591,7 @@
                 <a:ea typeface="Calibri" pitchFamily="34" charset="-122"/>
                 <a:cs typeface="Calibri" pitchFamily="34" charset="-120"/>
               </a:rPr>
-              <a:t>POCT is performed by non-laboratorians across many sites — the error surface is large.</a:t>
+              <a:t>Monitor narrow-therapeutic-index drugs (vancomycin, aminoglycosides, digoxin, lithium, antiepileptics, immunosuppressants).</a:t>
             </a:r>
             <a:endParaRPr lang="en-US" sz="1250" dirty="0"/>
           </a:p>
@@ -3256,7 +3612,7 @@
                 <a:ea typeface="Calibri" pitchFamily="34" charset="-122"/>
                 <a:cs typeface="Calibri" pitchFamily="34" charset="-120"/>
               </a:rPr>
-              <a:t>Requires operator training/competency, QC, connectivity, and result documentation.</a:t>
+              <a:t>Sample at STEADY STATE (~5 half-lives) unless assessing toxicity.</a:t>
             </a:r>
             <a:endParaRPr lang="en-US" sz="1250" dirty="0"/>
           </a:p>
@@ -3277,7 +3633,7 @@
                 <a:ea typeface="Calibri" pitchFamily="34" charset="-122"/>
                 <a:cs typeface="Calibri" pitchFamily="34" charset="-120"/>
               </a:rPr>
-              <a:t>Lot verification and reagent storage are common failure points.</a:t>
+              <a:t>Trough for most agents; specific peak/AUC for aminoglycosides/vancomycin.</a:t>
             </a:r>
             <a:endParaRPr lang="en-US" sz="1250" dirty="0"/>
           </a:p>
@@ -3298,7 +3654,7 @@
                 <a:ea typeface="Calibri" pitchFamily="34" charset="-122"/>
                 <a:cs typeface="Calibri" pitchFamily="34" charset="-120"/>
               </a:rPr>
-              <a:t>Oversight sits with the laboratory medical director under CLIA/accreditation.</a:t>
+              <a:t>Timing errors are the commonest cause of misinterpretation.</a:t>
             </a:r>
             <a:endParaRPr lang="en-US" sz="1250" dirty="0"/>
           </a:p>
@@ -3366,7 +3722,7 @@
                 <a:ea typeface="Calibri" pitchFamily="34" charset="-122"/>
                 <a:cs typeface="Calibri" pitchFamily="34" charset="-120"/>
               </a:rPr>
-              <a:t>QUALITY REQUIREMENTS</a:t>
+              <a:t>FREE DRUG &amp; METABOLITES</a:t>
             </a:r>
             <a:endParaRPr lang="en-US" sz="1200" dirty="0"/>
           </a:p>
@@ -3409,7 +3765,7 @@
                 <a:ea typeface="Calibri" pitchFamily="34" charset="-122"/>
                 <a:cs typeface="Calibri" pitchFamily="34" charset="-120"/>
               </a:rPr>
-              <a:t>Defined QC frequency and lockout for failed QC.</a:t>
+              <a:t>Free (unbound) drug matters when protein binding changes (phenytoin in hypoalbuminemia/uremia).</a:t>
             </a:r>
             <a:endParaRPr lang="en-US" sz="1250" dirty="0"/>
           </a:p>
@@ -3430,7 +3786,7 @@
                 <a:ea typeface="Calibri" pitchFamily="34" charset="-122"/>
                 <a:cs typeface="Calibri" pitchFamily="34" charset="-120"/>
               </a:rPr>
-              <a:t>Correlation with central-lab methods (method comparison).</a:t>
+              <a:t>Active metabolites may not be measured by the assay.</a:t>
             </a:r>
             <a:endParaRPr lang="en-US" sz="1250" dirty="0"/>
           </a:p>
@@ -3451,7 +3807,7 @@
                 <a:ea typeface="Calibri" pitchFamily="34" charset="-122"/>
                 <a:cs typeface="Calibri" pitchFamily="34" charset="-120"/>
               </a:rPr>
-              <a:t>Critical-value communication pathways from the bedside.</a:t>
+              <a:t>Digoxin: draw ≥ 6–8 h post-dose (avoid the distribution phase).</a:t>
             </a:r>
             <a:endParaRPr lang="en-US" sz="1250" dirty="0"/>
           </a:p>
@@ -3472,7 +3828,7 @@
                 <a:ea typeface="Calibri" pitchFamily="34" charset="-122"/>
                 <a:cs typeface="Calibri" pitchFamily="34" charset="-120"/>
               </a:rPr>
-              <a:t>Data capture into the LIS/EHR for traceability.</a:t>
+              <a:t>Correlate the level with clinical effect and toxicity.</a:t>
             </a:r>
             <a:endParaRPr lang="en-US" sz="1250" dirty="0"/>
           </a:p>
@@ -3595,199 +3951,6 @@
 <file path=ppt/slides/slide11.xml><?xml version="1.0" encoding="utf-8"?>
 <p:sld xmlns:a="http://schemas.openxmlformats.org/drawingml/2006/main" xmlns:r="http://schemas.openxmlformats.org/officeDocument/2006/relationships" xmlns:p="http://schemas.openxmlformats.org/presentationml/2006/main">
   <p:cSld name="Slide 11">
-    <p:bg>
-      <p:bgPr>
-        <a:solidFill>
-          <a:srgbClr val="0D4A92"/>
-        </a:solidFill>
-      </p:bgPr>
-    </p:bg>
-    <p:spTree>
-      <p:nvGrpSpPr>
-        <p:cNvPr id="1" name=""/>
-        <p:cNvGrpSpPr/>
-        <p:nvPr/>
-      </p:nvGrpSpPr>
-      <p:grpSpPr>
-        <a:xfrm>
-          <a:off x="0" y="0"/>
-          <a:ext cx="0" cy="0"/>
-          <a:chOff x="0" y="0"/>
-          <a:chExt cx="0" cy="0"/>
-        </a:xfrm>
-      </p:grpSpPr>
-      <p:sp>
-        <p:nvSpPr>
-          <p:cNvPr id="2" name="Shape 0"/>
-          <p:cNvSpPr/>
-          <p:nvPr/>
-        </p:nvSpPr>
-        <p:spPr>
-          <a:xfrm>
-            <a:off x="9509760" y="-1280160"/>
-            <a:ext cx="4754880" cy="4754880"/>
-          </a:xfrm>
-          <a:prstGeom prst="ellipse">
-            <a:avLst/>
-          </a:prstGeom>
-          <a:solidFill>
-            <a:srgbClr val="FFFFFF">
-              <a:alpha val="8000"/>
-            </a:srgbClr>
-          </a:solidFill>
-          <a:ln/>
-        </p:spPr>
-      </p:sp>
-      <p:sp>
-        <p:nvSpPr>
-          <p:cNvPr id="3" name="Shape 1"/>
-          <p:cNvSpPr/>
-          <p:nvPr/>
-        </p:nvSpPr>
-        <p:spPr>
-          <a:xfrm>
-            <a:off x="10607040" y="3931920"/>
-            <a:ext cx="3108960" cy="3108960"/>
-          </a:xfrm>
-          <a:prstGeom prst="ellipse">
-            <a:avLst/>
-          </a:prstGeom>
-          <a:solidFill>
-            <a:srgbClr val="FFFFFF">
-              <a:alpha val="6000"/>
-            </a:srgbClr>
-          </a:solidFill>
-          <a:ln/>
-        </p:spPr>
-      </p:sp>
-      <p:sp>
-        <p:nvSpPr>
-          <p:cNvPr id="4" name="Text 2"/>
-          <p:cNvSpPr/>
-          <p:nvPr/>
-        </p:nvSpPr>
-        <p:spPr>
-          <a:xfrm>
-            <a:off x="566928" y="1783080"/>
-            <a:ext cx="2743200" cy="1463040"/>
-          </a:xfrm>
-          <a:prstGeom prst="rect">
-            <a:avLst/>
-          </a:prstGeom>
-          <a:noFill/>
-          <a:ln/>
-        </p:spPr>
-        <p:txBody>
-          <a:bodyPr wrap="square" lIns="0" tIns="0" rIns="0" bIns="0" rtlCol="0" anchor="ctr"/>
-          <a:lstStyle/>
-          <a:p>
-            <a:pPr algn="l" indent="0" marL="0">
-              <a:buNone/>
-            </a:pPr>
-            <a:r>
-              <a:rPr lang="en-US" sz="6400" b="1" dirty="0">
-                <a:solidFill>
-                  <a:srgbClr val="E7EFFA"/>
-                </a:solidFill>
-                <a:latin typeface="Calibri" pitchFamily="34" charset="0"/>
-                <a:ea typeface="Calibri" pitchFamily="34" charset="-122"/>
-                <a:cs typeface="Calibri" pitchFamily="34" charset="-120"/>
-              </a:rPr>
-              <a:t>03</a:t>
-            </a:r>
-            <a:endParaRPr lang="en-US" sz="6400" dirty="0"/>
-          </a:p>
-        </p:txBody>
-      </p:sp>
-      <p:sp>
-        <p:nvSpPr>
-          <p:cNvPr id="5" name="Text 3"/>
-          <p:cNvSpPr/>
-          <p:nvPr/>
-        </p:nvSpPr>
-        <p:spPr>
-          <a:xfrm>
-            <a:off x="566928" y="3246120"/>
-            <a:ext cx="10058400" cy="365760"/>
-          </a:xfrm>
-          <a:prstGeom prst="rect">
-            <a:avLst/>
-          </a:prstGeom>
-          <a:noFill/>
-          <a:ln/>
-        </p:spPr>
-        <p:txBody>
-          <a:bodyPr wrap="square" lIns="0" tIns="0" rIns="0" bIns="0" rtlCol="0" anchor="ctr"/>
-          <a:lstStyle/>
-          <a:p>
-            <a:pPr algn="l" indent="0" marL="0">
-              <a:buNone/>
-            </a:pPr>
-            <a:r>
-              <a:rPr lang="en-US" sz="1300" b="1" spc="250" kern="0" dirty="0">
-                <a:solidFill>
-                  <a:srgbClr val="F2C9D9"/>
-                </a:solidFill>
-                <a:latin typeface="Calibri" pitchFamily="34" charset="0"/>
-                <a:ea typeface="Calibri" pitchFamily="34" charset="-122"/>
-                <a:cs typeface="Calibri" pitchFamily="34" charset="-120"/>
-              </a:rPr>
-              <a:t>PART THREE</a:t>
-            </a:r>
-            <a:endParaRPr lang="en-US" sz="1300" dirty="0"/>
-          </a:p>
-        </p:txBody>
-      </p:sp>
-      <p:sp>
-        <p:nvSpPr>
-          <p:cNvPr id="6" name="Text 4"/>
-          <p:cNvSpPr/>
-          <p:nvPr/>
-        </p:nvSpPr>
-        <p:spPr>
-          <a:xfrm>
-            <a:off x="566928" y="3611880"/>
-            <a:ext cx="10607040" cy="1463040"/>
-          </a:xfrm>
-          <a:prstGeom prst="rect">
-            <a:avLst/>
-          </a:prstGeom>
-          <a:noFill/>
-          <a:ln/>
-        </p:spPr>
-        <p:txBody>
-          <a:bodyPr wrap="square" lIns="0" tIns="0" rIns="0" bIns="0" rtlCol="0" anchor="t"/>
-          <a:lstStyle/>
-          <a:p>
-            <a:pPr algn="l" indent="0" marL="0">
-              <a:buNone/>
-            </a:pPr>
-            <a:r>
-              <a:rPr lang="en-US" sz="3800" b="1" dirty="0">
-                <a:solidFill>
-                  <a:srgbClr val="FFFFFF"/>
-                </a:solidFill>
-                <a:latin typeface="Calibri" pitchFamily="34" charset="0"/>
-                <a:ea typeface="Calibri" pitchFamily="34" charset="-122"/>
-                <a:cs typeface="Calibri" pitchFamily="34" charset="-120"/>
-              </a:rPr>
-              <a:t>Validation, Cases &amp; Board</a:t>
-            </a:r>
-            <a:endParaRPr lang="en-US" sz="3800" dirty="0"/>
-          </a:p>
-        </p:txBody>
-      </p:sp>
-    </p:spTree>
-  </p:cSld>
-  <p:clrMapOvr>
-    <a:masterClrMapping/>
-  </p:clrMapOvr>
-</p:sld>
-</file>
-
-<file path=ppt/slides/slide12.xml><?xml version="1.0" encoding="utf-8"?>
-<p:sld xmlns:a="http://schemas.openxmlformats.org/drawingml/2006/main" xmlns:r="http://schemas.openxmlformats.org/officeDocument/2006/relationships" xmlns:p="http://schemas.openxmlformats.org/presentationml/2006/main">
-  <p:cSld name="Slide 12">
     <p:bg>
       <p:bgPr>
         <a:solidFill>
@@ -3842,7 +4005,7 @@
                 <a:ea typeface="Calibri" pitchFamily="34" charset="-122"/>
                 <a:cs typeface="Calibri" pitchFamily="34" charset="-120"/>
               </a:rPr>
-              <a:t>CLINICAL CHEMISTRY   ·   VALIDATION</a:t>
+              <a:t>CLINICAL CHEMISTRY   ·   HIGH-YIELD LEVELS</a:t>
             </a:r>
             <a:endParaRPr lang="en-US" sz="1100" dirty="0"/>
           </a:p>
@@ -3881,7 +4044,7 @@
                 <a:ea typeface="Calibri" pitchFamily="34" charset="-122"/>
                 <a:cs typeface="Calibri" pitchFamily="34" charset="-120"/>
               </a:rPr>
-              <a:t>Method Validation Essentials</a:t>
+              <a:t>Specific Drugs to Know</a:t>
             </a:r>
             <a:endParaRPr lang="en-US" sz="3000" dirty="0"/>
           </a:p>
@@ -3889,7 +4052,7 @@
       </p:sp>
       <p:graphicFrame>
         <p:nvGraphicFramePr>
-          <p:cNvPr id="13" name="Table 0"/>
+          <p:cNvPr id="12" name="Table 0"/>
           <p:cNvGraphicFramePr>
             <a:graphicFrameLocks noGrp="1"/>
           </p:cNvGraphicFramePr>
@@ -3910,8 +4073,9 @@
             <a:tbl>
               <a:tblPr/>
               <a:tblGrid>
-                <a:gridCol w="3657600"/>
-                <a:gridCol w="7397496"/>
+                <a:gridCol w="2194560"/>
+                <a:gridCol w="4572000"/>
+                <a:gridCol w="4288536"/>
               </a:tblGrid>
               <a:tr h="548640">
                 <a:tc>
@@ -3931,7 +4095,7 @@
                           <a:ea typeface="Calibri" pitchFamily="34" charset="-122"/>
                           <a:cs typeface="Calibri" pitchFamily="34" charset="-120"/>
                         </a:rPr>
-                        <a:t>Characteristic</a:t>
+                        <a:t>Drug</a:t>
                       </a:r>
                       <a:endParaRPr lang="en-US" sz="1200" dirty="0">
                         <a:latin typeface="Calibri" charset="0"/>
@@ -3999,7 +4163,75 @@
                           <a:ea typeface="Calibri" pitchFamily="34" charset="-122"/>
                           <a:cs typeface="Calibri" pitchFamily="34" charset="-120"/>
                         </a:rPr>
-                        <a:t>What it establishes</a:t>
+                        <a:t>Sampling / caveat</a:t>
+                      </a:r>
+                      <a:endParaRPr lang="en-US" sz="1200" dirty="0">
+                        <a:latin typeface="Calibri" charset="0"/>
+                        <a:ea typeface="Calibri" charset="0"/>
+                        <a:cs typeface="Calibri" charset="0"/>
+                      </a:endParaRPr>
+                    </a:p>
+                  </a:txBody>
+                  <a:tcPr marL="91440" marR="91440" marT="45720" marB="45720" anchor="ctr">
+                    <a:lnL w="9525" cap="flat" cmpd="sng" algn="ctr">
+                      <a:solidFill>
+                        <a:srgbClr val="DCE4EC"/>
+                      </a:solidFill>
+                      <a:prstDash val="solid"/>
+                      <a:round/>
+                      <a:headEnd type="none" w="med" len="med"/>
+                      <a:tailEnd type="none" w="med" len="med"/>
+                    </a:lnL>
+                    <a:lnR w="9525" cap="flat" cmpd="sng" algn="ctr">
+                      <a:solidFill>
+                        <a:srgbClr val="DCE4EC"/>
+                      </a:solidFill>
+                      <a:prstDash val="solid"/>
+                      <a:round/>
+                      <a:headEnd type="none" w="med" len="med"/>
+                      <a:tailEnd type="none" w="med" len="med"/>
+                    </a:lnR>
+                    <a:lnT w="9525" cap="flat" cmpd="sng" algn="ctr">
+                      <a:solidFill>
+                        <a:srgbClr val="DCE4EC"/>
+                      </a:solidFill>
+                      <a:prstDash val="solid"/>
+                      <a:round/>
+                      <a:headEnd type="none" w="med" len="med"/>
+                      <a:tailEnd type="none" w="med" len="med"/>
+                    </a:lnT>
+                    <a:lnB w="9525" cap="flat" cmpd="sng" algn="ctr">
+                      <a:solidFill>
+                        <a:srgbClr val="DCE4EC"/>
+                      </a:solidFill>
+                      <a:prstDash val="solid"/>
+                      <a:round/>
+                      <a:headEnd type="none" w="med" len="med"/>
+                      <a:tailEnd type="none" w="med" len="med"/>
+                    </a:lnB>
+                    <a:solidFill>
+                      <a:srgbClr val="1565C0"/>
+                    </a:solidFill>
+                  </a:tcPr>
+                </a:tc>
+                <a:tc>
+                  <a:txBody>
+                    <a:bodyPr/>
+                    <a:lstStyle/>
+                    <a:p>
+                      <a:pPr algn="ctr" indent="0" marL="0">
+                        <a:buNone/>
+                      </a:pPr>
+                      <a:r>
+                        <a:rPr lang="en-US" sz="1200" b="1" dirty="0">
+                          <a:solidFill>
+                            <a:srgbClr val="FFFFFF"/>
+                          </a:solidFill>
+                          <a:latin typeface="Calibri" pitchFamily="34" charset="0"/>
+                          <a:ea typeface="Calibri" pitchFamily="34" charset="-122"/>
+                          <a:cs typeface="Calibri" pitchFamily="34" charset="-120"/>
+                        </a:rPr>
+                        <a:t>Toxicity clue</a:t>
                       </a:r>
                       <a:endParaRPr lang="en-US" sz="1200" dirty="0">
                         <a:latin typeface="Calibri" charset="0"/>
@@ -4061,7 +4293,7 @@
                         <a:buNone/>
                       </a:pPr>
                       <a:r>
-                        <a:rPr lang="en-US" sz="1200" b="1" dirty="0">
+                        <a:rPr lang="en-US" sz="1100" b="1" dirty="0">
                           <a:solidFill>
                             <a:srgbClr val="1B2A38"/>
                           </a:solidFill>
@@ -4069,9 +4301,9 @@
                           <a:ea typeface="Calibri" pitchFamily="34" charset="-122"/>
                           <a:cs typeface="Calibri" pitchFamily="34" charset="-120"/>
                         </a:rPr>
-                        <a:t>Accuracy / trueness</a:t>
+                        <a:t>Vancomycin</a:t>
                       </a:r>
-                      <a:endParaRPr lang="en-US" sz="1200" dirty="0">
+                      <a:endParaRPr lang="en-US" sz="1100" dirty="0">
                         <a:latin typeface="Calibri" charset="0"/>
                         <a:ea typeface="Calibri" charset="0"/>
                         <a:cs typeface="Calibri" charset="0"/>
@@ -4129,7 +4361,7 @@
                         <a:buNone/>
                       </a:pPr>
                       <a:r>
-                        <a:rPr lang="en-US" sz="1200" dirty="0">
+                        <a:rPr lang="en-US" sz="1100" dirty="0">
                           <a:solidFill>
                             <a:srgbClr val="33444F"/>
                           </a:solidFill>
@@ -4137,9 +4369,77 @@
                           <a:ea typeface="Calibri" pitchFamily="34" charset="-122"/>
                           <a:cs typeface="Calibri" pitchFamily="34" charset="-120"/>
                         </a:rPr>
-                        <a:t>Agreement with a reference or comparative method</a:t>
+                        <a:t>AUC-guided (or trough); steady state</a:t>
                       </a:r>
-                      <a:endParaRPr lang="en-US" sz="1200" dirty="0">
+                      <a:endParaRPr lang="en-US" sz="1100" dirty="0">
+                        <a:latin typeface="Calibri" charset="0"/>
+                        <a:ea typeface="Calibri" charset="0"/>
+                        <a:cs typeface="Calibri" charset="0"/>
+                      </a:endParaRPr>
+                    </a:p>
+                  </a:txBody>
+                  <a:tcPr marL="91440" marR="91440" marT="45720" marB="45720" anchor="ctr">
+                    <a:lnL w="9525" cap="flat" cmpd="sng" algn="ctr">
+                      <a:solidFill>
+                        <a:srgbClr val="DCE4EC"/>
+                      </a:solidFill>
+                      <a:prstDash val="solid"/>
+                      <a:round/>
+                      <a:headEnd type="none" w="med" len="med"/>
+                      <a:tailEnd type="none" w="med" len="med"/>
+                    </a:lnL>
+                    <a:lnR w="9525" cap="flat" cmpd="sng" algn="ctr">
+                      <a:solidFill>
+                        <a:srgbClr val="DCE4EC"/>
+                      </a:solidFill>
+                      <a:prstDash val="solid"/>
+                      <a:round/>
+                      <a:headEnd type="none" w="med" len="med"/>
+                      <a:tailEnd type="none" w="med" len="med"/>
+                    </a:lnR>
+                    <a:lnT w="9525" cap="flat" cmpd="sng" algn="ctr">
+                      <a:solidFill>
+                        <a:srgbClr val="DCE4EC"/>
+                      </a:solidFill>
+                      <a:prstDash val="solid"/>
+                      <a:round/>
+                      <a:headEnd type="none" w="med" len="med"/>
+                      <a:tailEnd type="none" w="med" len="med"/>
+                    </a:lnT>
+                    <a:lnB w="9525" cap="flat" cmpd="sng" algn="ctr">
+                      <a:solidFill>
+                        <a:srgbClr val="DCE4EC"/>
+                      </a:solidFill>
+                      <a:prstDash val="solid"/>
+                      <a:round/>
+                      <a:headEnd type="none" w="med" len="med"/>
+                      <a:tailEnd type="none" w="med" len="med"/>
+                    </a:lnB>
+                    <a:solidFill>
+                      <a:srgbClr val="F3F7FA"/>
+                    </a:solidFill>
+                  </a:tcPr>
+                </a:tc>
+                <a:tc>
+                  <a:txBody>
+                    <a:bodyPr/>
+                    <a:lstStyle/>
+                    <a:p>
+                      <a:pPr algn="ctr" indent="0" marL="0">
+                        <a:buNone/>
+                      </a:pPr>
+                      <a:r>
+                        <a:rPr lang="en-US" sz="1100" dirty="0">
+                          <a:solidFill>
+                            <a:srgbClr val="33444F"/>
+                          </a:solidFill>
+                          <a:latin typeface="Calibri" pitchFamily="34" charset="0"/>
+                          <a:ea typeface="Calibri" pitchFamily="34" charset="-122"/>
+                          <a:cs typeface="Calibri" pitchFamily="34" charset="-120"/>
+                        </a:rPr>
+                        <a:t>Nephrotoxicity</a:t>
+                      </a:r>
+                      <a:endParaRPr lang="en-US" sz="1100" dirty="0">
                         <a:latin typeface="Calibri" charset="0"/>
                         <a:ea typeface="Calibri" charset="0"/>
                         <a:cs typeface="Calibri" charset="0"/>
@@ -4199,7 +4499,7 @@
                         <a:buNone/>
                       </a:pPr>
                       <a:r>
-                        <a:rPr lang="en-US" sz="1200" b="1" dirty="0">
+                        <a:rPr lang="en-US" sz="1100" b="1" dirty="0">
                           <a:solidFill>
                             <a:srgbClr val="1B2A38"/>
                           </a:solidFill>
@@ -4207,9 +4507,9 @@
                           <a:ea typeface="Calibri" pitchFamily="34" charset="-122"/>
                           <a:cs typeface="Calibri" pitchFamily="34" charset="-120"/>
                         </a:rPr>
-                        <a:t>Precision</a:t>
+                        <a:t>Aminoglycosides</a:t>
                       </a:r>
-                      <a:endParaRPr lang="en-US" sz="1200" dirty="0">
+                      <a:endParaRPr lang="en-US" sz="1100" dirty="0">
                         <a:latin typeface="Calibri" charset="0"/>
                         <a:ea typeface="Calibri" charset="0"/>
                         <a:cs typeface="Calibri" charset="0"/>
@@ -4267,7 +4567,7 @@
                         <a:buNone/>
                       </a:pPr>
                       <a:r>
-                        <a:rPr lang="en-US" sz="1200" dirty="0">
+                        <a:rPr lang="en-US" sz="1100" dirty="0">
                           <a:solidFill>
                             <a:srgbClr val="33444F"/>
                           </a:solidFill>
@@ -4275,9 +4575,77 @@
                           <a:ea typeface="Calibri" pitchFamily="34" charset="-122"/>
                           <a:cs typeface="Calibri" pitchFamily="34" charset="-120"/>
                         </a:rPr>
-                        <a:t>Repeatability and reproducibility (within/between run)</a:t>
+                        <a:t>Peak (efficacy) and trough (toxicity)</a:t>
                       </a:r>
-                      <a:endParaRPr lang="en-US" sz="1200" dirty="0">
+                      <a:endParaRPr lang="en-US" sz="1100" dirty="0">
+                        <a:latin typeface="Calibri" charset="0"/>
+                        <a:ea typeface="Calibri" charset="0"/>
+                        <a:cs typeface="Calibri" charset="0"/>
+                      </a:endParaRPr>
+                    </a:p>
+                  </a:txBody>
+                  <a:tcPr marL="91440" marR="91440" marT="45720" marB="45720" anchor="ctr">
+                    <a:lnL w="9525" cap="flat" cmpd="sng" algn="ctr">
+                      <a:solidFill>
+                        <a:srgbClr val="DCE4EC"/>
+                      </a:solidFill>
+                      <a:prstDash val="solid"/>
+                      <a:round/>
+                      <a:headEnd type="none" w="med" len="med"/>
+                      <a:tailEnd type="none" w="med" len="med"/>
+                    </a:lnL>
+                    <a:lnR w="9525" cap="flat" cmpd="sng" algn="ctr">
+                      <a:solidFill>
+                        <a:srgbClr val="DCE4EC"/>
+                      </a:solidFill>
+                      <a:prstDash val="solid"/>
+                      <a:round/>
+                      <a:headEnd type="none" w="med" len="med"/>
+                      <a:tailEnd type="none" w="med" len="med"/>
+                    </a:lnR>
+                    <a:lnT w="9525" cap="flat" cmpd="sng" algn="ctr">
+                      <a:solidFill>
+                        <a:srgbClr val="DCE4EC"/>
+                      </a:solidFill>
+                      <a:prstDash val="solid"/>
+                      <a:round/>
+                      <a:headEnd type="none" w="med" len="med"/>
+                      <a:tailEnd type="none" w="med" len="med"/>
+                    </a:lnT>
+                    <a:lnB w="9525" cap="flat" cmpd="sng" algn="ctr">
+                      <a:solidFill>
+                        <a:srgbClr val="DCE4EC"/>
+                      </a:solidFill>
+                      <a:prstDash val="solid"/>
+                      <a:round/>
+                      <a:headEnd type="none" w="med" len="med"/>
+                      <a:tailEnd type="none" w="med" len="med"/>
+                    </a:lnB>
+                    <a:solidFill>
+                      <a:srgbClr val="FFFFFF"/>
+                    </a:solidFill>
+                  </a:tcPr>
+                </a:tc>
+                <a:tc>
+                  <a:txBody>
+                    <a:bodyPr/>
+                    <a:lstStyle/>
+                    <a:p>
+                      <a:pPr algn="ctr" indent="0" marL="0">
+                        <a:buNone/>
+                      </a:pPr>
+                      <a:r>
+                        <a:rPr lang="en-US" sz="1100" dirty="0">
+                          <a:solidFill>
+                            <a:srgbClr val="33444F"/>
+                          </a:solidFill>
+                          <a:latin typeface="Calibri" pitchFamily="34" charset="0"/>
+                          <a:ea typeface="Calibri" pitchFamily="34" charset="-122"/>
+                          <a:cs typeface="Calibri" pitchFamily="34" charset="-120"/>
+                        </a:rPr>
+                        <a:t>Nephro-/ototoxicity</a:t>
+                      </a:r>
+                      <a:endParaRPr lang="en-US" sz="1100" dirty="0">
                         <a:latin typeface="Calibri" charset="0"/>
                         <a:ea typeface="Calibri" charset="0"/>
                         <a:cs typeface="Calibri" charset="0"/>
@@ -4337,7 +4705,7 @@
                         <a:buNone/>
                       </a:pPr>
                       <a:r>
-                        <a:rPr lang="en-US" sz="1200" b="1" dirty="0">
+                        <a:rPr lang="en-US" sz="1100" b="1" dirty="0">
                           <a:solidFill>
                             <a:srgbClr val="1B2A38"/>
                           </a:solidFill>
@@ -4345,9 +4713,9 @@
                           <a:ea typeface="Calibri" pitchFamily="34" charset="-122"/>
                           <a:cs typeface="Calibri" pitchFamily="34" charset="-120"/>
                         </a:rPr>
-                        <a:t>Analytical sensitivity / LoD</a:t>
+                        <a:t>Digoxin</a:t>
                       </a:r>
-                      <a:endParaRPr lang="en-US" sz="1200" dirty="0">
+                      <a:endParaRPr lang="en-US" sz="1100" dirty="0">
                         <a:latin typeface="Calibri" charset="0"/>
                         <a:ea typeface="Calibri" charset="0"/>
                         <a:cs typeface="Calibri" charset="0"/>
@@ -4405,7 +4773,7 @@
                         <a:buNone/>
                       </a:pPr>
                       <a:r>
-                        <a:rPr lang="en-US" sz="1200" dirty="0">
+                        <a:rPr lang="en-US" sz="1100" dirty="0">
                           <a:solidFill>
                             <a:srgbClr val="33444F"/>
                           </a:solidFill>
@@ -4413,9 +4781,77 @@
                           <a:ea typeface="Calibri" pitchFamily="34" charset="-122"/>
                           <a:cs typeface="Calibri" pitchFamily="34" charset="-120"/>
                         </a:rPr>
-                        <a:t>Lowest reliably detected concentration</a:t>
+                        <a:t>≥ 6–8 h post-dose; ↑ by hypokalemia</a:t>
                       </a:r>
-                      <a:endParaRPr lang="en-US" sz="1200" dirty="0">
+                      <a:endParaRPr lang="en-US" sz="1100" dirty="0">
+                        <a:latin typeface="Calibri" charset="0"/>
+                        <a:ea typeface="Calibri" charset="0"/>
+                        <a:cs typeface="Calibri" charset="0"/>
+                      </a:endParaRPr>
+                    </a:p>
+                  </a:txBody>
+                  <a:tcPr marL="91440" marR="91440" marT="45720" marB="45720" anchor="ctr">
+                    <a:lnL w="9525" cap="flat" cmpd="sng" algn="ctr">
+                      <a:solidFill>
+                        <a:srgbClr val="DCE4EC"/>
+                      </a:solidFill>
+                      <a:prstDash val="solid"/>
+                      <a:round/>
+                      <a:headEnd type="none" w="med" len="med"/>
+                      <a:tailEnd type="none" w="med" len="med"/>
+                    </a:lnL>
+                    <a:lnR w="9525" cap="flat" cmpd="sng" algn="ctr">
+                      <a:solidFill>
+                        <a:srgbClr val="DCE4EC"/>
+                      </a:solidFill>
+                      <a:prstDash val="solid"/>
+                      <a:round/>
+                      <a:headEnd type="none" w="med" len="med"/>
+                      <a:tailEnd type="none" w="med" len="med"/>
+                    </a:lnR>
+                    <a:lnT w="9525" cap="flat" cmpd="sng" algn="ctr">
+                      <a:solidFill>
+                        <a:srgbClr val="DCE4EC"/>
+                      </a:solidFill>
+                      <a:prstDash val="solid"/>
+                      <a:round/>
+                      <a:headEnd type="none" w="med" len="med"/>
+                      <a:tailEnd type="none" w="med" len="med"/>
+                    </a:lnT>
+                    <a:lnB w="9525" cap="flat" cmpd="sng" algn="ctr">
+                      <a:solidFill>
+                        <a:srgbClr val="DCE4EC"/>
+                      </a:solidFill>
+                      <a:prstDash val="solid"/>
+                      <a:round/>
+                      <a:headEnd type="none" w="med" len="med"/>
+                      <a:tailEnd type="none" w="med" len="med"/>
+                    </a:lnB>
+                    <a:solidFill>
+                      <a:srgbClr val="F3F7FA"/>
+                    </a:solidFill>
+                  </a:tcPr>
+                </a:tc>
+                <a:tc>
+                  <a:txBody>
+                    <a:bodyPr/>
+                    <a:lstStyle/>
+                    <a:p>
+                      <a:pPr algn="ctr" indent="0" marL="0">
+                        <a:buNone/>
+                      </a:pPr>
+                      <a:r>
+                        <a:rPr lang="en-US" sz="1100" dirty="0">
+                          <a:solidFill>
+                            <a:srgbClr val="33444F"/>
+                          </a:solidFill>
+                          <a:latin typeface="Calibri" pitchFamily="34" charset="0"/>
+                          <a:ea typeface="Calibri" pitchFamily="34" charset="-122"/>
+                          <a:cs typeface="Calibri" pitchFamily="34" charset="-120"/>
+                        </a:rPr>
+                        <a:t>Nausea, arrhythmia, visual changes</a:t>
+                      </a:r>
+                      <a:endParaRPr lang="en-US" sz="1100" dirty="0">
                         <a:latin typeface="Calibri" charset="0"/>
                         <a:ea typeface="Calibri" charset="0"/>
                         <a:cs typeface="Calibri" charset="0"/>
@@ -4475,7 +4911,7 @@
                         <a:buNone/>
                       </a:pPr>
                       <a:r>
-                        <a:rPr lang="en-US" sz="1200" b="1" dirty="0">
+                        <a:rPr lang="en-US" sz="1100" b="1" dirty="0">
                           <a:solidFill>
                             <a:srgbClr val="1B2A38"/>
                           </a:solidFill>
@@ -4483,9 +4919,9 @@
                           <a:ea typeface="Calibri" pitchFamily="34" charset="-122"/>
                           <a:cs typeface="Calibri" pitchFamily="34" charset="-120"/>
                         </a:rPr>
-                        <a:t>Analytical specificity</a:t>
+                        <a:t>Lithium</a:t>
                       </a:r>
-                      <a:endParaRPr lang="en-US" sz="1200" dirty="0">
+                      <a:endParaRPr lang="en-US" sz="1100" dirty="0">
                         <a:latin typeface="Calibri" charset="0"/>
                         <a:ea typeface="Calibri" charset="0"/>
                         <a:cs typeface="Calibri" charset="0"/>
@@ -4543,7 +4979,7 @@
                         <a:buNone/>
                       </a:pPr>
                       <a:r>
-                        <a:rPr lang="en-US" sz="1200" dirty="0">
+                        <a:rPr lang="en-US" sz="1100" dirty="0">
                           <a:solidFill>
                             <a:srgbClr val="33444F"/>
                           </a:solidFill>
@@ -4551,9 +4987,77 @@
                           <a:ea typeface="Calibri" pitchFamily="34" charset="-122"/>
                           <a:cs typeface="Calibri" pitchFamily="34" charset="-120"/>
                         </a:rPr>
-                        <a:t>Freedom from interference / cross-reactivity</a:t>
+                        <a:t>12-h post-dose trough; narrow window</a:t>
                       </a:r>
-                      <a:endParaRPr lang="en-US" sz="1200" dirty="0">
+                      <a:endParaRPr lang="en-US" sz="1100" dirty="0">
+                        <a:latin typeface="Calibri" charset="0"/>
+                        <a:ea typeface="Calibri" charset="0"/>
+                        <a:cs typeface="Calibri" charset="0"/>
+                      </a:endParaRPr>
+                    </a:p>
+                  </a:txBody>
+                  <a:tcPr marL="91440" marR="91440" marT="45720" marB="45720" anchor="ctr">
+                    <a:lnL w="9525" cap="flat" cmpd="sng" algn="ctr">
+                      <a:solidFill>
+                        <a:srgbClr val="DCE4EC"/>
+                      </a:solidFill>
+                      <a:prstDash val="solid"/>
+                      <a:round/>
+                      <a:headEnd type="none" w="med" len="med"/>
+                      <a:tailEnd type="none" w="med" len="med"/>
+                    </a:lnL>
+                    <a:lnR w="9525" cap="flat" cmpd="sng" algn="ctr">
+                      <a:solidFill>
+                        <a:srgbClr val="DCE4EC"/>
+                      </a:solidFill>
+                      <a:prstDash val="solid"/>
+                      <a:round/>
+                      <a:headEnd type="none" w="med" len="med"/>
+                      <a:tailEnd type="none" w="med" len="med"/>
+                    </a:lnR>
+                    <a:lnT w="9525" cap="flat" cmpd="sng" algn="ctr">
+                      <a:solidFill>
+                        <a:srgbClr val="DCE4EC"/>
+                      </a:solidFill>
+                      <a:prstDash val="solid"/>
+                      <a:round/>
+                      <a:headEnd type="none" w="med" len="med"/>
+                      <a:tailEnd type="none" w="med" len="med"/>
+                    </a:lnT>
+                    <a:lnB w="9525" cap="flat" cmpd="sng" algn="ctr">
+                      <a:solidFill>
+                        <a:srgbClr val="DCE4EC"/>
+                      </a:solidFill>
+                      <a:prstDash val="solid"/>
+                      <a:round/>
+                      <a:headEnd type="none" w="med" len="med"/>
+                      <a:tailEnd type="none" w="med" len="med"/>
+                    </a:lnB>
+                    <a:solidFill>
+                      <a:srgbClr val="FFFFFF"/>
+                    </a:solidFill>
+                  </a:tcPr>
+                </a:tc>
+                <a:tc>
+                  <a:txBody>
+                    <a:bodyPr/>
+                    <a:lstStyle/>
+                    <a:p>
+                      <a:pPr algn="ctr" indent="0" marL="0">
+                        <a:buNone/>
+                      </a:pPr>
+                      <a:r>
+                        <a:rPr lang="en-US" sz="1100" dirty="0">
+                          <a:solidFill>
+                            <a:srgbClr val="33444F"/>
+                          </a:solidFill>
+                          <a:latin typeface="Calibri" pitchFamily="34" charset="0"/>
+                          <a:ea typeface="Calibri" pitchFamily="34" charset="-122"/>
+                          <a:cs typeface="Calibri" pitchFamily="34" charset="-120"/>
+                        </a:rPr>
+                        <a:t>Tremor, confusion, renal/thyroid effects</a:t>
+                      </a:r>
+                      <a:endParaRPr lang="en-US" sz="1100" dirty="0">
                         <a:latin typeface="Calibri" charset="0"/>
                         <a:ea typeface="Calibri" charset="0"/>
                         <a:cs typeface="Calibri" charset="0"/>
@@ -4613,7 +5117,7 @@
                         <a:buNone/>
                       </a:pPr>
                       <a:r>
-                        <a:rPr lang="en-US" sz="1200" b="1" dirty="0">
+                        <a:rPr lang="en-US" sz="1100" b="1" dirty="0">
                           <a:solidFill>
                             <a:srgbClr val="1B2A38"/>
                           </a:solidFill>
@@ -4621,9 +5125,9 @@
                           <a:ea typeface="Calibri" pitchFamily="34" charset="-122"/>
                           <a:cs typeface="Calibri" pitchFamily="34" charset="-120"/>
                         </a:rPr>
-                        <a:t>Linearity / reportable range</a:t>
+                        <a:t>Phenytoin</a:t>
                       </a:r>
-                      <a:endParaRPr lang="en-US" sz="1200" dirty="0">
+                      <a:endParaRPr lang="en-US" sz="1100" dirty="0">
                         <a:latin typeface="Calibri" charset="0"/>
                         <a:ea typeface="Calibri" charset="0"/>
                         <a:cs typeface="Calibri" charset="0"/>
@@ -4681,7 +5185,7 @@
                         <a:buNone/>
                       </a:pPr>
                       <a:r>
-                        <a:rPr lang="en-US" sz="1200" dirty="0">
+                        <a:rPr lang="en-US" sz="1100" dirty="0">
                           <a:solidFill>
                             <a:srgbClr val="33444F"/>
                           </a:solidFill>
@@ -4689,9 +5193,77 @@
                           <a:ea typeface="Calibri" pitchFamily="34" charset="-122"/>
                           <a:cs typeface="Calibri" pitchFamily="34" charset="-120"/>
                         </a:rPr>
-                        <a:t>Range over which results are valid</a:t>
+                        <a:t>FREE level if low albumin/uremia</a:t>
                       </a:r>
-                      <a:endParaRPr lang="en-US" sz="1200" dirty="0">
+                      <a:endParaRPr lang="en-US" sz="1100" dirty="0">
+                        <a:latin typeface="Calibri" charset="0"/>
+                        <a:ea typeface="Calibri" charset="0"/>
+                        <a:cs typeface="Calibri" charset="0"/>
+                      </a:endParaRPr>
+                    </a:p>
+                  </a:txBody>
+                  <a:tcPr marL="91440" marR="91440" marT="45720" marB="45720" anchor="ctr">
+                    <a:lnL w="9525" cap="flat" cmpd="sng" algn="ctr">
+                      <a:solidFill>
+                        <a:srgbClr val="DCE4EC"/>
+                      </a:solidFill>
+                      <a:prstDash val="solid"/>
+                      <a:round/>
+                      <a:headEnd type="none" w="med" len="med"/>
+                      <a:tailEnd type="none" w="med" len="med"/>
+                    </a:lnL>
+                    <a:lnR w="9525" cap="flat" cmpd="sng" algn="ctr">
+                      <a:solidFill>
+                        <a:srgbClr val="DCE4EC"/>
+                      </a:solidFill>
+                      <a:prstDash val="solid"/>
+                      <a:round/>
+                      <a:headEnd type="none" w="med" len="med"/>
+                      <a:tailEnd type="none" w="med" len="med"/>
+                    </a:lnR>
+                    <a:lnT w="9525" cap="flat" cmpd="sng" algn="ctr">
+                      <a:solidFill>
+                        <a:srgbClr val="DCE4EC"/>
+                      </a:solidFill>
+                      <a:prstDash val="solid"/>
+                      <a:round/>
+                      <a:headEnd type="none" w="med" len="med"/>
+                      <a:tailEnd type="none" w="med" len="med"/>
+                    </a:lnT>
+                    <a:lnB w="9525" cap="flat" cmpd="sng" algn="ctr">
+                      <a:solidFill>
+                        <a:srgbClr val="DCE4EC"/>
+                      </a:solidFill>
+                      <a:prstDash val="solid"/>
+                      <a:round/>
+                      <a:headEnd type="none" w="med" len="med"/>
+                      <a:tailEnd type="none" w="med" len="med"/>
+                    </a:lnB>
+                    <a:solidFill>
+                      <a:srgbClr val="F3F7FA"/>
+                    </a:solidFill>
+                  </a:tcPr>
+                </a:tc>
+                <a:tc>
+                  <a:txBody>
+                    <a:bodyPr/>
+                    <a:lstStyle/>
+                    <a:p>
+                      <a:pPr algn="ctr" indent="0" marL="0">
+                        <a:buNone/>
+                      </a:pPr>
+                      <a:r>
+                        <a:rPr lang="en-US" sz="1100" dirty="0">
+                          <a:solidFill>
+                            <a:srgbClr val="33444F"/>
+                          </a:solidFill>
+                          <a:latin typeface="Calibri" pitchFamily="34" charset="0"/>
+                          <a:ea typeface="Calibri" pitchFamily="34" charset="-122"/>
+                          <a:cs typeface="Calibri" pitchFamily="34" charset="-120"/>
+                        </a:rPr>
+                        <a:t>Nystagmus, ataxia despite normal total</a:t>
+                      </a:r>
+                      <a:endParaRPr lang="en-US" sz="1100" dirty="0">
                         <a:latin typeface="Calibri" charset="0"/>
                         <a:ea typeface="Calibri" charset="0"/>
                         <a:cs typeface="Calibri" charset="0"/>
@@ -4741,144 +5313,6 @@
                   </a:tcPr>
                 </a:tc>
               </a:tr>
-              <a:tr h="548640">
-                <a:tc>
-                  <a:txBody>
-                    <a:bodyPr/>
-                    <a:lstStyle/>
-                    <a:p>
-                      <a:pPr algn="l" indent="0" marL="0">
-                        <a:buNone/>
-                      </a:pPr>
-                      <a:r>
-                        <a:rPr lang="en-US" sz="1200" b="1" dirty="0">
-                          <a:solidFill>
-                            <a:srgbClr val="1B2A38"/>
-                          </a:solidFill>
-                          <a:latin typeface="Calibri" pitchFamily="34" charset="0"/>
-                          <a:ea typeface="Calibri" pitchFamily="34" charset="-122"/>
-                          <a:cs typeface="Calibri" pitchFamily="34" charset="-120"/>
-                        </a:rPr>
-                        <a:t>Reference interval</a:t>
-                      </a:r>
-                      <a:endParaRPr lang="en-US" sz="1200" dirty="0">
-                        <a:latin typeface="Calibri" charset="0"/>
-                        <a:ea typeface="Calibri" charset="0"/>
-                        <a:cs typeface="Calibri" charset="0"/>
-                      </a:endParaRPr>
-                    </a:p>
-                  </a:txBody>
-                  <a:tcPr marL="91440" marR="91440" marT="45720" marB="45720" anchor="ctr">
-                    <a:lnL w="9525" cap="flat" cmpd="sng" algn="ctr">
-                      <a:solidFill>
-                        <a:srgbClr val="DCE4EC"/>
-                      </a:solidFill>
-                      <a:prstDash val="solid"/>
-                      <a:round/>
-                      <a:headEnd type="none" w="med" len="med"/>
-                      <a:tailEnd type="none" w="med" len="med"/>
-                    </a:lnL>
-                    <a:lnR w="9525" cap="flat" cmpd="sng" algn="ctr">
-                      <a:solidFill>
-                        <a:srgbClr val="DCE4EC"/>
-                      </a:solidFill>
-                      <a:prstDash val="solid"/>
-                      <a:round/>
-                      <a:headEnd type="none" w="med" len="med"/>
-                      <a:tailEnd type="none" w="med" len="med"/>
-                    </a:lnR>
-                    <a:lnT w="9525" cap="flat" cmpd="sng" algn="ctr">
-                      <a:solidFill>
-                        <a:srgbClr val="DCE4EC"/>
-                      </a:solidFill>
-                      <a:prstDash val="solid"/>
-                      <a:round/>
-                      <a:headEnd type="none" w="med" len="med"/>
-                      <a:tailEnd type="none" w="med" len="med"/>
-                    </a:lnT>
-                    <a:lnB w="9525" cap="flat" cmpd="sng" algn="ctr">
-                      <a:solidFill>
-                        <a:srgbClr val="DCE4EC"/>
-                      </a:solidFill>
-                      <a:prstDash val="solid"/>
-                      <a:round/>
-                      <a:headEnd type="none" w="med" len="med"/>
-                      <a:tailEnd type="none" w="med" len="med"/>
-                    </a:lnB>
-                    <a:solidFill>
-                      <a:srgbClr val="FFFFFF"/>
-                    </a:solidFill>
-                  </a:tcPr>
-                </a:tc>
-                <a:tc>
-                  <a:txBody>
-                    <a:bodyPr/>
-                    <a:lstStyle/>
-                    <a:p>
-                      <a:pPr algn="ctr" indent="0" marL="0">
-                        <a:buNone/>
-                      </a:pPr>
-                      <a:r>
-                        <a:rPr lang="en-US" sz="1200" dirty="0">
-                          <a:solidFill>
-                            <a:srgbClr val="33444F"/>
-                          </a:solidFill>
-                          <a:latin typeface="Calibri" pitchFamily="34" charset="0"/>
-                          <a:ea typeface="Calibri" pitchFamily="34" charset="-122"/>
-                          <a:cs typeface="Calibri" pitchFamily="34" charset="-120"/>
-                        </a:rPr>
-                        <a:t>Expected values in the relevant population</a:t>
-                      </a:r>
-                      <a:endParaRPr lang="en-US" sz="1200" dirty="0">
-                        <a:latin typeface="Calibri" charset="0"/>
-                        <a:ea typeface="Calibri" charset="0"/>
-                        <a:cs typeface="Calibri" charset="0"/>
-                      </a:endParaRPr>
-                    </a:p>
-                  </a:txBody>
-                  <a:tcPr marL="91440" marR="91440" marT="45720" marB="45720" anchor="ctr">
-                    <a:lnL w="9525" cap="flat" cmpd="sng" algn="ctr">
-                      <a:solidFill>
-                        <a:srgbClr val="DCE4EC"/>
-                      </a:solidFill>
-                      <a:prstDash val="solid"/>
-                      <a:round/>
-                      <a:headEnd type="none" w="med" len="med"/>
-                      <a:tailEnd type="none" w="med" len="med"/>
-                    </a:lnL>
-                    <a:lnR w="9525" cap="flat" cmpd="sng" algn="ctr">
-                      <a:solidFill>
-                        <a:srgbClr val="DCE4EC"/>
-                      </a:solidFill>
-                      <a:prstDash val="solid"/>
-                      <a:round/>
-                      <a:headEnd type="none" w="med" len="med"/>
-                      <a:tailEnd type="none" w="med" len="med"/>
-                    </a:lnR>
-                    <a:lnT w="9525" cap="flat" cmpd="sng" algn="ctr">
-                      <a:solidFill>
-                        <a:srgbClr val="DCE4EC"/>
-                      </a:solidFill>
-                      <a:prstDash val="solid"/>
-                      <a:round/>
-                      <a:headEnd type="none" w="med" len="med"/>
-                      <a:tailEnd type="none" w="med" len="med"/>
-                    </a:lnT>
-                    <a:lnB w="9525" cap="flat" cmpd="sng" algn="ctr">
-                      <a:solidFill>
-                        <a:srgbClr val="DCE4EC"/>
-                      </a:solidFill>
-                      <a:prstDash val="solid"/>
-                      <a:round/>
-                      <a:headEnd type="none" w="med" len="med"/>
-                      <a:tailEnd type="none" w="med" len="med"/>
-                    </a:lnB>
-                    <a:solidFill>
-                      <a:srgbClr val="FFFFFF"/>
-                    </a:solidFill>
-                  </a:tcPr>
-                </a:tc>
-              </a:tr>
             </a:tbl>
           </a:graphicData>
         </a:graphic>
@@ -4916,7 +5350,7 @@
                 <a:ea typeface="Calibri" pitchFamily="34" charset="-122"/>
                 <a:cs typeface="Calibri" pitchFamily="34" charset="-120"/>
               </a:rPr>
-              <a:t>FDA-cleared assays require verification; laboratory-developed tests require full validation before clinical use.</a:t>
+              <a:t>Timing and protein binding define interpretation — the right level at the wrong time gives the wrong answer.</a:t>
             </a:r>
             <a:endParaRPr lang="en-US" sz="1050" dirty="0"/>
           </a:p>
@@ -5025,6 +5459,199 @@
               <a:t>9</a:t>
             </a:r>
             <a:endParaRPr lang="en-US" sz="850" dirty="0"/>
+          </a:p>
+        </p:txBody>
+      </p:sp>
+    </p:spTree>
+  </p:cSld>
+  <p:clrMapOvr>
+    <a:masterClrMapping/>
+  </p:clrMapOvr>
+</p:sld>
+</file>
+
+<file path=ppt/slides/slide12.xml><?xml version="1.0" encoding="utf-8"?>
+<p:sld xmlns:a="http://schemas.openxmlformats.org/drawingml/2006/main" xmlns:r="http://schemas.openxmlformats.org/officeDocument/2006/relationships" xmlns:p="http://schemas.openxmlformats.org/presentationml/2006/main">
+  <p:cSld name="Slide 12">
+    <p:bg>
+      <p:bgPr>
+        <a:solidFill>
+          <a:srgbClr val="0D4A92"/>
+        </a:solidFill>
+      </p:bgPr>
+    </p:bg>
+    <p:spTree>
+      <p:nvGrpSpPr>
+        <p:cNvPr id="1" name=""/>
+        <p:cNvGrpSpPr/>
+        <p:nvPr/>
+      </p:nvGrpSpPr>
+      <p:grpSpPr>
+        <a:xfrm>
+          <a:off x="0" y="0"/>
+          <a:ext cx="0" cy="0"/>
+          <a:chOff x="0" y="0"/>
+          <a:chExt cx="0" cy="0"/>
+        </a:xfrm>
+      </p:grpSpPr>
+      <p:sp>
+        <p:nvSpPr>
+          <p:cNvPr id="2" name="Shape 0"/>
+          <p:cNvSpPr/>
+          <p:nvPr/>
+        </p:nvSpPr>
+        <p:spPr>
+          <a:xfrm>
+            <a:off x="9509760" y="-1280160"/>
+            <a:ext cx="4754880" cy="4754880"/>
+          </a:xfrm>
+          <a:prstGeom prst="ellipse">
+            <a:avLst/>
+          </a:prstGeom>
+          <a:solidFill>
+            <a:srgbClr val="FFFFFF">
+              <a:alpha val="8000"/>
+            </a:srgbClr>
+          </a:solidFill>
+          <a:ln/>
+        </p:spPr>
+      </p:sp>
+      <p:sp>
+        <p:nvSpPr>
+          <p:cNvPr id="3" name="Shape 1"/>
+          <p:cNvSpPr/>
+          <p:nvPr/>
+        </p:nvSpPr>
+        <p:spPr>
+          <a:xfrm>
+            <a:off x="10607040" y="3931920"/>
+            <a:ext cx="3108960" cy="3108960"/>
+          </a:xfrm>
+          <a:prstGeom prst="ellipse">
+            <a:avLst/>
+          </a:prstGeom>
+          <a:solidFill>
+            <a:srgbClr val="FFFFFF">
+              <a:alpha val="6000"/>
+            </a:srgbClr>
+          </a:solidFill>
+          <a:ln/>
+        </p:spPr>
+      </p:sp>
+      <p:sp>
+        <p:nvSpPr>
+          <p:cNvPr id="4" name="Text 2"/>
+          <p:cNvSpPr/>
+          <p:nvPr/>
+        </p:nvSpPr>
+        <p:spPr>
+          <a:xfrm>
+            <a:off x="566928" y="1783080"/>
+            <a:ext cx="2743200" cy="1463040"/>
+          </a:xfrm>
+          <a:prstGeom prst="rect">
+            <a:avLst/>
+          </a:prstGeom>
+          <a:noFill/>
+          <a:ln/>
+        </p:spPr>
+        <p:txBody>
+          <a:bodyPr wrap="square" lIns="0" tIns="0" rIns="0" bIns="0" rtlCol="0" anchor="ctr"/>
+          <a:lstStyle/>
+          <a:p>
+            <a:pPr algn="l" indent="0" marL="0">
+              <a:buNone/>
+            </a:pPr>
+            <a:r>
+              <a:rPr lang="en-US" sz="6400" b="1" dirty="0">
+                <a:solidFill>
+                  <a:srgbClr val="E7EFFA"/>
+                </a:solidFill>
+                <a:latin typeface="Calibri" pitchFamily="34" charset="0"/>
+                <a:ea typeface="Calibri" pitchFamily="34" charset="-122"/>
+                <a:cs typeface="Calibri" pitchFamily="34" charset="-120"/>
+              </a:rPr>
+              <a:t>03</a:t>
+            </a:r>
+            <a:endParaRPr lang="en-US" sz="6400" dirty="0"/>
+          </a:p>
+        </p:txBody>
+      </p:sp>
+      <p:sp>
+        <p:nvSpPr>
+          <p:cNvPr id="5" name="Text 3"/>
+          <p:cNvSpPr/>
+          <p:nvPr/>
+        </p:nvSpPr>
+        <p:spPr>
+          <a:xfrm>
+            <a:off x="566928" y="3246120"/>
+            <a:ext cx="10058400" cy="365760"/>
+          </a:xfrm>
+          <a:prstGeom prst="rect">
+            <a:avLst/>
+          </a:prstGeom>
+          <a:noFill/>
+          <a:ln/>
+        </p:spPr>
+        <p:txBody>
+          <a:bodyPr wrap="square" lIns="0" tIns="0" rIns="0" bIns="0" rtlCol="0" anchor="ctr"/>
+          <a:lstStyle/>
+          <a:p>
+            <a:pPr algn="l" indent="0" marL="0">
+              <a:buNone/>
+            </a:pPr>
+            <a:r>
+              <a:rPr lang="en-US" sz="1300" b="1" spc="250" kern="0" dirty="0">
+                <a:solidFill>
+                  <a:srgbClr val="F2C9D9"/>
+                </a:solidFill>
+                <a:latin typeface="Calibri" pitchFamily="34" charset="0"/>
+                <a:ea typeface="Calibri" pitchFamily="34" charset="-122"/>
+                <a:cs typeface="Calibri" pitchFamily="34" charset="-120"/>
+              </a:rPr>
+              <a:t>PART THREE</a:t>
+            </a:r>
+            <a:endParaRPr lang="en-US" sz="1300" dirty="0"/>
+          </a:p>
+        </p:txBody>
+      </p:sp>
+      <p:sp>
+        <p:nvSpPr>
+          <p:cNvPr id="6" name="Text 4"/>
+          <p:cNvSpPr/>
+          <p:nvPr/>
+        </p:nvSpPr>
+        <p:spPr>
+          <a:xfrm>
+            <a:off x="566928" y="3611880"/>
+            <a:ext cx="10607040" cy="1463040"/>
+          </a:xfrm>
+          <a:prstGeom prst="rect">
+            <a:avLst/>
+          </a:prstGeom>
+          <a:noFill/>
+          <a:ln/>
+        </p:spPr>
+        <p:txBody>
+          <a:bodyPr wrap="square" lIns="0" tIns="0" rIns="0" bIns="0" rtlCol="0" anchor="t"/>
+          <a:lstStyle/>
+          <a:p>
+            <a:pPr algn="l" indent="0" marL="0">
+              <a:buNone/>
+            </a:pPr>
+            <a:r>
+              <a:rPr lang="en-US" sz="3800" b="1" dirty="0">
+                <a:solidFill>
+                  <a:srgbClr val="FFFFFF"/>
+                </a:solidFill>
+                <a:latin typeface="Calibri" pitchFamily="34" charset="0"/>
+                <a:ea typeface="Calibri" pitchFamily="34" charset="-122"/>
+                <a:cs typeface="Calibri" pitchFamily="34" charset="-120"/>
+              </a:rPr>
+              <a:t>POCT, Validation, Cases &amp; Board</a:t>
+            </a:r>
+            <a:endParaRPr lang="en-US" sz="3800" dirty="0"/>
           </a:p>
         </p:txBody>
       </p:sp>
@@ -5093,7 +5720,7 @@
                 <a:ea typeface="Calibri" pitchFamily="34" charset="-122"/>
                 <a:cs typeface="Calibri" pitchFamily="34" charset="-120"/>
               </a:rPr>
-              <a:t>CLINICAL CHEMISTRY   ·   CASE 1</a:t>
+              <a:t>CLINICAL CHEMISTRY   ·   POCT</a:t>
             </a:r>
             <a:endParaRPr lang="en-US" sz="1100" dirty="0"/>
           </a:p>
@@ -5132,7 +5759,7 @@
                 <a:ea typeface="Calibri" pitchFamily="34" charset="-122"/>
                 <a:cs typeface="Calibri" pitchFamily="34" charset="-120"/>
               </a:rPr>
-              <a:t>Case 1</a:t>
+              <a:t>Point-of-Care Testing Governance</a:t>
             </a:r>
             <a:endParaRPr lang="en-US" sz="3000" dirty="0"/>
           </a:p>
@@ -5147,11 +5774,11 @@
         <p:spPr>
           <a:xfrm>
             <a:off x="566928" y="1517904"/>
-            <a:ext cx="11057839" cy="2788920"/>
+            <a:ext cx="5346040" cy="4114800"/>
           </a:xfrm>
           <a:prstGeom prst="roundRect">
             <a:avLst>
-              <a:gd name="adj" fmla="val 2951"/>
+              <a:gd name="adj" fmla="val 2000"/>
             </a:avLst>
           </a:prstGeom>
           <a:solidFill>
@@ -5175,8 +5802,8 @@
         </p:nvSpPr>
         <p:spPr>
           <a:xfrm>
-            <a:off x="841248" y="1700784"/>
-            <a:ext cx="5486400" cy="292608"/>
+            <a:off x="804672" y="1682496"/>
+            <a:ext cx="4888840" cy="274320"/>
           </a:xfrm>
           <a:prstGeom prst="rect">
             <a:avLst/>
@@ -5192,17 +5819,17 @@
               <a:buNone/>
             </a:pPr>
             <a:r>
-              <a:rPr lang="en-US" sz="1100" b="1" spc="150" kern="0" dirty="0">
-                <a:solidFill>
-                  <a:srgbClr val="1565C0"/>
-                </a:solidFill>
-                <a:latin typeface="Calibri" pitchFamily="34" charset="0"/>
-                <a:ea typeface="Calibri" pitchFamily="34" charset="-122"/>
-                <a:cs typeface="Calibri" pitchFamily="34" charset="-120"/>
-              </a:rPr>
-              <a:t>CLINICAL VIGNETTE</a:t>
-            </a:r>
-            <a:endParaRPr lang="en-US" sz="1100" dirty="0"/>
+              <a:rPr lang="en-US" sz="1200" b="1" spc="100" kern="0" dirty="0">
+                <a:solidFill>
+                  <a:srgbClr val="0D4A92"/>
+                </a:solidFill>
+                <a:latin typeface="Calibri" pitchFamily="34" charset="0"/>
+                <a:ea typeface="Calibri" pitchFamily="34" charset="-122"/>
+                <a:cs typeface="Calibri" pitchFamily="34" charset="-120"/>
+              </a:rPr>
+              <a:t>WHY GOVERNANCE MATTERS</a:t>
+            </a:r>
+            <a:endParaRPr lang="en-US" sz="1200" dirty="0"/>
           </a:p>
         </p:txBody>
       </p:sp>
@@ -5214,8 +5841,8 @@
         </p:nvSpPr>
         <p:spPr>
           <a:xfrm>
-            <a:off x="841248" y="2029968"/>
-            <a:ext cx="10509199" cy="2148840"/>
+            <a:off x="804672" y="2029968"/>
+            <a:ext cx="4870552" cy="3474720"/>
           </a:xfrm>
           <a:prstGeom prst="rect">
             <a:avLst/>
@@ -5227,14 +5854,36 @@
           <a:bodyPr wrap="square" lIns="0" tIns="0" rIns="0" bIns="0" rtlCol="0" anchor="t"/>
           <a:lstStyle/>
           <a:p>
-            <a:pPr algn="l" indent="0" marL="0">
-              <a:lnSpc>
-                <a:spcPct val="108000"/>
-              </a:lnSpc>
-              <a:buNone/>
-            </a:pPr>
-            <a:r>
-              <a:rPr lang="en-US" sz="1450" dirty="0">
+            <a:pPr algn="l" marL="177800" indent="-177800">
+              <a:spcAft>
+                <a:spcPts val="900"/>
+              </a:spcAft>
+              <a:buSzPct val="100000"/>
+              <a:buChar char="•"/>
+            </a:pPr>
+            <a:r>
+              <a:rPr lang="en-US" sz="1250" b="1" dirty="0">
+                <a:solidFill>
+                  <a:srgbClr val="1B2A38"/>
+                </a:solidFill>
+                <a:latin typeface="Calibri" pitchFamily="34" charset="0"/>
+                <a:ea typeface="Calibri" pitchFamily="34" charset="-122"/>
+                <a:cs typeface="Calibri" pitchFamily="34" charset="-120"/>
+              </a:rPr>
+              <a:t>POCT is performed by non-laboratorians across many sites — a large error surface.</a:t>
+            </a:r>
+            <a:endParaRPr lang="en-US" sz="1250" dirty="0"/>
+          </a:p>
+          <a:p>
+            <a:pPr algn="l" marL="177800" indent="-177800">
+              <a:spcAft>
+                <a:spcPts val="900"/>
+              </a:spcAft>
+              <a:buSzPct val="100000"/>
+              <a:buChar char="•"/>
+            </a:pPr>
+            <a:r>
+              <a:rPr lang="en-US" sz="1250" dirty="0">
                 <a:solidFill>
                   <a:srgbClr val="33444F"/>
                 </a:solidFill>
@@ -5242,9 +5891,51 @@
                 <a:ea typeface="Calibri" pitchFamily="34" charset="-122"/>
                 <a:cs typeface="Calibri" pitchFamily="34" charset="-120"/>
               </a:rPr>
-              <a:t>A pre-employment urine drug screen is positive for amphetamines. The donor takes an over-the-counter decongestant and denies stimulant use. The sample is sent for confirmatory testing.</a:t>
-            </a:r>
-            <a:endParaRPr lang="en-US" sz="1450" dirty="0"/>
+              <a:t>Requires operator training/competency, QC, connectivity, and documentation.</a:t>
+            </a:r>
+            <a:endParaRPr lang="en-US" sz="1250" dirty="0"/>
+          </a:p>
+          <a:p>
+            <a:pPr algn="l" marL="177800" indent="-177800">
+              <a:spcAft>
+                <a:spcPts val="900"/>
+              </a:spcAft>
+              <a:buSzPct val="100000"/>
+              <a:buChar char="•"/>
+            </a:pPr>
+            <a:r>
+              <a:rPr lang="en-US" sz="1250" dirty="0">
+                <a:solidFill>
+                  <a:srgbClr val="33444F"/>
+                </a:solidFill>
+                <a:latin typeface="Calibri" pitchFamily="34" charset="0"/>
+                <a:ea typeface="Calibri" pitchFamily="34" charset="-122"/>
+                <a:cs typeface="Calibri" pitchFamily="34" charset="-120"/>
+              </a:rPr>
+              <a:t>Lot verification and reagent storage are common failure points.</a:t>
+            </a:r>
+            <a:endParaRPr lang="en-US" sz="1250" dirty="0"/>
+          </a:p>
+          <a:p>
+            <a:pPr algn="l" marL="177800" indent="-177800">
+              <a:spcAft>
+                <a:spcPts val="900"/>
+              </a:spcAft>
+              <a:buSzPct val="100000"/>
+              <a:buChar char="•"/>
+            </a:pPr>
+            <a:r>
+              <a:rPr lang="en-US" sz="1250" dirty="0">
+                <a:solidFill>
+                  <a:srgbClr val="33444F"/>
+                </a:solidFill>
+                <a:latin typeface="Calibri" pitchFamily="34" charset="0"/>
+                <a:ea typeface="Calibri" pitchFamily="34" charset="-122"/>
+                <a:cs typeface="Calibri" pitchFamily="34" charset="-120"/>
+              </a:rPr>
+              <a:t>Oversight sits with the laboratory medical director under CLIA/accreditation.</a:t>
+            </a:r>
+            <a:endParaRPr lang="en-US" sz="1250" dirty="0"/>
           </a:p>
         </p:txBody>
       </p:sp>
@@ -5256,16 +5947,16 @@
         </p:nvSpPr>
         <p:spPr>
           <a:xfrm>
-            <a:off x="566928" y="4553712"/>
-            <a:ext cx="11057839" cy="1325880"/>
+            <a:off x="6278728" y="1517904"/>
+            <a:ext cx="5346040" cy="4114800"/>
           </a:xfrm>
           <a:prstGeom prst="roundRect">
             <a:avLst>
-              <a:gd name="adj" fmla="val 6207"/>
+              <a:gd name="adj" fmla="val 2000"/>
             </a:avLst>
           </a:prstGeom>
           <a:solidFill>
-            <a:srgbClr val="0E3A5F"/>
+            <a:srgbClr val="E7EFFA"/>
           </a:solidFill>
           <a:ln/>
           <a:effectLst>
@@ -5285,8 +5976,8 @@
         </p:nvSpPr>
         <p:spPr>
           <a:xfrm>
-            <a:off x="822960" y="4681728"/>
-            <a:ext cx="640080" cy="960120"/>
+            <a:off x="6516472" y="1682496"/>
+            <a:ext cx="4888840" cy="274320"/>
           </a:xfrm>
           <a:prstGeom prst="rect">
             <a:avLst/>
@@ -5298,21 +5989,21 @@
           <a:bodyPr wrap="square" lIns="0" tIns="0" rIns="0" bIns="0" rtlCol="0" anchor="ctr"/>
           <a:lstStyle/>
           <a:p>
-            <a:pPr algn="ctr" indent="0" marL="0">
-              <a:buNone/>
-            </a:pPr>
-            <a:r>
-              <a:rPr lang="en-US" sz="4000" b="1" dirty="0">
-                <a:solidFill>
-                  <a:srgbClr val="1565C0"/>
-                </a:solidFill>
-                <a:latin typeface="Calibri" pitchFamily="34" charset="0"/>
-                <a:ea typeface="Calibri" pitchFamily="34" charset="-122"/>
-                <a:cs typeface="Calibri" pitchFamily="34" charset="-120"/>
-              </a:rPr>
-              <a:t>?</a:t>
-            </a:r>
-            <a:endParaRPr lang="en-US" sz="4000" dirty="0"/>
+            <a:pPr indent="0" marL="0">
+              <a:buNone/>
+            </a:pPr>
+            <a:r>
+              <a:rPr lang="en-US" sz="1200" b="1" spc="100" kern="0" dirty="0">
+                <a:solidFill>
+                  <a:srgbClr val="0D4A92"/>
+                </a:solidFill>
+                <a:latin typeface="Calibri" pitchFamily="34" charset="0"/>
+                <a:ea typeface="Calibri" pitchFamily="34" charset="-122"/>
+                <a:cs typeface="Calibri" pitchFamily="34" charset="-120"/>
+              </a:rPr>
+              <a:t>VALIDATION ESSENTIALS</a:t>
+            </a:r>
+            <a:endParaRPr lang="en-US" sz="1200" dirty="0"/>
           </a:p>
         </p:txBody>
       </p:sp>
@@ -5324,34 +6015,101 @@
         </p:nvSpPr>
         <p:spPr>
           <a:xfrm>
-            <a:off x="1618488" y="4553712"/>
-            <a:ext cx="9686239" cy="1325880"/>
-          </a:xfrm>
-          <a:prstGeom prst="rect">
-            <a:avLst/>
-          </a:prstGeom>
-          <a:noFill/>
-          <a:ln/>
-        </p:spPr>
-        <p:txBody>
-          <a:bodyPr wrap="square" lIns="0" tIns="0" rIns="0" bIns="0" rtlCol="0" anchor="ctr"/>
-          <a:lstStyle/>
-          <a:p>
-            <a:pPr algn="l" indent="0" marL="0">
-              <a:buNone/>
-            </a:pPr>
-            <a:r>
-              <a:rPr lang="en-US" sz="1500" b="1" dirty="0">
-                <a:solidFill>
-                  <a:srgbClr val="FFFFFF"/>
-                </a:solidFill>
-                <a:latin typeface="Calibri" pitchFamily="34" charset="0"/>
-                <a:ea typeface="Calibri" pitchFamily="34" charset="-122"/>
-                <a:cs typeface="Calibri" pitchFamily="34" charset="-120"/>
-              </a:rPr>
-              <a:t>How should the laboratory handle the discrepancy, and what does confirmation add?</a:t>
-            </a:r>
-            <a:endParaRPr lang="en-US" sz="1500" dirty="0"/>
+            <a:off x="6516472" y="2029968"/>
+            <a:ext cx="4870552" cy="3474720"/>
+          </a:xfrm>
+          <a:prstGeom prst="rect">
+            <a:avLst/>
+          </a:prstGeom>
+          <a:noFill/>
+          <a:ln/>
+        </p:spPr>
+        <p:txBody>
+          <a:bodyPr wrap="square" lIns="0" tIns="0" rIns="0" bIns="0" rtlCol="0" anchor="t"/>
+          <a:lstStyle/>
+          <a:p>
+            <a:pPr algn="l" marL="177800" indent="-177800">
+              <a:spcAft>
+                <a:spcPts val="900"/>
+              </a:spcAft>
+              <a:buSzPct val="100000"/>
+              <a:buChar char="•"/>
+            </a:pPr>
+            <a:r>
+              <a:rPr lang="en-US" sz="1250" b="1" dirty="0">
+                <a:solidFill>
+                  <a:srgbClr val="1B2A38"/>
+                </a:solidFill>
+                <a:latin typeface="Calibri" pitchFamily="34" charset="0"/>
+                <a:ea typeface="Calibri" pitchFamily="34" charset="-122"/>
+                <a:cs typeface="Calibri" pitchFamily="34" charset="-120"/>
+              </a:rPr>
+              <a:t>Accuracy, precision, analytical sensitivity (LoD), specificity, reportable range, reference interval.</a:t>
+            </a:r>
+            <a:endParaRPr lang="en-US" sz="1250" dirty="0"/>
+          </a:p>
+          <a:p>
+            <a:pPr algn="l" marL="177800" indent="-177800">
+              <a:spcAft>
+                <a:spcPts val="900"/>
+              </a:spcAft>
+              <a:buSzPct val="100000"/>
+              <a:buChar char="•"/>
+            </a:pPr>
+            <a:r>
+              <a:rPr lang="en-US" sz="1250" dirty="0">
+                <a:solidFill>
+                  <a:srgbClr val="33444F"/>
+                </a:solidFill>
+                <a:latin typeface="Calibri" pitchFamily="34" charset="0"/>
+                <a:ea typeface="Calibri" pitchFamily="34" charset="-122"/>
+                <a:cs typeface="Calibri" pitchFamily="34" charset="-120"/>
+              </a:rPr>
+              <a:t>FDA-cleared assays require verification; laboratory-developed tests require full validation.</a:t>
+            </a:r>
+            <a:endParaRPr lang="en-US" sz="1250" dirty="0"/>
+          </a:p>
+          <a:p>
+            <a:pPr algn="l" marL="177800" indent="-177800">
+              <a:spcAft>
+                <a:spcPts val="900"/>
+              </a:spcAft>
+              <a:buSzPct val="100000"/>
+              <a:buChar char="•"/>
+            </a:pPr>
+            <a:r>
+              <a:rPr lang="en-US" sz="1250" dirty="0">
+                <a:solidFill>
+                  <a:srgbClr val="33444F"/>
+                </a:solidFill>
+                <a:latin typeface="Calibri" pitchFamily="34" charset="0"/>
+                <a:ea typeface="Calibri" pitchFamily="34" charset="-122"/>
+                <a:cs typeface="Calibri" pitchFamily="34" charset="-120"/>
+              </a:rPr>
+              <a:t>Method comparison/correlation with the central lab.</a:t>
+            </a:r>
+            <a:endParaRPr lang="en-US" sz="1250" dirty="0"/>
+          </a:p>
+          <a:p>
+            <a:pPr algn="l" marL="177800" indent="-177800">
+              <a:spcAft>
+                <a:spcPts val="900"/>
+              </a:spcAft>
+              <a:buSzPct val="100000"/>
+              <a:buChar char="•"/>
+            </a:pPr>
+            <a:r>
+              <a:rPr lang="en-US" sz="1250" dirty="0">
+                <a:solidFill>
+                  <a:srgbClr val="33444F"/>
+                </a:solidFill>
+                <a:latin typeface="Calibri" pitchFamily="34" charset="0"/>
+                <a:ea typeface="Calibri" pitchFamily="34" charset="-122"/>
+                <a:cs typeface="Calibri" pitchFamily="34" charset="-120"/>
+              </a:rPr>
+              <a:t>Critical-value pathways from the bedside into the record.</a:t>
+            </a:r>
+            <a:endParaRPr lang="en-US" sz="1250" dirty="0"/>
           </a:p>
         </p:txBody>
       </p:sp>
@@ -5526,7 +6284,7 @@
                 <a:ea typeface="Calibri" pitchFamily="34" charset="-122"/>
                 <a:cs typeface="Calibri" pitchFamily="34" charset="-120"/>
               </a:rPr>
-              <a:t>CLINICAL CHEMISTRY   ·   CASE 1  ·  RESOLUTION</a:t>
+              <a:t>CLINICAL CHEMISTRY   ·   CASE 1</a:t>
             </a:r>
             <a:endParaRPr lang="en-US" sz="1100" dirty="0"/>
           </a:p>
@@ -5565,7 +6323,7 @@
                 <a:ea typeface="Calibri" pitchFamily="34" charset="-122"/>
                 <a:cs typeface="Calibri" pitchFamily="34" charset="-120"/>
               </a:rPr>
-              <a:t>Case 1: Presumptive Positive Screen</a:t>
+              <a:t>Case 1</a:t>
             </a:r>
             <a:endParaRPr lang="en-US" sz="3000" dirty="0"/>
           </a:p>
@@ -5573,124 +6331,18 @@
       </p:sp>
       <p:sp>
         <p:nvSpPr>
-          <p:cNvPr id="4" name="Text 2"/>
-          <p:cNvSpPr/>
-          <p:nvPr/>
-        </p:nvSpPr>
-        <p:spPr>
-          <a:xfrm>
-            <a:off x="566928" y="1554480"/>
-            <a:ext cx="6413547" cy="4023360"/>
-          </a:xfrm>
-          <a:prstGeom prst="rect">
-            <a:avLst/>
-          </a:prstGeom>
-          <a:noFill/>
-          <a:ln/>
-        </p:spPr>
-        <p:txBody>
-          <a:bodyPr wrap="square" lIns="0" tIns="0" rIns="0" bIns="0" rtlCol="0" anchor="t"/>
-          <a:lstStyle/>
-          <a:p>
-            <a:pPr algn="l" marL="177800" indent="-177800">
-              <a:spcAft>
-                <a:spcPts val="900"/>
-              </a:spcAft>
-              <a:buSzPct val="100000"/>
-              <a:buChar char="•"/>
-            </a:pPr>
-            <a:r>
-              <a:rPr lang="en-US" sz="1400" b="1" dirty="0">
-                <a:solidFill>
-                  <a:srgbClr val="1B2A38"/>
-                </a:solidFill>
-                <a:latin typeface="Calibri" pitchFamily="34" charset="0"/>
-                <a:ea typeface="Calibri" pitchFamily="34" charset="-122"/>
-                <a:cs typeface="Calibri" pitchFamily="34" charset="-120"/>
-              </a:rPr>
-              <a:t>The immunoassay screen is presumptive and cross-reacts with sympathomimetics like some decongestants.</a:t>
-            </a:r>
-            <a:endParaRPr lang="en-US" sz="1400" dirty="0"/>
-          </a:p>
-          <a:p>
-            <a:pPr algn="l" marL="177800" indent="-177800">
-              <a:spcAft>
-                <a:spcPts val="900"/>
-              </a:spcAft>
-              <a:buSzPct val="100000"/>
-              <a:buChar char="•"/>
-            </a:pPr>
-            <a:r>
-              <a:rPr lang="en-US" sz="1400" dirty="0">
-                <a:solidFill>
-                  <a:srgbClr val="33444F"/>
-                </a:solidFill>
-                <a:latin typeface="Calibri" pitchFamily="34" charset="0"/>
-                <a:ea typeface="Calibri" pitchFamily="34" charset="-122"/>
-                <a:cs typeface="Calibri" pitchFamily="34" charset="-120"/>
-              </a:rPr>
-              <a:t>Definitive results require GC-MS or LC-MS/MS confirmation.</a:t>
-            </a:r>
-            <a:endParaRPr lang="en-US" sz="1400" dirty="0"/>
-          </a:p>
-          <a:p>
-            <a:pPr algn="l" marL="177800" indent="-177800">
-              <a:spcAft>
-                <a:spcPts val="900"/>
-              </a:spcAft>
-              <a:buSzPct val="100000"/>
-              <a:buChar char="•"/>
-            </a:pPr>
-            <a:r>
-              <a:rPr lang="en-US" sz="1400" dirty="0">
-                <a:solidFill>
-                  <a:srgbClr val="33444F"/>
-                </a:solidFill>
-                <a:latin typeface="Calibri" pitchFamily="34" charset="0"/>
-                <a:ea typeface="Calibri" pitchFamily="34" charset="-122"/>
-                <a:cs typeface="Calibri" pitchFamily="34" charset="-120"/>
-              </a:rPr>
-              <a:t>Confirmation distinguishes true amphetamine/methamphetamine from cross-reacting compounds.</a:t>
-            </a:r>
-            <a:endParaRPr lang="en-US" sz="1400" dirty="0"/>
-          </a:p>
-          <a:p>
-            <a:pPr algn="l" marL="177800" indent="-177800">
-              <a:spcAft>
-                <a:spcPts val="900"/>
-              </a:spcAft>
-              <a:buSzPct val="100000"/>
-              <a:buChar char="•"/>
-            </a:pPr>
-            <a:r>
-              <a:rPr lang="en-US" sz="1400" dirty="0">
-                <a:solidFill>
-                  <a:srgbClr val="33444F"/>
-                </a:solidFill>
-                <a:latin typeface="Calibri" pitchFamily="34" charset="0"/>
-                <a:ea typeface="Calibri" pitchFamily="34" charset="-122"/>
-                <a:cs typeface="Calibri" pitchFamily="34" charset="-120"/>
-              </a:rPr>
-              <a:t>Report screen results as presumptive and act only on confirmed results in consequential settings.</a:t>
-            </a:r>
-            <a:endParaRPr lang="en-US" sz="1400" dirty="0"/>
-          </a:p>
-        </p:txBody>
-      </p:sp>
-      <p:sp>
-        <p:nvSpPr>
-          <p:cNvPr id="5" name="Shape 3"/>
-          <p:cNvSpPr/>
-          <p:nvPr/>
-        </p:nvSpPr>
-        <p:spPr>
-          <a:xfrm>
-            <a:off x="7422788" y="1554480"/>
-            <a:ext cx="4201979" cy="3977640"/>
+          <p:cNvPr id="4" name="Shape 2"/>
+          <p:cNvSpPr/>
+          <p:nvPr/>
+        </p:nvSpPr>
+        <p:spPr>
+          <a:xfrm>
+            <a:off x="566928" y="1517904"/>
+            <a:ext cx="11057839" cy="2788920"/>
           </a:xfrm>
           <a:prstGeom prst="roundRect">
             <a:avLst>
-              <a:gd name="adj" fmla="val 2069"/>
+              <a:gd name="adj" fmla="val 2951"/>
             </a:avLst>
           </a:prstGeom>
           <a:solidFill>
@@ -5708,53 +6360,53 @@
       </p:sp>
       <p:sp>
         <p:nvSpPr>
+          <p:cNvPr id="5" name="Text 3"/>
+          <p:cNvSpPr/>
+          <p:nvPr/>
+        </p:nvSpPr>
+        <p:spPr>
+          <a:xfrm>
+            <a:off x="841248" y="1700784"/>
+            <a:ext cx="5486400" cy="292608"/>
+          </a:xfrm>
+          <a:prstGeom prst="rect">
+            <a:avLst/>
+          </a:prstGeom>
+          <a:noFill/>
+          <a:ln/>
+        </p:spPr>
+        <p:txBody>
+          <a:bodyPr wrap="square" lIns="0" tIns="0" rIns="0" bIns="0" rtlCol="0" anchor="ctr"/>
+          <a:lstStyle/>
+          <a:p>
+            <a:pPr indent="0" marL="0">
+              <a:buNone/>
+            </a:pPr>
+            <a:r>
+              <a:rPr lang="en-US" sz="1100" b="1" spc="150" kern="0" dirty="0">
+                <a:solidFill>
+                  <a:srgbClr val="1565C0"/>
+                </a:solidFill>
+                <a:latin typeface="Calibri" pitchFamily="34" charset="0"/>
+                <a:ea typeface="Calibri" pitchFamily="34" charset="-122"/>
+                <a:cs typeface="Calibri" pitchFamily="34" charset="-120"/>
+              </a:rPr>
+              <a:t>CLINICAL VIGNETTE</a:t>
+            </a:r>
+            <a:endParaRPr lang="en-US" sz="1100" dirty="0"/>
+          </a:p>
+        </p:txBody>
+      </p:sp>
+      <p:sp>
+        <p:nvSpPr>
           <p:cNvPr id="6" name="Text 4"/>
           <p:cNvSpPr/>
           <p:nvPr/>
         </p:nvSpPr>
         <p:spPr>
           <a:xfrm>
-            <a:off x="7660532" y="1755648"/>
-            <a:ext cx="3744779" cy="310896"/>
-          </a:xfrm>
-          <a:prstGeom prst="rect">
-            <a:avLst/>
-          </a:prstGeom>
-          <a:noFill/>
-          <a:ln/>
-        </p:spPr>
-        <p:txBody>
-          <a:bodyPr wrap="square" lIns="0" tIns="0" rIns="0" bIns="0" rtlCol="0" anchor="ctr"/>
-          <a:lstStyle/>
-          <a:p>
-            <a:pPr indent="0" marL="0">
-              <a:buNone/>
-            </a:pPr>
-            <a:r>
-              <a:rPr lang="en-US" sz="1100" b="1" spc="140" kern="0" dirty="0">
-                <a:solidFill>
-                  <a:srgbClr val="1565C0"/>
-                </a:solidFill>
-                <a:latin typeface="Calibri" pitchFamily="34" charset="0"/>
-                <a:ea typeface="Calibri" pitchFamily="34" charset="-122"/>
-                <a:cs typeface="Calibri" pitchFamily="34" charset="-120"/>
-              </a:rPr>
-              <a:t>TEACHING POINT</a:t>
-            </a:r>
-            <a:endParaRPr lang="en-US" sz="1100" dirty="0"/>
-          </a:p>
-        </p:txBody>
-      </p:sp>
-      <p:sp>
-        <p:nvSpPr>
-          <p:cNvPr id="7" name="Text 5"/>
-          <p:cNvSpPr/>
-          <p:nvPr/>
-        </p:nvSpPr>
-        <p:spPr>
-          <a:xfrm>
-            <a:off x="7660532" y="2121408"/>
-            <a:ext cx="3726491" cy="3291840"/>
+            <a:off x="841248" y="2029968"/>
+            <a:ext cx="10509199" cy="2148840"/>
           </a:xfrm>
           <a:prstGeom prst="rect">
             <a:avLst/>
@@ -5768,12 +6420,12 @@
           <a:p>
             <a:pPr algn="l" indent="0" marL="0">
               <a:lnSpc>
-                <a:spcPct val="110000"/>
+                <a:spcPct val="108000"/>
               </a:lnSpc>
               <a:buNone/>
             </a:pPr>
             <a:r>
-              <a:rPr lang="en-US" sz="1350" dirty="0">
+              <a:rPr lang="en-US" sz="1450" dirty="0">
                 <a:solidFill>
                   <a:srgbClr val="33444F"/>
                 </a:solidFill>
@@ -5781,15 +6433,122 @@
                 <a:ea typeface="Calibri" pitchFamily="34" charset="-122"/>
                 <a:cs typeface="Calibri" pitchFamily="34" charset="-120"/>
               </a:rPr>
-              <a:t>Never release a consequential toxicology result on a screen alone — confirm by mass spectrometry, which resolves cross-reactivity.</a:t>
-            </a:r>
-            <a:endParaRPr lang="en-US" sz="1350" dirty="0"/>
-          </a:p>
-        </p:txBody>
+              <a:t>A pre-employment urine screen is positive for amphetamines. The donor takes an OTC decongestant and denies stimulant use. The sample goes for confirmation.</a:t>
+            </a:r>
+            <a:endParaRPr lang="en-US" sz="1450" dirty="0"/>
+          </a:p>
+        </p:txBody>
+      </p:sp>
+      <p:sp>
+        <p:nvSpPr>
+          <p:cNvPr id="7" name="Shape 5"/>
+          <p:cNvSpPr/>
+          <p:nvPr/>
+        </p:nvSpPr>
+        <p:spPr>
+          <a:xfrm>
+            <a:off x="566928" y="4553712"/>
+            <a:ext cx="11057839" cy="1325880"/>
+          </a:xfrm>
+          <a:prstGeom prst="roundRect">
+            <a:avLst>
+              <a:gd name="adj" fmla="val 6207"/>
+            </a:avLst>
+          </a:prstGeom>
+          <a:solidFill>
+            <a:srgbClr val="0E3A5F"/>
+          </a:solidFill>
+          <a:ln/>
+          <a:effectLst>
+            <a:outerShdw sx="100000" sy="100000" kx="0" ky="0" algn="bl" rotWithShape="0" blurRad="88900" dist="25400" dir="5400000">
+              <a:srgbClr val="22303C">
+                <a:alpha val="12000"/>
+              </a:srgbClr>
+            </a:outerShdw>
+          </a:effectLst>
+        </p:spPr>
       </p:sp>
       <p:sp>
         <p:nvSpPr>
           <p:cNvPr id="8" name="Text 6"/>
+          <p:cNvSpPr/>
+          <p:nvPr/>
+        </p:nvSpPr>
+        <p:spPr>
+          <a:xfrm>
+            <a:off x="822960" y="4681728"/>
+            <a:ext cx="640080" cy="960120"/>
+          </a:xfrm>
+          <a:prstGeom prst="rect">
+            <a:avLst/>
+          </a:prstGeom>
+          <a:noFill/>
+          <a:ln/>
+        </p:spPr>
+        <p:txBody>
+          <a:bodyPr wrap="square" lIns="0" tIns="0" rIns="0" bIns="0" rtlCol="0" anchor="ctr"/>
+          <a:lstStyle/>
+          <a:p>
+            <a:pPr algn="ctr" indent="0" marL="0">
+              <a:buNone/>
+            </a:pPr>
+            <a:r>
+              <a:rPr lang="en-US" sz="4000" b="1" dirty="0">
+                <a:solidFill>
+                  <a:srgbClr val="1565C0"/>
+                </a:solidFill>
+                <a:latin typeface="Calibri" pitchFamily="34" charset="0"/>
+                <a:ea typeface="Calibri" pitchFamily="34" charset="-122"/>
+                <a:cs typeface="Calibri" pitchFamily="34" charset="-120"/>
+              </a:rPr>
+              <a:t>?</a:t>
+            </a:r>
+            <a:endParaRPr lang="en-US" sz="4000" dirty="0"/>
+          </a:p>
+        </p:txBody>
+      </p:sp>
+      <p:sp>
+        <p:nvSpPr>
+          <p:cNvPr id="9" name="Text 7"/>
+          <p:cNvSpPr/>
+          <p:nvPr/>
+        </p:nvSpPr>
+        <p:spPr>
+          <a:xfrm>
+            <a:off x="1618488" y="4553712"/>
+            <a:ext cx="9686239" cy="1325880"/>
+          </a:xfrm>
+          <a:prstGeom prst="rect">
+            <a:avLst/>
+          </a:prstGeom>
+          <a:noFill/>
+          <a:ln/>
+        </p:spPr>
+        <p:txBody>
+          <a:bodyPr wrap="square" lIns="0" tIns="0" rIns="0" bIns="0" rtlCol="0" anchor="ctr"/>
+          <a:lstStyle/>
+          <a:p>
+            <a:pPr algn="l" indent="0" marL="0">
+              <a:buNone/>
+            </a:pPr>
+            <a:r>
+              <a:rPr lang="en-US" sz="1500" b="1" dirty="0">
+                <a:solidFill>
+                  <a:srgbClr val="FFFFFF"/>
+                </a:solidFill>
+                <a:latin typeface="Calibri" pitchFamily="34" charset="0"/>
+                <a:ea typeface="Calibri" pitchFamily="34" charset="-122"/>
+                <a:cs typeface="Calibri" pitchFamily="34" charset="-120"/>
+              </a:rPr>
+              <a:t>How should the laboratory handle the discrepancy, and what does confirmation add?</a:t>
+            </a:r>
+            <a:endParaRPr lang="en-US" sz="1500" dirty="0"/>
+          </a:p>
+        </p:txBody>
+      </p:sp>
+      <p:sp>
+        <p:nvSpPr>
+          <p:cNvPr id="10" name="Text 8"/>
           <p:cNvSpPr/>
           <p:nvPr/>
         </p:nvSpPr>
@@ -5828,7 +6587,7 @@
       </p:sp>
       <p:sp>
         <p:nvSpPr>
-          <p:cNvPr id="9" name="Text 7"/>
+          <p:cNvPr id="11" name="Text 9"/>
           <p:cNvSpPr/>
           <p:nvPr/>
         </p:nvSpPr>
@@ -5958,7 +6717,7 @@
                 <a:ea typeface="Calibri" pitchFamily="34" charset="-122"/>
                 <a:cs typeface="Calibri" pitchFamily="34" charset="-120"/>
               </a:rPr>
-              <a:t>CLINICAL CHEMISTRY   ·   CASE 2</a:t>
+              <a:t>CLINICAL CHEMISTRY   ·   CASE 1  ·  RESOLUTION</a:t>
             </a:r>
             <a:endParaRPr lang="en-US" sz="1100" dirty="0"/>
           </a:p>
@@ -5997,7 +6756,7 @@
                 <a:ea typeface="Calibri" pitchFamily="34" charset="-122"/>
                 <a:cs typeface="Calibri" pitchFamily="34" charset="-120"/>
               </a:rPr>
-              <a:t>Case 2</a:t>
+              <a:t>Case 1: Presumptive Positive Screen</a:t>
             </a:r>
             <a:endParaRPr lang="en-US" sz="3000" dirty="0"/>
           </a:p>
@@ -6005,18 +6764,124 @@
       </p:sp>
       <p:sp>
         <p:nvSpPr>
-          <p:cNvPr id="4" name="Shape 2"/>
-          <p:cNvSpPr/>
-          <p:nvPr/>
-        </p:nvSpPr>
-        <p:spPr>
-          <a:xfrm>
-            <a:off x="566928" y="1517904"/>
-            <a:ext cx="11057839" cy="2788920"/>
+          <p:cNvPr id="4" name="Text 2"/>
+          <p:cNvSpPr/>
+          <p:nvPr/>
+        </p:nvSpPr>
+        <p:spPr>
+          <a:xfrm>
+            <a:off x="566928" y="1554480"/>
+            <a:ext cx="6413547" cy="4023360"/>
+          </a:xfrm>
+          <a:prstGeom prst="rect">
+            <a:avLst/>
+          </a:prstGeom>
+          <a:noFill/>
+          <a:ln/>
+        </p:spPr>
+        <p:txBody>
+          <a:bodyPr wrap="square" lIns="0" tIns="0" rIns="0" bIns="0" rtlCol="0" anchor="t"/>
+          <a:lstStyle/>
+          <a:p>
+            <a:pPr algn="l" marL="177800" indent="-177800">
+              <a:spcAft>
+                <a:spcPts val="900"/>
+              </a:spcAft>
+              <a:buSzPct val="100000"/>
+              <a:buChar char="•"/>
+            </a:pPr>
+            <a:r>
+              <a:rPr lang="en-US" sz="1400" b="1" dirty="0">
+                <a:solidFill>
+                  <a:srgbClr val="1B2A38"/>
+                </a:solidFill>
+                <a:latin typeface="Calibri" pitchFamily="34" charset="0"/>
+                <a:ea typeface="Calibri" pitchFamily="34" charset="-122"/>
+                <a:cs typeface="Calibri" pitchFamily="34" charset="-120"/>
+              </a:rPr>
+              <a:t>The immunoassay screen is presumptive and cross-reacts with sympathomimetics like some decongestants.</a:t>
+            </a:r>
+            <a:endParaRPr lang="en-US" sz="1400" dirty="0"/>
+          </a:p>
+          <a:p>
+            <a:pPr algn="l" marL="177800" indent="-177800">
+              <a:spcAft>
+                <a:spcPts val="900"/>
+              </a:spcAft>
+              <a:buSzPct val="100000"/>
+              <a:buChar char="•"/>
+            </a:pPr>
+            <a:r>
+              <a:rPr lang="en-US" sz="1400" dirty="0">
+                <a:solidFill>
+                  <a:srgbClr val="33444F"/>
+                </a:solidFill>
+                <a:latin typeface="Calibri" pitchFamily="34" charset="0"/>
+                <a:ea typeface="Calibri" pitchFamily="34" charset="-122"/>
+                <a:cs typeface="Calibri" pitchFamily="34" charset="-120"/>
+              </a:rPr>
+              <a:t>Definitive results require GC-MS or LC-MS/MS.</a:t>
+            </a:r>
+            <a:endParaRPr lang="en-US" sz="1400" dirty="0"/>
+          </a:p>
+          <a:p>
+            <a:pPr algn="l" marL="177800" indent="-177800">
+              <a:spcAft>
+                <a:spcPts val="900"/>
+              </a:spcAft>
+              <a:buSzPct val="100000"/>
+              <a:buChar char="•"/>
+            </a:pPr>
+            <a:r>
+              <a:rPr lang="en-US" sz="1400" dirty="0">
+                <a:solidFill>
+                  <a:srgbClr val="33444F"/>
+                </a:solidFill>
+                <a:latin typeface="Calibri" pitchFamily="34" charset="0"/>
+                <a:ea typeface="Calibri" pitchFamily="34" charset="-122"/>
+                <a:cs typeface="Calibri" pitchFamily="34" charset="-120"/>
+              </a:rPr>
+              <a:t>Confirmation distinguishes true amphetamine/methamphetamine from cross-reactors.</a:t>
+            </a:r>
+            <a:endParaRPr lang="en-US" sz="1400" dirty="0"/>
+          </a:p>
+          <a:p>
+            <a:pPr algn="l" marL="177800" indent="-177800">
+              <a:spcAft>
+                <a:spcPts val="900"/>
+              </a:spcAft>
+              <a:buSzPct val="100000"/>
+              <a:buChar char="•"/>
+            </a:pPr>
+            <a:r>
+              <a:rPr lang="en-US" sz="1400" dirty="0">
+                <a:solidFill>
+                  <a:srgbClr val="33444F"/>
+                </a:solidFill>
+                <a:latin typeface="Calibri" pitchFamily="34" charset="0"/>
+                <a:ea typeface="Calibri" pitchFamily="34" charset="-122"/>
+                <a:cs typeface="Calibri" pitchFamily="34" charset="-120"/>
+              </a:rPr>
+              <a:t>Report screens as presumptive; act only on confirmed results in consequential settings.</a:t>
+            </a:r>
+            <a:endParaRPr lang="en-US" sz="1400" dirty="0"/>
+          </a:p>
+        </p:txBody>
+      </p:sp>
+      <p:sp>
+        <p:nvSpPr>
+          <p:cNvPr id="5" name="Shape 3"/>
+          <p:cNvSpPr/>
+          <p:nvPr/>
+        </p:nvSpPr>
+        <p:spPr>
+          <a:xfrm>
+            <a:off x="7422788" y="1554480"/>
+            <a:ext cx="4201979" cy="3977640"/>
           </a:xfrm>
           <a:prstGeom prst="roundRect">
             <a:avLst>
-              <a:gd name="adj" fmla="val 2951"/>
+              <a:gd name="adj" fmla="val 2069"/>
             </a:avLst>
           </a:prstGeom>
           <a:solidFill>
@@ -6034,14 +6899,14 @@
       </p:sp>
       <p:sp>
         <p:nvSpPr>
-          <p:cNvPr id="5" name="Text 3"/>
-          <p:cNvSpPr/>
-          <p:nvPr/>
-        </p:nvSpPr>
-        <p:spPr>
-          <a:xfrm>
-            <a:off x="841248" y="1700784"/>
-            <a:ext cx="5486400" cy="292608"/>
+          <p:cNvPr id="6" name="Text 4"/>
+          <p:cNvSpPr/>
+          <p:nvPr/>
+        </p:nvSpPr>
+        <p:spPr>
+          <a:xfrm>
+            <a:off x="7660532" y="1755648"/>
+            <a:ext cx="3744779" cy="310896"/>
           </a:xfrm>
           <a:prstGeom prst="rect">
             <a:avLst/>
@@ -6057,7 +6922,7 @@
               <a:buNone/>
             </a:pPr>
             <a:r>
-              <a:rPr lang="en-US" sz="1100" b="1" spc="150" kern="0" dirty="0">
+              <a:rPr lang="en-US" sz="1100" b="1" spc="140" kern="0" dirty="0">
                 <a:solidFill>
                   <a:srgbClr val="1565C0"/>
                 </a:solidFill>
@@ -6065,7 +6930,7 @@
                 <a:ea typeface="Calibri" pitchFamily="34" charset="-122"/>
                 <a:cs typeface="Calibri" pitchFamily="34" charset="-120"/>
               </a:rPr>
-              <a:t>CLINICAL VIGNETTE</a:t>
+              <a:t>TEACHING POINT</a:t>
             </a:r>
             <a:endParaRPr lang="en-US" sz="1100" dirty="0"/>
           </a:p>
@@ -6073,14 +6938,14 @@
       </p:sp>
       <p:sp>
         <p:nvSpPr>
-          <p:cNvPr id="6" name="Text 4"/>
-          <p:cNvSpPr/>
-          <p:nvPr/>
-        </p:nvSpPr>
-        <p:spPr>
-          <a:xfrm>
-            <a:off x="841248" y="2029968"/>
-            <a:ext cx="10509199" cy="2148840"/>
+          <p:cNvPr id="7" name="Text 5"/>
+          <p:cNvSpPr/>
+          <p:nvPr/>
+        </p:nvSpPr>
+        <p:spPr>
+          <a:xfrm>
+            <a:off x="7660532" y="2121408"/>
+            <a:ext cx="3726491" cy="3291840"/>
           </a:xfrm>
           <a:prstGeom prst="rect">
             <a:avLst/>
@@ -6094,12 +6959,12 @@
           <a:p>
             <a:pPr algn="l" indent="0" marL="0">
               <a:lnSpc>
-                <a:spcPct val="108000"/>
+                <a:spcPct val="110000"/>
               </a:lnSpc>
               <a:buNone/>
             </a:pPr>
             <a:r>
-              <a:rPr lang="en-US" sz="1450" dirty="0">
+              <a:rPr lang="en-US" sz="1350" dirty="0">
                 <a:solidFill>
                   <a:srgbClr val="33444F"/>
                 </a:solidFill>
@@ -6107,122 +6972,15 @@
                 <a:ea typeface="Calibri" pitchFamily="34" charset="-122"/>
                 <a:cs typeface="Calibri" pitchFamily="34" charset="-120"/>
               </a:rPr>
-              <a:t>A patient on phenytoin with hypoalbuminemia has a low-normal TOTAL phenytoin level but clinical signs of toxicity (nystagmus, ataxia).</a:t>
-            </a:r>
-            <a:endParaRPr lang="en-US" sz="1450" dirty="0"/>
-          </a:p>
-        </p:txBody>
-      </p:sp>
-      <p:sp>
-        <p:nvSpPr>
-          <p:cNvPr id="7" name="Shape 5"/>
-          <p:cNvSpPr/>
-          <p:nvPr/>
-        </p:nvSpPr>
-        <p:spPr>
-          <a:xfrm>
-            <a:off x="566928" y="4553712"/>
-            <a:ext cx="11057839" cy="1325880"/>
-          </a:xfrm>
-          <a:prstGeom prst="roundRect">
-            <a:avLst>
-              <a:gd name="adj" fmla="val 6207"/>
-            </a:avLst>
-          </a:prstGeom>
-          <a:solidFill>
-            <a:srgbClr val="0E3A5F"/>
-          </a:solidFill>
-          <a:ln/>
-          <a:effectLst>
-            <a:outerShdw sx="100000" sy="100000" kx="0" ky="0" algn="bl" rotWithShape="0" blurRad="88900" dist="25400" dir="5400000">
-              <a:srgbClr val="22303C">
-                <a:alpha val="12000"/>
-              </a:srgbClr>
-            </a:outerShdw>
-          </a:effectLst>
-        </p:spPr>
+              <a:t>Never release a consequential toxicology result on a screen alone — confirm by mass spectrometry, which resolves cross-reactivity.</a:t>
+            </a:r>
+            <a:endParaRPr lang="en-US" sz="1350" dirty="0"/>
+          </a:p>
+        </p:txBody>
       </p:sp>
       <p:sp>
         <p:nvSpPr>
           <p:cNvPr id="8" name="Text 6"/>
-          <p:cNvSpPr/>
-          <p:nvPr/>
-        </p:nvSpPr>
-        <p:spPr>
-          <a:xfrm>
-            <a:off x="822960" y="4681728"/>
-            <a:ext cx="640080" cy="960120"/>
-          </a:xfrm>
-          <a:prstGeom prst="rect">
-            <a:avLst/>
-          </a:prstGeom>
-          <a:noFill/>
-          <a:ln/>
-        </p:spPr>
-        <p:txBody>
-          <a:bodyPr wrap="square" lIns="0" tIns="0" rIns="0" bIns="0" rtlCol="0" anchor="ctr"/>
-          <a:lstStyle/>
-          <a:p>
-            <a:pPr algn="ctr" indent="0" marL="0">
-              <a:buNone/>
-            </a:pPr>
-            <a:r>
-              <a:rPr lang="en-US" sz="4000" b="1" dirty="0">
-                <a:solidFill>
-                  <a:srgbClr val="1565C0"/>
-                </a:solidFill>
-                <a:latin typeface="Calibri" pitchFamily="34" charset="0"/>
-                <a:ea typeface="Calibri" pitchFamily="34" charset="-122"/>
-                <a:cs typeface="Calibri" pitchFamily="34" charset="-120"/>
-              </a:rPr>
-              <a:t>?</a:t>
-            </a:r>
-            <a:endParaRPr lang="en-US" sz="4000" dirty="0"/>
-          </a:p>
-        </p:txBody>
-      </p:sp>
-      <p:sp>
-        <p:nvSpPr>
-          <p:cNvPr id="9" name="Text 7"/>
-          <p:cNvSpPr/>
-          <p:nvPr/>
-        </p:nvSpPr>
-        <p:spPr>
-          <a:xfrm>
-            <a:off x="1618488" y="4553712"/>
-            <a:ext cx="9686239" cy="1325880"/>
-          </a:xfrm>
-          <a:prstGeom prst="rect">
-            <a:avLst/>
-          </a:prstGeom>
-          <a:noFill/>
-          <a:ln/>
-        </p:spPr>
-        <p:txBody>
-          <a:bodyPr wrap="square" lIns="0" tIns="0" rIns="0" bIns="0" rtlCol="0" anchor="ctr"/>
-          <a:lstStyle/>
-          <a:p>
-            <a:pPr algn="l" indent="0" marL="0">
-              <a:buNone/>
-            </a:pPr>
-            <a:r>
-              <a:rPr lang="en-US" sz="1500" b="1" dirty="0">
-                <a:solidFill>
-                  <a:srgbClr val="FFFFFF"/>
-                </a:solidFill>
-                <a:latin typeface="Calibri" pitchFamily="34" charset="0"/>
-                <a:ea typeface="Calibri" pitchFamily="34" charset="-122"/>
-                <a:cs typeface="Calibri" pitchFamily="34" charset="-120"/>
-              </a:rPr>
-              <a:t>Why is the total level misleading, and what test clarifies the situation?</a:t>
-            </a:r>
-            <a:endParaRPr lang="en-US" sz="1500" dirty="0"/>
-          </a:p>
-        </p:txBody>
-      </p:sp>
-      <p:sp>
-        <p:nvSpPr>
-          <p:cNvPr id="10" name="Text 8"/>
           <p:cNvSpPr/>
           <p:nvPr/>
         </p:nvSpPr>
@@ -6261,7 +7019,7 @@
       </p:sp>
       <p:sp>
         <p:nvSpPr>
-          <p:cNvPr id="11" name="Text 9"/>
+          <p:cNvPr id="9" name="Text 7"/>
           <p:cNvSpPr/>
           <p:nvPr/>
         </p:nvSpPr>
@@ -6391,7 +7149,7 @@
                 <a:ea typeface="Calibri" pitchFamily="34" charset="-122"/>
                 <a:cs typeface="Calibri" pitchFamily="34" charset="-120"/>
               </a:rPr>
-              <a:t>CLINICAL CHEMISTRY   ·   CASE 2  ·  RESOLUTION</a:t>
+              <a:t>CLINICAL CHEMISTRY   ·   CASE 2</a:t>
             </a:r>
             <a:endParaRPr lang="en-US" sz="1100" dirty="0"/>
           </a:p>
@@ -6430,7 +7188,7 @@
                 <a:ea typeface="Calibri" pitchFamily="34" charset="-122"/>
                 <a:cs typeface="Calibri" pitchFamily="34" charset="-120"/>
               </a:rPr>
-              <a:t>Case 2: Free Phenytoin in Hypoalbuminemia</a:t>
+              <a:t>Case 2</a:t>
             </a:r>
             <a:endParaRPr lang="en-US" sz="3000" dirty="0"/>
           </a:p>
@@ -6438,124 +7196,18 @@
       </p:sp>
       <p:sp>
         <p:nvSpPr>
-          <p:cNvPr id="4" name="Text 2"/>
-          <p:cNvSpPr/>
-          <p:nvPr/>
-        </p:nvSpPr>
-        <p:spPr>
-          <a:xfrm>
-            <a:off x="566928" y="1554480"/>
-            <a:ext cx="6413547" cy="4023360"/>
-          </a:xfrm>
-          <a:prstGeom prst="rect">
-            <a:avLst/>
-          </a:prstGeom>
-          <a:noFill/>
-          <a:ln/>
-        </p:spPr>
-        <p:txBody>
-          <a:bodyPr wrap="square" lIns="0" tIns="0" rIns="0" bIns="0" rtlCol="0" anchor="t"/>
-          <a:lstStyle/>
-          <a:p>
-            <a:pPr algn="l" marL="177800" indent="-177800">
-              <a:spcAft>
-                <a:spcPts val="900"/>
-              </a:spcAft>
-              <a:buSzPct val="100000"/>
-              <a:buChar char="•"/>
-            </a:pPr>
-            <a:r>
-              <a:rPr lang="en-US" sz="1400" b="1" dirty="0">
-                <a:solidFill>
-                  <a:srgbClr val="1B2A38"/>
-                </a:solidFill>
-                <a:latin typeface="Calibri" pitchFamily="34" charset="0"/>
-                <a:ea typeface="Calibri" pitchFamily="34" charset="-122"/>
-                <a:cs typeface="Calibri" pitchFamily="34" charset="-120"/>
-              </a:rPr>
-              <a:t>Phenytoin is highly protein-bound; in hypoalbuminemia the free (active) fraction rises while total drug appears normal/low.</a:t>
-            </a:r>
-            <a:endParaRPr lang="en-US" sz="1400" dirty="0"/>
-          </a:p>
-          <a:p>
-            <a:pPr algn="l" marL="177800" indent="-177800">
-              <a:spcAft>
-                <a:spcPts val="900"/>
-              </a:spcAft>
-              <a:buSzPct val="100000"/>
-              <a:buChar char="•"/>
-            </a:pPr>
-            <a:r>
-              <a:rPr lang="en-US" sz="1400" dirty="0">
-                <a:solidFill>
-                  <a:srgbClr val="33444F"/>
-                </a:solidFill>
-                <a:latin typeface="Calibri" pitchFamily="34" charset="0"/>
-                <a:ea typeface="Calibri" pitchFamily="34" charset="-122"/>
-                <a:cs typeface="Calibri" pitchFamily="34" charset="-120"/>
-              </a:rPr>
-              <a:t>The patient is clinically toxic because free drug is elevated.</a:t>
-            </a:r>
-            <a:endParaRPr lang="en-US" sz="1400" dirty="0"/>
-          </a:p>
-          <a:p>
-            <a:pPr algn="l" marL="177800" indent="-177800">
-              <a:spcAft>
-                <a:spcPts val="900"/>
-              </a:spcAft>
-              <a:buSzPct val="100000"/>
-              <a:buChar char="•"/>
-            </a:pPr>
-            <a:r>
-              <a:rPr lang="en-US" sz="1400" dirty="0">
-                <a:solidFill>
-                  <a:srgbClr val="33444F"/>
-                </a:solidFill>
-                <a:latin typeface="Calibri" pitchFamily="34" charset="0"/>
-                <a:ea typeface="Calibri" pitchFamily="34" charset="-122"/>
-                <a:cs typeface="Calibri" pitchFamily="34" charset="-120"/>
-              </a:rPr>
-              <a:t>Measure FREE phenytoin (or use a correction such as the Sheiner-Tozer estimate).</a:t>
-            </a:r>
-            <a:endParaRPr lang="en-US" sz="1400" dirty="0"/>
-          </a:p>
-          <a:p>
-            <a:pPr algn="l" marL="177800" indent="-177800">
-              <a:spcAft>
-                <a:spcPts val="900"/>
-              </a:spcAft>
-              <a:buSzPct val="100000"/>
-              <a:buChar char="•"/>
-            </a:pPr>
-            <a:r>
-              <a:rPr lang="en-US" sz="1400" dirty="0">
-                <a:solidFill>
-                  <a:srgbClr val="33444F"/>
-                </a:solidFill>
-                <a:latin typeface="Calibri" pitchFamily="34" charset="0"/>
-                <a:ea typeface="Calibri" pitchFamily="34" charset="-122"/>
-                <a:cs typeface="Calibri" pitchFamily="34" charset="-120"/>
-              </a:rPr>
-              <a:t>Adjust dosing to the free level and clinical effect.</a:t>
-            </a:r>
-            <a:endParaRPr lang="en-US" sz="1400" dirty="0"/>
-          </a:p>
-        </p:txBody>
-      </p:sp>
-      <p:sp>
-        <p:nvSpPr>
-          <p:cNvPr id="5" name="Shape 3"/>
-          <p:cNvSpPr/>
-          <p:nvPr/>
-        </p:nvSpPr>
-        <p:spPr>
-          <a:xfrm>
-            <a:off x="7422788" y="1554480"/>
-            <a:ext cx="4201979" cy="3977640"/>
+          <p:cNvPr id="4" name="Shape 2"/>
+          <p:cNvSpPr/>
+          <p:nvPr/>
+        </p:nvSpPr>
+        <p:spPr>
+          <a:xfrm>
+            <a:off x="566928" y="1517904"/>
+            <a:ext cx="11057839" cy="2788920"/>
           </a:xfrm>
           <a:prstGeom prst="roundRect">
             <a:avLst>
-              <a:gd name="adj" fmla="val 2069"/>
+              <a:gd name="adj" fmla="val 2951"/>
             </a:avLst>
           </a:prstGeom>
           <a:solidFill>
@@ -6573,53 +7225,53 @@
       </p:sp>
       <p:sp>
         <p:nvSpPr>
+          <p:cNvPr id="5" name="Text 3"/>
+          <p:cNvSpPr/>
+          <p:nvPr/>
+        </p:nvSpPr>
+        <p:spPr>
+          <a:xfrm>
+            <a:off x="841248" y="1700784"/>
+            <a:ext cx="5486400" cy="292608"/>
+          </a:xfrm>
+          <a:prstGeom prst="rect">
+            <a:avLst/>
+          </a:prstGeom>
+          <a:noFill/>
+          <a:ln/>
+        </p:spPr>
+        <p:txBody>
+          <a:bodyPr wrap="square" lIns="0" tIns="0" rIns="0" bIns="0" rtlCol="0" anchor="ctr"/>
+          <a:lstStyle/>
+          <a:p>
+            <a:pPr indent="0" marL="0">
+              <a:buNone/>
+            </a:pPr>
+            <a:r>
+              <a:rPr lang="en-US" sz="1100" b="1" spc="150" kern="0" dirty="0">
+                <a:solidFill>
+                  <a:srgbClr val="1565C0"/>
+                </a:solidFill>
+                <a:latin typeface="Calibri" pitchFamily="34" charset="0"/>
+                <a:ea typeface="Calibri" pitchFamily="34" charset="-122"/>
+                <a:cs typeface="Calibri" pitchFamily="34" charset="-120"/>
+              </a:rPr>
+              <a:t>CLINICAL VIGNETTE</a:t>
+            </a:r>
+            <a:endParaRPr lang="en-US" sz="1100" dirty="0"/>
+          </a:p>
+        </p:txBody>
+      </p:sp>
+      <p:sp>
+        <p:nvSpPr>
           <p:cNvPr id="6" name="Text 4"/>
           <p:cNvSpPr/>
           <p:nvPr/>
         </p:nvSpPr>
         <p:spPr>
           <a:xfrm>
-            <a:off x="7660532" y="1755648"/>
-            <a:ext cx="3744779" cy="310896"/>
-          </a:xfrm>
-          <a:prstGeom prst="rect">
-            <a:avLst/>
-          </a:prstGeom>
-          <a:noFill/>
-          <a:ln/>
-        </p:spPr>
-        <p:txBody>
-          <a:bodyPr wrap="square" lIns="0" tIns="0" rIns="0" bIns="0" rtlCol="0" anchor="ctr"/>
-          <a:lstStyle/>
-          <a:p>
-            <a:pPr indent="0" marL="0">
-              <a:buNone/>
-            </a:pPr>
-            <a:r>
-              <a:rPr lang="en-US" sz="1100" b="1" spc="140" kern="0" dirty="0">
-                <a:solidFill>
-                  <a:srgbClr val="1565C0"/>
-                </a:solidFill>
-                <a:latin typeface="Calibri" pitchFamily="34" charset="0"/>
-                <a:ea typeface="Calibri" pitchFamily="34" charset="-122"/>
-                <a:cs typeface="Calibri" pitchFamily="34" charset="-120"/>
-              </a:rPr>
-              <a:t>TEACHING POINT</a:t>
-            </a:r>
-            <a:endParaRPr lang="en-US" sz="1100" dirty="0"/>
-          </a:p>
-        </p:txBody>
-      </p:sp>
-      <p:sp>
-        <p:nvSpPr>
-          <p:cNvPr id="7" name="Text 5"/>
-          <p:cNvSpPr/>
-          <p:nvPr/>
-        </p:nvSpPr>
-        <p:spPr>
-          <a:xfrm>
-            <a:off x="7660532" y="2121408"/>
-            <a:ext cx="3726491" cy="3291840"/>
+            <a:off x="841248" y="2029968"/>
+            <a:ext cx="10509199" cy="2148840"/>
           </a:xfrm>
           <a:prstGeom prst="rect">
             <a:avLst/>
@@ -6633,12 +7285,12 @@
           <a:p>
             <a:pPr algn="l" indent="0" marL="0">
               <a:lnSpc>
-                <a:spcPct val="110000"/>
+                <a:spcPct val="108000"/>
               </a:lnSpc>
               <a:buNone/>
             </a:pPr>
             <a:r>
-              <a:rPr lang="en-US" sz="1350" dirty="0">
+              <a:rPr lang="en-US" sz="1450" dirty="0">
                 <a:solidFill>
                   <a:srgbClr val="33444F"/>
                 </a:solidFill>
@@ -6646,15 +7298,122 @@
                 <a:ea typeface="Calibri" pitchFamily="34" charset="-122"/>
                 <a:cs typeface="Calibri" pitchFamily="34" charset="-120"/>
               </a:rPr>
-              <a:t>For highly protein-bound drugs in altered binding states (low albumin, uremia), interpret the FREE level, not the total.</a:t>
-            </a:r>
-            <a:endParaRPr lang="en-US" sz="1350" dirty="0"/>
-          </a:p>
-        </p:txBody>
+              <a:t>A patient on phenytoin with hypoalbuminemia has a low-normal TOTAL phenytoin but clinical toxicity (nystagmus, ataxia).</a:t>
+            </a:r>
+            <a:endParaRPr lang="en-US" sz="1450" dirty="0"/>
+          </a:p>
+        </p:txBody>
+      </p:sp>
+      <p:sp>
+        <p:nvSpPr>
+          <p:cNvPr id="7" name="Shape 5"/>
+          <p:cNvSpPr/>
+          <p:nvPr/>
+        </p:nvSpPr>
+        <p:spPr>
+          <a:xfrm>
+            <a:off x="566928" y="4553712"/>
+            <a:ext cx="11057839" cy="1325880"/>
+          </a:xfrm>
+          <a:prstGeom prst="roundRect">
+            <a:avLst>
+              <a:gd name="adj" fmla="val 6207"/>
+            </a:avLst>
+          </a:prstGeom>
+          <a:solidFill>
+            <a:srgbClr val="0E3A5F"/>
+          </a:solidFill>
+          <a:ln/>
+          <a:effectLst>
+            <a:outerShdw sx="100000" sy="100000" kx="0" ky="0" algn="bl" rotWithShape="0" blurRad="88900" dist="25400" dir="5400000">
+              <a:srgbClr val="22303C">
+                <a:alpha val="12000"/>
+              </a:srgbClr>
+            </a:outerShdw>
+          </a:effectLst>
+        </p:spPr>
       </p:sp>
       <p:sp>
         <p:nvSpPr>
           <p:cNvPr id="8" name="Text 6"/>
+          <p:cNvSpPr/>
+          <p:nvPr/>
+        </p:nvSpPr>
+        <p:spPr>
+          <a:xfrm>
+            <a:off x="822960" y="4681728"/>
+            <a:ext cx="640080" cy="960120"/>
+          </a:xfrm>
+          <a:prstGeom prst="rect">
+            <a:avLst/>
+          </a:prstGeom>
+          <a:noFill/>
+          <a:ln/>
+        </p:spPr>
+        <p:txBody>
+          <a:bodyPr wrap="square" lIns="0" tIns="0" rIns="0" bIns="0" rtlCol="0" anchor="ctr"/>
+          <a:lstStyle/>
+          <a:p>
+            <a:pPr algn="ctr" indent="0" marL="0">
+              <a:buNone/>
+            </a:pPr>
+            <a:r>
+              <a:rPr lang="en-US" sz="4000" b="1" dirty="0">
+                <a:solidFill>
+                  <a:srgbClr val="1565C0"/>
+                </a:solidFill>
+                <a:latin typeface="Calibri" pitchFamily="34" charset="0"/>
+                <a:ea typeface="Calibri" pitchFamily="34" charset="-122"/>
+                <a:cs typeface="Calibri" pitchFamily="34" charset="-120"/>
+              </a:rPr>
+              <a:t>?</a:t>
+            </a:r>
+            <a:endParaRPr lang="en-US" sz="4000" dirty="0"/>
+          </a:p>
+        </p:txBody>
+      </p:sp>
+      <p:sp>
+        <p:nvSpPr>
+          <p:cNvPr id="9" name="Text 7"/>
+          <p:cNvSpPr/>
+          <p:nvPr/>
+        </p:nvSpPr>
+        <p:spPr>
+          <a:xfrm>
+            <a:off x="1618488" y="4553712"/>
+            <a:ext cx="9686239" cy="1325880"/>
+          </a:xfrm>
+          <a:prstGeom prst="rect">
+            <a:avLst/>
+          </a:prstGeom>
+          <a:noFill/>
+          <a:ln/>
+        </p:spPr>
+        <p:txBody>
+          <a:bodyPr wrap="square" lIns="0" tIns="0" rIns="0" bIns="0" rtlCol="0" anchor="ctr"/>
+          <a:lstStyle/>
+          <a:p>
+            <a:pPr algn="l" indent="0" marL="0">
+              <a:buNone/>
+            </a:pPr>
+            <a:r>
+              <a:rPr lang="en-US" sz="1500" b="1" dirty="0">
+                <a:solidFill>
+                  <a:srgbClr val="FFFFFF"/>
+                </a:solidFill>
+                <a:latin typeface="Calibri" pitchFamily="34" charset="0"/>
+                <a:ea typeface="Calibri" pitchFamily="34" charset="-122"/>
+                <a:cs typeface="Calibri" pitchFamily="34" charset="-120"/>
+              </a:rPr>
+              <a:t>Why is the total level misleading, and what test clarifies it?</a:t>
+            </a:r>
+            <a:endParaRPr lang="en-US" sz="1500" dirty="0"/>
+          </a:p>
+        </p:txBody>
+      </p:sp>
+      <p:sp>
+        <p:nvSpPr>
+          <p:cNvPr id="10" name="Text 8"/>
           <p:cNvSpPr/>
           <p:nvPr/>
         </p:nvSpPr>
@@ -6693,7 +7452,7 @@
       </p:sp>
       <p:sp>
         <p:nvSpPr>
-          <p:cNvPr id="9" name="Text 7"/>
+          <p:cNvPr id="11" name="Text 9"/>
           <p:cNvSpPr/>
           <p:nvPr/>
         </p:nvSpPr>
@@ -6823,7 +7582,7 @@
                 <a:ea typeface="Calibri" pitchFamily="34" charset="-122"/>
                 <a:cs typeface="Calibri" pitchFamily="34" charset="-120"/>
               </a:rPr>
-              <a:t>CLINICAL CHEMISTRY   ·   BOARD REVIEW  ·  Q1</a:t>
+              <a:t>CLINICAL CHEMISTRY   ·   CASE 2  ·  RESOLUTION</a:t>
             </a:r>
             <a:endParaRPr lang="en-US" sz="1100" dirty="0"/>
           </a:p>
@@ -6854,7 +7613,7 @@
               <a:buNone/>
             </a:pPr>
             <a:r>
-              <a:rPr lang="en-US" sz="2600" b="1" dirty="0">
+              <a:rPr lang="en-US" sz="3000" b="1" dirty="0">
                 <a:solidFill>
                   <a:srgbClr val="0E3A5F"/>
                 </a:solidFill>
@@ -6862,9 +7621,9 @@
                 <a:ea typeface="Calibri" pitchFamily="34" charset="-122"/>
                 <a:cs typeface="Calibri" pitchFamily="34" charset="-120"/>
               </a:rPr>
-              <a:t>Board-Style Review</a:t>
-            </a:r>
-            <a:endParaRPr lang="en-US" sz="2600" dirty="0"/>
+              <a:t>Case 2: Free Phenytoin in Hypoalbuminemia</a:t>
+            </a:r>
+            <a:endParaRPr lang="en-US" sz="3000" dirty="0"/>
           </a:p>
         </p:txBody>
       </p:sp>
@@ -6876,8 +7635,8 @@
         </p:nvSpPr>
         <p:spPr>
           <a:xfrm>
-            <a:off x="566928" y="1417320"/>
-            <a:ext cx="11057839" cy="914400"/>
+            <a:off x="566928" y="1554480"/>
+            <a:ext cx="6413547" cy="4023360"/>
           </a:xfrm>
           <a:prstGeom prst="rect">
             <a:avLst/>
@@ -6889,14 +7648,15 @@
           <a:bodyPr wrap="square" lIns="0" tIns="0" rIns="0" bIns="0" rtlCol="0" anchor="t"/>
           <a:lstStyle/>
           <a:p>
-            <a:pPr algn="l" indent="0" marL="0">
-              <a:lnSpc>
-                <a:spcPct val="105000"/>
-              </a:lnSpc>
-              <a:buNone/>
-            </a:pPr>
-            <a:r>
-              <a:rPr lang="en-US" sz="1450" b="1" dirty="0">
+            <a:pPr algn="l" marL="177800" indent="-177800">
+              <a:spcAft>
+                <a:spcPts val="900"/>
+              </a:spcAft>
+              <a:buSzPct val="100000"/>
+              <a:buChar char="•"/>
+            </a:pPr>
+            <a:r>
+              <a:rPr lang="en-US" sz="1400" b="1" dirty="0">
                 <a:solidFill>
                   <a:srgbClr val="1B2A38"/>
                 </a:solidFill>
@@ -6904,41 +7664,20 @@
                 <a:ea typeface="Calibri" pitchFamily="34" charset="-122"/>
                 <a:cs typeface="Calibri" pitchFamily="34" charset="-120"/>
               </a:rPr>
-              <a:t>A urine immunoassay is positive for opiates but the patient only takes oxycodone. The most likely explanation is:</a:t>
-            </a:r>
-            <a:endParaRPr lang="en-US" sz="1450" dirty="0"/>
-          </a:p>
-        </p:txBody>
-      </p:sp>
-      <p:sp>
-        <p:nvSpPr>
-          <p:cNvPr id="5" name="Text 3"/>
-          <p:cNvSpPr/>
-          <p:nvPr/>
-        </p:nvSpPr>
-        <p:spPr>
-          <a:xfrm>
-            <a:off x="658368" y="2395728"/>
-            <a:ext cx="6192390" cy="3017520"/>
-          </a:xfrm>
-          <a:prstGeom prst="rect">
-            <a:avLst/>
-          </a:prstGeom>
-          <a:noFill/>
-          <a:ln/>
-        </p:spPr>
-        <p:txBody>
-          <a:bodyPr wrap="square" lIns="0" tIns="0" rIns="0" bIns="0" rtlCol="0" anchor="t"/>
-          <a:lstStyle/>
-          <a:p>
-            <a:pPr algn="l" indent="0" marL="0">
+              <a:t>Phenytoin is highly protein-bound; in hypoalbuminemia the free (active) fraction rises while total appears normal/low.</a:t>
+            </a:r>
+            <a:endParaRPr lang="en-US" sz="1400" dirty="0"/>
+          </a:p>
+          <a:p>
+            <a:pPr algn="l" marL="177800" indent="-177800">
               <a:spcAft>
-                <a:spcPts val="600"/>
+                <a:spcPts val="900"/>
               </a:spcAft>
-              <a:buNone/>
-            </a:pPr>
-            <a:r>
-              <a:rPr lang="en-US" sz="1350" dirty="0">
+              <a:buSzPct val="100000"/>
+              <a:buChar char="•"/>
+            </a:pPr>
+            <a:r>
+              <a:rPr lang="en-US" sz="1400" dirty="0">
                 <a:solidFill>
                   <a:srgbClr val="33444F"/>
                 </a:solidFill>
@@ -6946,39 +7685,41 @@
                 <a:ea typeface="Calibri" pitchFamily="34" charset="-122"/>
                 <a:cs typeface="Calibri" pitchFamily="34" charset="-120"/>
               </a:rPr>
-              <a:t>A. A true positive for morphine</a:t>
-            </a:r>
-            <a:endParaRPr lang="en-US" sz="1350" dirty="0"/>
-          </a:p>
-          <a:p>
-            <a:pPr algn="l" indent="0" marL="0">
+              <a:t>The patient is clinically toxic because free drug is elevated.</a:t>
+            </a:r>
+            <a:endParaRPr lang="en-US" sz="1400" dirty="0"/>
+          </a:p>
+          <a:p>
+            <a:pPr algn="l" marL="177800" indent="-177800">
               <a:spcAft>
-                <a:spcPts val="600"/>
+                <a:spcPts val="900"/>
               </a:spcAft>
-              <a:buNone/>
-            </a:pPr>
-            <a:r>
-              <a:rPr lang="en-US" sz="1350" b="1" dirty="0">
-                <a:solidFill>
-                  <a:srgbClr val="0D4A92"/>
-                </a:solidFill>
-                <a:latin typeface="Calibri" pitchFamily="34" charset="0"/>
-                <a:ea typeface="Calibri" pitchFamily="34" charset="-122"/>
-                <a:cs typeface="Calibri" pitchFamily="34" charset="-120"/>
-              </a:rPr>
-              <a:t>B. Opiate immunoassays may not reliably detect semisynthetic/synthetic opioids; targeted testing/confirmation is needed</a:t>
-            </a:r>
-            <a:endParaRPr lang="en-US" sz="1350" dirty="0"/>
-          </a:p>
-          <a:p>
-            <a:pPr algn="l" indent="0" marL="0">
+              <a:buSzPct val="100000"/>
+              <a:buChar char="•"/>
+            </a:pPr>
+            <a:r>
+              <a:rPr lang="en-US" sz="1400" dirty="0">
+                <a:solidFill>
+                  <a:srgbClr val="33444F"/>
+                </a:solidFill>
+                <a:latin typeface="Calibri" pitchFamily="34" charset="0"/>
+                <a:ea typeface="Calibri" pitchFamily="34" charset="-122"/>
+                <a:cs typeface="Calibri" pitchFamily="34" charset="-120"/>
+              </a:rPr>
+              <a:t>Measure FREE phenytoin (or correct with the Sheiner-Tozer estimate).</a:t>
+            </a:r>
+            <a:endParaRPr lang="en-US" sz="1400" dirty="0"/>
+          </a:p>
+          <a:p>
+            <a:pPr algn="l" marL="177800" indent="-177800">
               <a:spcAft>
-                <a:spcPts val="600"/>
+                <a:spcPts val="900"/>
               </a:spcAft>
-              <a:buNone/>
-            </a:pPr>
-            <a:r>
-              <a:rPr lang="en-US" sz="1350" dirty="0">
+              <a:buSzPct val="100000"/>
+              <a:buChar char="•"/>
+            </a:pPr>
+            <a:r>
+              <a:rPr lang="en-US" sz="1400" dirty="0">
                 <a:solidFill>
                   <a:srgbClr val="33444F"/>
                 </a:solidFill>
@@ -6986,66 +7727,26 @@
                 <a:ea typeface="Calibri" pitchFamily="34" charset="-122"/>
                 <a:cs typeface="Calibri" pitchFamily="34" charset="-120"/>
               </a:rPr>
-              <a:t>C. Sample adulteration</a:t>
-            </a:r>
-            <a:endParaRPr lang="en-US" sz="1350" dirty="0"/>
-          </a:p>
-          <a:p>
-            <a:pPr algn="l" indent="0" marL="0">
-              <a:spcAft>
-                <a:spcPts val="600"/>
-              </a:spcAft>
-              <a:buNone/>
-            </a:pPr>
-            <a:r>
-              <a:rPr lang="en-US" sz="1350" dirty="0">
-                <a:solidFill>
-                  <a:srgbClr val="33444F"/>
-                </a:solidFill>
-                <a:latin typeface="Calibri" pitchFamily="34" charset="0"/>
-                <a:ea typeface="Calibri" pitchFamily="34" charset="-122"/>
-                <a:cs typeface="Calibri" pitchFamily="34" charset="-120"/>
-              </a:rPr>
-              <a:t>D. The hook effect</a:t>
-            </a:r>
-            <a:endParaRPr lang="en-US" sz="1350" dirty="0"/>
-          </a:p>
-          <a:p>
-            <a:pPr algn="l" indent="0" marL="0">
-              <a:spcAft>
-                <a:spcPts val="600"/>
-              </a:spcAft>
-              <a:buNone/>
-            </a:pPr>
-            <a:r>
-              <a:rPr lang="en-US" sz="1350" dirty="0">
-                <a:solidFill>
-                  <a:srgbClr val="33444F"/>
-                </a:solidFill>
-                <a:latin typeface="Calibri" pitchFamily="34" charset="0"/>
-                <a:ea typeface="Calibri" pitchFamily="34" charset="-122"/>
-                <a:cs typeface="Calibri" pitchFamily="34" charset="-120"/>
-              </a:rPr>
-              <a:t>E. Heterophile antibody</a:t>
-            </a:r>
-            <a:endParaRPr lang="en-US" sz="1350" dirty="0"/>
-          </a:p>
-        </p:txBody>
-      </p:sp>
-      <p:sp>
-        <p:nvSpPr>
-          <p:cNvPr id="6" name="Shape 4"/>
-          <p:cNvSpPr/>
-          <p:nvPr/>
-        </p:nvSpPr>
-        <p:spPr>
-          <a:xfrm>
-            <a:off x="7201632" y="2395728"/>
-            <a:ext cx="4423136" cy="3246120"/>
+              <a:t>Adjust dosing to the free level and clinical effect.</a:t>
+            </a:r>
+            <a:endParaRPr lang="en-US" sz="1400" dirty="0"/>
+          </a:p>
+        </p:txBody>
+      </p:sp>
+      <p:sp>
+        <p:nvSpPr>
+          <p:cNvPr id="5" name="Shape 3"/>
+          <p:cNvSpPr/>
+          <p:nvPr/>
+        </p:nvSpPr>
+        <p:spPr>
+          <a:xfrm>
+            <a:off x="7422788" y="1554480"/>
+            <a:ext cx="4201979" cy="3977640"/>
           </a:xfrm>
           <a:prstGeom prst="roundRect">
             <a:avLst>
-              <a:gd name="adj" fmla="val 2535"/>
+              <a:gd name="adj" fmla="val 2069"/>
             </a:avLst>
           </a:prstGeom>
           <a:solidFill>
@@ -7063,67 +7764,53 @@
       </p:sp>
       <p:sp>
         <p:nvSpPr>
+          <p:cNvPr id="6" name="Text 4"/>
+          <p:cNvSpPr/>
+          <p:nvPr/>
+        </p:nvSpPr>
+        <p:spPr>
+          <a:xfrm>
+            <a:off x="7660532" y="1755648"/>
+            <a:ext cx="3744779" cy="310896"/>
+          </a:xfrm>
+          <a:prstGeom prst="rect">
+            <a:avLst/>
+          </a:prstGeom>
+          <a:noFill/>
+          <a:ln/>
+        </p:spPr>
+        <p:txBody>
+          <a:bodyPr wrap="square" lIns="0" tIns="0" rIns="0" bIns="0" rtlCol="0" anchor="ctr"/>
+          <a:lstStyle/>
+          <a:p>
+            <a:pPr indent="0" marL="0">
+              <a:buNone/>
+            </a:pPr>
+            <a:r>
+              <a:rPr lang="en-US" sz="1100" b="1" spc="140" kern="0" dirty="0">
+                <a:solidFill>
+                  <a:srgbClr val="1565C0"/>
+                </a:solidFill>
+                <a:latin typeface="Calibri" pitchFamily="34" charset="0"/>
+                <a:ea typeface="Calibri" pitchFamily="34" charset="-122"/>
+                <a:cs typeface="Calibri" pitchFamily="34" charset="-120"/>
+              </a:rPr>
+              <a:t>TEACHING POINT</a:t>
+            </a:r>
+            <a:endParaRPr lang="en-US" sz="1100" dirty="0"/>
+          </a:p>
+        </p:txBody>
+      </p:sp>
+      <p:sp>
+        <p:nvSpPr>
           <p:cNvPr id="7" name="Text 5"/>
           <p:cNvSpPr/>
           <p:nvPr/>
         </p:nvSpPr>
         <p:spPr>
           <a:xfrm>
-            <a:off x="7439376" y="2578608"/>
-            <a:ext cx="3965936" cy="457200"/>
-          </a:xfrm>
-          <a:prstGeom prst="rect">
-            <a:avLst/>
-          </a:prstGeom>
-          <a:noFill/>
-          <a:ln/>
-        </p:spPr>
-        <p:txBody>
-          <a:bodyPr wrap="square" lIns="0" tIns="0" rIns="0" bIns="0" rtlCol="0" anchor="ctr"/>
-          <a:lstStyle/>
-          <a:p>
-            <a:pPr indent="0" marL="0">
-              <a:buNone/>
-            </a:pPr>
-            <a:r>
-              <a:rPr lang="en-US" sz="1500" b="1" dirty="0">
-                <a:solidFill>
-                  <a:srgbClr val="1565C0"/>
-                </a:solidFill>
-                <a:latin typeface="Calibri" pitchFamily="34" charset="0"/>
-                <a:ea typeface="Calibri" pitchFamily="34" charset="-122"/>
-                <a:cs typeface="Calibri" pitchFamily="34" charset="-120"/>
-              </a:rPr>
-              <a:t>ANSWER  </a:t>
-            </a:r>
-            <a:pPr indent="0" marL="0">
-              <a:buNone/>
-            </a:pPr>
-            <a:r>
-              <a:rPr lang="en-US" sz="1500" b="1" dirty="0">
-                <a:solidFill>
-                  <a:srgbClr val="1B2A38"/>
-                </a:solidFill>
-                <a:latin typeface="Calibri" pitchFamily="34" charset="0"/>
-                <a:ea typeface="Calibri" pitchFamily="34" charset="-122"/>
-                <a:cs typeface="Calibri" pitchFamily="34" charset="-120"/>
-              </a:rPr>
-              <a:t>B — Screens may miss semisynthetic/synthetic opioids</a:t>
-            </a:r>
-            <a:endParaRPr lang="en-US" sz="1500" dirty="0"/>
-          </a:p>
-        </p:txBody>
-      </p:sp>
-      <p:sp>
-        <p:nvSpPr>
-          <p:cNvPr id="8" name="Text 6"/>
-          <p:cNvSpPr/>
-          <p:nvPr/>
-        </p:nvSpPr>
-        <p:spPr>
-          <a:xfrm>
-            <a:off x="7439376" y="3127248"/>
-            <a:ext cx="3947648" cy="2377440"/>
+            <a:off x="7660532" y="2121408"/>
+            <a:ext cx="3726491" cy="3291840"/>
           </a:xfrm>
           <a:prstGeom prst="rect">
             <a:avLst/>
@@ -7137,12 +7824,12 @@
           <a:p>
             <a:pPr algn="l" indent="0" marL="0">
               <a:lnSpc>
-                <a:spcPct val="108000"/>
+                <a:spcPct val="110000"/>
               </a:lnSpc>
               <a:buNone/>
             </a:pPr>
             <a:r>
-              <a:rPr lang="en-US" sz="1250" dirty="0">
+              <a:rPr lang="en-US" sz="1350" dirty="0">
                 <a:solidFill>
                   <a:srgbClr val="33444F"/>
                 </a:solidFill>
@@ -7150,15 +7837,15 @@
                 <a:ea typeface="Calibri" pitchFamily="34" charset="-122"/>
                 <a:cs typeface="Calibri" pitchFamily="34" charset="-120"/>
               </a:rPr>
-              <a:t>Standard opiate immunoassays are calibrated to morphine/codeine and can under-detect oxycodone/fentanyl; targeted assays or LC-MS/MS are required.</a:t>
-            </a:r>
-            <a:endParaRPr lang="en-US" sz="1250" dirty="0"/>
-          </a:p>
-        </p:txBody>
-      </p:sp>
-      <p:sp>
-        <p:nvSpPr>
-          <p:cNvPr id="9" name="Text 7"/>
+              <a:t>For highly protein-bound drugs in altered-binding states (low albumin, uremia), interpret the FREE level, not the total.</a:t>
+            </a:r>
+            <a:endParaRPr lang="en-US" sz="1350" dirty="0"/>
+          </a:p>
+        </p:txBody>
+      </p:sp>
+      <p:sp>
+        <p:nvSpPr>
+          <p:cNvPr id="8" name="Text 6"/>
           <p:cNvSpPr/>
           <p:nvPr/>
         </p:nvSpPr>
@@ -7197,7 +7884,7 @@
       </p:sp>
       <p:sp>
         <p:nvSpPr>
-          <p:cNvPr id="10" name="Text 8"/>
+          <p:cNvPr id="9" name="Text 7"/>
           <p:cNvSpPr/>
           <p:nvPr/>
         </p:nvSpPr>
@@ -7327,7 +8014,7 @@
                 <a:ea typeface="Calibri" pitchFamily="34" charset="-122"/>
                 <a:cs typeface="Calibri" pitchFamily="34" charset="-120"/>
               </a:rPr>
-              <a:t>CLINICAL CHEMISTRY   ·   BOARD REVIEW  ·  Q2</a:t>
+              <a:t>CLINICAL CHEMISTRY   ·   CASE 3</a:t>
             </a:r>
             <a:endParaRPr lang="en-US" sz="1100" dirty="0"/>
           </a:p>
@@ -7358,7 +8045,7 @@
               <a:buNone/>
             </a:pPr>
             <a:r>
-              <a:rPr lang="en-US" sz="2600" b="1" dirty="0">
+              <a:rPr lang="en-US" sz="3000" b="1" dirty="0">
                 <a:solidFill>
                   <a:srgbClr val="0E3A5F"/>
                 </a:solidFill>
@@ -7366,190 +8053,26 @@
                 <a:ea typeface="Calibri" pitchFamily="34" charset="-122"/>
                 <a:cs typeface="Calibri" pitchFamily="34" charset="-120"/>
               </a:rPr>
-              <a:t>Board-Style Review</a:t>
-            </a:r>
-            <a:endParaRPr lang="en-US" sz="2600" dirty="0"/>
-          </a:p>
-        </p:txBody>
-      </p:sp>
-      <p:sp>
-        <p:nvSpPr>
-          <p:cNvPr id="4" name="Text 2"/>
-          <p:cNvSpPr/>
-          <p:nvPr/>
-        </p:nvSpPr>
-        <p:spPr>
-          <a:xfrm>
-            <a:off x="566928" y="1417320"/>
-            <a:ext cx="11057839" cy="914400"/>
-          </a:xfrm>
-          <a:prstGeom prst="rect">
-            <a:avLst/>
-          </a:prstGeom>
-          <a:noFill/>
-          <a:ln/>
-        </p:spPr>
-        <p:txBody>
-          <a:bodyPr wrap="square" lIns="0" tIns="0" rIns="0" bIns="0" rtlCol="0" anchor="t"/>
-          <a:lstStyle/>
-          <a:p>
-            <a:pPr algn="l" indent="0" marL="0">
-              <a:lnSpc>
-                <a:spcPct val="105000"/>
-              </a:lnSpc>
-              <a:buNone/>
-            </a:pPr>
-            <a:r>
-              <a:rPr lang="en-US" sz="1450" b="1" dirty="0">
-                <a:solidFill>
-                  <a:srgbClr val="1B2A38"/>
-                </a:solidFill>
-                <a:latin typeface="Calibri" pitchFamily="34" charset="0"/>
-                <a:ea typeface="Calibri" pitchFamily="34" charset="-122"/>
-                <a:cs typeface="Calibri" pitchFamily="34" charset="-120"/>
-              </a:rPr>
-              <a:t>When should a trough level generally be drawn for routine therapeutic drug monitoring?</a:t>
-            </a:r>
-            <a:endParaRPr lang="en-US" sz="1450" dirty="0"/>
-          </a:p>
-        </p:txBody>
-      </p:sp>
-      <p:sp>
-        <p:nvSpPr>
-          <p:cNvPr id="5" name="Text 3"/>
-          <p:cNvSpPr/>
-          <p:nvPr/>
-        </p:nvSpPr>
-        <p:spPr>
-          <a:xfrm>
-            <a:off x="658368" y="2395728"/>
-            <a:ext cx="6192390" cy="3017520"/>
-          </a:xfrm>
-          <a:prstGeom prst="rect">
-            <a:avLst/>
-          </a:prstGeom>
-          <a:noFill/>
-          <a:ln/>
-        </p:spPr>
-        <p:txBody>
-          <a:bodyPr wrap="square" lIns="0" tIns="0" rIns="0" bIns="0" rtlCol="0" anchor="t"/>
-          <a:lstStyle/>
-          <a:p>
-            <a:pPr algn="l" indent="0" marL="0">
-              <a:spcAft>
-                <a:spcPts val="600"/>
-              </a:spcAft>
-              <a:buNone/>
-            </a:pPr>
-            <a:r>
-              <a:rPr lang="en-US" sz="1350" dirty="0">
-                <a:solidFill>
-                  <a:srgbClr val="33444F"/>
-                </a:solidFill>
-                <a:latin typeface="Calibri" pitchFamily="34" charset="0"/>
-                <a:ea typeface="Calibri" pitchFamily="34" charset="-122"/>
-                <a:cs typeface="Calibri" pitchFamily="34" charset="-120"/>
-              </a:rPr>
-              <a:t>A. Immediately after the first dose</a:t>
-            </a:r>
-            <a:endParaRPr lang="en-US" sz="1350" dirty="0"/>
-          </a:p>
-          <a:p>
-            <a:pPr algn="l" indent="0" marL="0">
-              <a:spcAft>
-                <a:spcPts val="600"/>
-              </a:spcAft>
-              <a:buNone/>
-            </a:pPr>
-            <a:r>
-              <a:rPr lang="en-US" sz="1350" dirty="0">
-                <a:solidFill>
-                  <a:srgbClr val="33444F"/>
-                </a:solidFill>
-                <a:latin typeface="Calibri" pitchFamily="34" charset="0"/>
-                <a:ea typeface="Calibri" pitchFamily="34" charset="-122"/>
-                <a:cs typeface="Calibri" pitchFamily="34" charset="-120"/>
-              </a:rPr>
-              <a:t>B. At the peak after any dose</a:t>
-            </a:r>
-            <a:endParaRPr lang="en-US" sz="1350" dirty="0"/>
-          </a:p>
-          <a:p>
-            <a:pPr algn="l" indent="0" marL="0">
-              <a:spcAft>
-                <a:spcPts val="600"/>
-              </a:spcAft>
-              <a:buNone/>
-            </a:pPr>
-            <a:r>
-              <a:rPr lang="en-US" sz="1350" b="1" dirty="0">
-                <a:solidFill>
-                  <a:srgbClr val="0D4A92"/>
-                </a:solidFill>
-                <a:latin typeface="Calibri" pitchFamily="34" charset="0"/>
-                <a:ea typeface="Calibri" pitchFamily="34" charset="-122"/>
-                <a:cs typeface="Calibri" pitchFamily="34" charset="-120"/>
-              </a:rPr>
-              <a:t>C. At steady state, just before the next dose</a:t>
-            </a:r>
-            <a:endParaRPr lang="en-US" sz="1350" dirty="0"/>
-          </a:p>
-          <a:p>
-            <a:pPr algn="l" indent="0" marL="0">
-              <a:spcAft>
-                <a:spcPts val="600"/>
-              </a:spcAft>
-              <a:buNone/>
-            </a:pPr>
-            <a:r>
-              <a:rPr lang="en-US" sz="1350" dirty="0">
-                <a:solidFill>
-                  <a:srgbClr val="33444F"/>
-                </a:solidFill>
-                <a:latin typeface="Calibri" pitchFamily="34" charset="0"/>
-                <a:ea typeface="Calibri" pitchFamily="34" charset="-122"/>
-                <a:cs typeface="Calibri" pitchFamily="34" charset="-120"/>
-              </a:rPr>
-              <a:t>D. Randomly</a:t>
-            </a:r>
-            <a:endParaRPr lang="en-US" sz="1350" dirty="0"/>
-          </a:p>
-          <a:p>
-            <a:pPr algn="l" indent="0" marL="0">
-              <a:spcAft>
-                <a:spcPts val="600"/>
-              </a:spcAft>
-              <a:buNone/>
-            </a:pPr>
-            <a:r>
-              <a:rPr lang="en-US" sz="1350" dirty="0">
-                <a:solidFill>
-                  <a:srgbClr val="33444F"/>
-                </a:solidFill>
-                <a:latin typeface="Calibri" pitchFamily="34" charset="0"/>
-                <a:ea typeface="Calibri" pitchFamily="34" charset="-122"/>
-                <a:cs typeface="Calibri" pitchFamily="34" charset="-120"/>
-              </a:rPr>
-              <a:t>E. Only when toxicity is suspected</a:t>
-            </a:r>
-            <a:endParaRPr lang="en-US" sz="1350" dirty="0"/>
-          </a:p>
-        </p:txBody>
-      </p:sp>
-      <p:sp>
-        <p:nvSpPr>
-          <p:cNvPr id="6" name="Shape 4"/>
-          <p:cNvSpPr/>
-          <p:nvPr/>
-        </p:nvSpPr>
-        <p:spPr>
-          <a:xfrm>
-            <a:off x="7201632" y="2395728"/>
-            <a:ext cx="4423136" cy="3246120"/>
+              <a:t>Case 3</a:t>
+            </a:r>
+            <a:endParaRPr lang="en-US" sz="3000" dirty="0"/>
+          </a:p>
+        </p:txBody>
+      </p:sp>
+      <p:sp>
+        <p:nvSpPr>
+          <p:cNvPr id="4" name="Shape 2"/>
+          <p:cNvSpPr/>
+          <p:nvPr/>
+        </p:nvSpPr>
+        <p:spPr>
+          <a:xfrm>
+            <a:off x="566928" y="1517904"/>
+            <a:ext cx="11057839" cy="2788920"/>
           </a:xfrm>
           <a:prstGeom prst="roundRect">
             <a:avLst>
-              <a:gd name="adj" fmla="val 2535"/>
+              <a:gd name="adj" fmla="val 2951"/>
             </a:avLst>
           </a:prstGeom>
           <a:solidFill>
@@ -7567,14 +8090,14 @@
       </p:sp>
       <p:sp>
         <p:nvSpPr>
-          <p:cNvPr id="7" name="Text 5"/>
-          <p:cNvSpPr/>
-          <p:nvPr/>
-        </p:nvSpPr>
-        <p:spPr>
-          <a:xfrm>
-            <a:off x="7439376" y="2578608"/>
-            <a:ext cx="3965936" cy="457200"/>
+          <p:cNvPr id="5" name="Text 3"/>
+          <p:cNvSpPr/>
+          <p:nvPr/>
+        </p:nvSpPr>
+        <p:spPr>
+          <a:xfrm>
+            <a:off x="841248" y="1700784"/>
+            <a:ext cx="5486400" cy="292608"/>
           </a:xfrm>
           <a:prstGeom prst="rect">
             <a:avLst/>
@@ -7590,7 +8113,7 @@
               <a:buNone/>
             </a:pPr>
             <a:r>
-              <a:rPr lang="en-US" sz="1500" b="1" dirty="0">
+              <a:rPr lang="en-US" sz="1100" b="1" spc="150" kern="0" dirty="0">
                 <a:solidFill>
                   <a:srgbClr val="1565C0"/>
                 </a:solidFill>
@@ -7598,36 +8121,22 @@
                 <a:ea typeface="Calibri" pitchFamily="34" charset="-122"/>
                 <a:cs typeface="Calibri" pitchFamily="34" charset="-120"/>
               </a:rPr>
-              <a:t>ANSWER  </a:t>
-            </a:r>
-            <a:pPr indent="0" marL="0">
-              <a:buNone/>
-            </a:pPr>
-            <a:r>
-              <a:rPr lang="en-US" sz="1500" b="1" dirty="0">
-                <a:solidFill>
-                  <a:srgbClr val="1B2A38"/>
-                </a:solidFill>
-                <a:latin typeface="Calibri" pitchFamily="34" charset="0"/>
-                <a:ea typeface="Calibri" pitchFamily="34" charset="-122"/>
-                <a:cs typeface="Calibri" pitchFamily="34" charset="-120"/>
-              </a:rPr>
-              <a:t>C — At steady state, pre-dose (trough)</a:t>
-            </a:r>
-            <a:endParaRPr lang="en-US" sz="1500" dirty="0"/>
-          </a:p>
-        </p:txBody>
-      </p:sp>
-      <p:sp>
-        <p:nvSpPr>
-          <p:cNvPr id="8" name="Text 6"/>
-          <p:cNvSpPr/>
-          <p:nvPr/>
-        </p:nvSpPr>
-        <p:spPr>
-          <a:xfrm>
-            <a:off x="7439376" y="3127248"/>
-            <a:ext cx="3947648" cy="2377440"/>
+              <a:t>CLINICAL VIGNETTE</a:t>
+            </a:r>
+            <a:endParaRPr lang="en-US" sz="1100" dirty="0"/>
+          </a:p>
+        </p:txBody>
+      </p:sp>
+      <p:sp>
+        <p:nvSpPr>
+          <p:cNvPr id="6" name="Text 4"/>
+          <p:cNvSpPr/>
+          <p:nvPr/>
+        </p:nvSpPr>
+        <p:spPr>
+          <a:xfrm>
+            <a:off x="841248" y="2029968"/>
+            <a:ext cx="10509199" cy="2148840"/>
           </a:xfrm>
           <a:prstGeom prst="rect">
             <a:avLst/>
@@ -7646,7 +8155,7 @@
               <a:buNone/>
             </a:pPr>
             <a:r>
-              <a:rPr lang="en-US" sz="1250" dirty="0">
+              <a:rPr lang="en-US" sz="1450" dirty="0">
                 <a:solidFill>
                   <a:srgbClr val="33444F"/>
                 </a:solidFill>
@@ -7654,15 +8163,122 @@
                 <a:ea typeface="Calibri" pitchFamily="34" charset="-122"/>
                 <a:cs typeface="Calibri" pitchFamily="34" charset="-120"/>
               </a:rPr>
-              <a:t>Steady state (~5 half-lives) with a pre-dose trough gives the most interpretable, reproducible level for most monitored drugs.</a:t>
-            </a:r>
-            <a:endParaRPr lang="en-US" sz="1250" dirty="0"/>
+              <a:t>A digoxin level drawn 2 hours after the dose is high, but the patient is asymptomatic with a normal ECG.</a:t>
+            </a:r>
+            <a:endParaRPr lang="en-US" sz="1450" dirty="0"/>
+          </a:p>
+        </p:txBody>
+      </p:sp>
+      <p:sp>
+        <p:nvSpPr>
+          <p:cNvPr id="7" name="Shape 5"/>
+          <p:cNvSpPr/>
+          <p:nvPr/>
+        </p:nvSpPr>
+        <p:spPr>
+          <a:xfrm>
+            <a:off x="566928" y="4553712"/>
+            <a:ext cx="11057839" cy="1325880"/>
+          </a:xfrm>
+          <a:prstGeom prst="roundRect">
+            <a:avLst>
+              <a:gd name="adj" fmla="val 6207"/>
+            </a:avLst>
+          </a:prstGeom>
+          <a:solidFill>
+            <a:srgbClr val="0E3A5F"/>
+          </a:solidFill>
+          <a:ln/>
+          <a:effectLst>
+            <a:outerShdw sx="100000" sy="100000" kx="0" ky="0" algn="bl" rotWithShape="0" blurRad="88900" dist="25400" dir="5400000">
+              <a:srgbClr val="22303C">
+                <a:alpha val="12000"/>
+              </a:srgbClr>
+            </a:outerShdw>
+          </a:effectLst>
+        </p:spPr>
+      </p:sp>
+      <p:sp>
+        <p:nvSpPr>
+          <p:cNvPr id="8" name="Text 6"/>
+          <p:cNvSpPr/>
+          <p:nvPr/>
+        </p:nvSpPr>
+        <p:spPr>
+          <a:xfrm>
+            <a:off x="822960" y="4681728"/>
+            <a:ext cx="640080" cy="960120"/>
+          </a:xfrm>
+          <a:prstGeom prst="rect">
+            <a:avLst/>
+          </a:prstGeom>
+          <a:noFill/>
+          <a:ln/>
+        </p:spPr>
+        <p:txBody>
+          <a:bodyPr wrap="square" lIns="0" tIns="0" rIns="0" bIns="0" rtlCol="0" anchor="ctr"/>
+          <a:lstStyle/>
+          <a:p>
+            <a:pPr algn="ctr" indent="0" marL="0">
+              <a:buNone/>
+            </a:pPr>
+            <a:r>
+              <a:rPr lang="en-US" sz="4000" b="1" dirty="0">
+                <a:solidFill>
+                  <a:srgbClr val="1565C0"/>
+                </a:solidFill>
+                <a:latin typeface="Calibri" pitchFamily="34" charset="0"/>
+                <a:ea typeface="Calibri" pitchFamily="34" charset="-122"/>
+                <a:cs typeface="Calibri" pitchFamily="34" charset="-120"/>
+              </a:rPr>
+              <a:t>?</a:t>
+            </a:r>
+            <a:endParaRPr lang="en-US" sz="4000" dirty="0"/>
           </a:p>
         </p:txBody>
       </p:sp>
       <p:sp>
         <p:nvSpPr>
           <p:cNvPr id="9" name="Text 7"/>
+          <p:cNvSpPr/>
+          <p:nvPr/>
+        </p:nvSpPr>
+        <p:spPr>
+          <a:xfrm>
+            <a:off x="1618488" y="4553712"/>
+            <a:ext cx="9686239" cy="1325880"/>
+          </a:xfrm>
+          <a:prstGeom prst="rect">
+            <a:avLst/>
+          </a:prstGeom>
+          <a:noFill/>
+          <a:ln/>
+        </p:spPr>
+        <p:txBody>
+          <a:bodyPr wrap="square" lIns="0" tIns="0" rIns="0" bIns="0" rtlCol="0" anchor="ctr"/>
+          <a:lstStyle/>
+          <a:p>
+            <a:pPr algn="l" indent="0" marL="0">
+              <a:buNone/>
+            </a:pPr>
+            <a:r>
+              <a:rPr lang="en-US" sz="1500" b="1" dirty="0">
+                <a:solidFill>
+                  <a:srgbClr val="FFFFFF"/>
+                </a:solidFill>
+                <a:latin typeface="Calibri" pitchFamily="34" charset="0"/>
+                <a:ea typeface="Calibri" pitchFamily="34" charset="-122"/>
+                <a:cs typeface="Calibri" pitchFamily="34" charset="-120"/>
+              </a:rPr>
+              <a:t>Why may this level be misleading, and when should it be drawn?</a:t>
+            </a:r>
+            <a:endParaRPr lang="en-US" sz="1500" dirty="0"/>
+          </a:p>
+        </p:txBody>
+      </p:sp>
+      <p:sp>
+        <p:nvSpPr>
+          <p:cNvPr id="10" name="Text 8"/>
           <p:cNvSpPr/>
           <p:nvPr/>
         </p:nvSpPr>
@@ -7701,7 +8317,7 @@
       </p:sp>
       <p:sp>
         <p:nvSpPr>
-          <p:cNvPr id="10" name="Text 8"/>
+          <p:cNvPr id="11" name="Text 9"/>
           <p:cNvSpPr/>
           <p:nvPr/>
         </p:nvSpPr>
@@ -7831,7 +8447,7 @@
                 <a:ea typeface="Calibri" pitchFamily="34" charset="-122"/>
                 <a:cs typeface="Calibri" pitchFamily="34" charset="-120"/>
               </a:rPr>
-              <a:t>CLINICAL CHEMISTRY   ·   BOARD REVIEW  ·  Q3</a:t>
+              <a:t>CLINICAL CHEMISTRY   ·   CASE 3  ·  RESOLUTION</a:t>
             </a:r>
             <a:endParaRPr lang="en-US" sz="1100" dirty="0"/>
           </a:p>
@@ -7862,7 +8478,7 @@
               <a:buNone/>
             </a:pPr>
             <a:r>
-              <a:rPr lang="en-US" sz="2600" b="1" dirty="0">
+              <a:rPr lang="en-US" sz="3000" b="1" dirty="0">
                 <a:solidFill>
                   <a:srgbClr val="0E3A5F"/>
                 </a:solidFill>
@@ -7870,9 +8486,9 @@
                 <a:ea typeface="Calibri" pitchFamily="34" charset="-122"/>
                 <a:cs typeface="Calibri" pitchFamily="34" charset="-120"/>
               </a:rPr>
-              <a:t>Board-Style Review</a:t>
-            </a:r>
-            <a:endParaRPr lang="en-US" sz="2600" dirty="0"/>
+              <a:t>Case 3: Digoxin Sampling Timing</a:t>
+            </a:r>
+            <a:endParaRPr lang="en-US" sz="3000" dirty="0"/>
           </a:p>
         </p:txBody>
       </p:sp>
@@ -7884,8 +8500,8 @@
         </p:nvSpPr>
         <p:spPr>
           <a:xfrm>
-            <a:off x="566928" y="1417320"/>
-            <a:ext cx="11057839" cy="914400"/>
+            <a:off x="566928" y="1554480"/>
+            <a:ext cx="6413547" cy="4023360"/>
           </a:xfrm>
           <a:prstGeom prst="rect">
             <a:avLst/>
@@ -7897,14 +8513,15 @@
           <a:bodyPr wrap="square" lIns="0" tIns="0" rIns="0" bIns="0" rtlCol="0" anchor="t"/>
           <a:lstStyle/>
           <a:p>
-            <a:pPr algn="l" indent="0" marL="0">
-              <a:lnSpc>
-                <a:spcPct val="105000"/>
-              </a:lnSpc>
-              <a:buNone/>
-            </a:pPr>
-            <a:r>
-              <a:rPr lang="en-US" sz="1450" b="1" dirty="0">
+            <a:pPr algn="l" marL="177800" indent="-177800">
+              <a:spcAft>
+                <a:spcPts val="900"/>
+              </a:spcAft>
+              <a:buSzPct val="100000"/>
+              <a:buChar char="•"/>
+            </a:pPr>
+            <a:r>
+              <a:rPr lang="en-US" sz="1400" b="1" dirty="0">
                 <a:solidFill>
                   <a:srgbClr val="1B2A38"/>
                 </a:solidFill>
@@ -7912,41 +8529,20 @@
                 <a:ea typeface="Calibri" pitchFamily="34" charset="-122"/>
                 <a:cs typeface="Calibri" pitchFamily="34" charset="-120"/>
               </a:rPr>
-              <a:t>A laboratory-developed test (not FDA-cleared) is being introduced. Before clinical use it requires:</a:t>
-            </a:r>
-            <a:endParaRPr lang="en-US" sz="1450" dirty="0"/>
-          </a:p>
-        </p:txBody>
-      </p:sp>
-      <p:sp>
-        <p:nvSpPr>
-          <p:cNvPr id="5" name="Text 3"/>
-          <p:cNvSpPr/>
-          <p:nvPr/>
-        </p:nvSpPr>
-        <p:spPr>
-          <a:xfrm>
-            <a:off x="658368" y="2395728"/>
-            <a:ext cx="6192390" cy="3017520"/>
-          </a:xfrm>
-          <a:prstGeom prst="rect">
-            <a:avLst/>
-          </a:prstGeom>
-          <a:noFill/>
-          <a:ln/>
-        </p:spPr>
-        <p:txBody>
-          <a:bodyPr wrap="square" lIns="0" tIns="0" rIns="0" bIns="0" rtlCol="0" anchor="t"/>
-          <a:lstStyle/>
-          <a:p>
-            <a:pPr algn="l" indent="0" marL="0">
+              <a:t>A level drawn during the distribution phase (too soon) overestimates the tissue-equilibrated concentration.</a:t>
+            </a:r>
+            <a:endParaRPr lang="en-US" sz="1400" dirty="0"/>
+          </a:p>
+          <a:p>
+            <a:pPr algn="l" marL="177800" indent="-177800">
               <a:spcAft>
-                <a:spcPts val="600"/>
+                <a:spcPts val="900"/>
               </a:spcAft>
-              <a:buNone/>
-            </a:pPr>
-            <a:r>
-              <a:rPr lang="en-US" sz="1350" dirty="0">
+              <a:buSzPct val="100000"/>
+              <a:buChar char="•"/>
+            </a:pPr>
+            <a:r>
+              <a:rPr lang="en-US" sz="1400" dirty="0">
                 <a:solidFill>
                   <a:srgbClr val="33444F"/>
                 </a:solidFill>
@@ -7954,39 +8550,41 @@
                 <a:ea typeface="Calibri" pitchFamily="34" charset="-122"/>
                 <a:cs typeface="Calibri" pitchFamily="34" charset="-120"/>
               </a:rPr>
-              <a:t>A. Verification of manufacturer claims only</a:t>
-            </a:r>
-            <a:endParaRPr lang="en-US" sz="1350" dirty="0"/>
-          </a:p>
-          <a:p>
-            <a:pPr algn="l" indent="0" marL="0">
+              <a:t>Draw digoxin at least 6–8 hours post-dose.</a:t>
+            </a:r>
+            <a:endParaRPr lang="en-US" sz="1400" dirty="0"/>
+          </a:p>
+          <a:p>
+            <a:pPr algn="l" marL="177800" indent="-177800">
               <a:spcAft>
-                <a:spcPts val="600"/>
+                <a:spcPts val="900"/>
               </a:spcAft>
-              <a:buNone/>
-            </a:pPr>
-            <a:r>
-              <a:rPr lang="en-US" sz="1350" b="1" dirty="0">
-                <a:solidFill>
-                  <a:srgbClr val="0D4A92"/>
-                </a:solidFill>
-                <a:latin typeface="Calibri" pitchFamily="34" charset="0"/>
-                <a:ea typeface="Calibri" pitchFamily="34" charset="-122"/>
-                <a:cs typeface="Calibri" pitchFamily="34" charset="-120"/>
-              </a:rPr>
-              <a:t>B. Full validation of accuracy, precision, sensitivity, specificity, linearity, and reference interval</a:t>
-            </a:r>
-            <a:endParaRPr lang="en-US" sz="1350" dirty="0"/>
-          </a:p>
-          <a:p>
-            <a:pPr algn="l" indent="0" marL="0">
+              <a:buSzPct val="100000"/>
+              <a:buChar char="•"/>
+            </a:pPr>
+            <a:r>
+              <a:rPr lang="en-US" sz="1400" dirty="0">
+                <a:solidFill>
+                  <a:srgbClr val="33444F"/>
+                </a:solidFill>
+                <a:latin typeface="Calibri" pitchFamily="34" charset="0"/>
+                <a:ea typeface="Calibri" pitchFamily="34" charset="-122"/>
+                <a:cs typeface="Calibri" pitchFamily="34" charset="-120"/>
+              </a:rPr>
+              <a:t>Hypokalemia and hypomagnesemia potentiate toxicity at any level.</a:t>
+            </a:r>
+            <a:endParaRPr lang="en-US" sz="1400" dirty="0"/>
+          </a:p>
+          <a:p>
+            <a:pPr algn="l" marL="177800" indent="-177800">
               <a:spcAft>
-                <a:spcPts val="600"/>
+                <a:spcPts val="900"/>
               </a:spcAft>
-              <a:buNone/>
-            </a:pPr>
-            <a:r>
-              <a:rPr lang="en-US" sz="1350" dirty="0">
+              <a:buSzPct val="100000"/>
+              <a:buChar char="•"/>
+            </a:pPr>
+            <a:r>
+              <a:rPr lang="en-US" sz="1400" dirty="0">
                 <a:solidFill>
                   <a:srgbClr val="33444F"/>
                 </a:solidFill>
@@ -7994,66 +8592,26 @@
                 <a:ea typeface="Calibri" pitchFamily="34" charset="-122"/>
                 <a:cs typeface="Calibri" pitchFamily="34" charset="-120"/>
               </a:rPr>
-              <a:t>C. No additional study</a:t>
-            </a:r>
-            <a:endParaRPr lang="en-US" sz="1350" dirty="0"/>
-          </a:p>
-          <a:p>
-            <a:pPr algn="l" indent="0" marL="0">
-              <a:spcAft>
-                <a:spcPts val="600"/>
-              </a:spcAft>
-              <a:buNone/>
-            </a:pPr>
-            <a:r>
-              <a:rPr lang="en-US" sz="1350" dirty="0">
-                <a:solidFill>
-                  <a:srgbClr val="33444F"/>
-                </a:solidFill>
-                <a:latin typeface="Calibri" pitchFamily="34" charset="0"/>
-                <a:ea typeface="Calibri" pitchFamily="34" charset="-122"/>
-                <a:cs typeface="Calibri" pitchFamily="34" charset="-120"/>
-              </a:rPr>
-              <a:t>D. Only a reference interval</a:t>
-            </a:r>
-            <a:endParaRPr lang="en-US" sz="1350" dirty="0"/>
-          </a:p>
-          <a:p>
-            <a:pPr algn="l" indent="0" marL="0">
-              <a:spcAft>
-                <a:spcPts val="600"/>
-              </a:spcAft>
-              <a:buNone/>
-            </a:pPr>
-            <a:r>
-              <a:rPr lang="en-US" sz="1350" dirty="0">
-                <a:solidFill>
-                  <a:srgbClr val="33444F"/>
-                </a:solidFill>
-                <a:latin typeface="Calibri" pitchFamily="34" charset="0"/>
-                <a:ea typeface="Calibri" pitchFamily="34" charset="-122"/>
-                <a:cs typeface="Calibri" pitchFamily="34" charset="-120"/>
-              </a:rPr>
-              <a:t>E. Only proficiency testing</a:t>
-            </a:r>
-            <a:endParaRPr lang="en-US" sz="1350" dirty="0"/>
-          </a:p>
-        </p:txBody>
-      </p:sp>
-      <p:sp>
-        <p:nvSpPr>
-          <p:cNvPr id="6" name="Shape 4"/>
-          <p:cNvSpPr/>
-          <p:nvPr/>
-        </p:nvSpPr>
-        <p:spPr>
-          <a:xfrm>
-            <a:off x="7201632" y="2395728"/>
-            <a:ext cx="4423136" cy="3246120"/>
+              <a:t>Interpret with symptoms and the ECG, not the number alone.</a:t>
+            </a:r>
+            <a:endParaRPr lang="en-US" sz="1400" dirty="0"/>
+          </a:p>
+        </p:txBody>
+      </p:sp>
+      <p:sp>
+        <p:nvSpPr>
+          <p:cNvPr id="5" name="Shape 3"/>
+          <p:cNvSpPr/>
+          <p:nvPr/>
+        </p:nvSpPr>
+        <p:spPr>
+          <a:xfrm>
+            <a:off x="7422788" y="1554480"/>
+            <a:ext cx="4201979" cy="3977640"/>
           </a:xfrm>
           <a:prstGeom prst="roundRect">
             <a:avLst>
-              <a:gd name="adj" fmla="val 2535"/>
+              <a:gd name="adj" fmla="val 2069"/>
             </a:avLst>
           </a:prstGeom>
           <a:solidFill>
@@ -8071,67 +8629,53 @@
       </p:sp>
       <p:sp>
         <p:nvSpPr>
+          <p:cNvPr id="6" name="Text 4"/>
+          <p:cNvSpPr/>
+          <p:nvPr/>
+        </p:nvSpPr>
+        <p:spPr>
+          <a:xfrm>
+            <a:off x="7660532" y="1755648"/>
+            <a:ext cx="3744779" cy="310896"/>
+          </a:xfrm>
+          <a:prstGeom prst="rect">
+            <a:avLst/>
+          </a:prstGeom>
+          <a:noFill/>
+          <a:ln/>
+        </p:spPr>
+        <p:txBody>
+          <a:bodyPr wrap="square" lIns="0" tIns="0" rIns="0" bIns="0" rtlCol="0" anchor="ctr"/>
+          <a:lstStyle/>
+          <a:p>
+            <a:pPr indent="0" marL="0">
+              <a:buNone/>
+            </a:pPr>
+            <a:r>
+              <a:rPr lang="en-US" sz="1100" b="1" spc="140" kern="0" dirty="0">
+                <a:solidFill>
+                  <a:srgbClr val="1565C0"/>
+                </a:solidFill>
+                <a:latin typeface="Calibri" pitchFamily="34" charset="0"/>
+                <a:ea typeface="Calibri" pitchFamily="34" charset="-122"/>
+                <a:cs typeface="Calibri" pitchFamily="34" charset="-120"/>
+              </a:rPr>
+              <a:t>TEACHING POINT</a:t>
+            </a:r>
+            <a:endParaRPr lang="en-US" sz="1100" dirty="0"/>
+          </a:p>
+        </p:txBody>
+      </p:sp>
+      <p:sp>
+        <p:nvSpPr>
           <p:cNvPr id="7" name="Text 5"/>
           <p:cNvSpPr/>
           <p:nvPr/>
         </p:nvSpPr>
         <p:spPr>
           <a:xfrm>
-            <a:off x="7439376" y="2578608"/>
-            <a:ext cx="3965936" cy="457200"/>
-          </a:xfrm>
-          <a:prstGeom prst="rect">
-            <a:avLst/>
-          </a:prstGeom>
-          <a:noFill/>
-          <a:ln/>
-        </p:spPr>
-        <p:txBody>
-          <a:bodyPr wrap="square" lIns="0" tIns="0" rIns="0" bIns="0" rtlCol="0" anchor="ctr"/>
-          <a:lstStyle/>
-          <a:p>
-            <a:pPr indent="0" marL="0">
-              <a:buNone/>
-            </a:pPr>
-            <a:r>
-              <a:rPr lang="en-US" sz="1500" b="1" dirty="0">
-                <a:solidFill>
-                  <a:srgbClr val="1565C0"/>
-                </a:solidFill>
-                <a:latin typeface="Calibri" pitchFamily="34" charset="0"/>
-                <a:ea typeface="Calibri" pitchFamily="34" charset="-122"/>
-                <a:cs typeface="Calibri" pitchFamily="34" charset="-120"/>
-              </a:rPr>
-              <a:t>ANSWER  </a:t>
-            </a:r>
-            <a:pPr indent="0" marL="0">
-              <a:buNone/>
-            </a:pPr>
-            <a:r>
-              <a:rPr lang="en-US" sz="1500" b="1" dirty="0">
-                <a:solidFill>
-                  <a:srgbClr val="1B2A38"/>
-                </a:solidFill>
-                <a:latin typeface="Calibri" pitchFamily="34" charset="0"/>
-                <a:ea typeface="Calibri" pitchFamily="34" charset="-122"/>
-                <a:cs typeface="Calibri" pitchFamily="34" charset="-120"/>
-              </a:rPr>
-              <a:t>B — Full validation</a:t>
-            </a:r>
-            <a:endParaRPr lang="en-US" sz="1500" dirty="0"/>
-          </a:p>
-        </p:txBody>
-      </p:sp>
-      <p:sp>
-        <p:nvSpPr>
-          <p:cNvPr id="8" name="Text 6"/>
-          <p:cNvSpPr/>
-          <p:nvPr/>
-        </p:nvSpPr>
-        <p:spPr>
-          <a:xfrm>
-            <a:off x="7439376" y="3127248"/>
-            <a:ext cx="3947648" cy="2377440"/>
+            <a:off x="7660532" y="2121408"/>
+            <a:ext cx="3726491" cy="3291840"/>
           </a:xfrm>
           <a:prstGeom prst="rect">
             <a:avLst/>
@@ -8145,12 +8689,12 @@
           <a:p>
             <a:pPr algn="l" indent="0" marL="0">
               <a:lnSpc>
-                <a:spcPct val="108000"/>
+                <a:spcPct val="110000"/>
               </a:lnSpc>
               <a:buNone/>
             </a:pPr>
             <a:r>
-              <a:rPr lang="en-US" sz="1250" dirty="0">
+              <a:rPr lang="en-US" sz="1350" dirty="0">
                 <a:solidFill>
                   <a:srgbClr val="33444F"/>
                 </a:solidFill>
@@ -8158,15 +8702,15 @@
                 <a:ea typeface="Calibri" pitchFamily="34" charset="-122"/>
                 <a:cs typeface="Calibri" pitchFamily="34" charset="-120"/>
               </a:rPr>
-              <a:t>FDA-cleared assays require verification; laboratory-developed tests require full validation of all performance characteristics before clinical reporting.</a:t>
-            </a:r>
-            <a:endParaRPr lang="en-US" sz="1250" dirty="0"/>
-          </a:p>
-        </p:txBody>
-      </p:sp>
-      <p:sp>
-        <p:nvSpPr>
-          <p:cNvPr id="9" name="Text 7"/>
+              <a:t>Digoxin must be sampled after distribution (≥ 6–8 h); an early draw reads falsely high.</a:t>
+            </a:r>
+            <a:endParaRPr lang="en-US" sz="1350" dirty="0"/>
+          </a:p>
+        </p:txBody>
+      </p:sp>
+      <p:sp>
+        <p:nvSpPr>
+          <p:cNvPr id="8" name="Text 6"/>
           <p:cNvSpPr/>
           <p:nvPr/>
         </p:nvSpPr>
@@ -8205,7 +8749,7 @@
       </p:sp>
       <p:sp>
         <p:nvSpPr>
-          <p:cNvPr id="10" name="Text 8"/>
+          <p:cNvPr id="9" name="Text 7"/>
           <p:cNvSpPr/>
           <p:nvPr/>
         </p:nvSpPr>
@@ -8935,7 +9479,7 @@
     <p:bg>
       <p:bgPr>
         <a:solidFill>
-          <a:srgbClr val="0A2A45"/>
+          <a:srgbClr val="FFFFFF"/>
         </a:solidFill>
       </p:bgPr>
     </p:bg>
@@ -8962,7 +9506,7 @@
         <p:spPr>
           <a:xfrm>
             <a:off x="566928" y="329184"/>
-            <a:ext cx="10058400" cy="310896"/>
+            <a:ext cx="10515600" cy="310896"/>
           </a:xfrm>
           <a:prstGeom prst="rect">
             <a:avLst/>
@@ -8974,7 +9518,7 @@
           <a:bodyPr wrap="square" lIns="0" tIns="0" rIns="0" bIns="0" rtlCol="0" anchor="ctr"/>
           <a:lstStyle/>
           <a:p>
-            <a:pPr indent="0" marL="0">
+            <a:pPr algn="l" indent="0" marL="0">
               <a:buNone/>
             </a:pPr>
             <a:r>
@@ -8986,7 +9530,7 @@
                 <a:ea typeface="Calibri" pitchFamily="34" charset="-122"/>
                 <a:cs typeface="Calibri" pitchFamily="34" charset="-120"/>
               </a:rPr>
-              <a:t>CLINICAL CHEMISTRY</a:t>
+              <a:t>CLINICAL CHEMISTRY   ·   BOARD REVIEW  ·  Q1</a:t>
             </a:r>
             <a:endParaRPr lang="en-US" sz="1100" dirty="0"/>
           </a:p>
@@ -9000,8 +9544,8 @@
         </p:nvSpPr>
         <p:spPr>
           <a:xfrm>
-            <a:off x="566928" y="676656"/>
-            <a:ext cx="10972800" cy="749808"/>
+            <a:off x="566928" y="713232"/>
+            <a:ext cx="11064240" cy="749808"/>
           </a:xfrm>
           <a:prstGeom prst="rect">
             <a:avLst/>
@@ -9013,62 +9557,206 @@
           <a:bodyPr wrap="square" lIns="0" tIns="0" rIns="0" bIns="0" rtlCol="0" anchor="ctr"/>
           <a:lstStyle/>
           <a:p>
-            <a:pPr indent="0" marL="0">
-              <a:buNone/>
-            </a:pPr>
-            <a:r>
-              <a:rPr lang="en-US" sz="3000" b="1" dirty="0">
-                <a:solidFill>
-                  <a:srgbClr val="FFFFFF"/>
-                </a:solidFill>
-                <a:latin typeface="Calibri" pitchFamily="34" charset="0"/>
-                <a:ea typeface="Calibri" pitchFamily="34" charset="-122"/>
-                <a:cs typeface="Calibri" pitchFamily="34" charset="-120"/>
-              </a:rPr>
-              <a:t>Key Take-Home Points</a:t>
-            </a:r>
-            <a:endParaRPr lang="en-US" sz="3000" dirty="0"/>
-          </a:p>
-        </p:txBody>
-      </p:sp>
-      <p:sp>
-        <p:nvSpPr>
-          <p:cNvPr id="4" name="Shape 2"/>
-          <p:cNvSpPr/>
-          <p:nvPr/>
-        </p:nvSpPr>
-        <p:spPr>
-          <a:xfrm>
-            <a:off x="566928" y="1517904"/>
-            <a:ext cx="11057839" cy="841248"/>
+            <a:pPr algn="l" indent="0" marL="0">
+              <a:buNone/>
+            </a:pPr>
+            <a:r>
+              <a:rPr lang="en-US" sz="2600" b="1" dirty="0">
+                <a:solidFill>
+                  <a:srgbClr val="0E3A5F"/>
+                </a:solidFill>
+                <a:latin typeface="Calibri" pitchFamily="34" charset="0"/>
+                <a:ea typeface="Calibri" pitchFamily="34" charset="-122"/>
+                <a:cs typeface="Calibri" pitchFamily="34" charset="-120"/>
+              </a:rPr>
+              <a:t>Board-Style Review</a:t>
+            </a:r>
+            <a:endParaRPr lang="en-US" sz="2600" dirty="0"/>
+          </a:p>
+        </p:txBody>
+      </p:sp>
+      <p:sp>
+        <p:nvSpPr>
+          <p:cNvPr id="4" name="Text 2"/>
+          <p:cNvSpPr/>
+          <p:nvPr/>
+        </p:nvSpPr>
+        <p:spPr>
+          <a:xfrm>
+            <a:off x="566928" y="1417320"/>
+            <a:ext cx="11057839" cy="914400"/>
+          </a:xfrm>
+          <a:prstGeom prst="rect">
+            <a:avLst/>
+          </a:prstGeom>
+          <a:noFill/>
+          <a:ln/>
+        </p:spPr>
+        <p:txBody>
+          <a:bodyPr wrap="square" lIns="0" tIns="0" rIns="0" bIns="0" rtlCol="0" anchor="t"/>
+          <a:lstStyle/>
+          <a:p>
+            <a:pPr algn="l" indent="0" marL="0">
+              <a:lnSpc>
+                <a:spcPct val="105000"/>
+              </a:lnSpc>
+              <a:buNone/>
+            </a:pPr>
+            <a:r>
+              <a:rPr lang="en-US" sz="1450" b="1" dirty="0">
+                <a:solidFill>
+                  <a:srgbClr val="1B2A38"/>
+                </a:solidFill>
+                <a:latin typeface="Calibri" pitchFamily="34" charset="0"/>
+                <a:ea typeface="Calibri" pitchFamily="34" charset="-122"/>
+                <a:cs typeface="Calibri" pitchFamily="34" charset="-120"/>
+              </a:rPr>
+              <a:t>A urine immunoassay is positive for opiates but the patient only takes oxycodone. The likely explanation is:</a:t>
+            </a:r>
+            <a:endParaRPr lang="en-US" sz="1450" dirty="0"/>
+          </a:p>
+        </p:txBody>
+      </p:sp>
+      <p:sp>
+        <p:nvSpPr>
+          <p:cNvPr id="5" name="Text 3"/>
+          <p:cNvSpPr/>
+          <p:nvPr/>
+        </p:nvSpPr>
+        <p:spPr>
+          <a:xfrm>
+            <a:off x="658368" y="2395728"/>
+            <a:ext cx="6192390" cy="3017520"/>
+          </a:xfrm>
+          <a:prstGeom prst="rect">
+            <a:avLst/>
+          </a:prstGeom>
+          <a:noFill/>
+          <a:ln/>
+        </p:spPr>
+        <p:txBody>
+          <a:bodyPr wrap="square" lIns="0" tIns="0" rIns="0" bIns="0" rtlCol="0" anchor="t"/>
+          <a:lstStyle/>
+          <a:p>
+            <a:pPr algn="l" indent="0" marL="0">
+              <a:spcAft>
+                <a:spcPts val="600"/>
+              </a:spcAft>
+              <a:buNone/>
+            </a:pPr>
+            <a:r>
+              <a:rPr lang="en-US" sz="1350" dirty="0">
+                <a:solidFill>
+                  <a:srgbClr val="33444F"/>
+                </a:solidFill>
+                <a:latin typeface="Calibri" pitchFamily="34" charset="0"/>
+                <a:ea typeface="Calibri" pitchFamily="34" charset="-122"/>
+                <a:cs typeface="Calibri" pitchFamily="34" charset="-120"/>
+              </a:rPr>
+              <a:t>A. A true positive for morphine</a:t>
+            </a:r>
+            <a:endParaRPr lang="en-US" sz="1350" dirty="0"/>
+          </a:p>
+          <a:p>
+            <a:pPr algn="l" indent="0" marL="0">
+              <a:spcAft>
+                <a:spcPts val="600"/>
+              </a:spcAft>
+              <a:buNone/>
+            </a:pPr>
+            <a:r>
+              <a:rPr lang="en-US" sz="1350" b="1" dirty="0">
+                <a:solidFill>
+                  <a:srgbClr val="0D4A92"/>
+                </a:solidFill>
+                <a:latin typeface="Calibri" pitchFamily="34" charset="0"/>
+                <a:ea typeface="Calibri" pitchFamily="34" charset="-122"/>
+                <a:cs typeface="Calibri" pitchFamily="34" charset="-120"/>
+              </a:rPr>
+              <a:t>B. Opiate screens may not reliably detect semisynthetic/synthetic opioids; targeted testing is needed</a:t>
+            </a:r>
+            <a:endParaRPr lang="en-US" sz="1350" dirty="0"/>
+          </a:p>
+          <a:p>
+            <a:pPr algn="l" indent="0" marL="0">
+              <a:spcAft>
+                <a:spcPts val="600"/>
+              </a:spcAft>
+              <a:buNone/>
+            </a:pPr>
+            <a:r>
+              <a:rPr lang="en-US" sz="1350" dirty="0">
+                <a:solidFill>
+                  <a:srgbClr val="33444F"/>
+                </a:solidFill>
+                <a:latin typeface="Calibri" pitchFamily="34" charset="0"/>
+                <a:ea typeface="Calibri" pitchFamily="34" charset="-122"/>
+                <a:cs typeface="Calibri" pitchFamily="34" charset="-120"/>
+              </a:rPr>
+              <a:t>C. Sample adulteration</a:t>
+            </a:r>
+            <a:endParaRPr lang="en-US" sz="1350" dirty="0"/>
+          </a:p>
+          <a:p>
+            <a:pPr algn="l" indent="0" marL="0">
+              <a:spcAft>
+                <a:spcPts val="600"/>
+              </a:spcAft>
+              <a:buNone/>
+            </a:pPr>
+            <a:r>
+              <a:rPr lang="en-US" sz="1350" dirty="0">
+                <a:solidFill>
+                  <a:srgbClr val="33444F"/>
+                </a:solidFill>
+                <a:latin typeface="Calibri" pitchFamily="34" charset="0"/>
+                <a:ea typeface="Calibri" pitchFamily="34" charset="-122"/>
+                <a:cs typeface="Calibri" pitchFamily="34" charset="-120"/>
+              </a:rPr>
+              <a:t>D. The hook effect</a:t>
+            </a:r>
+            <a:endParaRPr lang="en-US" sz="1350" dirty="0"/>
+          </a:p>
+          <a:p>
+            <a:pPr algn="l" indent="0" marL="0">
+              <a:spcAft>
+                <a:spcPts val="600"/>
+              </a:spcAft>
+              <a:buNone/>
+            </a:pPr>
+            <a:r>
+              <a:rPr lang="en-US" sz="1350" dirty="0">
+                <a:solidFill>
+                  <a:srgbClr val="33444F"/>
+                </a:solidFill>
+                <a:latin typeface="Calibri" pitchFamily="34" charset="0"/>
+                <a:ea typeface="Calibri" pitchFamily="34" charset="-122"/>
+                <a:cs typeface="Calibri" pitchFamily="34" charset="-120"/>
+              </a:rPr>
+              <a:t>E. Heterophile antibody</a:t>
+            </a:r>
+            <a:endParaRPr lang="en-US" sz="1350" dirty="0"/>
+          </a:p>
+        </p:txBody>
+      </p:sp>
+      <p:sp>
+        <p:nvSpPr>
+          <p:cNvPr id="6" name="Shape 4"/>
+          <p:cNvSpPr/>
+          <p:nvPr/>
+        </p:nvSpPr>
+        <p:spPr>
+          <a:xfrm>
+            <a:off x="7201632" y="2395728"/>
+            <a:ext cx="4423136" cy="3246120"/>
           </a:xfrm>
           <a:prstGeom prst="roundRect">
             <a:avLst>
-              <a:gd name="adj" fmla="val 7609"/>
+              <a:gd name="adj" fmla="val 2535"/>
             </a:avLst>
           </a:prstGeom>
           <a:solidFill>
-            <a:srgbClr val="143651"/>
-          </a:solidFill>
-          <a:ln/>
-        </p:spPr>
-      </p:sp>
-      <p:sp>
-        <p:nvSpPr>
-          <p:cNvPr id="5" name="Shape 3"/>
-          <p:cNvSpPr/>
-          <p:nvPr/>
-        </p:nvSpPr>
-        <p:spPr>
-          <a:xfrm>
-            <a:off x="749808" y="1755648"/>
-            <a:ext cx="365760" cy="365760"/>
-          </a:xfrm>
-          <a:prstGeom prst="ellipse">
-            <a:avLst/>
-          </a:prstGeom>
-          <a:solidFill>
-            <a:srgbClr val="1565C0"/>
+            <a:srgbClr val="E7EFFA"/>
           </a:solidFill>
           <a:ln/>
           <a:effectLst>
@@ -9082,14 +9770,14 @@
       </p:sp>
       <p:sp>
         <p:nvSpPr>
-          <p:cNvPr id="6" name="Text 4"/>
-          <p:cNvSpPr/>
-          <p:nvPr/>
-        </p:nvSpPr>
-        <p:spPr>
-          <a:xfrm>
-            <a:off x="749808" y="1755648"/>
-            <a:ext cx="365760" cy="365760"/>
+          <p:cNvPr id="7" name="Text 5"/>
+          <p:cNvSpPr/>
+          <p:nvPr/>
+        </p:nvSpPr>
+        <p:spPr>
+          <a:xfrm>
+            <a:off x="7439376" y="2578608"/>
+            <a:ext cx="3965936" cy="457200"/>
           </a:xfrm>
           <a:prstGeom prst="rect">
             <a:avLst/>
@@ -9101,19 +9789,33 @@
           <a:bodyPr wrap="square" lIns="0" tIns="0" rIns="0" bIns="0" rtlCol="0" anchor="ctr"/>
           <a:lstStyle/>
           <a:p>
-            <a:pPr algn="ctr" indent="0" marL="0">
+            <a:pPr indent="0" marL="0">
               <a:buNone/>
             </a:pPr>
             <a:r>
               <a:rPr lang="en-US" sz="1500" b="1" dirty="0">
                 <a:solidFill>
-                  <a:srgbClr val="FFFFFF"/>
-                </a:solidFill>
-                <a:latin typeface="Calibri" pitchFamily="34" charset="0"/>
-                <a:ea typeface="Calibri" pitchFamily="34" charset="-122"/>
-                <a:cs typeface="Calibri" pitchFamily="34" charset="-120"/>
-              </a:rPr>
-              <a:t>1</a:t>
+                  <a:srgbClr val="1565C0"/>
+                </a:solidFill>
+                <a:latin typeface="Calibri" pitchFamily="34" charset="0"/>
+                <a:ea typeface="Calibri" pitchFamily="34" charset="-122"/>
+                <a:cs typeface="Calibri" pitchFamily="34" charset="-120"/>
+              </a:rPr>
+              <a:t>ANSWER  </a:t>
+            </a:r>
+            <a:pPr indent="0" marL="0">
+              <a:buNone/>
+            </a:pPr>
+            <a:r>
+              <a:rPr lang="en-US" sz="1500" b="1" dirty="0">
+                <a:solidFill>
+                  <a:srgbClr val="1B2A38"/>
+                </a:solidFill>
+                <a:latin typeface="Calibri" pitchFamily="34" charset="0"/>
+                <a:ea typeface="Calibri" pitchFamily="34" charset="-122"/>
+                <a:cs typeface="Calibri" pitchFamily="34" charset="-120"/>
+              </a:rPr>
+              <a:t>B — Screens may miss semisynthetic/synthetic opioids</a:t>
             </a:r>
             <a:endParaRPr lang="en-US" sz="1500" dirty="0"/>
           </a:p>
@@ -9121,14 +9823,56 @@
       </p:sp>
       <p:sp>
         <p:nvSpPr>
-          <p:cNvPr id="7" name="Text 5"/>
-          <p:cNvSpPr/>
-          <p:nvPr/>
-        </p:nvSpPr>
-        <p:spPr>
-          <a:xfrm>
-            <a:off x="1280160" y="1517904"/>
-            <a:ext cx="10143439" cy="841248"/>
+          <p:cNvPr id="8" name="Text 6"/>
+          <p:cNvSpPr/>
+          <p:nvPr/>
+        </p:nvSpPr>
+        <p:spPr>
+          <a:xfrm>
+            <a:off x="7439376" y="3127248"/>
+            <a:ext cx="3947648" cy="2377440"/>
+          </a:xfrm>
+          <a:prstGeom prst="rect">
+            <a:avLst/>
+          </a:prstGeom>
+          <a:noFill/>
+          <a:ln/>
+        </p:spPr>
+        <p:txBody>
+          <a:bodyPr wrap="square" lIns="0" tIns="0" rIns="0" bIns="0" rtlCol="0" anchor="t"/>
+          <a:lstStyle/>
+          <a:p>
+            <a:pPr algn="l" indent="0" marL="0">
+              <a:lnSpc>
+                <a:spcPct val="108000"/>
+              </a:lnSpc>
+              <a:buNone/>
+            </a:pPr>
+            <a:r>
+              <a:rPr lang="en-US" sz="1250" dirty="0">
+                <a:solidFill>
+                  <a:srgbClr val="33444F"/>
+                </a:solidFill>
+                <a:latin typeface="Calibri" pitchFamily="34" charset="0"/>
+                <a:ea typeface="Calibri" pitchFamily="34" charset="-122"/>
+                <a:cs typeface="Calibri" pitchFamily="34" charset="-120"/>
+              </a:rPr>
+              <a:t>Standard opiate immunoassays are calibrated to morphine/codeine and can under-detect oxycodone/fentanyl; targeted assays or LC-MS/MS are required.</a:t>
+            </a:r>
+            <a:endParaRPr lang="en-US" sz="1250" dirty="0"/>
+          </a:p>
+        </p:txBody>
+      </p:sp>
+      <p:sp>
+        <p:nvSpPr>
+          <p:cNvPr id="9" name="Text 7"/>
+          <p:cNvSpPr/>
+          <p:nvPr/>
+        </p:nvSpPr>
+        <p:spPr>
+          <a:xfrm>
+            <a:off x="566928" y="6473952"/>
+            <a:ext cx="7772400" cy="274320"/>
           </a:xfrm>
           <a:prstGeom prst="rect">
             <a:avLst/>
@@ -9144,68 +9888,19 @@
               <a:buNone/>
             </a:pPr>
             <a:r>
-              <a:rPr lang="en-US" sz="1350" dirty="0">
-                <a:solidFill>
-                  <a:srgbClr val="E7EEF4"/>
-                </a:solidFill>
-                <a:latin typeface="Calibri" pitchFamily="34" charset="0"/>
-                <a:ea typeface="Calibri" pitchFamily="34" charset="-122"/>
-                <a:cs typeface="Calibri" pitchFamily="34" charset="-120"/>
-              </a:rPr>
-              <a:t>Drug screens are presumptive and cross-react; confirm consequential results by GC-MS / LC-MS/MS.</a:t>
-            </a:r>
-            <a:endParaRPr lang="en-US" sz="1350" dirty="0"/>
-          </a:p>
-        </p:txBody>
-      </p:sp>
-      <p:sp>
-        <p:nvSpPr>
-          <p:cNvPr id="8" name="Shape 6"/>
-          <p:cNvSpPr/>
-          <p:nvPr/>
-        </p:nvSpPr>
-        <p:spPr>
-          <a:xfrm>
-            <a:off x="566928" y="2505456"/>
-            <a:ext cx="11057839" cy="841248"/>
-          </a:xfrm>
-          <a:prstGeom prst="roundRect">
-            <a:avLst>
-              <a:gd name="adj" fmla="val 7609"/>
-            </a:avLst>
-          </a:prstGeom>
-          <a:solidFill>
-            <a:srgbClr val="143651"/>
-          </a:solidFill>
-          <a:ln/>
-        </p:spPr>
-      </p:sp>
-      <p:sp>
-        <p:nvSpPr>
-          <p:cNvPr id="9" name="Shape 7"/>
-          <p:cNvSpPr/>
-          <p:nvPr/>
-        </p:nvSpPr>
-        <p:spPr>
-          <a:xfrm>
-            <a:off x="749808" y="2743200"/>
-            <a:ext cx="365760" cy="365760"/>
-          </a:xfrm>
-          <a:prstGeom prst="ellipse">
-            <a:avLst/>
-          </a:prstGeom>
-          <a:solidFill>
-            <a:srgbClr val="1565C0"/>
-          </a:solidFill>
-          <a:ln/>
-          <a:effectLst>
-            <a:outerShdw sx="100000" sy="100000" kx="0" ky="0" algn="bl" rotWithShape="0" blurRad="88900" dist="25400" dir="5400000">
-              <a:srgbClr val="22303C">
-                <a:alpha val="12000"/>
-              </a:srgbClr>
-            </a:outerShdw>
-          </a:effectLst>
-        </p:spPr>
+              <a:rPr lang="en-US" sz="850" dirty="0">
+                <a:solidFill>
+                  <a:srgbClr val="9AA8B4"/>
+                </a:solidFill>
+                <a:latin typeface="Calibri" pitchFamily="34" charset="0"/>
+                <a:ea typeface="Calibri" pitchFamily="34" charset="-122"/>
+                <a:cs typeface="Calibri" pitchFamily="34" charset="-120"/>
+              </a:rPr>
+              <a:t>Makassed General Hospital  ·  Department of Laboratory Medicine</a:t>
+            </a:r>
+            <a:endParaRPr lang="en-US" sz="850" dirty="0"/>
+          </a:p>
+        </p:txBody>
       </p:sp>
       <p:sp>
         <p:nvSpPr>
@@ -9215,8 +9910,8 @@
         </p:nvSpPr>
         <p:spPr>
           <a:xfrm>
-            <a:off x="749808" y="2743200"/>
-            <a:ext cx="365760" cy="365760"/>
+            <a:off x="9814255" y="6473952"/>
+            <a:ext cx="1828800" cy="274320"/>
           </a:xfrm>
           <a:prstGeom prst="rect">
             <a:avLst/>
@@ -9228,504 +9923,34 @@
           <a:bodyPr wrap="square" lIns="0" tIns="0" rIns="0" bIns="0" rtlCol="0" anchor="ctr"/>
           <a:lstStyle/>
           <a:p>
-            <a:pPr algn="ctr" indent="0" marL="0">
-              <a:buNone/>
-            </a:pPr>
-            <a:r>
-              <a:rPr lang="en-US" sz="1500" b="1" dirty="0">
-                <a:solidFill>
-                  <a:srgbClr val="FFFFFF"/>
-                </a:solidFill>
-                <a:latin typeface="Calibri" pitchFamily="34" charset="0"/>
-                <a:ea typeface="Calibri" pitchFamily="34" charset="-122"/>
-                <a:cs typeface="Calibri" pitchFamily="34" charset="-120"/>
-              </a:rPr>
-              <a:t>2</a:t>
-            </a:r>
-            <a:endParaRPr lang="en-US" sz="1500" dirty="0"/>
-          </a:p>
-        </p:txBody>
-      </p:sp>
-      <p:sp>
-        <p:nvSpPr>
-          <p:cNvPr id="11" name="Text 9"/>
-          <p:cNvSpPr/>
-          <p:nvPr/>
-        </p:nvSpPr>
-        <p:spPr>
-          <a:xfrm>
-            <a:off x="1280160" y="2505456"/>
-            <a:ext cx="10143439" cy="841248"/>
-          </a:xfrm>
-          <a:prstGeom prst="rect">
-            <a:avLst/>
-          </a:prstGeom>
-          <a:noFill/>
-          <a:ln/>
-        </p:spPr>
-        <p:txBody>
-          <a:bodyPr wrap="square" lIns="0" tIns="0" rIns="0" bIns="0" rtlCol="0" anchor="ctr"/>
-          <a:lstStyle/>
-          <a:p>
-            <a:pPr algn="l" indent="0" marL="0">
-              <a:buNone/>
-            </a:pPr>
-            <a:r>
-              <a:rPr lang="en-US" sz="1350" dirty="0">
-                <a:solidFill>
-                  <a:srgbClr val="E7EEF4"/>
-                </a:solidFill>
-                <a:latin typeface="Calibri" pitchFamily="34" charset="0"/>
-                <a:ea typeface="Calibri" pitchFamily="34" charset="-122"/>
-                <a:cs typeface="Calibri" pitchFamily="34" charset="-120"/>
-              </a:rPr>
-              <a:t>Standard opiate screens can miss synthetic/semisynthetic opioids — use targeted assays when needed.</a:t>
-            </a:r>
-            <a:endParaRPr lang="en-US" sz="1350" dirty="0"/>
-          </a:p>
-        </p:txBody>
-      </p:sp>
-      <p:sp>
-        <p:nvSpPr>
-          <p:cNvPr id="12" name="Shape 10"/>
-          <p:cNvSpPr/>
-          <p:nvPr/>
-        </p:nvSpPr>
-        <p:spPr>
-          <a:xfrm>
-            <a:off x="566928" y="3493008"/>
-            <a:ext cx="11057839" cy="841248"/>
-          </a:xfrm>
-          <a:prstGeom prst="roundRect">
-            <a:avLst>
-              <a:gd name="adj" fmla="val 7609"/>
-            </a:avLst>
-          </a:prstGeom>
-          <a:solidFill>
-            <a:srgbClr val="143651"/>
-          </a:solidFill>
-          <a:ln/>
-        </p:spPr>
-      </p:sp>
-      <p:sp>
-        <p:nvSpPr>
-          <p:cNvPr id="13" name="Shape 11"/>
-          <p:cNvSpPr/>
-          <p:nvPr/>
-        </p:nvSpPr>
-        <p:spPr>
-          <a:xfrm>
-            <a:off x="749808" y="3730752"/>
-            <a:ext cx="365760" cy="365760"/>
-          </a:xfrm>
-          <a:prstGeom prst="ellipse">
-            <a:avLst/>
-          </a:prstGeom>
-          <a:solidFill>
-            <a:srgbClr val="1565C0"/>
-          </a:solidFill>
-          <a:ln/>
-          <a:effectLst>
-            <a:outerShdw sx="100000" sy="100000" kx="0" ky="0" algn="bl" rotWithShape="0" blurRad="88900" dist="25400" dir="5400000">
-              <a:srgbClr val="22303C">
-                <a:alpha val="12000"/>
-              </a:srgbClr>
-            </a:outerShdw>
-          </a:effectLst>
-        </p:spPr>
-      </p:sp>
-      <p:sp>
-        <p:nvSpPr>
-          <p:cNvPr id="14" name="Text 12"/>
-          <p:cNvSpPr/>
-          <p:nvPr/>
-        </p:nvSpPr>
-        <p:spPr>
-          <a:xfrm>
-            <a:off x="749808" y="3730752"/>
-            <a:ext cx="365760" cy="365760"/>
-          </a:xfrm>
-          <a:prstGeom prst="rect">
-            <a:avLst/>
-          </a:prstGeom>
-          <a:noFill/>
-          <a:ln/>
-        </p:spPr>
-        <p:txBody>
-          <a:bodyPr wrap="square" lIns="0" tIns="0" rIns="0" bIns="0" rtlCol="0" anchor="ctr"/>
-          <a:lstStyle/>
-          <a:p>
-            <a:pPr algn="ctr" indent="0" marL="0">
-              <a:buNone/>
-            </a:pPr>
-            <a:r>
-              <a:rPr lang="en-US" sz="1500" b="1" dirty="0">
-                <a:solidFill>
-                  <a:srgbClr val="FFFFFF"/>
-                </a:solidFill>
-                <a:latin typeface="Calibri" pitchFamily="34" charset="0"/>
-                <a:ea typeface="Calibri" pitchFamily="34" charset="-122"/>
-                <a:cs typeface="Calibri" pitchFamily="34" charset="-120"/>
-              </a:rPr>
-              <a:t>3</a:t>
-            </a:r>
-            <a:endParaRPr lang="en-US" sz="1500" dirty="0"/>
-          </a:p>
-        </p:txBody>
-      </p:sp>
-      <p:sp>
-        <p:nvSpPr>
-          <p:cNvPr id="15" name="Text 13"/>
-          <p:cNvSpPr/>
-          <p:nvPr/>
-        </p:nvSpPr>
-        <p:spPr>
-          <a:xfrm>
-            <a:off x="1280160" y="3493008"/>
-            <a:ext cx="10143439" cy="841248"/>
-          </a:xfrm>
-          <a:prstGeom prst="rect">
-            <a:avLst/>
-          </a:prstGeom>
-          <a:noFill/>
-          <a:ln/>
-        </p:spPr>
-        <p:txBody>
-          <a:bodyPr wrap="square" lIns="0" tIns="0" rIns="0" bIns="0" rtlCol="0" anchor="ctr"/>
-          <a:lstStyle/>
-          <a:p>
-            <a:pPr algn="l" indent="0" marL="0">
-              <a:buNone/>
-            </a:pPr>
-            <a:r>
-              <a:rPr lang="en-US" sz="1350" dirty="0">
-                <a:solidFill>
-                  <a:srgbClr val="E7EEF4"/>
-                </a:solidFill>
-                <a:latin typeface="Calibri" pitchFamily="34" charset="0"/>
-                <a:ea typeface="Calibri" pitchFamily="34" charset="-122"/>
-                <a:cs typeface="Calibri" pitchFamily="34" charset="-120"/>
-              </a:rPr>
-              <a:t>TDM: sample at steady state, usually as a trough; interpret FREE drug when protein binding is altered.</a:t>
-            </a:r>
-            <a:endParaRPr lang="en-US" sz="1350" dirty="0"/>
-          </a:p>
-        </p:txBody>
-      </p:sp>
-      <p:sp>
-        <p:nvSpPr>
-          <p:cNvPr id="16" name="Shape 14"/>
-          <p:cNvSpPr/>
-          <p:nvPr/>
-        </p:nvSpPr>
-        <p:spPr>
-          <a:xfrm>
-            <a:off x="566928" y="4480560"/>
-            <a:ext cx="11057839" cy="841248"/>
-          </a:xfrm>
-          <a:prstGeom prst="roundRect">
-            <a:avLst>
-              <a:gd name="adj" fmla="val 7609"/>
-            </a:avLst>
-          </a:prstGeom>
-          <a:solidFill>
-            <a:srgbClr val="143651"/>
-          </a:solidFill>
-          <a:ln/>
-        </p:spPr>
-      </p:sp>
-      <p:sp>
-        <p:nvSpPr>
-          <p:cNvPr id="17" name="Shape 15"/>
-          <p:cNvSpPr/>
-          <p:nvPr/>
-        </p:nvSpPr>
-        <p:spPr>
-          <a:xfrm>
-            <a:off x="749808" y="4718304"/>
-            <a:ext cx="365760" cy="365760"/>
-          </a:xfrm>
-          <a:prstGeom prst="ellipse">
-            <a:avLst/>
-          </a:prstGeom>
-          <a:solidFill>
-            <a:srgbClr val="1565C0"/>
-          </a:solidFill>
-          <a:ln/>
-          <a:effectLst>
-            <a:outerShdw sx="100000" sy="100000" kx="0" ky="0" algn="bl" rotWithShape="0" blurRad="88900" dist="25400" dir="5400000">
-              <a:srgbClr val="22303C">
-                <a:alpha val="12000"/>
-              </a:srgbClr>
-            </a:outerShdw>
-          </a:effectLst>
-        </p:spPr>
-      </p:sp>
-      <p:sp>
-        <p:nvSpPr>
-          <p:cNvPr id="18" name="Text 16"/>
-          <p:cNvSpPr/>
-          <p:nvPr/>
-        </p:nvSpPr>
-        <p:spPr>
-          <a:xfrm>
-            <a:off x="749808" y="4718304"/>
-            <a:ext cx="365760" cy="365760"/>
-          </a:xfrm>
-          <a:prstGeom prst="rect">
-            <a:avLst/>
-          </a:prstGeom>
-          <a:noFill/>
-          <a:ln/>
-        </p:spPr>
-        <p:txBody>
-          <a:bodyPr wrap="square" lIns="0" tIns="0" rIns="0" bIns="0" rtlCol="0" anchor="ctr"/>
-          <a:lstStyle/>
-          <a:p>
-            <a:pPr algn="ctr" indent="0" marL="0">
-              <a:buNone/>
-            </a:pPr>
-            <a:r>
-              <a:rPr lang="en-US" sz="1500" b="1" dirty="0">
-                <a:solidFill>
-                  <a:srgbClr val="FFFFFF"/>
-                </a:solidFill>
-                <a:latin typeface="Calibri" pitchFamily="34" charset="0"/>
-                <a:ea typeface="Calibri" pitchFamily="34" charset="-122"/>
-                <a:cs typeface="Calibri" pitchFamily="34" charset="-120"/>
-              </a:rPr>
-              <a:t>4</a:t>
-            </a:r>
-            <a:endParaRPr lang="en-US" sz="1500" dirty="0"/>
-          </a:p>
-        </p:txBody>
-      </p:sp>
-      <p:sp>
-        <p:nvSpPr>
-          <p:cNvPr id="19" name="Text 17"/>
-          <p:cNvSpPr/>
-          <p:nvPr/>
-        </p:nvSpPr>
-        <p:spPr>
-          <a:xfrm>
-            <a:off x="1280160" y="4480560"/>
-            <a:ext cx="10143439" cy="841248"/>
-          </a:xfrm>
-          <a:prstGeom prst="rect">
-            <a:avLst/>
-          </a:prstGeom>
-          <a:noFill/>
-          <a:ln/>
-        </p:spPr>
-        <p:txBody>
-          <a:bodyPr wrap="square" lIns="0" tIns="0" rIns="0" bIns="0" rtlCol="0" anchor="ctr"/>
-          <a:lstStyle/>
-          <a:p>
-            <a:pPr algn="l" indent="0" marL="0">
-              <a:buNone/>
-            </a:pPr>
-            <a:r>
-              <a:rPr lang="en-US" sz="1350" dirty="0">
-                <a:solidFill>
-                  <a:srgbClr val="E7EEF4"/>
-                </a:solidFill>
-                <a:latin typeface="Calibri" pitchFamily="34" charset="0"/>
-                <a:ea typeface="Calibri" pitchFamily="34" charset="-122"/>
-                <a:cs typeface="Calibri" pitchFamily="34" charset="-120"/>
-              </a:rPr>
-              <a:t>POCT needs the same governance as the main lab: competency, QC, correlation, connectivity, and director oversight.</a:t>
-            </a:r>
-            <a:endParaRPr lang="en-US" sz="1350" dirty="0"/>
-          </a:p>
-        </p:txBody>
-      </p:sp>
-      <p:sp>
-        <p:nvSpPr>
-          <p:cNvPr id="20" name="Shape 18"/>
-          <p:cNvSpPr/>
-          <p:nvPr/>
-        </p:nvSpPr>
-        <p:spPr>
-          <a:xfrm>
-            <a:off x="566928" y="5468112"/>
-            <a:ext cx="11057839" cy="841248"/>
-          </a:xfrm>
-          <a:prstGeom prst="roundRect">
-            <a:avLst>
-              <a:gd name="adj" fmla="val 7609"/>
-            </a:avLst>
-          </a:prstGeom>
-          <a:solidFill>
-            <a:srgbClr val="143651"/>
-          </a:solidFill>
-          <a:ln/>
-        </p:spPr>
-      </p:sp>
-      <p:sp>
-        <p:nvSpPr>
-          <p:cNvPr id="21" name="Shape 19"/>
-          <p:cNvSpPr/>
-          <p:nvPr/>
-        </p:nvSpPr>
-        <p:spPr>
-          <a:xfrm>
-            <a:off x="749808" y="5705856"/>
-            <a:ext cx="365760" cy="365760"/>
-          </a:xfrm>
-          <a:prstGeom prst="ellipse">
-            <a:avLst/>
-          </a:prstGeom>
-          <a:solidFill>
-            <a:srgbClr val="1565C0"/>
-          </a:solidFill>
-          <a:ln/>
-          <a:effectLst>
-            <a:outerShdw sx="100000" sy="100000" kx="0" ky="0" algn="bl" rotWithShape="0" blurRad="88900" dist="25400" dir="5400000">
-              <a:srgbClr val="22303C">
-                <a:alpha val="12000"/>
-              </a:srgbClr>
-            </a:outerShdw>
-          </a:effectLst>
-        </p:spPr>
-      </p:sp>
-      <p:sp>
-        <p:nvSpPr>
-          <p:cNvPr id="22" name="Text 20"/>
-          <p:cNvSpPr/>
-          <p:nvPr/>
-        </p:nvSpPr>
-        <p:spPr>
-          <a:xfrm>
-            <a:off x="749808" y="5705856"/>
-            <a:ext cx="365760" cy="365760"/>
-          </a:xfrm>
-          <a:prstGeom prst="rect">
-            <a:avLst/>
-          </a:prstGeom>
-          <a:noFill/>
-          <a:ln/>
-        </p:spPr>
-        <p:txBody>
-          <a:bodyPr wrap="square" lIns="0" tIns="0" rIns="0" bIns="0" rtlCol="0" anchor="ctr"/>
-          <a:lstStyle/>
-          <a:p>
-            <a:pPr algn="ctr" indent="0" marL="0">
-              <a:buNone/>
-            </a:pPr>
-            <a:r>
-              <a:rPr lang="en-US" sz="1500" b="1" dirty="0">
-                <a:solidFill>
-                  <a:srgbClr val="FFFFFF"/>
-                </a:solidFill>
-                <a:latin typeface="Calibri" pitchFamily="34" charset="0"/>
-                <a:ea typeface="Calibri" pitchFamily="34" charset="-122"/>
-                <a:cs typeface="Calibri" pitchFamily="34" charset="-120"/>
-              </a:rPr>
-              <a:t>5</a:t>
-            </a:r>
-            <a:endParaRPr lang="en-US" sz="1500" dirty="0"/>
-          </a:p>
-        </p:txBody>
-      </p:sp>
-      <p:sp>
-        <p:nvSpPr>
-          <p:cNvPr id="23" name="Text 21"/>
-          <p:cNvSpPr/>
-          <p:nvPr/>
-        </p:nvSpPr>
-        <p:spPr>
-          <a:xfrm>
-            <a:off x="1280160" y="5468112"/>
-            <a:ext cx="10143439" cy="841248"/>
-          </a:xfrm>
-          <a:prstGeom prst="rect">
-            <a:avLst/>
-          </a:prstGeom>
-          <a:noFill/>
-          <a:ln/>
-        </p:spPr>
-        <p:txBody>
-          <a:bodyPr wrap="square" lIns="0" tIns="0" rIns="0" bIns="0" rtlCol="0" anchor="ctr"/>
-          <a:lstStyle/>
-          <a:p>
-            <a:pPr algn="l" indent="0" marL="0">
-              <a:buNone/>
-            </a:pPr>
-            <a:r>
-              <a:rPr lang="en-US" sz="1350" dirty="0">
-                <a:solidFill>
-                  <a:srgbClr val="E7EEF4"/>
-                </a:solidFill>
-                <a:latin typeface="Calibri" pitchFamily="34" charset="0"/>
-                <a:ea typeface="Calibri" pitchFamily="34" charset="-122"/>
-                <a:cs typeface="Calibri" pitchFamily="34" charset="-120"/>
-              </a:rPr>
-              <a:t>Validate laboratory-developed tests fully (accuracy, precision, LoD, specificity, linearity, reference interval); verify FDA-cleared assays.</a:t>
-            </a:r>
-            <a:endParaRPr lang="en-US" sz="1350" dirty="0"/>
-          </a:p>
-        </p:txBody>
-      </p:sp>
-      <p:sp>
-        <p:nvSpPr>
-          <p:cNvPr id="24" name="Text 22"/>
-          <p:cNvSpPr/>
-          <p:nvPr/>
-        </p:nvSpPr>
-        <p:spPr>
-          <a:xfrm>
-            <a:off x="566928" y="6473952"/>
-            <a:ext cx="8229600" cy="274320"/>
-          </a:xfrm>
-          <a:prstGeom prst="rect">
-            <a:avLst/>
-          </a:prstGeom>
-          <a:noFill/>
-          <a:ln/>
-        </p:spPr>
-        <p:txBody>
-          <a:bodyPr wrap="square" lIns="0" tIns="0" rIns="0" bIns="0" rtlCol="0" anchor="ctr"/>
-          <a:lstStyle/>
-          <a:p>
-            <a:pPr indent="0" marL="0">
+            <a:pPr algn="r" indent="0" marL="0">
               <a:buNone/>
             </a:pPr>
             <a:r>
               <a:rPr lang="en-US" sz="850" dirty="0">
                 <a:solidFill>
-                  <a:srgbClr val="5E7488"/>
-                </a:solidFill>
-                <a:latin typeface="Calibri" pitchFamily="34" charset="0"/>
-                <a:ea typeface="Calibri" pitchFamily="34" charset="-122"/>
-                <a:cs typeface="Calibri" pitchFamily="34" charset="-120"/>
-              </a:rPr>
-              <a:t>Makassed General Hospital  ·  Department of Laboratory Medicine</a:t>
-            </a:r>
-            <a:endParaRPr lang="en-US" sz="850" dirty="0"/>
-          </a:p>
-        </p:txBody>
-      </p:sp>
-      <p:sp>
-        <p:nvSpPr>
-          <p:cNvPr id="25" name="Text 23"/>
-          <p:cNvSpPr/>
-          <p:nvPr/>
-        </p:nvSpPr>
-        <p:spPr>
-          <a:xfrm>
-            <a:off x="11002975" y="6473952"/>
-            <a:ext cx="640080" cy="274320"/>
-          </a:xfrm>
-          <a:prstGeom prst="rect">
-            <a:avLst/>
-          </a:prstGeom>
-          <a:noFill/>
-          <a:ln/>
-        </p:spPr>
-        <p:txBody>
-          <a:bodyPr wrap="square" lIns="0" tIns="0" rIns="0" bIns="0" rtlCol="0" anchor="ctr"/>
-          <a:lstStyle/>
-          <a:p>
+                  <a:srgbClr val="9AA8B4"/>
+                </a:solidFill>
+                <a:latin typeface="Calibri" pitchFamily="34" charset="0"/>
+                <a:ea typeface="Calibri" pitchFamily="34" charset="-122"/>
+                <a:cs typeface="Calibri" pitchFamily="34" charset="-120"/>
+              </a:rPr>
+              <a:t>CP Lecture Series</a:t>
+            </a:r>
+            <a:pPr algn="r" indent="0" marL="0">
+              <a:buNone/>
+            </a:pPr>
+            <a:r>
+              <a:rPr lang="en-US" sz="850" dirty="0">
+                <a:solidFill>
+                  <a:srgbClr val="DCE4EC"/>
+                </a:solidFill>
+                <a:latin typeface="Calibri" pitchFamily="34" charset="0"/>
+                <a:ea typeface="Calibri" pitchFamily="34" charset="-122"/>
+                <a:cs typeface="Calibri" pitchFamily="34" charset="-120"/>
+              </a:rPr>
+              <a:t>   ·   </a:t>
+            </a:r>
             <a:pPr algn="r" indent="0" marL="0">
               <a:buNone/>
             </a:pPr>
@@ -9809,6 +10034,2341 @@
                 <a:ea typeface="Calibri" pitchFamily="34" charset="-122"/>
                 <a:cs typeface="Calibri" pitchFamily="34" charset="-120"/>
               </a:rPr>
+              <a:t>CLINICAL CHEMISTRY   ·   BOARD REVIEW  ·  Q2</a:t>
+            </a:r>
+            <a:endParaRPr lang="en-US" sz="1100" dirty="0"/>
+          </a:p>
+        </p:txBody>
+      </p:sp>
+      <p:sp>
+        <p:nvSpPr>
+          <p:cNvPr id="3" name="Text 1"/>
+          <p:cNvSpPr/>
+          <p:nvPr/>
+        </p:nvSpPr>
+        <p:spPr>
+          <a:xfrm>
+            <a:off x="566928" y="713232"/>
+            <a:ext cx="11064240" cy="749808"/>
+          </a:xfrm>
+          <a:prstGeom prst="rect">
+            <a:avLst/>
+          </a:prstGeom>
+          <a:noFill/>
+          <a:ln/>
+        </p:spPr>
+        <p:txBody>
+          <a:bodyPr wrap="square" lIns="0" tIns="0" rIns="0" bIns="0" rtlCol="0" anchor="ctr"/>
+          <a:lstStyle/>
+          <a:p>
+            <a:pPr algn="l" indent="0" marL="0">
+              <a:buNone/>
+            </a:pPr>
+            <a:r>
+              <a:rPr lang="en-US" sz="2600" b="1" dirty="0">
+                <a:solidFill>
+                  <a:srgbClr val="0E3A5F"/>
+                </a:solidFill>
+                <a:latin typeface="Calibri" pitchFamily="34" charset="0"/>
+                <a:ea typeface="Calibri" pitchFamily="34" charset="-122"/>
+                <a:cs typeface="Calibri" pitchFamily="34" charset="-120"/>
+              </a:rPr>
+              <a:t>Board-Style Review</a:t>
+            </a:r>
+            <a:endParaRPr lang="en-US" sz="2600" dirty="0"/>
+          </a:p>
+        </p:txBody>
+      </p:sp>
+      <p:sp>
+        <p:nvSpPr>
+          <p:cNvPr id="4" name="Text 2"/>
+          <p:cNvSpPr/>
+          <p:nvPr/>
+        </p:nvSpPr>
+        <p:spPr>
+          <a:xfrm>
+            <a:off x="566928" y="1417320"/>
+            <a:ext cx="11057839" cy="914400"/>
+          </a:xfrm>
+          <a:prstGeom prst="rect">
+            <a:avLst/>
+          </a:prstGeom>
+          <a:noFill/>
+          <a:ln/>
+        </p:spPr>
+        <p:txBody>
+          <a:bodyPr wrap="square" lIns="0" tIns="0" rIns="0" bIns="0" rtlCol="0" anchor="t"/>
+          <a:lstStyle/>
+          <a:p>
+            <a:pPr algn="l" indent="0" marL="0">
+              <a:lnSpc>
+                <a:spcPct val="105000"/>
+              </a:lnSpc>
+              <a:buNone/>
+            </a:pPr>
+            <a:r>
+              <a:rPr lang="en-US" sz="1450" b="1" dirty="0">
+                <a:solidFill>
+                  <a:srgbClr val="1B2A38"/>
+                </a:solidFill>
+                <a:latin typeface="Calibri" pitchFamily="34" charset="0"/>
+                <a:ea typeface="Calibri" pitchFamily="34" charset="-122"/>
+                <a:cs typeface="Calibri" pitchFamily="34" charset="-120"/>
+              </a:rPr>
+              <a:t>When should a trough be drawn for routine TDM?</a:t>
+            </a:r>
+            <a:endParaRPr lang="en-US" sz="1450" dirty="0"/>
+          </a:p>
+        </p:txBody>
+      </p:sp>
+      <p:sp>
+        <p:nvSpPr>
+          <p:cNvPr id="5" name="Text 3"/>
+          <p:cNvSpPr/>
+          <p:nvPr/>
+        </p:nvSpPr>
+        <p:spPr>
+          <a:xfrm>
+            <a:off x="658368" y="2395728"/>
+            <a:ext cx="6192390" cy="3017520"/>
+          </a:xfrm>
+          <a:prstGeom prst="rect">
+            <a:avLst/>
+          </a:prstGeom>
+          <a:noFill/>
+          <a:ln/>
+        </p:spPr>
+        <p:txBody>
+          <a:bodyPr wrap="square" lIns="0" tIns="0" rIns="0" bIns="0" rtlCol="0" anchor="t"/>
+          <a:lstStyle/>
+          <a:p>
+            <a:pPr algn="l" indent="0" marL="0">
+              <a:spcAft>
+                <a:spcPts val="600"/>
+              </a:spcAft>
+              <a:buNone/>
+            </a:pPr>
+            <a:r>
+              <a:rPr lang="en-US" sz="1350" dirty="0">
+                <a:solidFill>
+                  <a:srgbClr val="33444F"/>
+                </a:solidFill>
+                <a:latin typeface="Calibri" pitchFamily="34" charset="0"/>
+                <a:ea typeface="Calibri" pitchFamily="34" charset="-122"/>
+                <a:cs typeface="Calibri" pitchFamily="34" charset="-120"/>
+              </a:rPr>
+              <a:t>A. Immediately after the first dose</a:t>
+            </a:r>
+            <a:endParaRPr lang="en-US" sz="1350" dirty="0"/>
+          </a:p>
+          <a:p>
+            <a:pPr algn="l" indent="0" marL="0">
+              <a:spcAft>
+                <a:spcPts val="600"/>
+              </a:spcAft>
+              <a:buNone/>
+            </a:pPr>
+            <a:r>
+              <a:rPr lang="en-US" sz="1350" dirty="0">
+                <a:solidFill>
+                  <a:srgbClr val="33444F"/>
+                </a:solidFill>
+                <a:latin typeface="Calibri" pitchFamily="34" charset="0"/>
+                <a:ea typeface="Calibri" pitchFamily="34" charset="-122"/>
+                <a:cs typeface="Calibri" pitchFamily="34" charset="-120"/>
+              </a:rPr>
+              <a:t>B. At the peak after any dose</a:t>
+            </a:r>
+            <a:endParaRPr lang="en-US" sz="1350" dirty="0"/>
+          </a:p>
+          <a:p>
+            <a:pPr algn="l" indent="0" marL="0">
+              <a:spcAft>
+                <a:spcPts val="600"/>
+              </a:spcAft>
+              <a:buNone/>
+            </a:pPr>
+            <a:r>
+              <a:rPr lang="en-US" sz="1350" b="1" dirty="0">
+                <a:solidFill>
+                  <a:srgbClr val="0D4A92"/>
+                </a:solidFill>
+                <a:latin typeface="Calibri" pitchFamily="34" charset="0"/>
+                <a:ea typeface="Calibri" pitchFamily="34" charset="-122"/>
+                <a:cs typeface="Calibri" pitchFamily="34" charset="-120"/>
+              </a:rPr>
+              <a:t>C. At steady state, just before the next dose</a:t>
+            </a:r>
+            <a:endParaRPr lang="en-US" sz="1350" dirty="0"/>
+          </a:p>
+          <a:p>
+            <a:pPr algn="l" indent="0" marL="0">
+              <a:spcAft>
+                <a:spcPts val="600"/>
+              </a:spcAft>
+              <a:buNone/>
+            </a:pPr>
+            <a:r>
+              <a:rPr lang="en-US" sz="1350" dirty="0">
+                <a:solidFill>
+                  <a:srgbClr val="33444F"/>
+                </a:solidFill>
+                <a:latin typeface="Calibri" pitchFamily="34" charset="0"/>
+                <a:ea typeface="Calibri" pitchFamily="34" charset="-122"/>
+                <a:cs typeface="Calibri" pitchFamily="34" charset="-120"/>
+              </a:rPr>
+              <a:t>D. Randomly</a:t>
+            </a:r>
+            <a:endParaRPr lang="en-US" sz="1350" dirty="0"/>
+          </a:p>
+          <a:p>
+            <a:pPr algn="l" indent="0" marL="0">
+              <a:spcAft>
+                <a:spcPts val="600"/>
+              </a:spcAft>
+              <a:buNone/>
+            </a:pPr>
+            <a:r>
+              <a:rPr lang="en-US" sz="1350" dirty="0">
+                <a:solidFill>
+                  <a:srgbClr val="33444F"/>
+                </a:solidFill>
+                <a:latin typeface="Calibri" pitchFamily="34" charset="0"/>
+                <a:ea typeface="Calibri" pitchFamily="34" charset="-122"/>
+                <a:cs typeface="Calibri" pitchFamily="34" charset="-120"/>
+              </a:rPr>
+              <a:t>E. Only when toxicity is suspected</a:t>
+            </a:r>
+            <a:endParaRPr lang="en-US" sz="1350" dirty="0"/>
+          </a:p>
+        </p:txBody>
+      </p:sp>
+      <p:sp>
+        <p:nvSpPr>
+          <p:cNvPr id="6" name="Shape 4"/>
+          <p:cNvSpPr/>
+          <p:nvPr/>
+        </p:nvSpPr>
+        <p:spPr>
+          <a:xfrm>
+            <a:off x="7201632" y="2395728"/>
+            <a:ext cx="4423136" cy="3246120"/>
+          </a:xfrm>
+          <a:prstGeom prst="roundRect">
+            <a:avLst>
+              <a:gd name="adj" fmla="val 2535"/>
+            </a:avLst>
+          </a:prstGeom>
+          <a:solidFill>
+            <a:srgbClr val="E7EFFA"/>
+          </a:solidFill>
+          <a:ln/>
+          <a:effectLst>
+            <a:outerShdw sx="100000" sy="100000" kx="0" ky="0" algn="bl" rotWithShape="0" blurRad="88900" dist="25400" dir="5400000">
+              <a:srgbClr val="22303C">
+                <a:alpha val="12000"/>
+              </a:srgbClr>
+            </a:outerShdw>
+          </a:effectLst>
+        </p:spPr>
+      </p:sp>
+      <p:sp>
+        <p:nvSpPr>
+          <p:cNvPr id="7" name="Text 5"/>
+          <p:cNvSpPr/>
+          <p:nvPr/>
+        </p:nvSpPr>
+        <p:spPr>
+          <a:xfrm>
+            <a:off x="7439376" y="2578608"/>
+            <a:ext cx="3965936" cy="457200"/>
+          </a:xfrm>
+          <a:prstGeom prst="rect">
+            <a:avLst/>
+          </a:prstGeom>
+          <a:noFill/>
+          <a:ln/>
+        </p:spPr>
+        <p:txBody>
+          <a:bodyPr wrap="square" lIns="0" tIns="0" rIns="0" bIns="0" rtlCol="0" anchor="ctr"/>
+          <a:lstStyle/>
+          <a:p>
+            <a:pPr indent="0" marL="0">
+              <a:buNone/>
+            </a:pPr>
+            <a:r>
+              <a:rPr lang="en-US" sz="1500" b="1" dirty="0">
+                <a:solidFill>
+                  <a:srgbClr val="1565C0"/>
+                </a:solidFill>
+                <a:latin typeface="Calibri" pitchFamily="34" charset="0"/>
+                <a:ea typeface="Calibri" pitchFamily="34" charset="-122"/>
+                <a:cs typeface="Calibri" pitchFamily="34" charset="-120"/>
+              </a:rPr>
+              <a:t>ANSWER  </a:t>
+            </a:r>
+            <a:pPr indent="0" marL="0">
+              <a:buNone/>
+            </a:pPr>
+            <a:r>
+              <a:rPr lang="en-US" sz="1500" b="1" dirty="0">
+                <a:solidFill>
+                  <a:srgbClr val="1B2A38"/>
+                </a:solidFill>
+                <a:latin typeface="Calibri" pitchFamily="34" charset="0"/>
+                <a:ea typeface="Calibri" pitchFamily="34" charset="-122"/>
+                <a:cs typeface="Calibri" pitchFamily="34" charset="-120"/>
+              </a:rPr>
+              <a:t>C — At steady state, pre-dose (trough)</a:t>
+            </a:r>
+            <a:endParaRPr lang="en-US" sz="1500" dirty="0"/>
+          </a:p>
+        </p:txBody>
+      </p:sp>
+      <p:sp>
+        <p:nvSpPr>
+          <p:cNvPr id="8" name="Text 6"/>
+          <p:cNvSpPr/>
+          <p:nvPr/>
+        </p:nvSpPr>
+        <p:spPr>
+          <a:xfrm>
+            <a:off x="7439376" y="3127248"/>
+            <a:ext cx="3947648" cy="2377440"/>
+          </a:xfrm>
+          <a:prstGeom prst="rect">
+            <a:avLst/>
+          </a:prstGeom>
+          <a:noFill/>
+          <a:ln/>
+        </p:spPr>
+        <p:txBody>
+          <a:bodyPr wrap="square" lIns="0" tIns="0" rIns="0" bIns="0" rtlCol="0" anchor="t"/>
+          <a:lstStyle/>
+          <a:p>
+            <a:pPr algn="l" indent="0" marL="0">
+              <a:lnSpc>
+                <a:spcPct val="108000"/>
+              </a:lnSpc>
+              <a:buNone/>
+            </a:pPr>
+            <a:r>
+              <a:rPr lang="en-US" sz="1250" dirty="0">
+                <a:solidFill>
+                  <a:srgbClr val="33444F"/>
+                </a:solidFill>
+                <a:latin typeface="Calibri" pitchFamily="34" charset="0"/>
+                <a:ea typeface="Calibri" pitchFamily="34" charset="-122"/>
+                <a:cs typeface="Calibri" pitchFamily="34" charset="-120"/>
+              </a:rPr>
+              <a:t>Steady state (~5 half-lives) with a pre-dose trough gives the most interpretable, reproducible level for most monitored drugs.</a:t>
+            </a:r>
+            <a:endParaRPr lang="en-US" sz="1250" dirty="0"/>
+          </a:p>
+        </p:txBody>
+      </p:sp>
+      <p:sp>
+        <p:nvSpPr>
+          <p:cNvPr id="9" name="Text 7"/>
+          <p:cNvSpPr/>
+          <p:nvPr/>
+        </p:nvSpPr>
+        <p:spPr>
+          <a:xfrm>
+            <a:off x="566928" y="6473952"/>
+            <a:ext cx="7772400" cy="274320"/>
+          </a:xfrm>
+          <a:prstGeom prst="rect">
+            <a:avLst/>
+          </a:prstGeom>
+          <a:noFill/>
+          <a:ln/>
+        </p:spPr>
+        <p:txBody>
+          <a:bodyPr wrap="square" lIns="0" tIns="0" rIns="0" bIns="0" rtlCol="0" anchor="ctr"/>
+          <a:lstStyle/>
+          <a:p>
+            <a:pPr algn="l" indent="0" marL="0">
+              <a:buNone/>
+            </a:pPr>
+            <a:r>
+              <a:rPr lang="en-US" sz="850" dirty="0">
+                <a:solidFill>
+                  <a:srgbClr val="9AA8B4"/>
+                </a:solidFill>
+                <a:latin typeface="Calibri" pitchFamily="34" charset="0"/>
+                <a:ea typeface="Calibri" pitchFamily="34" charset="-122"/>
+                <a:cs typeface="Calibri" pitchFamily="34" charset="-120"/>
+              </a:rPr>
+              <a:t>Makassed General Hospital  ·  Department of Laboratory Medicine</a:t>
+            </a:r>
+            <a:endParaRPr lang="en-US" sz="850" dirty="0"/>
+          </a:p>
+        </p:txBody>
+      </p:sp>
+      <p:sp>
+        <p:nvSpPr>
+          <p:cNvPr id="10" name="Text 8"/>
+          <p:cNvSpPr/>
+          <p:nvPr/>
+        </p:nvSpPr>
+        <p:spPr>
+          <a:xfrm>
+            <a:off x="9814255" y="6473952"/>
+            <a:ext cx="1828800" cy="274320"/>
+          </a:xfrm>
+          <a:prstGeom prst="rect">
+            <a:avLst/>
+          </a:prstGeom>
+          <a:noFill/>
+          <a:ln/>
+        </p:spPr>
+        <p:txBody>
+          <a:bodyPr wrap="square" lIns="0" tIns="0" rIns="0" bIns="0" rtlCol="0" anchor="ctr"/>
+          <a:lstStyle/>
+          <a:p>
+            <a:pPr algn="r" indent="0" marL="0">
+              <a:buNone/>
+            </a:pPr>
+            <a:r>
+              <a:rPr lang="en-US" sz="850" dirty="0">
+                <a:solidFill>
+                  <a:srgbClr val="9AA8B4"/>
+                </a:solidFill>
+                <a:latin typeface="Calibri" pitchFamily="34" charset="0"/>
+                <a:ea typeface="Calibri" pitchFamily="34" charset="-122"/>
+                <a:cs typeface="Calibri" pitchFamily="34" charset="-120"/>
+              </a:rPr>
+              <a:t>CP Lecture Series</a:t>
+            </a:r>
+            <a:pPr algn="r" indent="0" marL="0">
+              <a:buNone/>
+            </a:pPr>
+            <a:r>
+              <a:rPr lang="en-US" sz="850" dirty="0">
+                <a:solidFill>
+                  <a:srgbClr val="DCE4EC"/>
+                </a:solidFill>
+                <a:latin typeface="Calibri" pitchFamily="34" charset="0"/>
+                <a:ea typeface="Calibri" pitchFamily="34" charset="-122"/>
+                <a:cs typeface="Calibri" pitchFamily="34" charset="-120"/>
+              </a:rPr>
+              <a:t>   ·   </a:t>
+            </a:r>
+            <a:pPr algn="r" indent="0" marL="0">
+              <a:buNone/>
+            </a:pPr>
+            <a:r>
+              <a:rPr lang="en-US" sz="850" b="1" dirty="0">
+                <a:solidFill>
+                  <a:srgbClr val="1565C0"/>
+                </a:solidFill>
+                <a:latin typeface="Calibri" pitchFamily="34" charset="0"/>
+                <a:ea typeface="Calibri" pitchFamily="34" charset="-122"/>
+                <a:cs typeface="Calibri" pitchFamily="34" charset="-120"/>
+              </a:rPr>
+              <a:t>18</a:t>
+            </a:r>
+            <a:endParaRPr lang="en-US" sz="850" dirty="0"/>
+          </a:p>
+        </p:txBody>
+      </p:sp>
+    </p:spTree>
+  </p:cSld>
+  <p:clrMapOvr>
+    <a:masterClrMapping/>
+  </p:clrMapOvr>
+</p:sld>
+</file>
+
+<file path=ppt/slides/slide22.xml><?xml version="1.0" encoding="utf-8"?>
+<p:sld xmlns:a="http://schemas.openxmlformats.org/drawingml/2006/main" xmlns:r="http://schemas.openxmlformats.org/officeDocument/2006/relationships" xmlns:p="http://schemas.openxmlformats.org/presentationml/2006/main">
+  <p:cSld name="Slide 22">
+    <p:bg>
+      <p:bgPr>
+        <a:solidFill>
+          <a:srgbClr val="FFFFFF"/>
+        </a:solidFill>
+      </p:bgPr>
+    </p:bg>
+    <p:spTree>
+      <p:nvGrpSpPr>
+        <p:cNvPr id="1" name=""/>
+        <p:cNvGrpSpPr/>
+        <p:nvPr/>
+      </p:nvGrpSpPr>
+      <p:grpSpPr>
+        <a:xfrm>
+          <a:off x="0" y="0"/>
+          <a:ext cx="0" cy="0"/>
+          <a:chOff x="0" y="0"/>
+          <a:chExt cx="0" cy="0"/>
+        </a:xfrm>
+      </p:grpSpPr>
+      <p:sp>
+        <p:nvSpPr>
+          <p:cNvPr id="2" name="Text 0"/>
+          <p:cNvSpPr/>
+          <p:nvPr/>
+        </p:nvSpPr>
+        <p:spPr>
+          <a:xfrm>
+            <a:off x="566928" y="329184"/>
+            <a:ext cx="10515600" cy="310896"/>
+          </a:xfrm>
+          <a:prstGeom prst="rect">
+            <a:avLst/>
+          </a:prstGeom>
+          <a:noFill/>
+          <a:ln/>
+        </p:spPr>
+        <p:txBody>
+          <a:bodyPr wrap="square" lIns="0" tIns="0" rIns="0" bIns="0" rtlCol="0" anchor="ctr"/>
+          <a:lstStyle/>
+          <a:p>
+            <a:pPr algn="l" indent="0" marL="0">
+              <a:buNone/>
+            </a:pPr>
+            <a:r>
+              <a:rPr lang="en-US" sz="1100" b="1" spc="150" kern="0" dirty="0">
+                <a:solidFill>
+                  <a:srgbClr val="1565C0"/>
+                </a:solidFill>
+                <a:latin typeface="Calibri" pitchFamily="34" charset="0"/>
+                <a:ea typeface="Calibri" pitchFamily="34" charset="-122"/>
+                <a:cs typeface="Calibri" pitchFamily="34" charset="-120"/>
+              </a:rPr>
+              <a:t>CLINICAL CHEMISTRY   ·   BOARD REVIEW  ·  Q3</a:t>
+            </a:r>
+            <a:endParaRPr lang="en-US" sz="1100" dirty="0"/>
+          </a:p>
+        </p:txBody>
+      </p:sp>
+      <p:sp>
+        <p:nvSpPr>
+          <p:cNvPr id="3" name="Text 1"/>
+          <p:cNvSpPr/>
+          <p:nvPr/>
+        </p:nvSpPr>
+        <p:spPr>
+          <a:xfrm>
+            <a:off x="566928" y="713232"/>
+            <a:ext cx="11064240" cy="749808"/>
+          </a:xfrm>
+          <a:prstGeom prst="rect">
+            <a:avLst/>
+          </a:prstGeom>
+          <a:noFill/>
+          <a:ln/>
+        </p:spPr>
+        <p:txBody>
+          <a:bodyPr wrap="square" lIns="0" tIns="0" rIns="0" bIns="0" rtlCol="0" anchor="ctr"/>
+          <a:lstStyle/>
+          <a:p>
+            <a:pPr algn="l" indent="0" marL="0">
+              <a:buNone/>
+            </a:pPr>
+            <a:r>
+              <a:rPr lang="en-US" sz="2600" b="1" dirty="0">
+                <a:solidFill>
+                  <a:srgbClr val="0E3A5F"/>
+                </a:solidFill>
+                <a:latin typeface="Calibri" pitchFamily="34" charset="0"/>
+                <a:ea typeface="Calibri" pitchFamily="34" charset="-122"/>
+                <a:cs typeface="Calibri" pitchFamily="34" charset="-120"/>
+              </a:rPr>
+              <a:t>Board-Style Review</a:t>
+            </a:r>
+            <a:endParaRPr lang="en-US" sz="2600" dirty="0"/>
+          </a:p>
+        </p:txBody>
+      </p:sp>
+      <p:sp>
+        <p:nvSpPr>
+          <p:cNvPr id="4" name="Text 2"/>
+          <p:cNvSpPr/>
+          <p:nvPr/>
+        </p:nvSpPr>
+        <p:spPr>
+          <a:xfrm>
+            <a:off x="566928" y="1417320"/>
+            <a:ext cx="11057839" cy="914400"/>
+          </a:xfrm>
+          <a:prstGeom prst="rect">
+            <a:avLst/>
+          </a:prstGeom>
+          <a:noFill/>
+          <a:ln/>
+        </p:spPr>
+        <p:txBody>
+          <a:bodyPr wrap="square" lIns="0" tIns="0" rIns="0" bIns="0" rtlCol="0" anchor="t"/>
+          <a:lstStyle/>
+          <a:p>
+            <a:pPr algn="l" indent="0" marL="0">
+              <a:lnSpc>
+                <a:spcPct val="105000"/>
+              </a:lnSpc>
+              <a:buNone/>
+            </a:pPr>
+            <a:r>
+              <a:rPr lang="en-US" sz="1450" b="1" dirty="0">
+                <a:solidFill>
+                  <a:srgbClr val="1B2A38"/>
+                </a:solidFill>
+                <a:latin typeface="Calibri" pitchFamily="34" charset="0"/>
+                <a:ea typeface="Calibri" pitchFamily="34" charset="-122"/>
+                <a:cs typeface="Calibri" pitchFamily="34" charset="-120"/>
+              </a:rPr>
+              <a:t>A laboratory-developed test (not FDA-cleared) requires which before clinical use?</a:t>
+            </a:r>
+            <a:endParaRPr lang="en-US" sz="1450" dirty="0"/>
+          </a:p>
+        </p:txBody>
+      </p:sp>
+      <p:sp>
+        <p:nvSpPr>
+          <p:cNvPr id="5" name="Text 3"/>
+          <p:cNvSpPr/>
+          <p:nvPr/>
+        </p:nvSpPr>
+        <p:spPr>
+          <a:xfrm>
+            <a:off x="658368" y="2395728"/>
+            <a:ext cx="6192390" cy="3017520"/>
+          </a:xfrm>
+          <a:prstGeom prst="rect">
+            <a:avLst/>
+          </a:prstGeom>
+          <a:noFill/>
+          <a:ln/>
+        </p:spPr>
+        <p:txBody>
+          <a:bodyPr wrap="square" lIns="0" tIns="0" rIns="0" bIns="0" rtlCol="0" anchor="t"/>
+          <a:lstStyle/>
+          <a:p>
+            <a:pPr algn="l" indent="0" marL="0">
+              <a:spcAft>
+                <a:spcPts val="600"/>
+              </a:spcAft>
+              <a:buNone/>
+            </a:pPr>
+            <a:r>
+              <a:rPr lang="en-US" sz="1350" dirty="0">
+                <a:solidFill>
+                  <a:srgbClr val="33444F"/>
+                </a:solidFill>
+                <a:latin typeface="Calibri" pitchFamily="34" charset="0"/>
+                <a:ea typeface="Calibri" pitchFamily="34" charset="-122"/>
+                <a:cs typeface="Calibri" pitchFamily="34" charset="-120"/>
+              </a:rPr>
+              <a:t>A. Verification of manufacturer claims only</a:t>
+            </a:r>
+            <a:endParaRPr lang="en-US" sz="1350" dirty="0"/>
+          </a:p>
+          <a:p>
+            <a:pPr algn="l" indent="0" marL="0">
+              <a:spcAft>
+                <a:spcPts val="600"/>
+              </a:spcAft>
+              <a:buNone/>
+            </a:pPr>
+            <a:r>
+              <a:rPr lang="en-US" sz="1350" b="1" dirty="0">
+                <a:solidFill>
+                  <a:srgbClr val="0D4A92"/>
+                </a:solidFill>
+                <a:latin typeface="Calibri" pitchFamily="34" charset="0"/>
+                <a:ea typeface="Calibri" pitchFamily="34" charset="-122"/>
+                <a:cs typeface="Calibri" pitchFamily="34" charset="-120"/>
+              </a:rPr>
+              <a:t>B. Full validation of accuracy, precision, sensitivity, specificity, linearity, reference interval</a:t>
+            </a:r>
+            <a:endParaRPr lang="en-US" sz="1350" dirty="0"/>
+          </a:p>
+          <a:p>
+            <a:pPr algn="l" indent="0" marL="0">
+              <a:spcAft>
+                <a:spcPts val="600"/>
+              </a:spcAft>
+              <a:buNone/>
+            </a:pPr>
+            <a:r>
+              <a:rPr lang="en-US" sz="1350" dirty="0">
+                <a:solidFill>
+                  <a:srgbClr val="33444F"/>
+                </a:solidFill>
+                <a:latin typeface="Calibri" pitchFamily="34" charset="0"/>
+                <a:ea typeface="Calibri" pitchFamily="34" charset="-122"/>
+                <a:cs typeface="Calibri" pitchFamily="34" charset="-120"/>
+              </a:rPr>
+              <a:t>C. No additional study</a:t>
+            </a:r>
+            <a:endParaRPr lang="en-US" sz="1350" dirty="0"/>
+          </a:p>
+          <a:p>
+            <a:pPr algn="l" indent="0" marL="0">
+              <a:spcAft>
+                <a:spcPts val="600"/>
+              </a:spcAft>
+              <a:buNone/>
+            </a:pPr>
+            <a:r>
+              <a:rPr lang="en-US" sz="1350" dirty="0">
+                <a:solidFill>
+                  <a:srgbClr val="33444F"/>
+                </a:solidFill>
+                <a:latin typeface="Calibri" pitchFamily="34" charset="0"/>
+                <a:ea typeface="Calibri" pitchFamily="34" charset="-122"/>
+                <a:cs typeface="Calibri" pitchFamily="34" charset="-120"/>
+              </a:rPr>
+              <a:t>D. Only a reference interval</a:t>
+            </a:r>
+            <a:endParaRPr lang="en-US" sz="1350" dirty="0"/>
+          </a:p>
+          <a:p>
+            <a:pPr algn="l" indent="0" marL="0">
+              <a:spcAft>
+                <a:spcPts val="600"/>
+              </a:spcAft>
+              <a:buNone/>
+            </a:pPr>
+            <a:r>
+              <a:rPr lang="en-US" sz="1350" dirty="0">
+                <a:solidFill>
+                  <a:srgbClr val="33444F"/>
+                </a:solidFill>
+                <a:latin typeface="Calibri" pitchFamily="34" charset="0"/>
+                <a:ea typeface="Calibri" pitchFamily="34" charset="-122"/>
+                <a:cs typeface="Calibri" pitchFamily="34" charset="-120"/>
+              </a:rPr>
+              <a:t>E. Only proficiency testing</a:t>
+            </a:r>
+            <a:endParaRPr lang="en-US" sz="1350" dirty="0"/>
+          </a:p>
+        </p:txBody>
+      </p:sp>
+      <p:sp>
+        <p:nvSpPr>
+          <p:cNvPr id="6" name="Shape 4"/>
+          <p:cNvSpPr/>
+          <p:nvPr/>
+        </p:nvSpPr>
+        <p:spPr>
+          <a:xfrm>
+            <a:off x="7201632" y="2395728"/>
+            <a:ext cx="4423136" cy="3246120"/>
+          </a:xfrm>
+          <a:prstGeom prst="roundRect">
+            <a:avLst>
+              <a:gd name="adj" fmla="val 2535"/>
+            </a:avLst>
+          </a:prstGeom>
+          <a:solidFill>
+            <a:srgbClr val="E7EFFA"/>
+          </a:solidFill>
+          <a:ln/>
+          <a:effectLst>
+            <a:outerShdw sx="100000" sy="100000" kx="0" ky="0" algn="bl" rotWithShape="0" blurRad="88900" dist="25400" dir="5400000">
+              <a:srgbClr val="22303C">
+                <a:alpha val="12000"/>
+              </a:srgbClr>
+            </a:outerShdw>
+          </a:effectLst>
+        </p:spPr>
+      </p:sp>
+      <p:sp>
+        <p:nvSpPr>
+          <p:cNvPr id="7" name="Text 5"/>
+          <p:cNvSpPr/>
+          <p:nvPr/>
+        </p:nvSpPr>
+        <p:spPr>
+          <a:xfrm>
+            <a:off x="7439376" y="2578608"/>
+            <a:ext cx="3965936" cy="457200"/>
+          </a:xfrm>
+          <a:prstGeom prst="rect">
+            <a:avLst/>
+          </a:prstGeom>
+          <a:noFill/>
+          <a:ln/>
+        </p:spPr>
+        <p:txBody>
+          <a:bodyPr wrap="square" lIns="0" tIns="0" rIns="0" bIns="0" rtlCol="0" anchor="ctr"/>
+          <a:lstStyle/>
+          <a:p>
+            <a:pPr indent="0" marL="0">
+              <a:buNone/>
+            </a:pPr>
+            <a:r>
+              <a:rPr lang="en-US" sz="1500" b="1" dirty="0">
+                <a:solidFill>
+                  <a:srgbClr val="1565C0"/>
+                </a:solidFill>
+                <a:latin typeface="Calibri" pitchFamily="34" charset="0"/>
+                <a:ea typeface="Calibri" pitchFamily="34" charset="-122"/>
+                <a:cs typeface="Calibri" pitchFamily="34" charset="-120"/>
+              </a:rPr>
+              <a:t>ANSWER  </a:t>
+            </a:r>
+            <a:pPr indent="0" marL="0">
+              <a:buNone/>
+            </a:pPr>
+            <a:r>
+              <a:rPr lang="en-US" sz="1500" b="1" dirty="0">
+                <a:solidFill>
+                  <a:srgbClr val="1B2A38"/>
+                </a:solidFill>
+                <a:latin typeface="Calibri" pitchFamily="34" charset="0"/>
+                <a:ea typeface="Calibri" pitchFamily="34" charset="-122"/>
+                <a:cs typeface="Calibri" pitchFamily="34" charset="-120"/>
+              </a:rPr>
+              <a:t>B — Full validation</a:t>
+            </a:r>
+            <a:endParaRPr lang="en-US" sz="1500" dirty="0"/>
+          </a:p>
+        </p:txBody>
+      </p:sp>
+      <p:sp>
+        <p:nvSpPr>
+          <p:cNvPr id="8" name="Text 6"/>
+          <p:cNvSpPr/>
+          <p:nvPr/>
+        </p:nvSpPr>
+        <p:spPr>
+          <a:xfrm>
+            <a:off x="7439376" y="3127248"/>
+            <a:ext cx="3947648" cy="2377440"/>
+          </a:xfrm>
+          <a:prstGeom prst="rect">
+            <a:avLst/>
+          </a:prstGeom>
+          <a:noFill/>
+          <a:ln/>
+        </p:spPr>
+        <p:txBody>
+          <a:bodyPr wrap="square" lIns="0" tIns="0" rIns="0" bIns="0" rtlCol="0" anchor="t"/>
+          <a:lstStyle/>
+          <a:p>
+            <a:pPr algn="l" indent="0" marL="0">
+              <a:lnSpc>
+                <a:spcPct val="108000"/>
+              </a:lnSpc>
+              <a:buNone/>
+            </a:pPr>
+            <a:r>
+              <a:rPr lang="en-US" sz="1250" dirty="0">
+                <a:solidFill>
+                  <a:srgbClr val="33444F"/>
+                </a:solidFill>
+                <a:latin typeface="Calibri" pitchFamily="34" charset="0"/>
+                <a:ea typeface="Calibri" pitchFamily="34" charset="-122"/>
+                <a:cs typeface="Calibri" pitchFamily="34" charset="-120"/>
+              </a:rPr>
+              <a:t>FDA-cleared assays require verification; laboratory-developed tests require full validation of all performance characteristics.</a:t>
+            </a:r>
+            <a:endParaRPr lang="en-US" sz="1250" dirty="0"/>
+          </a:p>
+        </p:txBody>
+      </p:sp>
+      <p:sp>
+        <p:nvSpPr>
+          <p:cNvPr id="9" name="Text 7"/>
+          <p:cNvSpPr/>
+          <p:nvPr/>
+        </p:nvSpPr>
+        <p:spPr>
+          <a:xfrm>
+            <a:off x="566928" y="6473952"/>
+            <a:ext cx="7772400" cy="274320"/>
+          </a:xfrm>
+          <a:prstGeom prst="rect">
+            <a:avLst/>
+          </a:prstGeom>
+          <a:noFill/>
+          <a:ln/>
+        </p:spPr>
+        <p:txBody>
+          <a:bodyPr wrap="square" lIns="0" tIns="0" rIns="0" bIns="0" rtlCol="0" anchor="ctr"/>
+          <a:lstStyle/>
+          <a:p>
+            <a:pPr algn="l" indent="0" marL="0">
+              <a:buNone/>
+            </a:pPr>
+            <a:r>
+              <a:rPr lang="en-US" sz="850" dirty="0">
+                <a:solidFill>
+                  <a:srgbClr val="9AA8B4"/>
+                </a:solidFill>
+                <a:latin typeface="Calibri" pitchFamily="34" charset="0"/>
+                <a:ea typeface="Calibri" pitchFamily="34" charset="-122"/>
+                <a:cs typeface="Calibri" pitchFamily="34" charset="-120"/>
+              </a:rPr>
+              <a:t>Makassed General Hospital  ·  Department of Laboratory Medicine</a:t>
+            </a:r>
+            <a:endParaRPr lang="en-US" sz="850" dirty="0"/>
+          </a:p>
+        </p:txBody>
+      </p:sp>
+      <p:sp>
+        <p:nvSpPr>
+          <p:cNvPr id="10" name="Text 8"/>
+          <p:cNvSpPr/>
+          <p:nvPr/>
+        </p:nvSpPr>
+        <p:spPr>
+          <a:xfrm>
+            <a:off x="9814255" y="6473952"/>
+            <a:ext cx="1828800" cy="274320"/>
+          </a:xfrm>
+          <a:prstGeom prst="rect">
+            <a:avLst/>
+          </a:prstGeom>
+          <a:noFill/>
+          <a:ln/>
+        </p:spPr>
+        <p:txBody>
+          <a:bodyPr wrap="square" lIns="0" tIns="0" rIns="0" bIns="0" rtlCol="0" anchor="ctr"/>
+          <a:lstStyle/>
+          <a:p>
+            <a:pPr algn="r" indent="0" marL="0">
+              <a:buNone/>
+            </a:pPr>
+            <a:r>
+              <a:rPr lang="en-US" sz="850" dirty="0">
+                <a:solidFill>
+                  <a:srgbClr val="9AA8B4"/>
+                </a:solidFill>
+                <a:latin typeface="Calibri" pitchFamily="34" charset="0"/>
+                <a:ea typeface="Calibri" pitchFamily="34" charset="-122"/>
+                <a:cs typeface="Calibri" pitchFamily="34" charset="-120"/>
+              </a:rPr>
+              <a:t>CP Lecture Series</a:t>
+            </a:r>
+            <a:pPr algn="r" indent="0" marL="0">
+              <a:buNone/>
+            </a:pPr>
+            <a:r>
+              <a:rPr lang="en-US" sz="850" dirty="0">
+                <a:solidFill>
+                  <a:srgbClr val="DCE4EC"/>
+                </a:solidFill>
+                <a:latin typeface="Calibri" pitchFamily="34" charset="0"/>
+                <a:ea typeface="Calibri" pitchFamily="34" charset="-122"/>
+                <a:cs typeface="Calibri" pitchFamily="34" charset="-120"/>
+              </a:rPr>
+              <a:t>   ·   </a:t>
+            </a:r>
+            <a:pPr algn="r" indent="0" marL="0">
+              <a:buNone/>
+            </a:pPr>
+            <a:r>
+              <a:rPr lang="en-US" sz="850" b="1" dirty="0">
+                <a:solidFill>
+                  <a:srgbClr val="1565C0"/>
+                </a:solidFill>
+                <a:latin typeface="Calibri" pitchFamily="34" charset="0"/>
+                <a:ea typeface="Calibri" pitchFamily="34" charset="-122"/>
+                <a:cs typeface="Calibri" pitchFamily="34" charset="-120"/>
+              </a:rPr>
+              <a:t>19</a:t>
+            </a:r>
+            <a:endParaRPr lang="en-US" sz="850" dirty="0"/>
+          </a:p>
+        </p:txBody>
+      </p:sp>
+    </p:spTree>
+  </p:cSld>
+  <p:clrMapOvr>
+    <a:masterClrMapping/>
+  </p:clrMapOvr>
+</p:sld>
+</file>
+
+<file path=ppt/slides/slide23.xml><?xml version="1.0" encoding="utf-8"?>
+<p:sld xmlns:a="http://schemas.openxmlformats.org/drawingml/2006/main" xmlns:r="http://schemas.openxmlformats.org/officeDocument/2006/relationships" xmlns:p="http://schemas.openxmlformats.org/presentationml/2006/main">
+  <p:cSld name="Slide 23">
+    <p:bg>
+      <p:bgPr>
+        <a:solidFill>
+          <a:srgbClr val="FFFFFF"/>
+        </a:solidFill>
+      </p:bgPr>
+    </p:bg>
+    <p:spTree>
+      <p:nvGrpSpPr>
+        <p:cNvPr id="1" name=""/>
+        <p:cNvGrpSpPr/>
+        <p:nvPr/>
+      </p:nvGrpSpPr>
+      <p:grpSpPr>
+        <a:xfrm>
+          <a:off x="0" y="0"/>
+          <a:ext cx="0" cy="0"/>
+          <a:chOff x="0" y="0"/>
+          <a:chExt cx="0" cy="0"/>
+        </a:xfrm>
+      </p:grpSpPr>
+      <p:sp>
+        <p:nvSpPr>
+          <p:cNvPr id="2" name="Text 0"/>
+          <p:cNvSpPr/>
+          <p:nvPr/>
+        </p:nvSpPr>
+        <p:spPr>
+          <a:xfrm>
+            <a:off x="566928" y="329184"/>
+            <a:ext cx="10515600" cy="310896"/>
+          </a:xfrm>
+          <a:prstGeom prst="rect">
+            <a:avLst/>
+          </a:prstGeom>
+          <a:noFill/>
+          <a:ln/>
+        </p:spPr>
+        <p:txBody>
+          <a:bodyPr wrap="square" lIns="0" tIns="0" rIns="0" bIns="0" rtlCol="0" anchor="ctr"/>
+          <a:lstStyle/>
+          <a:p>
+            <a:pPr algn="l" indent="0" marL="0">
+              <a:buNone/>
+            </a:pPr>
+            <a:r>
+              <a:rPr lang="en-US" sz="1100" b="1" spc="150" kern="0" dirty="0">
+                <a:solidFill>
+                  <a:srgbClr val="1565C0"/>
+                </a:solidFill>
+                <a:latin typeface="Calibri" pitchFamily="34" charset="0"/>
+                <a:ea typeface="Calibri" pitchFamily="34" charset="-122"/>
+                <a:cs typeface="Calibri" pitchFamily="34" charset="-120"/>
+              </a:rPr>
+              <a:t>CLINICAL CHEMISTRY   ·   BOARD REVIEW  ·  Q4</a:t>
+            </a:r>
+            <a:endParaRPr lang="en-US" sz="1100" dirty="0"/>
+          </a:p>
+        </p:txBody>
+      </p:sp>
+      <p:sp>
+        <p:nvSpPr>
+          <p:cNvPr id="3" name="Text 1"/>
+          <p:cNvSpPr/>
+          <p:nvPr/>
+        </p:nvSpPr>
+        <p:spPr>
+          <a:xfrm>
+            <a:off x="566928" y="713232"/>
+            <a:ext cx="11064240" cy="749808"/>
+          </a:xfrm>
+          <a:prstGeom prst="rect">
+            <a:avLst/>
+          </a:prstGeom>
+          <a:noFill/>
+          <a:ln/>
+        </p:spPr>
+        <p:txBody>
+          <a:bodyPr wrap="square" lIns="0" tIns="0" rIns="0" bIns="0" rtlCol="0" anchor="ctr"/>
+          <a:lstStyle/>
+          <a:p>
+            <a:pPr algn="l" indent="0" marL="0">
+              <a:buNone/>
+            </a:pPr>
+            <a:r>
+              <a:rPr lang="en-US" sz="2600" b="1" dirty="0">
+                <a:solidFill>
+                  <a:srgbClr val="0E3A5F"/>
+                </a:solidFill>
+                <a:latin typeface="Calibri" pitchFamily="34" charset="0"/>
+                <a:ea typeface="Calibri" pitchFamily="34" charset="-122"/>
+                <a:cs typeface="Calibri" pitchFamily="34" charset="-120"/>
+              </a:rPr>
+              <a:t>Board-Style Review</a:t>
+            </a:r>
+            <a:endParaRPr lang="en-US" sz="2600" dirty="0"/>
+          </a:p>
+        </p:txBody>
+      </p:sp>
+      <p:sp>
+        <p:nvSpPr>
+          <p:cNvPr id="4" name="Text 2"/>
+          <p:cNvSpPr/>
+          <p:nvPr/>
+        </p:nvSpPr>
+        <p:spPr>
+          <a:xfrm>
+            <a:off x="566928" y="1417320"/>
+            <a:ext cx="11057839" cy="914400"/>
+          </a:xfrm>
+          <a:prstGeom prst="rect">
+            <a:avLst/>
+          </a:prstGeom>
+          <a:noFill/>
+          <a:ln/>
+        </p:spPr>
+        <p:txBody>
+          <a:bodyPr wrap="square" lIns="0" tIns="0" rIns="0" bIns="0" rtlCol="0" anchor="t"/>
+          <a:lstStyle/>
+          <a:p>
+            <a:pPr algn="l" indent="0" marL="0">
+              <a:lnSpc>
+                <a:spcPct val="105000"/>
+              </a:lnSpc>
+              <a:buNone/>
+            </a:pPr>
+            <a:r>
+              <a:rPr lang="en-US" sz="1450" b="1" dirty="0">
+                <a:solidFill>
+                  <a:srgbClr val="1B2A38"/>
+                </a:solidFill>
+                <a:latin typeface="Calibri" pitchFamily="34" charset="0"/>
+                <a:ea typeface="Calibri" pitchFamily="34" charset="-122"/>
+                <a:cs typeface="Calibri" pitchFamily="34" charset="-120"/>
+              </a:rPr>
+              <a:t>A toxic phenytoin effect with a normal TOTAL level in a hypoalbuminemic patient is best explained by:</a:t>
+            </a:r>
+            <a:endParaRPr lang="en-US" sz="1450" dirty="0"/>
+          </a:p>
+        </p:txBody>
+      </p:sp>
+      <p:sp>
+        <p:nvSpPr>
+          <p:cNvPr id="5" name="Text 3"/>
+          <p:cNvSpPr/>
+          <p:nvPr/>
+        </p:nvSpPr>
+        <p:spPr>
+          <a:xfrm>
+            <a:off x="658368" y="2395728"/>
+            <a:ext cx="6192390" cy="3017520"/>
+          </a:xfrm>
+          <a:prstGeom prst="rect">
+            <a:avLst/>
+          </a:prstGeom>
+          <a:noFill/>
+          <a:ln/>
+        </p:spPr>
+        <p:txBody>
+          <a:bodyPr wrap="square" lIns="0" tIns="0" rIns="0" bIns="0" rtlCol="0" anchor="t"/>
+          <a:lstStyle/>
+          <a:p>
+            <a:pPr algn="l" indent="0" marL="0">
+              <a:spcAft>
+                <a:spcPts val="600"/>
+              </a:spcAft>
+              <a:buNone/>
+            </a:pPr>
+            <a:r>
+              <a:rPr lang="en-US" sz="1350" dirty="0">
+                <a:solidFill>
+                  <a:srgbClr val="33444F"/>
+                </a:solidFill>
+                <a:latin typeface="Calibri" pitchFamily="34" charset="0"/>
+                <a:ea typeface="Calibri" pitchFamily="34" charset="-122"/>
+                <a:cs typeface="Calibri" pitchFamily="34" charset="-120"/>
+              </a:rPr>
+              <a:t>A. Assay interference</a:t>
+            </a:r>
+            <a:endParaRPr lang="en-US" sz="1350" dirty="0"/>
+          </a:p>
+          <a:p>
+            <a:pPr algn="l" indent="0" marL="0">
+              <a:spcAft>
+                <a:spcPts val="600"/>
+              </a:spcAft>
+              <a:buNone/>
+            </a:pPr>
+            <a:r>
+              <a:rPr lang="en-US" sz="1350" b="1" dirty="0">
+                <a:solidFill>
+                  <a:srgbClr val="0D4A92"/>
+                </a:solidFill>
+                <a:latin typeface="Calibri" pitchFamily="34" charset="0"/>
+                <a:ea typeface="Calibri" pitchFamily="34" charset="-122"/>
+                <a:cs typeface="Calibri" pitchFamily="34" charset="-120"/>
+              </a:rPr>
+              <a:t>B. Elevated FREE (unbound) phenytoin</a:t>
+            </a:r>
+            <a:endParaRPr lang="en-US" sz="1350" dirty="0"/>
+          </a:p>
+          <a:p>
+            <a:pPr algn="l" indent="0" marL="0">
+              <a:spcAft>
+                <a:spcPts val="600"/>
+              </a:spcAft>
+              <a:buNone/>
+            </a:pPr>
+            <a:r>
+              <a:rPr lang="en-US" sz="1350" dirty="0">
+                <a:solidFill>
+                  <a:srgbClr val="33444F"/>
+                </a:solidFill>
+                <a:latin typeface="Calibri" pitchFamily="34" charset="0"/>
+                <a:ea typeface="Calibri" pitchFamily="34" charset="-122"/>
+                <a:cs typeface="Calibri" pitchFamily="34" charset="-120"/>
+              </a:rPr>
+              <a:t>C. Hook effect</a:t>
+            </a:r>
+            <a:endParaRPr lang="en-US" sz="1350" dirty="0"/>
+          </a:p>
+          <a:p>
+            <a:pPr algn="l" indent="0" marL="0">
+              <a:spcAft>
+                <a:spcPts val="600"/>
+              </a:spcAft>
+              <a:buNone/>
+            </a:pPr>
+            <a:r>
+              <a:rPr lang="en-US" sz="1350" dirty="0">
+                <a:solidFill>
+                  <a:srgbClr val="33444F"/>
+                </a:solidFill>
+                <a:latin typeface="Calibri" pitchFamily="34" charset="0"/>
+                <a:ea typeface="Calibri" pitchFamily="34" charset="-122"/>
+                <a:cs typeface="Calibri" pitchFamily="34" charset="-120"/>
+              </a:rPr>
+              <a:t>D. Wrong sampling time</a:t>
+            </a:r>
+            <a:endParaRPr lang="en-US" sz="1350" dirty="0"/>
+          </a:p>
+          <a:p>
+            <a:pPr algn="l" indent="0" marL="0">
+              <a:spcAft>
+                <a:spcPts val="600"/>
+              </a:spcAft>
+              <a:buNone/>
+            </a:pPr>
+            <a:r>
+              <a:rPr lang="en-US" sz="1350" dirty="0">
+                <a:solidFill>
+                  <a:srgbClr val="33444F"/>
+                </a:solidFill>
+                <a:latin typeface="Calibri" pitchFamily="34" charset="0"/>
+                <a:ea typeface="Calibri" pitchFamily="34" charset="-122"/>
+                <a:cs typeface="Calibri" pitchFamily="34" charset="-120"/>
+              </a:rPr>
+              <a:t>E. Macro-analyte</a:t>
+            </a:r>
+            <a:endParaRPr lang="en-US" sz="1350" dirty="0"/>
+          </a:p>
+        </p:txBody>
+      </p:sp>
+      <p:sp>
+        <p:nvSpPr>
+          <p:cNvPr id="6" name="Shape 4"/>
+          <p:cNvSpPr/>
+          <p:nvPr/>
+        </p:nvSpPr>
+        <p:spPr>
+          <a:xfrm>
+            <a:off x="7201632" y="2395728"/>
+            <a:ext cx="4423136" cy="3246120"/>
+          </a:xfrm>
+          <a:prstGeom prst="roundRect">
+            <a:avLst>
+              <a:gd name="adj" fmla="val 2535"/>
+            </a:avLst>
+          </a:prstGeom>
+          <a:solidFill>
+            <a:srgbClr val="E7EFFA"/>
+          </a:solidFill>
+          <a:ln/>
+          <a:effectLst>
+            <a:outerShdw sx="100000" sy="100000" kx="0" ky="0" algn="bl" rotWithShape="0" blurRad="88900" dist="25400" dir="5400000">
+              <a:srgbClr val="22303C">
+                <a:alpha val="12000"/>
+              </a:srgbClr>
+            </a:outerShdw>
+          </a:effectLst>
+        </p:spPr>
+      </p:sp>
+      <p:sp>
+        <p:nvSpPr>
+          <p:cNvPr id="7" name="Text 5"/>
+          <p:cNvSpPr/>
+          <p:nvPr/>
+        </p:nvSpPr>
+        <p:spPr>
+          <a:xfrm>
+            <a:off x="7439376" y="2578608"/>
+            <a:ext cx="3965936" cy="457200"/>
+          </a:xfrm>
+          <a:prstGeom prst="rect">
+            <a:avLst/>
+          </a:prstGeom>
+          <a:noFill/>
+          <a:ln/>
+        </p:spPr>
+        <p:txBody>
+          <a:bodyPr wrap="square" lIns="0" tIns="0" rIns="0" bIns="0" rtlCol="0" anchor="ctr"/>
+          <a:lstStyle/>
+          <a:p>
+            <a:pPr indent="0" marL="0">
+              <a:buNone/>
+            </a:pPr>
+            <a:r>
+              <a:rPr lang="en-US" sz="1500" b="1" dirty="0">
+                <a:solidFill>
+                  <a:srgbClr val="1565C0"/>
+                </a:solidFill>
+                <a:latin typeface="Calibri" pitchFamily="34" charset="0"/>
+                <a:ea typeface="Calibri" pitchFamily="34" charset="-122"/>
+                <a:cs typeface="Calibri" pitchFamily="34" charset="-120"/>
+              </a:rPr>
+              <a:t>ANSWER  </a:t>
+            </a:r>
+            <a:pPr indent="0" marL="0">
+              <a:buNone/>
+            </a:pPr>
+            <a:r>
+              <a:rPr lang="en-US" sz="1500" b="1" dirty="0">
+                <a:solidFill>
+                  <a:srgbClr val="1B2A38"/>
+                </a:solidFill>
+                <a:latin typeface="Calibri" pitchFamily="34" charset="0"/>
+                <a:ea typeface="Calibri" pitchFamily="34" charset="-122"/>
+                <a:cs typeface="Calibri" pitchFamily="34" charset="-120"/>
+              </a:rPr>
+              <a:t>B — Elevated free phenytoin</a:t>
+            </a:r>
+            <a:endParaRPr lang="en-US" sz="1500" dirty="0"/>
+          </a:p>
+        </p:txBody>
+      </p:sp>
+      <p:sp>
+        <p:nvSpPr>
+          <p:cNvPr id="8" name="Text 6"/>
+          <p:cNvSpPr/>
+          <p:nvPr/>
+        </p:nvSpPr>
+        <p:spPr>
+          <a:xfrm>
+            <a:off x="7439376" y="3127248"/>
+            <a:ext cx="3947648" cy="2377440"/>
+          </a:xfrm>
+          <a:prstGeom prst="rect">
+            <a:avLst/>
+          </a:prstGeom>
+          <a:noFill/>
+          <a:ln/>
+        </p:spPr>
+        <p:txBody>
+          <a:bodyPr wrap="square" lIns="0" tIns="0" rIns="0" bIns="0" rtlCol="0" anchor="t"/>
+          <a:lstStyle/>
+          <a:p>
+            <a:pPr algn="l" indent="0" marL="0">
+              <a:lnSpc>
+                <a:spcPct val="108000"/>
+              </a:lnSpc>
+              <a:buNone/>
+            </a:pPr>
+            <a:r>
+              <a:rPr lang="en-US" sz="1250" dirty="0">
+                <a:solidFill>
+                  <a:srgbClr val="33444F"/>
+                </a:solidFill>
+                <a:latin typeface="Calibri" pitchFamily="34" charset="0"/>
+                <a:ea typeface="Calibri" pitchFamily="34" charset="-122"/>
+                <a:cs typeface="Calibri" pitchFamily="34" charset="-120"/>
+              </a:rPr>
+              <a:t>Low albumin raises the unbound active fraction; total level underestimates the effective concentration. Measure free phenytoin.</a:t>
+            </a:r>
+            <a:endParaRPr lang="en-US" sz="1250" dirty="0"/>
+          </a:p>
+        </p:txBody>
+      </p:sp>
+      <p:sp>
+        <p:nvSpPr>
+          <p:cNvPr id="9" name="Text 7"/>
+          <p:cNvSpPr/>
+          <p:nvPr/>
+        </p:nvSpPr>
+        <p:spPr>
+          <a:xfrm>
+            <a:off x="566928" y="6473952"/>
+            <a:ext cx="7772400" cy="274320"/>
+          </a:xfrm>
+          <a:prstGeom prst="rect">
+            <a:avLst/>
+          </a:prstGeom>
+          <a:noFill/>
+          <a:ln/>
+        </p:spPr>
+        <p:txBody>
+          <a:bodyPr wrap="square" lIns="0" tIns="0" rIns="0" bIns="0" rtlCol="0" anchor="ctr"/>
+          <a:lstStyle/>
+          <a:p>
+            <a:pPr algn="l" indent="0" marL="0">
+              <a:buNone/>
+            </a:pPr>
+            <a:r>
+              <a:rPr lang="en-US" sz="850" dirty="0">
+                <a:solidFill>
+                  <a:srgbClr val="9AA8B4"/>
+                </a:solidFill>
+                <a:latin typeface="Calibri" pitchFamily="34" charset="0"/>
+                <a:ea typeface="Calibri" pitchFamily="34" charset="-122"/>
+                <a:cs typeface="Calibri" pitchFamily="34" charset="-120"/>
+              </a:rPr>
+              <a:t>Makassed General Hospital  ·  Department of Laboratory Medicine</a:t>
+            </a:r>
+            <a:endParaRPr lang="en-US" sz="850" dirty="0"/>
+          </a:p>
+        </p:txBody>
+      </p:sp>
+      <p:sp>
+        <p:nvSpPr>
+          <p:cNvPr id="10" name="Text 8"/>
+          <p:cNvSpPr/>
+          <p:nvPr/>
+        </p:nvSpPr>
+        <p:spPr>
+          <a:xfrm>
+            <a:off x="9814255" y="6473952"/>
+            <a:ext cx="1828800" cy="274320"/>
+          </a:xfrm>
+          <a:prstGeom prst="rect">
+            <a:avLst/>
+          </a:prstGeom>
+          <a:noFill/>
+          <a:ln/>
+        </p:spPr>
+        <p:txBody>
+          <a:bodyPr wrap="square" lIns="0" tIns="0" rIns="0" bIns="0" rtlCol="0" anchor="ctr"/>
+          <a:lstStyle/>
+          <a:p>
+            <a:pPr algn="r" indent="0" marL="0">
+              <a:buNone/>
+            </a:pPr>
+            <a:r>
+              <a:rPr lang="en-US" sz="850" dirty="0">
+                <a:solidFill>
+                  <a:srgbClr val="9AA8B4"/>
+                </a:solidFill>
+                <a:latin typeface="Calibri" pitchFamily="34" charset="0"/>
+                <a:ea typeface="Calibri" pitchFamily="34" charset="-122"/>
+                <a:cs typeface="Calibri" pitchFamily="34" charset="-120"/>
+              </a:rPr>
+              <a:t>CP Lecture Series</a:t>
+            </a:r>
+            <a:pPr algn="r" indent="0" marL="0">
+              <a:buNone/>
+            </a:pPr>
+            <a:r>
+              <a:rPr lang="en-US" sz="850" dirty="0">
+                <a:solidFill>
+                  <a:srgbClr val="DCE4EC"/>
+                </a:solidFill>
+                <a:latin typeface="Calibri" pitchFamily="34" charset="0"/>
+                <a:ea typeface="Calibri" pitchFamily="34" charset="-122"/>
+                <a:cs typeface="Calibri" pitchFamily="34" charset="-120"/>
+              </a:rPr>
+              <a:t>   ·   </a:t>
+            </a:r>
+            <a:pPr algn="r" indent="0" marL="0">
+              <a:buNone/>
+            </a:pPr>
+            <a:r>
+              <a:rPr lang="en-US" sz="850" b="1" dirty="0">
+                <a:solidFill>
+                  <a:srgbClr val="1565C0"/>
+                </a:solidFill>
+                <a:latin typeface="Calibri" pitchFamily="34" charset="0"/>
+                <a:ea typeface="Calibri" pitchFamily="34" charset="-122"/>
+                <a:cs typeface="Calibri" pitchFamily="34" charset="-120"/>
+              </a:rPr>
+              <a:t>20</a:t>
+            </a:r>
+            <a:endParaRPr lang="en-US" sz="850" dirty="0"/>
+          </a:p>
+        </p:txBody>
+      </p:sp>
+    </p:spTree>
+  </p:cSld>
+  <p:clrMapOvr>
+    <a:masterClrMapping/>
+  </p:clrMapOvr>
+</p:sld>
+</file>
+
+<file path=ppt/slides/slide24.xml><?xml version="1.0" encoding="utf-8"?>
+<p:sld xmlns:a="http://schemas.openxmlformats.org/drawingml/2006/main" xmlns:r="http://schemas.openxmlformats.org/officeDocument/2006/relationships" xmlns:p="http://schemas.openxmlformats.org/presentationml/2006/main">
+  <p:cSld name="Slide 24">
+    <p:bg>
+      <p:bgPr>
+        <a:solidFill>
+          <a:srgbClr val="0A2A45"/>
+        </a:solidFill>
+      </p:bgPr>
+    </p:bg>
+    <p:spTree>
+      <p:nvGrpSpPr>
+        <p:cNvPr id="1" name=""/>
+        <p:cNvGrpSpPr/>
+        <p:nvPr/>
+      </p:nvGrpSpPr>
+      <p:grpSpPr>
+        <a:xfrm>
+          <a:off x="0" y="0"/>
+          <a:ext cx="0" cy="0"/>
+          <a:chOff x="0" y="0"/>
+          <a:chExt cx="0" cy="0"/>
+        </a:xfrm>
+      </p:grpSpPr>
+      <p:sp>
+        <p:nvSpPr>
+          <p:cNvPr id="2" name="Text 0"/>
+          <p:cNvSpPr/>
+          <p:nvPr/>
+        </p:nvSpPr>
+        <p:spPr>
+          <a:xfrm>
+            <a:off x="566928" y="329184"/>
+            <a:ext cx="10058400" cy="310896"/>
+          </a:xfrm>
+          <a:prstGeom prst="rect">
+            <a:avLst/>
+          </a:prstGeom>
+          <a:noFill/>
+          <a:ln/>
+        </p:spPr>
+        <p:txBody>
+          <a:bodyPr wrap="square" lIns="0" tIns="0" rIns="0" bIns="0" rtlCol="0" anchor="ctr"/>
+          <a:lstStyle/>
+          <a:p>
+            <a:pPr indent="0" marL="0">
+              <a:buNone/>
+            </a:pPr>
+            <a:r>
+              <a:rPr lang="en-US" sz="1100" b="1" spc="150" kern="0" dirty="0">
+                <a:solidFill>
+                  <a:srgbClr val="1565C0"/>
+                </a:solidFill>
+                <a:latin typeface="Calibri" pitchFamily="34" charset="0"/>
+                <a:ea typeface="Calibri" pitchFamily="34" charset="-122"/>
+                <a:cs typeface="Calibri" pitchFamily="34" charset="-120"/>
+              </a:rPr>
+              <a:t>CLINICAL CHEMISTRY</a:t>
+            </a:r>
+            <a:endParaRPr lang="en-US" sz="1100" dirty="0"/>
+          </a:p>
+        </p:txBody>
+      </p:sp>
+      <p:sp>
+        <p:nvSpPr>
+          <p:cNvPr id="3" name="Text 1"/>
+          <p:cNvSpPr/>
+          <p:nvPr/>
+        </p:nvSpPr>
+        <p:spPr>
+          <a:xfrm>
+            <a:off x="566928" y="676656"/>
+            <a:ext cx="10972800" cy="749808"/>
+          </a:xfrm>
+          <a:prstGeom prst="rect">
+            <a:avLst/>
+          </a:prstGeom>
+          <a:noFill/>
+          <a:ln/>
+        </p:spPr>
+        <p:txBody>
+          <a:bodyPr wrap="square" lIns="0" tIns="0" rIns="0" bIns="0" rtlCol="0" anchor="ctr"/>
+          <a:lstStyle/>
+          <a:p>
+            <a:pPr indent="0" marL="0">
+              <a:buNone/>
+            </a:pPr>
+            <a:r>
+              <a:rPr lang="en-US" sz="3000" b="1" dirty="0">
+                <a:solidFill>
+                  <a:srgbClr val="FFFFFF"/>
+                </a:solidFill>
+                <a:latin typeface="Calibri" pitchFamily="34" charset="0"/>
+                <a:ea typeface="Calibri" pitchFamily="34" charset="-122"/>
+                <a:cs typeface="Calibri" pitchFamily="34" charset="-120"/>
+              </a:rPr>
+              <a:t>Key Take-Home Points</a:t>
+            </a:r>
+            <a:endParaRPr lang="en-US" sz="3000" dirty="0"/>
+          </a:p>
+        </p:txBody>
+      </p:sp>
+      <p:sp>
+        <p:nvSpPr>
+          <p:cNvPr id="4" name="Shape 2"/>
+          <p:cNvSpPr/>
+          <p:nvPr/>
+        </p:nvSpPr>
+        <p:spPr>
+          <a:xfrm>
+            <a:off x="566928" y="1517904"/>
+            <a:ext cx="11057839" cy="841248"/>
+          </a:xfrm>
+          <a:prstGeom prst="roundRect">
+            <a:avLst>
+              <a:gd name="adj" fmla="val 7609"/>
+            </a:avLst>
+          </a:prstGeom>
+          <a:solidFill>
+            <a:srgbClr val="143651"/>
+          </a:solidFill>
+          <a:ln/>
+        </p:spPr>
+      </p:sp>
+      <p:sp>
+        <p:nvSpPr>
+          <p:cNvPr id="5" name="Shape 3"/>
+          <p:cNvSpPr/>
+          <p:nvPr/>
+        </p:nvSpPr>
+        <p:spPr>
+          <a:xfrm>
+            <a:off x="749808" y="1755648"/>
+            <a:ext cx="365760" cy="365760"/>
+          </a:xfrm>
+          <a:prstGeom prst="ellipse">
+            <a:avLst/>
+          </a:prstGeom>
+          <a:solidFill>
+            <a:srgbClr val="1565C0"/>
+          </a:solidFill>
+          <a:ln/>
+          <a:effectLst>
+            <a:outerShdw sx="100000" sy="100000" kx="0" ky="0" algn="bl" rotWithShape="0" blurRad="88900" dist="25400" dir="5400000">
+              <a:srgbClr val="22303C">
+                <a:alpha val="12000"/>
+              </a:srgbClr>
+            </a:outerShdw>
+          </a:effectLst>
+        </p:spPr>
+      </p:sp>
+      <p:sp>
+        <p:nvSpPr>
+          <p:cNvPr id="6" name="Text 4"/>
+          <p:cNvSpPr/>
+          <p:nvPr/>
+        </p:nvSpPr>
+        <p:spPr>
+          <a:xfrm>
+            <a:off x="749808" y="1755648"/>
+            <a:ext cx="365760" cy="365760"/>
+          </a:xfrm>
+          <a:prstGeom prst="rect">
+            <a:avLst/>
+          </a:prstGeom>
+          <a:noFill/>
+          <a:ln/>
+        </p:spPr>
+        <p:txBody>
+          <a:bodyPr wrap="square" lIns="0" tIns="0" rIns="0" bIns="0" rtlCol="0" anchor="ctr"/>
+          <a:lstStyle/>
+          <a:p>
+            <a:pPr algn="ctr" indent="0" marL="0">
+              <a:buNone/>
+            </a:pPr>
+            <a:r>
+              <a:rPr lang="en-US" sz="1500" b="1" dirty="0">
+                <a:solidFill>
+                  <a:srgbClr val="FFFFFF"/>
+                </a:solidFill>
+                <a:latin typeface="Calibri" pitchFamily="34" charset="0"/>
+                <a:ea typeface="Calibri" pitchFamily="34" charset="-122"/>
+                <a:cs typeface="Calibri" pitchFamily="34" charset="-120"/>
+              </a:rPr>
+              <a:t>1</a:t>
+            </a:r>
+            <a:endParaRPr lang="en-US" sz="1500" dirty="0"/>
+          </a:p>
+        </p:txBody>
+      </p:sp>
+      <p:sp>
+        <p:nvSpPr>
+          <p:cNvPr id="7" name="Text 5"/>
+          <p:cNvSpPr/>
+          <p:nvPr/>
+        </p:nvSpPr>
+        <p:spPr>
+          <a:xfrm>
+            <a:off x="1280160" y="1517904"/>
+            <a:ext cx="10143439" cy="841248"/>
+          </a:xfrm>
+          <a:prstGeom prst="rect">
+            <a:avLst/>
+          </a:prstGeom>
+          <a:noFill/>
+          <a:ln/>
+        </p:spPr>
+        <p:txBody>
+          <a:bodyPr wrap="square" lIns="0" tIns="0" rIns="0" bIns="0" rtlCol="0" anchor="ctr"/>
+          <a:lstStyle/>
+          <a:p>
+            <a:pPr algn="l" indent="0" marL="0">
+              <a:buNone/>
+            </a:pPr>
+            <a:r>
+              <a:rPr lang="en-US" sz="1350" dirty="0">
+                <a:solidFill>
+                  <a:srgbClr val="E7EEF4"/>
+                </a:solidFill>
+                <a:latin typeface="Calibri" pitchFamily="34" charset="0"/>
+                <a:ea typeface="Calibri" pitchFamily="34" charset="-122"/>
+                <a:cs typeface="Calibri" pitchFamily="34" charset="-120"/>
+              </a:rPr>
+              <a:t>Drug screens are presumptive and cross-react; confirm consequential results by GC-MS / LC-MS/MS.</a:t>
+            </a:r>
+            <a:endParaRPr lang="en-US" sz="1350" dirty="0"/>
+          </a:p>
+        </p:txBody>
+      </p:sp>
+      <p:sp>
+        <p:nvSpPr>
+          <p:cNvPr id="8" name="Shape 6"/>
+          <p:cNvSpPr/>
+          <p:nvPr/>
+        </p:nvSpPr>
+        <p:spPr>
+          <a:xfrm>
+            <a:off x="566928" y="2505456"/>
+            <a:ext cx="11057839" cy="841248"/>
+          </a:xfrm>
+          <a:prstGeom prst="roundRect">
+            <a:avLst>
+              <a:gd name="adj" fmla="val 7609"/>
+            </a:avLst>
+          </a:prstGeom>
+          <a:solidFill>
+            <a:srgbClr val="143651"/>
+          </a:solidFill>
+          <a:ln/>
+        </p:spPr>
+      </p:sp>
+      <p:sp>
+        <p:nvSpPr>
+          <p:cNvPr id="9" name="Shape 7"/>
+          <p:cNvSpPr/>
+          <p:nvPr/>
+        </p:nvSpPr>
+        <p:spPr>
+          <a:xfrm>
+            <a:off x="749808" y="2743200"/>
+            <a:ext cx="365760" cy="365760"/>
+          </a:xfrm>
+          <a:prstGeom prst="ellipse">
+            <a:avLst/>
+          </a:prstGeom>
+          <a:solidFill>
+            <a:srgbClr val="1565C0"/>
+          </a:solidFill>
+          <a:ln/>
+          <a:effectLst>
+            <a:outerShdw sx="100000" sy="100000" kx="0" ky="0" algn="bl" rotWithShape="0" blurRad="88900" dist="25400" dir="5400000">
+              <a:srgbClr val="22303C">
+                <a:alpha val="12000"/>
+              </a:srgbClr>
+            </a:outerShdw>
+          </a:effectLst>
+        </p:spPr>
+      </p:sp>
+      <p:sp>
+        <p:nvSpPr>
+          <p:cNvPr id="10" name="Text 8"/>
+          <p:cNvSpPr/>
+          <p:nvPr/>
+        </p:nvSpPr>
+        <p:spPr>
+          <a:xfrm>
+            <a:off x="749808" y="2743200"/>
+            <a:ext cx="365760" cy="365760"/>
+          </a:xfrm>
+          <a:prstGeom prst="rect">
+            <a:avLst/>
+          </a:prstGeom>
+          <a:noFill/>
+          <a:ln/>
+        </p:spPr>
+        <p:txBody>
+          <a:bodyPr wrap="square" lIns="0" tIns="0" rIns="0" bIns="0" rtlCol="0" anchor="ctr"/>
+          <a:lstStyle/>
+          <a:p>
+            <a:pPr algn="ctr" indent="0" marL="0">
+              <a:buNone/>
+            </a:pPr>
+            <a:r>
+              <a:rPr lang="en-US" sz="1500" b="1" dirty="0">
+                <a:solidFill>
+                  <a:srgbClr val="FFFFFF"/>
+                </a:solidFill>
+                <a:latin typeface="Calibri" pitchFamily="34" charset="0"/>
+                <a:ea typeface="Calibri" pitchFamily="34" charset="-122"/>
+                <a:cs typeface="Calibri" pitchFamily="34" charset="-120"/>
+              </a:rPr>
+              <a:t>2</a:t>
+            </a:r>
+            <a:endParaRPr lang="en-US" sz="1500" dirty="0"/>
+          </a:p>
+        </p:txBody>
+      </p:sp>
+      <p:sp>
+        <p:nvSpPr>
+          <p:cNvPr id="11" name="Text 9"/>
+          <p:cNvSpPr/>
+          <p:nvPr/>
+        </p:nvSpPr>
+        <p:spPr>
+          <a:xfrm>
+            <a:off x="1280160" y="2505456"/>
+            <a:ext cx="10143439" cy="841248"/>
+          </a:xfrm>
+          <a:prstGeom prst="rect">
+            <a:avLst/>
+          </a:prstGeom>
+          <a:noFill/>
+          <a:ln/>
+        </p:spPr>
+        <p:txBody>
+          <a:bodyPr wrap="square" lIns="0" tIns="0" rIns="0" bIns="0" rtlCol="0" anchor="ctr"/>
+          <a:lstStyle/>
+          <a:p>
+            <a:pPr algn="l" indent="0" marL="0">
+              <a:buNone/>
+            </a:pPr>
+            <a:r>
+              <a:rPr lang="en-US" sz="1350" dirty="0">
+                <a:solidFill>
+                  <a:srgbClr val="E7EEF4"/>
+                </a:solidFill>
+                <a:latin typeface="Calibri" pitchFamily="34" charset="0"/>
+                <a:ea typeface="Calibri" pitchFamily="34" charset="-122"/>
+                <a:cs typeface="Calibri" pitchFamily="34" charset="-120"/>
+              </a:rPr>
+              <a:t>Standard opiate screens can miss synthetic/semisynthetic opioids — use targeted assays.</a:t>
+            </a:r>
+            <a:endParaRPr lang="en-US" sz="1350" dirty="0"/>
+          </a:p>
+        </p:txBody>
+      </p:sp>
+      <p:sp>
+        <p:nvSpPr>
+          <p:cNvPr id="12" name="Shape 10"/>
+          <p:cNvSpPr/>
+          <p:nvPr/>
+        </p:nvSpPr>
+        <p:spPr>
+          <a:xfrm>
+            <a:off x="566928" y="3493008"/>
+            <a:ext cx="11057839" cy="841248"/>
+          </a:xfrm>
+          <a:prstGeom prst="roundRect">
+            <a:avLst>
+              <a:gd name="adj" fmla="val 7609"/>
+            </a:avLst>
+          </a:prstGeom>
+          <a:solidFill>
+            <a:srgbClr val="143651"/>
+          </a:solidFill>
+          <a:ln/>
+        </p:spPr>
+      </p:sp>
+      <p:sp>
+        <p:nvSpPr>
+          <p:cNvPr id="13" name="Shape 11"/>
+          <p:cNvSpPr/>
+          <p:nvPr/>
+        </p:nvSpPr>
+        <p:spPr>
+          <a:xfrm>
+            <a:off x="749808" y="3730752"/>
+            <a:ext cx="365760" cy="365760"/>
+          </a:xfrm>
+          <a:prstGeom prst="ellipse">
+            <a:avLst/>
+          </a:prstGeom>
+          <a:solidFill>
+            <a:srgbClr val="1565C0"/>
+          </a:solidFill>
+          <a:ln/>
+          <a:effectLst>
+            <a:outerShdw sx="100000" sy="100000" kx="0" ky="0" algn="bl" rotWithShape="0" blurRad="88900" dist="25400" dir="5400000">
+              <a:srgbClr val="22303C">
+                <a:alpha val="12000"/>
+              </a:srgbClr>
+            </a:outerShdw>
+          </a:effectLst>
+        </p:spPr>
+      </p:sp>
+      <p:sp>
+        <p:nvSpPr>
+          <p:cNvPr id="14" name="Text 12"/>
+          <p:cNvSpPr/>
+          <p:nvPr/>
+        </p:nvSpPr>
+        <p:spPr>
+          <a:xfrm>
+            <a:off x="749808" y="3730752"/>
+            <a:ext cx="365760" cy="365760"/>
+          </a:xfrm>
+          <a:prstGeom prst="rect">
+            <a:avLst/>
+          </a:prstGeom>
+          <a:noFill/>
+          <a:ln/>
+        </p:spPr>
+        <p:txBody>
+          <a:bodyPr wrap="square" lIns="0" tIns="0" rIns="0" bIns="0" rtlCol="0" anchor="ctr"/>
+          <a:lstStyle/>
+          <a:p>
+            <a:pPr algn="ctr" indent="0" marL="0">
+              <a:buNone/>
+            </a:pPr>
+            <a:r>
+              <a:rPr lang="en-US" sz="1500" b="1" dirty="0">
+                <a:solidFill>
+                  <a:srgbClr val="FFFFFF"/>
+                </a:solidFill>
+                <a:latin typeface="Calibri" pitchFamily="34" charset="0"/>
+                <a:ea typeface="Calibri" pitchFamily="34" charset="-122"/>
+                <a:cs typeface="Calibri" pitchFamily="34" charset="-120"/>
+              </a:rPr>
+              <a:t>3</a:t>
+            </a:r>
+            <a:endParaRPr lang="en-US" sz="1500" dirty="0"/>
+          </a:p>
+        </p:txBody>
+      </p:sp>
+      <p:sp>
+        <p:nvSpPr>
+          <p:cNvPr id="15" name="Text 13"/>
+          <p:cNvSpPr/>
+          <p:nvPr/>
+        </p:nvSpPr>
+        <p:spPr>
+          <a:xfrm>
+            <a:off x="1280160" y="3493008"/>
+            <a:ext cx="10143439" cy="841248"/>
+          </a:xfrm>
+          <a:prstGeom prst="rect">
+            <a:avLst/>
+          </a:prstGeom>
+          <a:noFill/>
+          <a:ln/>
+        </p:spPr>
+        <p:txBody>
+          <a:bodyPr wrap="square" lIns="0" tIns="0" rIns="0" bIns="0" rtlCol="0" anchor="ctr"/>
+          <a:lstStyle/>
+          <a:p>
+            <a:pPr algn="l" indent="0" marL="0">
+              <a:buNone/>
+            </a:pPr>
+            <a:r>
+              <a:rPr lang="en-US" sz="1350" dirty="0">
+                <a:solidFill>
+                  <a:srgbClr val="E7EEF4"/>
+                </a:solidFill>
+                <a:latin typeface="Calibri" pitchFamily="34" charset="0"/>
+                <a:ea typeface="Calibri" pitchFamily="34" charset="-122"/>
+                <a:cs typeface="Calibri" pitchFamily="34" charset="-120"/>
+              </a:rPr>
+              <a:t>TDM: sample at steady state, usually as a trough; interpret FREE drug when protein binding is altered; time digoxin ≥ 6–8 h post-dose.</a:t>
+            </a:r>
+            <a:endParaRPr lang="en-US" sz="1350" dirty="0"/>
+          </a:p>
+        </p:txBody>
+      </p:sp>
+      <p:sp>
+        <p:nvSpPr>
+          <p:cNvPr id="16" name="Shape 14"/>
+          <p:cNvSpPr/>
+          <p:nvPr/>
+        </p:nvSpPr>
+        <p:spPr>
+          <a:xfrm>
+            <a:off x="566928" y="4480560"/>
+            <a:ext cx="11057839" cy="841248"/>
+          </a:xfrm>
+          <a:prstGeom prst="roundRect">
+            <a:avLst>
+              <a:gd name="adj" fmla="val 7609"/>
+            </a:avLst>
+          </a:prstGeom>
+          <a:solidFill>
+            <a:srgbClr val="143651"/>
+          </a:solidFill>
+          <a:ln/>
+        </p:spPr>
+      </p:sp>
+      <p:sp>
+        <p:nvSpPr>
+          <p:cNvPr id="17" name="Shape 15"/>
+          <p:cNvSpPr/>
+          <p:nvPr/>
+        </p:nvSpPr>
+        <p:spPr>
+          <a:xfrm>
+            <a:off x="749808" y="4718304"/>
+            <a:ext cx="365760" cy="365760"/>
+          </a:xfrm>
+          <a:prstGeom prst="ellipse">
+            <a:avLst/>
+          </a:prstGeom>
+          <a:solidFill>
+            <a:srgbClr val="1565C0"/>
+          </a:solidFill>
+          <a:ln/>
+          <a:effectLst>
+            <a:outerShdw sx="100000" sy="100000" kx="0" ky="0" algn="bl" rotWithShape="0" blurRad="88900" dist="25400" dir="5400000">
+              <a:srgbClr val="22303C">
+                <a:alpha val="12000"/>
+              </a:srgbClr>
+            </a:outerShdw>
+          </a:effectLst>
+        </p:spPr>
+      </p:sp>
+      <p:sp>
+        <p:nvSpPr>
+          <p:cNvPr id="18" name="Text 16"/>
+          <p:cNvSpPr/>
+          <p:nvPr/>
+        </p:nvSpPr>
+        <p:spPr>
+          <a:xfrm>
+            <a:off x="749808" y="4718304"/>
+            <a:ext cx="365760" cy="365760"/>
+          </a:xfrm>
+          <a:prstGeom prst="rect">
+            <a:avLst/>
+          </a:prstGeom>
+          <a:noFill/>
+          <a:ln/>
+        </p:spPr>
+        <p:txBody>
+          <a:bodyPr wrap="square" lIns="0" tIns="0" rIns="0" bIns="0" rtlCol="0" anchor="ctr"/>
+          <a:lstStyle/>
+          <a:p>
+            <a:pPr algn="ctr" indent="0" marL="0">
+              <a:buNone/>
+            </a:pPr>
+            <a:r>
+              <a:rPr lang="en-US" sz="1500" b="1" dirty="0">
+                <a:solidFill>
+                  <a:srgbClr val="FFFFFF"/>
+                </a:solidFill>
+                <a:latin typeface="Calibri" pitchFamily="34" charset="0"/>
+                <a:ea typeface="Calibri" pitchFamily="34" charset="-122"/>
+                <a:cs typeface="Calibri" pitchFamily="34" charset="-120"/>
+              </a:rPr>
+              <a:t>4</a:t>
+            </a:r>
+            <a:endParaRPr lang="en-US" sz="1500" dirty="0"/>
+          </a:p>
+        </p:txBody>
+      </p:sp>
+      <p:sp>
+        <p:nvSpPr>
+          <p:cNvPr id="19" name="Text 17"/>
+          <p:cNvSpPr/>
+          <p:nvPr/>
+        </p:nvSpPr>
+        <p:spPr>
+          <a:xfrm>
+            <a:off x="1280160" y="4480560"/>
+            <a:ext cx="10143439" cy="841248"/>
+          </a:xfrm>
+          <a:prstGeom prst="rect">
+            <a:avLst/>
+          </a:prstGeom>
+          <a:noFill/>
+          <a:ln/>
+        </p:spPr>
+        <p:txBody>
+          <a:bodyPr wrap="square" lIns="0" tIns="0" rIns="0" bIns="0" rtlCol="0" anchor="ctr"/>
+          <a:lstStyle/>
+          <a:p>
+            <a:pPr algn="l" indent="0" marL="0">
+              <a:buNone/>
+            </a:pPr>
+            <a:r>
+              <a:rPr lang="en-US" sz="1350" dirty="0">
+                <a:solidFill>
+                  <a:srgbClr val="E7EEF4"/>
+                </a:solidFill>
+                <a:latin typeface="Calibri" pitchFamily="34" charset="0"/>
+                <a:ea typeface="Calibri" pitchFamily="34" charset="-122"/>
+                <a:cs typeface="Calibri" pitchFamily="34" charset="-120"/>
+              </a:rPr>
+              <a:t>POCT needs main-lab-grade governance: competency, QC, correlation, connectivity, director oversight.</a:t>
+            </a:r>
+            <a:endParaRPr lang="en-US" sz="1350" dirty="0"/>
+          </a:p>
+        </p:txBody>
+      </p:sp>
+      <p:sp>
+        <p:nvSpPr>
+          <p:cNvPr id="20" name="Shape 18"/>
+          <p:cNvSpPr/>
+          <p:nvPr/>
+        </p:nvSpPr>
+        <p:spPr>
+          <a:xfrm>
+            <a:off x="566928" y="5468112"/>
+            <a:ext cx="11057839" cy="841248"/>
+          </a:xfrm>
+          <a:prstGeom prst="roundRect">
+            <a:avLst>
+              <a:gd name="adj" fmla="val 7609"/>
+            </a:avLst>
+          </a:prstGeom>
+          <a:solidFill>
+            <a:srgbClr val="143651"/>
+          </a:solidFill>
+          <a:ln/>
+        </p:spPr>
+      </p:sp>
+      <p:sp>
+        <p:nvSpPr>
+          <p:cNvPr id="21" name="Shape 19"/>
+          <p:cNvSpPr/>
+          <p:nvPr/>
+        </p:nvSpPr>
+        <p:spPr>
+          <a:xfrm>
+            <a:off x="749808" y="5705856"/>
+            <a:ext cx="365760" cy="365760"/>
+          </a:xfrm>
+          <a:prstGeom prst="ellipse">
+            <a:avLst/>
+          </a:prstGeom>
+          <a:solidFill>
+            <a:srgbClr val="1565C0"/>
+          </a:solidFill>
+          <a:ln/>
+          <a:effectLst>
+            <a:outerShdw sx="100000" sy="100000" kx="0" ky="0" algn="bl" rotWithShape="0" blurRad="88900" dist="25400" dir="5400000">
+              <a:srgbClr val="22303C">
+                <a:alpha val="12000"/>
+              </a:srgbClr>
+            </a:outerShdw>
+          </a:effectLst>
+        </p:spPr>
+      </p:sp>
+      <p:sp>
+        <p:nvSpPr>
+          <p:cNvPr id="22" name="Text 20"/>
+          <p:cNvSpPr/>
+          <p:nvPr/>
+        </p:nvSpPr>
+        <p:spPr>
+          <a:xfrm>
+            <a:off x="749808" y="5705856"/>
+            <a:ext cx="365760" cy="365760"/>
+          </a:xfrm>
+          <a:prstGeom prst="rect">
+            <a:avLst/>
+          </a:prstGeom>
+          <a:noFill/>
+          <a:ln/>
+        </p:spPr>
+        <p:txBody>
+          <a:bodyPr wrap="square" lIns="0" tIns="0" rIns="0" bIns="0" rtlCol="0" anchor="ctr"/>
+          <a:lstStyle/>
+          <a:p>
+            <a:pPr algn="ctr" indent="0" marL="0">
+              <a:buNone/>
+            </a:pPr>
+            <a:r>
+              <a:rPr lang="en-US" sz="1500" b="1" dirty="0">
+                <a:solidFill>
+                  <a:srgbClr val="FFFFFF"/>
+                </a:solidFill>
+                <a:latin typeface="Calibri" pitchFamily="34" charset="0"/>
+                <a:ea typeface="Calibri" pitchFamily="34" charset="-122"/>
+                <a:cs typeface="Calibri" pitchFamily="34" charset="-120"/>
+              </a:rPr>
+              <a:t>5</a:t>
+            </a:r>
+            <a:endParaRPr lang="en-US" sz="1500" dirty="0"/>
+          </a:p>
+        </p:txBody>
+      </p:sp>
+      <p:sp>
+        <p:nvSpPr>
+          <p:cNvPr id="23" name="Text 21"/>
+          <p:cNvSpPr/>
+          <p:nvPr/>
+        </p:nvSpPr>
+        <p:spPr>
+          <a:xfrm>
+            <a:off x="1280160" y="5468112"/>
+            <a:ext cx="10143439" cy="841248"/>
+          </a:xfrm>
+          <a:prstGeom prst="rect">
+            <a:avLst/>
+          </a:prstGeom>
+          <a:noFill/>
+          <a:ln/>
+        </p:spPr>
+        <p:txBody>
+          <a:bodyPr wrap="square" lIns="0" tIns="0" rIns="0" bIns="0" rtlCol="0" anchor="ctr"/>
+          <a:lstStyle/>
+          <a:p>
+            <a:pPr algn="l" indent="0" marL="0">
+              <a:buNone/>
+            </a:pPr>
+            <a:r>
+              <a:rPr lang="en-US" sz="1350" dirty="0">
+                <a:solidFill>
+                  <a:srgbClr val="E7EEF4"/>
+                </a:solidFill>
+                <a:latin typeface="Calibri" pitchFamily="34" charset="0"/>
+                <a:ea typeface="Calibri" pitchFamily="34" charset="-122"/>
+                <a:cs typeface="Calibri" pitchFamily="34" charset="-120"/>
+              </a:rPr>
+              <a:t>Validate laboratory-developed tests fully; verify FDA-cleared assays.</a:t>
+            </a:r>
+            <a:endParaRPr lang="en-US" sz="1350" dirty="0"/>
+          </a:p>
+        </p:txBody>
+      </p:sp>
+      <p:sp>
+        <p:nvSpPr>
+          <p:cNvPr id="24" name="Text 22"/>
+          <p:cNvSpPr/>
+          <p:nvPr/>
+        </p:nvSpPr>
+        <p:spPr>
+          <a:xfrm>
+            <a:off x="566928" y="6473952"/>
+            <a:ext cx="8229600" cy="274320"/>
+          </a:xfrm>
+          <a:prstGeom prst="rect">
+            <a:avLst/>
+          </a:prstGeom>
+          <a:noFill/>
+          <a:ln/>
+        </p:spPr>
+        <p:txBody>
+          <a:bodyPr wrap="square" lIns="0" tIns="0" rIns="0" bIns="0" rtlCol="0" anchor="ctr"/>
+          <a:lstStyle/>
+          <a:p>
+            <a:pPr indent="0" marL="0">
+              <a:buNone/>
+            </a:pPr>
+            <a:r>
+              <a:rPr lang="en-US" sz="850" dirty="0">
+                <a:solidFill>
+                  <a:srgbClr val="5E7488"/>
+                </a:solidFill>
+                <a:latin typeface="Calibri" pitchFamily="34" charset="0"/>
+                <a:ea typeface="Calibri" pitchFamily="34" charset="-122"/>
+                <a:cs typeface="Calibri" pitchFamily="34" charset="-120"/>
+              </a:rPr>
+              <a:t>Makassed General Hospital  ·  Department of Laboratory Medicine</a:t>
+            </a:r>
+            <a:endParaRPr lang="en-US" sz="850" dirty="0"/>
+          </a:p>
+        </p:txBody>
+      </p:sp>
+      <p:sp>
+        <p:nvSpPr>
+          <p:cNvPr id="25" name="Text 23"/>
+          <p:cNvSpPr/>
+          <p:nvPr/>
+        </p:nvSpPr>
+        <p:spPr>
+          <a:xfrm>
+            <a:off x="11002975" y="6473952"/>
+            <a:ext cx="640080" cy="274320"/>
+          </a:xfrm>
+          <a:prstGeom prst="rect">
+            <a:avLst/>
+          </a:prstGeom>
+          <a:noFill/>
+          <a:ln/>
+        </p:spPr>
+        <p:txBody>
+          <a:bodyPr wrap="square" lIns="0" tIns="0" rIns="0" bIns="0" rtlCol="0" anchor="ctr"/>
+          <a:lstStyle/>
+          <a:p>
+            <a:pPr algn="r" indent="0" marL="0">
+              <a:buNone/>
+            </a:pPr>
+            <a:r>
+              <a:rPr lang="en-US" sz="850" b="1" dirty="0">
+                <a:solidFill>
+                  <a:srgbClr val="1565C0"/>
+                </a:solidFill>
+                <a:latin typeface="Calibri" pitchFamily="34" charset="0"/>
+                <a:ea typeface="Calibri" pitchFamily="34" charset="-122"/>
+                <a:cs typeface="Calibri" pitchFamily="34" charset="-120"/>
+              </a:rPr>
+              <a:t>21</a:t>
+            </a:r>
+            <a:endParaRPr lang="en-US" sz="850" dirty="0"/>
+          </a:p>
+        </p:txBody>
+      </p:sp>
+    </p:spTree>
+  </p:cSld>
+  <p:clrMapOvr>
+    <a:masterClrMapping/>
+  </p:clrMapOvr>
+</p:sld>
+</file>
+
+<file path=ppt/slides/slide25.xml><?xml version="1.0" encoding="utf-8"?>
+<p:sld xmlns:a="http://schemas.openxmlformats.org/drawingml/2006/main" xmlns:r="http://schemas.openxmlformats.org/officeDocument/2006/relationships" xmlns:p="http://schemas.openxmlformats.org/presentationml/2006/main">
+  <p:cSld name="Slide 25">
+    <p:bg>
+      <p:bgPr>
+        <a:solidFill>
+          <a:srgbClr val="FFFFFF"/>
+        </a:solidFill>
+      </p:bgPr>
+    </p:bg>
+    <p:spTree>
+      <p:nvGrpSpPr>
+        <p:cNvPr id="1" name=""/>
+        <p:cNvGrpSpPr/>
+        <p:nvPr/>
+      </p:nvGrpSpPr>
+      <p:grpSpPr>
+        <a:xfrm>
+          <a:off x="0" y="0"/>
+          <a:ext cx="0" cy="0"/>
+          <a:chOff x="0" y="0"/>
+          <a:chExt cx="0" cy="0"/>
+        </a:xfrm>
+      </p:grpSpPr>
+      <p:sp>
+        <p:nvSpPr>
+          <p:cNvPr id="2" name="Text 0"/>
+          <p:cNvSpPr/>
+          <p:nvPr/>
+        </p:nvSpPr>
+        <p:spPr>
+          <a:xfrm>
+            <a:off x="566928" y="329184"/>
+            <a:ext cx="10515600" cy="310896"/>
+          </a:xfrm>
+          <a:prstGeom prst="rect">
+            <a:avLst/>
+          </a:prstGeom>
+          <a:noFill/>
+          <a:ln/>
+        </p:spPr>
+        <p:txBody>
+          <a:bodyPr wrap="square" lIns="0" tIns="0" rIns="0" bIns="0" rtlCol="0" anchor="ctr"/>
+          <a:lstStyle/>
+          <a:p>
+            <a:pPr algn="l" indent="0" marL="0">
+              <a:buNone/>
+            </a:pPr>
+            <a:r>
+              <a:rPr lang="en-US" sz="1100" b="1" spc="150" kern="0" dirty="0">
+                <a:solidFill>
+                  <a:srgbClr val="1565C0"/>
+                </a:solidFill>
+                <a:latin typeface="Calibri" pitchFamily="34" charset="0"/>
+                <a:ea typeface="Calibri" pitchFamily="34" charset="-122"/>
+                <a:cs typeface="Calibri" pitchFamily="34" charset="-120"/>
+              </a:rPr>
               <a:t>CLINICAL CHEMISTRY   ·   REFERENCES &amp; FURTHER READING</a:t>
             </a:r>
             <a:endParaRPr lang="en-US" sz="1100" dirty="0"/>
@@ -9910,7 +12470,7 @@
                 <a:ea typeface="Calibri" pitchFamily="34" charset="-122"/>
                 <a:cs typeface="Calibri" pitchFamily="34" charset="-120"/>
               </a:rPr>
-              <a:t>2.   CLSI EP15/EP06/EP07: Precision, Linearity, and Interference verification/validation.</a:t>
+              <a:t>2.   CLSI EP15/EP06/EP07: precision, linearity, and interference.</a:t>
             </a:r>
             <a:endParaRPr lang="en-US" sz="1150" dirty="0"/>
           </a:p>
@@ -9950,7 +12510,7 @@
                 <a:ea typeface="Calibri" pitchFamily="34" charset="-122"/>
                 <a:cs typeface="Calibri" pitchFamily="34" charset="-120"/>
               </a:rPr>
-              <a:t>4.   CLSI POCT documents (POCT governance and quality).</a:t>
+              <a:t>4.   CLSI POCT documents (governance and quality).</a:t>
             </a:r>
             <a:endParaRPr lang="en-US" sz="1150" dirty="0"/>
           </a:p>
@@ -10056,7 +12616,7 @@
                 <a:ea typeface="Calibri" pitchFamily="34" charset="-122"/>
                 <a:cs typeface="Calibri" pitchFamily="34" charset="-120"/>
               </a:rPr>
-              <a:t>18</a:t>
+              <a:t>22</a:t>
             </a:r>
             <a:endParaRPr lang="en-US" sz="850" dirty="0"/>
           </a:p>
@@ -10434,7 +12994,7 @@
                 <a:ea typeface="Calibri" pitchFamily="34" charset="-122"/>
                 <a:cs typeface="Calibri" pitchFamily="34" charset="-120"/>
               </a:rPr>
-              <a:t>Recognize common drug-screen cross-reactivities and pitfalls.</a:t>
+              <a:t>Recognize common drug-screen cross-reactivities and adulteration.</a:t>
             </a:r>
             <a:endParaRPr lang="en-US" sz="1350" dirty="0"/>
           </a:p>
@@ -10568,7 +13128,7 @@
                 <a:ea typeface="Calibri" pitchFamily="34" charset="-122"/>
                 <a:cs typeface="Calibri" pitchFamily="34" charset="-120"/>
               </a:rPr>
-              <a:t>Apply therapeutic drug monitoring principles (steady state, trough/peak).</a:t>
+              <a:t>Apply TDM principles (steady state, trough/peak, free drug).</a:t>
             </a:r>
             <a:endParaRPr lang="en-US" sz="1350" dirty="0"/>
           </a:p>
@@ -10702,7 +13262,7 @@
                 <a:ea typeface="Calibri" pitchFamily="34" charset="-122"/>
                 <a:cs typeface="Calibri" pitchFamily="34" charset="-120"/>
               </a:rPr>
-              <a:t>State point-of-care testing governance and quality requirements.</a:t>
+              <a:t>Interpret specific high-yield drug levels (vancomycin, digoxin, lithium, phenytoin).</a:t>
             </a:r>
             <a:endParaRPr lang="en-US" sz="1350" dirty="0"/>
           </a:p>
@@ -10836,7 +13396,7 @@
                 <a:ea typeface="Calibri" pitchFamily="34" charset="-122"/>
                 <a:cs typeface="Calibri" pitchFamily="34" charset="-120"/>
               </a:rPr>
-              <a:t>Outline method validation essentials for new assays.</a:t>
+              <a:t>State point-of-care testing governance and quality requirements.</a:t>
             </a:r>
             <a:endParaRPr lang="en-US" sz="1350" dirty="0"/>
           </a:p>
@@ -10970,7 +13530,7 @@
                 <a:ea typeface="Calibri" pitchFamily="34" charset="-122"/>
                 <a:cs typeface="Calibri" pitchFamily="34" charset="-120"/>
               </a:rPr>
-              <a:t>Apply reference intervals and critical-value reporting.</a:t>
+              <a:t>Outline method validation essentials and reference intervals.</a:t>
             </a:r>
             <a:endParaRPr lang="en-US" sz="1350" dirty="0"/>
           </a:p>
@@ -11475,7 +14035,7 @@
                 <a:ea typeface="Calibri" pitchFamily="34" charset="-122"/>
                 <a:cs typeface="Calibri" pitchFamily="34" charset="-120"/>
               </a:rPr>
-              <a:t>   —  sampling and interpretation</a:t>
+              <a:t>   —  sampling and free drug</a:t>
             </a:r>
             <a:endParaRPr lang="en-US" sz="1400" dirty="0"/>
           </a:p>
@@ -11609,7 +14169,7 @@
                 <a:ea typeface="Calibri" pitchFamily="34" charset="-122"/>
                 <a:cs typeface="Calibri" pitchFamily="34" charset="-120"/>
               </a:rPr>
-              <a:t>Point-of-care testing</a:t>
+              <a:t>High-yield drug levels</a:t>
             </a:r>
             <a:pPr algn="l" indent="0" marL="0">
               <a:buNone/>
@@ -11623,7 +14183,7 @@
                 <a:ea typeface="Calibri" pitchFamily="34" charset="-122"/>
                 <a:cs typeface="Calibri" pitchFamily="34" charset="-120"/>
               </a:rPr>
-              <a:t>   —  governance and quality</a:t>
+              <a:t>   —  vancomycin, digoxin, lithium, phenytoin</a:t>
             </a:r>
             <a:endParaRPr lang="en-US" sz="1400" dirty="0"/>
           </a:p>
@@ -11750,7 +14310,7 @@
                 <a:ea typeface="Calibri" pitchFamily="34" charset="-122"/>
                 <a:cs typeface="Calibri" pitchFamily="34" charset="-120"/>
               </a:rPr>
-              <a:t>Validation essentials</a:t>
+              <a:t>POCT &amp; validation</a:t>
             </a:r>
             <a:pPr algn="l" indent="0" marL="0">
               <a:buNone/>
@@ -11764,7 +14324,7 @@
                 <a:ea typeface="Calibri" pitchFamily="34" charset="-122"/>
                 <a:cs typeface="Calibri" pitchFamily="34" charset="-120"/>
               </a:rPr>
-              <a:t>   —  performance characteristics</a:t>
+              <a:t>   —  governance and performance</a:t>
             </a:r>
             <a:endParaRPr lang="en-US" sz="1400" dirty="0"/>
           </a:p>
@@ -11898,7 +14458,7 @@
                 <a:ea typeface="Calibri" pitchFamily="34" charset="-122"/>
                 <a:cs typeface="Calibri" pitchFamily="34" charset="-120"/>
               </a:rPr>
-              <a:t>Cases &amp; board</a:t>
+              <a:t>Cases &amp; board review</a:t>
             </a:r>
             <a:endParaRPr lang="en-US" sz="1400" dirty="0"/>
           </a:p>
@@ -12620,7 +15180,7 @@
                 <a:ea typeface="Calibri" pitchFamily="34" charset="-122"/>
                 <a:cs typeface="Calibri" pitchFamily="34" charset="-120"/>
               </a:rPr>
-              <a:t>Cross-Reactivity and Pitfalls</a:t>
+              <a:t>Cross-Reactivity and Adulteration</a:t>
             </a:r>
             <a:endParaRPr lang="en-US" sz="3000" dirty="0"/>
           </a:p>
@@ -12731,7 +15291,7 @@
                 <a:ea typeface="Calibri" pitchFamily="34" charset="-122"/>
                 <a:cs typeface="Calibri" pitchFamily="34" charset="-120"/>
               </a:rPr>
-              <a:t>Immunoassays cross-react: e.g., some antihistamines/decongestants with amphetamines; certain quinolones with opiates.</a:t>
+              <a:t>Cross-reactivity: some decongestants/antihistamines with amphetamines; quinolones with opiates.</a:t>
             </a:r>
             <a:endParaRPr lang="en-US" sz="1250" dirty="0"/>
           </a:p>
@@ -12752,7 +15312,7 @@
                 <a:ea typeface="Calibri" pitchFamily="34" charset="-122"/>
                 <a:cs typeface="Calibri" pitchFamily="34" charset="-120"/>
               </a:rPr>
-              <a:t>Opiate screens may miss synthetic/semisynthetic opioids (fentanyl, oxycodone) — use targeted assays.</a:t>
+              <a:t>Opiate screens may MISS synthetic/semisynthetic opioids (fentanyl, oxycodone) — use targeted assays.</a:t>
             </a:r>
             <a:endParaRPr lang="en-US" sz="1250" dirty="0"/>
           </a:p>
@@ -12773,7 +15333,7 @@
                 <a:ea typeface="Calibri" pitchFamily="34" charset="-122"/>
                 <a:cs typeface="Calibri" pitchFamily="34" charset="-120"/>
               </a:rPr>
-              <a:t>Adulteration/dilution affects urine drug screens (check creatinine, pH, oxidants).</a:t>
+              <a:t>Adulteration/dilution affects urine screens (check creatinine, pH, oxidants, specific gravity).</a:t>
             </a:r>
             <a:endParaRPr lang="en-US" sz="1250" dirty="0"/>
           </a:p>
@@ -12926,7 +15486,7 @@
                 <a:ea typeface="Calibri" pitchFamily="34" charset="-122"/>
                 <a:cs typeface="Calibri" pitchFamily="34" charset="-120"/>
               </a:rPr>
-              <a:t>Required for any result with clinical, forensic, or employment consequences.</a:t>
+              <a:t>Required for any consequential (clinical, forensic, employment) result.</a:t>
             </a:r>
             <a:endParaRPr lang="en-US" sz="1250" dirty="0"/>
           </a:p>
@@ -12947,7 +15507,7 @@
                 <a:ea typeface="Calibri" pitchFamily="34" charset="-122"/>
                 <a:cs typeface="Calibri" pitchFamily="34" charset="-120"/>
               </a:rPr>
-              <a:t>Resolves cross-reactivity by exact mass / fragmentation.</a:t>
+              <a:t>Resolves cross-reactivity by exact mass/fragmentation.</a:t>
             </a:r>
             <a:endParaRPr lang="en-US" sz="1250" dirty="0"/>
           </a:p>
@@ -13267,7 +15827,7 @@
                 <a:ea typeface="Calibri" pitchFamily="34" charset="-122"/>
                 <a:cs typeface="Calibri" pitchFamily="34" charset="-120"/>
               </a:rPr>
-              <a:t>Therapeutic Drug Monitoring &amp; POCT</a:t>
+              <a:t>Therapeutic Drug Monitoring</a:t>
             </a:r>
             <a:endParaRPr lang="en-US" sz="3800" dirty="0"/>
           </a:p>
@@ -13377,7 +15937,7 @@
                 <a:ea typeface="Calibri" pitchFamily="34" charset="-122"/>
                 <a:cs typeface="Calibri" pitchFamily="34" charset="-120"/>
               </a:rPr>
-              <a:t>Principles of Drug Monitoring</a:t>
+              <a:t>When to Sample for TDM</a:t>
             </a:r>
             <a:endParaRPr lang="en-US" sz="3000" dirty="0"/>
           </a:p>
@@ -13391,18 +15951,23 @@
         </p:nvSpPr>
         <p:spPr>
           <a:xfrm>
-            <a:off x="566928" y="1517904"/>
-            <a:ext cx="5346040" cy="4114800"/>
+            <a:off x="1249528" y="1481328"/>
+            <a:ext cx="9692640" cy="4023360"/>
           </a:xfrm>
           <a:prstGeom prst="roundRect">
             <a:avLst>
-              <a:gd name="adj" fmla="val 2000"/>
+              <a:gd name="adj" fmla="val 2045"/>
             </a:avLst>
           </a:prstGeom>
           <a:solidFill>
-            <a:srgbClr val="E7EFFA"/>
+            <a:srgbClr val="FFFFFF"/>
           </a:solidFill>
-          <a:ln/>
+          <a:ln w="12700">
+            <a:solidFill>
+              <a:srgbClr val="DCE4EC"/>
+            </a:solidFill>
+            <a:prstDash val="solid"/>
+          </a:ln>
           <a:effectLst>
             <a:outerShdw sx="100000" sy="100000" kx="0" ky="0" algn="bl" rotWithShape="0" blurRad="88900" dist="25400" dir="5400000">
               <a:srgbClr val="22303C">
@@ -13412,55 +15977,40 @@
           </a:effectLst>
         </p:spPr>
       </p:sp>
-      <p:sp>
-        <p:nvSpPr>
-          <p:cNvPr id="5" name="Text 3"/>
-          <p:cNvSpPr/>
-          <p:nvPr/>
-        </p:nvSpPr>
-        <p:spPr>
-          <a:xfrm>
-            <a:off x="804672" y="1682496"/>
-            <a:ext cx="4888840" cy="274320"/>
-          </a:xfrm>
-          <a:prstGeom prst="rect">
-            <a:avLst/>
-          </a:prstGeom>
-          <a:noFill/>
-          <a:ln/>
-        </p:spPr>
-        <p:txBody>
-          <a:bodyPr wrap="square" lIns="0" tIns="0" rIns="0" bIns="0" rtlCol="0" anchor="ctr"/>
-          <a:lstStyle/>
-          <a:p>
-            <a:pPr indent="0" marL="0">
-              <a:buNone/>
-            </a:pPr>
-            <a:r>
-              <a:rPr lang="en-US" sz="1200" b="1" spc="100" kern="0" dirty="0">
-                <a:solidFill>
-                  <a:srgbClr val="0D4A92"/>
-                </a:solidFill>
-                <a:latin typeface="Calibri" pitchFamily="34" charset="0"/>
-                <a:ea typeface="Calibri" pitchFamily="34" charset="-122"/>
-                <a:cs typeface="Calibri" pitchFamily="34" charset="-120"/>
-              </a:rPr>
-              <a:t>WHEN AND WHAT TO SAMPLE</a:t>
-            </a:r>
-            <a:endParaRPr lang="en-US" sz="1200" dirty="0"/>
-          </a:p>
-        </p:txBody>
-      </p:sp>
-      <p:sp>
-        <p:nvSpPr>
-          <p:cNvPr id="6" name="Text 4"/>
-          <p:cNvSpPr/>
-          <p:nvPr/>
-        </p:nvSpPr>
-        <p:spPr>
-          <a:xfrm>
-            <a:off x="804672" y="2029968"/>
-            <a:ext cx="4870552" cy="3474720"/>
+      <p:pic>
+        <p:nvPicPr>
+          <p:cNvPr id="5" name="Image 0" descr="/tmp/cp_work2/art/chem_tdm.png">    </p:cNvPr>
+          <p:cNvPicPr>
+            <a:picLocks noChangeAspect="1"/>
+          </p:cNvPicPr>
+          <p:nvPr/>
+        </p:nvPicPr>
+        <p:blipFill>
+          <a:blip r:embed="rId1"/>
+          <a:stretch>
+            <a:fillRect/>
+          </a:stretch>
+        </p:blipFill>
+        <p:spPr>
+          <a:xfrm>
+            <a:off x="1377544" y="1609344"/>
+            <a:ext cx="9436608" cy="3767328"/>
+          </a:xfrm>
+          <a:prstGeom prst="rect">
+            <a:avLst/>
+          </a:prstGeom>
+        </p:spPr>
+      </p:pic>
+      <p:sp>
+        <p:nvSpPr>
+          <p:cNvPr id="6" name="Text 3"/>
+          <p:cNvSpPr/>
+          <p:nvPr/>
+        </p:nvSpPr>
+        <p:spPr>
+          <a:xfrm>
+            <a:off x="566928" y="5577840"/>
+            <a:ext cx="11057839" cy="365760"/>
           </a:xfrm>
           <a:prstGeom prst="rect">
             <a:avLst/>
@@ -13472,268 +16022,27 @@
           <a:bodyPr wrap="square" lIns="0" tIns="0" rIns="0" bIns="0" rtlCol="0" anchor="t"/>
           <a:lstStyle/>
           <a:p>
-            <a:pPr algn="l" marL="177800" indent="-177800">
-              <a:spcAft>
-                <a:spcPts val="900"/>
-              </a:spcAft>
-              <a:buSzPct val="100000"/>
-              <a:buChar char="•"/>
-            </a:pPr>
-            <a:r>
-              <a:rPr lang="en-US" sz="1250" b="1" dirty="0">
-                <a:solidFill>
-                  <a:srgbClr val="1B2A38"/>
-                </a:solidFill>
-                <a:latin typeface="Calibri" pitchFamily="34" charset="0"/>
-                <a:ea typeface="Calibri" pitchFamily="34" charset="-122"/>
-                <a:cs typeface="Calibri" pitchFamily="34" charset="-120"/>
-              </a:rPr>
-              <a:t>Monitor drugs with a narrow therapeutic index (e.g., vancomycin, aminoglycosides, digoxin, lithium, certain antiepileptics, immunosuppressants).</a:t>
-            </a:r>
-            <a:endParaRPr lang="en-US" sz="1250" dirty="0"/>
-          </a:p>
-          <a:p>
-            <a:pPr algn="l" marL="177800" indent="-177800">
-              <a:spcAft>
-                <a:spcPts val="900"/>
-              </a:spcAft>
-              <a:buSzPct val="100000"/>
-              <a:buChar char="•"/>
-            </a:pPr>
-            <a:r>
-              <a:rPr lang="en-US" sz="1250" dirty="0">
-                <a:solidFill>
-                  <a:srgbClr val="33444F"/>
-                </a:solidFill>
-                <a:latin typeface="Calibri" pitchFamily="34" charset="0"/>
-                <a:ea typeface="Calibri" pitchFamily="34" charset="-122"/>
-                <a:cs typeface="Calibri" pitchFamily="34" charset="-120"/>
-              </a:rPr>
-              <a:t>Sample at STEADY STATE (~5 half-lives) unless assessing toxicity.</a:t>
-            </a:r>
-            <a:endParaRPr lang="en-US" sz="1250" dirty="0"/>
-          </a:p>
-          <a:p>
-            <a:pPr algn="l" marL="177800" indent="-177800">
-              <a:spcAft>
-                <a:spcPts val="900"/>
-              </a:spcAft>
-              <a:buSzPct val="100000"/>
-              <a:buChar char="•"/>
-            </a:pPr>
-            <a:r>
-              <a:rPr lang="en-US" sz="1250" dirty="0">
-                <a:solidFill>
-                  <a:srgbClr val="33444F"/>
-                </a:solidFill>
-                <a:latin typeface="Calibri" pitchFamily="34" charset="0"/>
-                <a:ea typeface="Calibri" pitchFamily="34" charset="-122"/>
-                <a:cs typeface="Calibri" pitchFamily="34" charset="-120"/>
-              </a:rPr>
-              <a:t>Trough (just before the next dose) for most agents; specific peak/AUC for aminoglycosides/vancomycin.</a:t>
-            </a:r>
-            <a:endParaRPr lang="en-US" sz="1250" dirty="0"/>
-          </a:p>
-          <a:p>
-            <a:pPr algn="l" marL="177800" indent="-177800">
-              <a:spcAft>
-                <a:spcPts val="900"/>
-              </a:spcAft>
-              <a:buSzPct val="100000"/>
-              <a:buChar char="•"/>
-            </a:pPr>
-            <a:r>
-              <a:rPr lang="en-US" sz="1250" dirty="0">
-                <a:solidFill>
-                  <a:srgbClr val="33444F"/>
-                </a:solidFill>
-                <a:latin typeface="Calibri" pitchFamily="34" charset="0"/>
-                <a:ea typeface="Calibri" pitchFamily="34" charset="-122"/>
-                <a:cs typeface="Calibri" pitchFamily="34" charset="-120"/>
-              </a:rPr>
-              <a:t>Digoxin: draw ≥ 6–8 h post-dose to avoid the distribution phase.</a:t>
-            </a:r>
-            <a:endParaRPr lang="en-US" sz="1250" dirty="0"/>
-          </a:p>
-        </p:txBody>
-      </p:sp>
-      <p:sp>
-        <p:nvSpPr>
-          <p:cNvPr id="7" name="Shape 5"/>
-          <p:cNvSpPr/>
-          <p:nvPr/>
-        </p:nvSpPr>
-        <p:spPr>
-          <a:xfrm>
-            <a:off x="6278728" y="1517904"/>
-            <a:ext cx="5346040" cy="4114800"/>
-          </a:xfrm>
-          <a:prstGeom prst="roundRect">
-            <a:avLst>
-              <a:gd name="adj" fmla="val 2000"/>
-            </a:avLst>
-          </a:prstGeom>
-          <a:solidFill>
-            <a:srgbClr val="E7EFFA"/>
-          </a:solidFill>
-          <a:ln/>
-          <a:effectLst>
-            <a:outerShdw sx="100000" sy="100000" kx="0" ky="0" algn="bl" rotWithShape="0" blurRad="88900" dist="25400" dir="5400000">
-              <a:srgbClr val="22303C">
-                <a:alpha val="12000"/>
-              </a:srgbClr>
-            </a:outerShdw>
-          </a:effectLst>
-        </p:spPr>
-      </p:sp>
-      <p:sp>
-        <p:nvSpPr>
-          <p:cNvPr id="8" name="Text 6"/>
-          <p:cNvSpPr/>
-          <p:nvPr/>
-        </p:nvSpPr>
-        <p:spPr>
-          <a:xfrm>
-            <a:off x="6516472" y="1682496"/>
-            <a:ext cx="4888840" cy="274320"/>
-          </a:xfrm>
-          <a:prstGeom prst="rect">
-            <a:avLst/>
-          </a:prstGeom>
-          <a:noFill/>
-          <a:ln/>
-        </p:spPr>
-        <p:txBody>
-          <a:bodyPr wrap="square" lIns="0" tIns="0" rIns="0" bIns="0" rtlCol="0" anchor="ctr"/>
-          <a:lstStyle/>
-          <a:p>
-            <a:pPr indent="0" marL="0">
-              <a:buNone/>
-            </a:pPr>
-            <a:r>
-              <a:rPr lang="en-US" sz="1200" b="1" spc="100" kern="0" dirty="0">
-                <a:solidFill>
-                  <a:srgbClr val="0D4A92"/>
-                </a:solidFill>
-                <a:latin typeface="Calibri" pitchFamily="34" charset="0"/>
-                <a:ea typeface="Calibri" pitchFamily="34" charset="-122"/>
-                <a:cs typeface="Calibri" pitchFamily="34" charset="-120"/>
-              </a:rPr>
-              <a:t>INTERPRETATION CAVEATS</a:t>
-            </a:r>
-            <a:endParaRPr lang="en-US" sz="1200" dirty="0"/>
-          </a:p>
-        </p:txBody>
-      </p:sp>
-      <p:sp>
-        <p:nvSpPr>
-          <p:cNvPr id="9" name="Text 7"/>
-          <p:cNvSpPr/>
-          <p:nvPr/>
-        </p:nvSpPr>
-        <p:spPr>
-          <a:xfrm>
-            <a:off x="6516472" y="2029968"/>
-            <a:ext cx="4870552" cy="3474720"/>
-          </a:xfrm>
-          <a:prstGeom prst="rect">
-            <a:avLst/>
-          </a:prstGeom>
-          <a:noFill/>
-          <a:ln/>
-        </p:spPr>
-        <p:txBody>
-          <a:bodyPr wrap="square" lIns="0" tIns="0" rIns="0" bIns="0" rtlCol="0" anchor="t"/>
-          <a:lstStyle/>
-          <a:p>
-            <a:pPr algn="l" marL="177800" indent="-177800">
-              <a:spcAft>
-                <a:spcPts val="900"/>
-              </a:spcAft>
-              <a:buSzPct val="100000"/>
-              <a:buChar char="•"/>
-            </a:pPr>
-            <a:r>
-              <a:rPr lang="en-US" sz="1250" b="1" dirty="0">
-                <a:solidFill>
-                  <a:srgbClr val="1B2A38"/>
-                </a:solidFill>
-                <a:latin typeface="Calibri" pitchFamily="34" charset="0"/>
-                <a:ea typeface="Calibri" pitchFamily="34" charset="-122"/>
-                <a:cs typeface="Calibri" pitchFamily="34" charset="-120"/>
-              </a:rPr>
-              <a:t>Free (unbound) drug matters when protein binding changes (e.g., phenytoin in hypoalbuminemia/uremia).</a:t>
-            </a:r>
-            <a:endParaRPr lang="en-US" sz="1250" dirty="0"/>
-          </a:p>
-          <a:p>
-            <a:pPr algn="l" marL="177800" indent="-177800">
-              <a:spcAft>
-                <a:spcPts val="900"/>
-              </a:spcAft>
-              <a:buSzPct val="100000"/>
-              <a:buChar char="•"/>
-            </a:pPr>
-            <a:r>
-              <a:rPr lang="en-US" sz="1250" dirty="0">
-                <a:solidFill>
-                  <a:srgbClr val="33444F"/>
-                </a:solidFill>
-                <a:latin typeface="Calibri" pitchFamily="34" charset="0"/>
-                <a:ea typeface="Calibri" pitchFamily="34" charset="-122"/>
-                <a:cs typeface="Calibri" pitchFamily="34" charset="-120"/>
-              </a:rPr>
-              <a:t>Active metabolites may not be measured by the assay.</a:t>
-            </a:r>
-            <a:endParaRPr lang="en-US" sz="1250" dirty="0"/>
-          </a:p>
-          <a:p>
-            <a:pPr algn="l" marL="177800" indent="-177800">
-              <a:spcAft>
-                <a:spcPts val="900"/>
-              </a:spcAft>
-              <a:buSzPct val="100000"/>
-              <a:buChar char="•"/>
-            </a:pPr>
-            <a:r>
-              <a:rPr lang="en-US" sz="1250" dirty="0">
-                <a:solidFill>
-                  <a:srgbClr val="33444F"/>
-                </a:solidFill>
-                <a:latin typeface="Calibri" pitchFamily="34" charset="0"/>
-                <a:ea typeface="Calibri" pitchFamily="34" charset="-122"/>
-                <a:cs typeface="Calibri" pitchFamily="34" charset="-120"/>
-              </a:rPr>
-              <a:t>Timing errors are the commonest cause of misinterpretation.</a:t>
-            </a:r>
-            <a:endParaRPr lang="en-US" sz="1250" dirty="0"/>
-          </a:p>
-          <a:p>
-            <a:pPr algn="l" marL="177800" indent="-177800">
-              <a:spcAft>
-                <a:spcPts val="900"/>
-              </a:spcAft>
-              <a:buSzPct val="100000"/>
-              <a:buChar char="•"/>
-            </a:pPr>
-            <a:r>
-              <a:rPr lang="en-US" sz="1250" dirty="0">
-                <a:solidFill>
-                  <a:srgbClr val="33444F"/>
-                </a:solidFill>
-                <a:latin typeface="Calibri" pitchFamily="34" charset="0"/>
-                <a:ea typeface="Calibri" pitchFamily="34" charset="-122"/>
-                <a:cs typeface="Calibri" pitchFamily="34" charset="-120"/>
-              </a:rPr>
-              <a:t>Correlate level with clinical effect and toxicity.</a:t>
-            </a:r>
-            <a:endParaRPr lang="en-US" sz="1250" dirty="0"/>
-          </a:p>
-        </p:txBody>
-      </p:sp>
-      <p:sp>
-        <p:nvSpPr>
-          <p:cNvPr id="10" name="Text 8"/>
+            <a:pPr algn="ctr" indent="0" marL="0">
+              <a:buNone/>
+            </a:pPr>
+            <a:r>
+              <a:rPr lang="en-US" sz="1150" i="1" dirty="0">
+                <a:solidFill>
+                  <a:srgbClr val="6B7B8A"/>
+                </a:solidFill>
+                <a:latin typeface="Calibri" pitchFamily="34" charset="0"/>
+                <a:ea typeface="Calibri" pitchFamily="34" charset="-122"/>
+                <a:cs typeface="Calibri" pitchFamily="34" charset="-120"/>
+              </a:rPr>
+              <a:t>Original schematic. Sample at steady state (~5 half-lives), usually as a trough; interpret FREE drug when binding is altered.</a:t>
+            </a:r>
+            <a:endParaRPr lang="en-US" sz="1150" dirty="0"/>
+          </a:p>
+        </p:txBody>
+      </p:sp>
+      <p:sp>
+        <p:nvSpPr>
+          <p:cNvPr id="7" name="Text 4"/>
           <p:cNvSpPr/>
           <p:nvPr/>
         </p:nvSpPr>
@@ -13772,7 +16081,7 @@
       </p:sp>
       <p:sp>
         <p:nvSpPr>
-          <p:cNvPr id="11" name="Text 9"/>
+          <p:cNvPr id="8" name="Text 5"/>
           <p:cNvSpPr/>
           <p:nvPr/>
         </p:nvSpPr>

--- a/decks/Chem_05_Toxicology-TDM-POCT.pptx
+++ b/decks/Chem_05_Toxicology-TDM-POCT.pptx
@@ -25,9 +25,13 @@
     <p:sldId id="273" r:id="rId19"/>
     <p:sldId id="274" r:id="rId20"/>
     <p:sldId id="275" r:id="rId21"/>
+    <p:sldId id="284" r:id="rId35"/>
     <p:sldId id="276" r:id="rId22"/>
+    <p:sldId id="283" r:id="rId34"/>
     <p:sldId id="277" r:id="rId23"/>
+    <p:sldId id="282" r:id="rId33"/>
     <p:sldId id="278" r:id="rId24"/>
+    <p:sldId id="281" r:id="rId32"/>
     <p:sldId id="279" r:id="rId25"/>
     <p:sldId id="280" r:id="rId26"/>
   </p:sldIdLst>
@@ -3032,6 +3036,10 @@
           </a:solidFill>
           <a:ln/>
         </p:spPr>
+        <p:txBody>
+          <a:bodyPr/>
+          <a:p/>
+        </p:txBody>
       </p:sp>
       <p:sp>
         <p:nvSpPr>
@@ -3054,6 +3062,10 @@
           </a:solidFill>
           <a:ln/>
         </p:spPr>
+        <p:txBody>
+          <a:bodyPr/>
+          <a:p/>
+        </p:txBody>
       </p:sp>
       <p:sp>
         <p:nvSpPr>
@@ -3076,6 +3088,10 @@
           </a:solidFill>
           <a:ln/>
         </p:spPr>
+        <p:txBody>
+          <a:bodyPr/>
+          <a:p/>
+        </p:txBody>
       </p:sp>
       <p:sp>
         <p:nvSpPr>
@@ -3098,6 +3114,10 @@
           </a:solidFill>
           <a:ln/>
         </p:spPr>
+        <p:txBody>
+          <a:bodyPr/>
+          <a:p/>
+        </p:txBody>
       </p:sp>
       <p:sp>
         <p:nvSpPr>
@@ -3514,6 +3534,10 @@
             </a:outerShdw>
           </a:effectLst>
         </p:spPr>
+        <p:txBody>
+          <a:bodyPr/>
+          <a:p/>
+        </p:txBody>
       </p:sp>
       <p:sp>
         <p:nvSpPr>
@@ -3688,6 +3712,10 @@
             </a:outerShdw>
           </a:effectLst>
         </p:spPr>
+        <p:txBody>
+          <a:bodyPr/>
+          <a:p/>
+        </p:txBody>
       </p:sp>
       <p:sp>
         <p:nvSpPr>
@@ -5515,6 +5543,10 @@
           </a:solidFill>
           <a:ln/>
         </p:spPr>
+        <p:txBody>
+          <a:bodyPr/>
+          <a:p/>
+        </p:txBody>
       </p:sp>
       <p:sp>
         <p:nvSpPr>
@@ -5537,6 +5569,10 @@
           </a:solidFill>
           <a:ln/>
         </p:spPr>
+        <p:txBody>
+          <a:bodyPr/>
+          <a:p/>
+        </p:txBody>
       </p:sp>
       <p:sp>
         <p:nvSpPr>
@@ -5793,6 +5829,10 @@
             </a:outerShdw>
           </a:effectLst>
         </p:spPr>
+        <p:txBody>
+          <a:bodyPr/>
+          <a:p/>
+        </p:txBody>
       </p:sp>
       <p:sp>
         <p:nvSpPr>
@@ -5967,6 +6007,10 @@
             </a:outerShdw>
           </a:effectLst>
         </p:spPr>
+        <p:txBody>
+          <a:bodyPr/>
+          <a:p/>
+        </p:txBody>
       </p:sp>
       <p:sp>
         <p:nvSpPr>
@@ -6357,6 +6401,10 @@
             </a:outerShdw>
           </a:effectLst>
         </p:spPr>
+        <p:txBody>
+          <a:bodyPr/>
+          <a:p/>
+        </p:txBody>
       </p:sp>
       <p:sp>
         <p:nvSpPr>
@@ -6467,6 +6515,10 @@
             </a:outerShdw>
           </a:effectLst>
         </p:spPr>
+        <p:txBody>
+          <a:bodyPr/>
+          <a:p/>
+        </p:txBody>
       </p:sp>
       <p:sp>
         <p:nvSpPr>
@@ -6896,6 +6948,10 @@
             </a:outerShdw>
           </a:effectLst>
         </p:spPr>
+        <p:txBody>
+          <a:bodyPr/>
+          <a:p/>
+        </p:txBody>
       </p:sp>
       <p:sp>
         <p:nvSpPr>
@@ -7222,6 +7278,10 @@
             </a:outerShdw>
           </a:effectLst>
         </p:spPr>
+        <p:txBody>
+          <a:bodyPr/>
+          <a:p/>
+        </p:txBody>
       </p:sp>
       <p:sp>
         <p:nvSpPr>
@@ -7332,6 +7392,10 @@
             </a:outerShdw>
           </a:effectLst>
         </p:spPr>
+        <p:txBody>
+          <a:bodyPr/>
+          <a:p/>
+        </p:txBody>
       </p:sp>
       <p:sp>
         <p:nvSpPr>
@@ -7761,6 +7825,10 @@
             </a:outerShdw>
           </a:effectLst>
         </p:spPr>
+        <p:txBody>
+          <a:bodyPr/>
+          <a:p/>
+        </p:txBody>
       </p:sp>
       <p:sp>
         <p:nvSpPr>
@@ -8087,6 +8155,10 @@
             </a:outerShdw>
           </a:effectLst>
         </p:spPr>
+        <p:txBody>
+          <a:bodyPr/>
+          <a:p/>
+        </p:txBody>
       </p:sp>
       <p:sp>
         <p:nvSpPr>
@@ -8197,6 +8269,10 @@
             </a:outerShdw>
           </a:effectLst>
         </p:spPr>
+        <p:txBody>
+          <a:bodyPr/>
+          <a:p/>
+        </p:txBody>
       </p:sp>
       <p:sp>
         <p:nvSpPr>
@@ -8626,6 +8702,10 @@
             </a:outerShdw>
           </a:effectLst>
         </p:spPr>
+        <p:txBody>
+          <a:bodyPr/>
+          <a:p/>
+        </p:txBody>
       </p:sp>
       <p:sp>
         <p:nvSpPr>
@@ -8952,6 +9032,10 @@
             </a:outerShdw>
           </a:effectLst>
         </p:spPr>
+        <p:txBody>
+          <a:bodyPr/>
+          <a:p/>
+        </p:txBody>
       </p:sp>
       <p:sp>
         <p:nvSpPr>
@@ -9059,6 +9143,10 @@
             </a:outerShdw>
           </a:effectLst>
         </p:spPr>
+        <p:txBody>
+          <a:bodyPr/>
+          <a:p/>
+        </p:txBody>
       </p:sp>
       <p:sp>
         <p:nvSpPr>
@@ -9166,6 +9254,10 @@
             </a:outerShdw>
           </a:effectLst>
         </p:spPr>
+        <p:txBody>
+          <a:bodyPr/>
+          <a:p/>
+        </p:txBody>
       </p:sp>
       <p:sp>
         <p:nvSpPr>
@@ -9273,6 +9365,10 @@
             </a:outerShdw>
           </a:effectLst>
         </p:spPr>
+        <p:txBody>
+          <a:bodyPr/>
+          <a:p/>
+        </p:txBody>
       </p:sp>
       <p:sp>
         <p:nvSpPr>
@@ -9665,9 +9761,9 @@
               <a:buNone/>
             </a:pPr>
             <a:r>
-              <a:rPr lang="en-US" sz="1350" b="1" dirty="0">
-                <a:solidFill>
-                  <a:srgbClr val="0D4A92"/>
+              <a:rPr lang="en-US" sz="1350" b="0" dirty="0">
+                <a:solidFill>
+                  <a:srgbClr val="33444F"/>
                 </a:solidFill>
                 <a:latin typeface="Calibri" pitchFamily="34" charset="0"/>
                 <a:ea typeface="Calibri" pitchFamily="34" charset="-122"/>
@@ -9736,130 +9832,6 @@
               <a:t>E. Heterophile antibody</a:t>
             </a:r>
             <a:endParaRPr lang="en-US" sz="1350" dirty="0"/>
-          </a:p>
-        </p:txBody>
-      </p:sp>
-      <p:sp>
-        <p:nvSpPr>
-          <p:cNvPr id="6" name="Shape 4"/>
-          <p:cNvSpPr/>
-          <p:nvPr/>
-        </p:nvSpPr>
-        <p:spPr>
-          <a:xfrm>
-            <a:off x="7201632" y="2395728"/>
-            <a:ext cx="4423136" cy="3246120"/>
-          </a:xfrm>
-          <a:prstGeom prst="roundRect">
-            <a:avLst>
-              <a:gd name="adj" fmla="val 2535"/>
-            </a:avLst>
-          </a:prstGeom>
-          <a:solidFill>
-            <a:srgbClr val="E7EFFA"/>
-          </a:solidFill>
-          <a:ln/>
-          <a:effectLst>
-            <a:outerShdw sx="100000" sy="100000" kx="0" ky="0" algn="bl" rotWithShape="0" blurRad="88900" dist="25400" dir="5400000">
-              <a:srgbClr val="22303C">
-                <a:alpha val="12000"/>
-              </a:srgbClr>
-            </a:outerShdw>
-          </a:effectLst>
-        </p:spPr>
-      </p:sp>
-      <p:sp>
-        <p:nvSpPr>
-          <p:cNvPr id="7" name="Text 5"/>
-          <p:cNvSpPr/>
-          <p:nvPr/>
-        </p:nvSpPr>
-        <p:spPr>
-          <a:xfrm>
-            <a:off x="7439376" y="2578608"/>
-            <a:ext cx="3965936" cy="457200"/>
-          </a:xfrm>
-          <a:prstGeom prst="rect">
-            <a:avLst/>
-          </a:prstGeom>
-          <a:noFill/>
-          <a:ln/>
-        </p:spPr>
-        <p:txBody>
-          <a:bodyPr wrap="square" lIns="0" tIns="0" rIns="0" bIns="0" rtlCol="0" anchor="ctr"/>
-          <a:lstStyle/>
-          <a:p>
-            <a:pPr indent="0" marL="0">
-              <a:buNone/>
-            </a:pPr>
-            <a:r>
-              <a:rPr lang="en-US" sz="1500" b="1" dirty="0">
-                <a:solidFill>
-                  <a:srgbClr val="1565C0"/>
-                </a:solidFill>
-                <a:latin typeface="Calibri" pitchFamily="34" charset="0"/>
-                <a:ea typeface="Calibri" pitchFamily="34" charset="-122"/>
-                <a:cs typeface="Calibri" pitchFamily="34" charset="-120"/>
-              </a:rPr>
-              <a:t>ANSWER  </a:t>
-            </a:r>
-            <a:pPr indent="0" marL="0">
-              <a:buNone/>
-            </a:pPr>
-            <a:r>
-              <a:rPr lang="en-US" sz="1500" b="1" dirty="0">
-                <a:solidFill>
-                  <a:srgbClr val="1B2A38"/>
-                </a:solidFill>
-                <a:latin typeface="Calibri" pitchFamily="34" charset="0"/>
-                <a:ea typeface="Calibri" pitchFamily="34" charset="-122"/>
-                <a:cs typeface="Calibri" pitchFamily="34" charset="-120"/>
-              </a:rPr>
-              <a:t>B — Screens may miss semisynthetic/synthetic opioids</a:t>
-            </a:r>
-            <a:endParaRPr lang="en-US" sz="1500" dirty="0"/>
-          </a:p>
-        </p:txBody>
-      </p:sp>
-      <p:sp>
-        <p:nvSpPr>
-          <p:cNvPr id="8" name="Text 6"/>
-          <p:cNvSpPr/>
-          <p:nvPr/>
-        </p:nvSpPr>
-        <p:spPr>
-          <a:xfrm>
-            <a:off x="7439376" y="3127248"/>
-            <a:ext cx="3947648" cy="2377440"/>
-          </a:xfrm>
-          <a:prstGeom prst="rect">
-            <a:avLst/>
-          </a:prstGeom>
-          <a:noFill/>
-          <a:ln/>
-        </p:spPr>
-        <p:txBody>
-          <a:bodyPr wrap="square" lIns="0" tIns="0" rIns="0" bIns="0" rtlCol="0" anchor="t"/>
-          <a:lstStyle/>
-          <a:p>
-            <a:pPr algn="l" indent="0" marL="0">
-              <a:lnSpc>
-                <a:spcPct val="108000"/>
-              </a:lnSpc>
-              <a:buNone/>
-            </a:pPr>
-            <a:r>
-              <a:rPr lang="en-US" sz="1250" dirty="0">
-                <a:solidFill>
-                  <a:srgbClr val="33444F"/>
-                </a:solidFill>
-                <a:latin typeface="Calibri" pitchFamily="34" charset="0"/>
-                <a:ea typeface="Calibri" pitchFamily="34" charset="-122"/>
-                <a:cs typeface="Calibri" pitchFamily="34" charset="-120"/>
-              </a:rPr>
-              <a:t>Standard opiate immunoassays are calibrated to morphine/codeine and can under-detect oxycodone/fentanyl; targeted assays or LC-MS/MS are required.</a:t>
-            </a:r>
-            <a:endParaRPr lang="en-US" sz="1250" dirty="0"/>
           </a:p>
         </p:txBody>
       </p:sp>
@@ -10189,9 +10161,9 @@
               <a:buNone/>
             </a:pPr>
             <a:r>
-              <a:rPr lang="en-US" sz="1350" b="1" dirty="0">
-                <a:solidFill>
-                  <a:srgbClr val="0D4A92"/>
+              <a:rPr lang="en-US" sz="1350" b="0" dirty="0">
+                <a:solidFill>
+                  <a:srgbClr val="33444F"/>
                 </a:solidFill>
                 <a:latin typeface="Calibri" pitchFamily="34" charset="0"/>
                 <a:ea typeface="Calibri" pitchFamily="34" charset="-122"/>
@@ -10240,130 +10212,6 @@
               <a:t>E. Only when toxicity is suspected</a:t>
             </a:r>
             <a:endParaRPr lang="en-US" sz="1350" dirty="0"/>
-          </a:p>
-        </p:txBody>
-      </p:sp>
-      <p:sp>
-        <p:nvSpPr>
-          <p:cNvPr id="6" name="Shape 4"/>
-          <p:cNvSpPr/>
-          <p:nvPr/>
-        </p:nvSpPr>
-        <p:spPr>
-          <a:xfrm>
-            <a:off x="7201632" y="2395728"/>
-            <a:ext cx="4423136" cy="3246120"/>
-          </a:xfrm>
-          <a:prstGeom prst="roundRect">
-            <a:avLst>
-              <a:gd name="adj" fmla="val 2535"/>
-            </a:avLst>
-          </a:prstGeom>
-          <a:solidFill>
-            <a:srgbClr val="E7EFFA"/>
-          </a:solidFill>
-          <a:ln/>
-          <a:effectLst>
-            <a:outerShdw sx="100000" sy="100000" kx="0" ky="0" algn="bl" rotWithShape="0" blurRad="88900" dist="25400" dir="5400000">
-              <a:srgbClr val="22303C">
-                <a:alpha val="12000"/>
-              </a:srgbClr>
-            </a:outerShdw>
-          </a:effectLst>
-        </p:spPr>
-      </p:sp>
-      <p:sp>
-        <p:nvSpPr>
-          <p:cNvPr id="7" name="Text 5"/>
-          <p:cNvSpPr/>
-          <p:nvPr/>
-        </p:nvSpPr>
-        <p:spPr>
-          <a:xfrm>
-            <a:off x="7439376" y="2578608"/>
-            <a:ext cx="3965936" cy="457200"/>
-          </a:xfrm>
-          <a:prstGeom prst="rect">
-            <a:avLst/>
-          </a:prstGeom>
-          <a:noFill/>
-          <a:ln/>
-        </p:spPr>
-        <p:txBody>
-          <a:bodyPr wrap="square" lIns="0" tIns="0" rIns="0" bIns="0" rtlCol="0" anchor="ctr"/>
-          <a:lstStyle/>
-          <a:p>
-            <a:pPr indent="0" marL="0">
-              <a:buNone/>
-            </a:pPr>
-            <a:r>
-              <a:rPr lang="en-US" sz="1500" b="1" dirty="0">
-                <a:solidFill>
-                  <a:srgbClr val="1565C0"/>
-                </a:solidFill>
-                <a:latin typeface="Calibri" pitchFamily="34" charset="0"/>
-                <a:ea typeface="Calibri" pitchFamily="34" charset="-122"/>
-                <a:cs typeface="Calibri" pitchFamily="34" charset="-120"/>
-              </a:rPr>
-              <a:t>ANSWER  </a:t>
-            </a:r>
-            <a:pPr indent="0" marL="0">
-              <a:buNone/>
-            </a:pPr>
-            <a:r>
-              <a:rPr lang="en-US" sz="1500" b="1" dirty="0">
-                <a:solidFill>
-                  <a:srgbClr val="1B2A38"/>
-                </a:solidFill>
-                <a:latin typeface="Calibri" pitchFamily="34" charset="0"/>
-                <a:ea typeface="Calibri" pitchFamily="34" charset="-122"/>
-                <a:cs typeface="Calibri" pitchFamily="34" charset="-120"/>
-              </a:rPr>
-              <a:t>C — At steady state, pre-dose (trough)</a:t>
-            </a:r>
-            <a:endParaRPr lang="en-US" sz="1500" dirty="0"/>
-          </a:p>
-        </p:txBody>
-      </p:sp>
-      <p:sp>
-        <p:nvSpPr>
-          <p:cNvPr id="8" name="Text 6"/>
-          <p:cNvSpPr/>
-          <p:nvPr/>
-        </p:nvSpPr>
-        <p:spPr>
-          <a:xfrm>
-            <a:off x="7439376" y="3127248"/>
-            <a:ext cx="3947648" cy="2377440"/>
-          </a:xfrm>
-          <a:prstGeom prst="rect">
-            <a:avLst/>
-          </a:prstGeom>
-          <a:noFill/>
-          <a:ln/>
-        </p:spPr>
-        <p:txBody>
-          <a:bodyPr wrap="square" lIns="0" tIns="0" rIns="0" bIns="0" rtlCol="0" anchor="t"/>
-          <a:lstStyle/>
-          <a:p>
-            <a:pPr algn="l" indent="0" marL="0">
-              <a:lnSpc>
-                <a:spcPct val="108000"/>
-              </a:lnSpc>
-              <a:buNone/>
-            </a:pPr>
-            <a:r>
-              <a:rPr lang="en-US" sz="1250" dirty="0">
-                <a:solidFill>
-                  <a:srgbClr val="33444F"/>
-                </a:solidFill>
-                <a:latin typeface="Calibri" pitchFamily="34" charset="0"/>
-                <a:ea typeface="Calibri" pitchFamily="34" charset="-122"/>
-                <a:cs typeface="Calibri" pitchFamily="34" charset="-120"/>
-              </a:rPr>
-              <a:t>Steady state (~5 half-lives) with a pre-dose trough gives the most interpretable, reproducible level for most monitored drugs.</a:t>
-            </a:r>
-            <a:endParaRPr lang="en-US" sz="1250" dirty="0"/>
           </a:p>
         </p:txBody>
       </p:sp>
@@ -10673,9 +10521,9 @@
               <a:buNone/>
             </a:pPr>
             <a:r>
-              <a:rPr lang="en-US" sz="1350" b="1" dirty="0">
-                <a:solidFill>
-                  <a:srgbClr val="0D4A92"/>
+              <a:rPr lang="en-US" sz="1350" b="0" dirty="0">
+                <a:solidFill>
+                  <a:srgbClr val="33444F"/>
                 </a:solidFill>
                 <a:latin typeface="Calibri" pitchFamily="34" charset="0"/>
                 <a:ea typeface="Calibri" pitchFamily="34" charset="-122"/>
@@ -10744,130 +10592,6 @@
               <a:t>E. Only proficiency testing</a:t>
             </a:r>
             <a:endParaRPr lang="en-US" sz="1350" dirty="0"/>
-          </a:p>
-        </p:txBody>
-      </p:sp>
-      <p:sp>
-        <p:nvSpPr>
-          <p:cNvPr id="6" name="Shape 4"/>
-          <p:cNvSpPr/>
-          <p:nvPr/>
-        </p:nvSpPr>
-        <p:spPr>
-          <a:xfrm>
-            <a:off x="7201632" y="2395728"/>
-            <a:ext cx="4423136" cy="3246120"/>
-          </a:xfrm>
-          <a:prstGeom prst="roundRect">
-            <a:avLst>
-              <a:gd name="adj" fmla="val 2535"/>
-            </a:avLst>
-          </a:prstGeom>
-          <a:solidFill>
-            <a:srgbClr val="E7EFFA"/>
-          </a:solidFill>
-          <a:ln/>
-          <a:effectLst>
-            <a:outerShdw sx="100000" sy="100000" kx="0" ky="0" algn="bl" rotWithShape="0" blurRad="88900" dist="25400" dir="5400000">
-              <a:srgbClr val="22303C">
-                <a:alpha val="12000"/>
-              </a:srgbClr>
-            </a:outerShdw>
-          </a:effectLst>
-        </p:spPr>
-      </p:sp>
-      <p:sp>
-        <p:nvSpPr>
-          <p:cNvPr id="7" name="Text 5"/>
-          <p:cNvSpPr/>
-          <p:nvPr/>
-        </p:nvSpPr>
-        <p:spPr>
-          <a:xfrm>
-            <a:off x="7439376" y="2578608"/>
-            <a:ext cx="3965936" cy="457200"/>
-          </a:xfrm>
-          <a:prstGeom prst="rect">
-            <a:avLst/>
-          </a:prstGeom>
-          <a:noFill/>
-          <a:ln/>
-        </p:spPr>
-        <p:txBody>
-          <a:bodyPr wrap="square" lIns="0" tIns="0" rIns="0" bIns="0" rtlCol="0" anchor="ctr"/>
-          <a:lstStyle/>
-          <a:p>
-            <a:pPr indent="0" marL="0">
-              <a:buNone/>
-            </a:pPr>
-            <a:r>
-              <a:rPr lang="en-US" sz="1500" b="1" dirty="0">
-                <a:solidFill>
-                  <a:srgbClr val="1565C0"/>
-                </a:solidFill>
-                <a:latin typeface="Calibri" pitchFamily="34" charset="0"/>
-                <a:ea typeface="Calibri" pitchFamily="34" charset="-122"/>
-                <a:cs typeface="Calibri" pitchFamily="34" charset="-120"/>
-              </a:rPr>
-              <a:t>ANSWER  </a:t>
-            </a:r>
-            <a:pPr indent="0" marL="0">
-              <a:buNone/>
-            </a:pPr>
-            <a:r>
-              <a:rPr lang="en-US" sz="1500" b="1" dirty="0">
-                <a:solidFill>
-                  <a:srgbClr val="1B2A38"/>
-                </a:solidFill>
-                <a:latin typeface="Calibri" pitchFamily="34" charset="0"/>
-                <a:ea typeface="Calibri" pitchFamily="34" charset="-122"/>
-                <a:cs typeface="Calibri" pitchFamily="34" charset="-120"/>
-              </a:rPr>
-              <a:t>B — Full validation</a:t>
-            </a:r>
-            <a:endParaRPr lang="en-US" sz="1500" dirty="0"/>
-          </a:p>
-        </p:txBody>
-      </p:sp>
-      <p:sp>
-        <p:nvSpPr>
-          <p:cNvPr id="8" name="Text 6"/>
-          <p:cNvSpPr/>
-          <p:nvPr/>
-        </p:nvSpPr>
-        <p:spPr>
-          <a:xfrm>
-            <a:off x="7439376" y="3127248"/>
-            <a:ext cx="3947648" cy="2377440"/>
-          </a:xfrm>
-          <a:prstGeom prst="rect">
-            <a:avLst/>
-          </a:prstGeom>
-          <a:noFill/>
-          <a:ln/>
-        </p:spPr>
-        <p:txBody>
-          <a:bodyPr wrap="square" lIns="0" tIns="0" rIns="0" bIns="0" rtlCol="0" anchor="t"/>
-          <a:lstStyle/>
-          <a:p>
-            <a:pPr algn="l" indent="0" marL="0">
-              <a:lnSpc>
-                <a:spcPct val="108000"/>
-              </a:lnSpc>
-              <a:buNone/>
-            </a:pPr>
-            <a:r>
-              <a:rPr lang="en-US" sz="1250" dirty="0">
-                <a:solidFill>
-                  <a:srgbClr val="33444F"/>
-                </a:solidFill>
-                <a:latin typeface="Calibri" pitchFamily="34" charset="0"/>
-                <a:ea typeface="Calibri" pitchFamily="34" charset="-122"/>
-                <a:cs typeface="Calibri" pitchFamily="34" charset="-120"/>
-              </a:rPr>
-              <a:t>FDA-cleared assays require verification; laboratory-developed tests require full validation of all performance characteristics.</a:t>
-            </a:r>
-            <a:endParaRPr lang="en-US" sz="1250" dirty="0"/>
           </a:p>
         </p:txBody>
       </p:sp>
@@ -11177,9 +10901,9 @@
               <a:buNone/>
             </a:pPr>
             <a:r>
-              <a:rPr lang="en-US" sz="1350" b="1" dirty="0">
-                <a:solidFill>
-                  <a:srgbClr val="0D4A92"/>
+              <a:rPr lang="en-US" sz="1350" b="0" dirty="0">
+                <a:solidFill>
+                  <a:srgbClr val="33444F"/>
                 </a:solidFill>
                 <a:latin typeface="Calibri" pitchFamily="34" charset="0"/>
                 <a:ea typeface="Calibri" pitchFamily="34" charset="-122"/>
@@ -11248,130 +10972,6 @@
               <a:t>E. Macro-analyte</a:t>
             </a:r>
             <a:endParaRPr lang="en-US" sz="1350" dirty="0"/>
-          </a:p>
-        </p:txBody>
-      </p:sp>
-      <p:sp>
-        <p:nvSpPr>
-          <p:cNvPr id="6" name="Shape 4"/>
-          <p:cNvSpPr/>
-          <p:nvPr/>
-        </p:nvSpPr>
-        <p:spPr>
-          <a:xfrm>
-            <a:off x="7201632" y="2395728"/>
-            <a:ext cx="4423136" cy="3246120"/>
-          </a:xfrm>
-          <a:prstGeom prst="roundRect">
-            <a:avLst>
-              <a:gd name="adj" fmla="val 2535"/>
-            </a:avLst>
-          </a:prstGeom>
-          <a:solidFill>
-            <a:srgbClr val="E7EFFA"/>
-          </a:solidFill>
-          <a:ln/>
-          <a:effectLst>
-            <a:outerShdw sx="100000" sy="100000" kx="0" ky="0" algn="bl" rotWithShape="0" blurRad="88900" dist="25400" dir="5400000">
-              <a:srgbClr val="22303C">
-                <a:alpha val="12000"/>
-              </a:srgbClr>
-            </a:outerShdw>
-          </a:effectLst>
-        </p:spPr>
-      </p:sp>
-      <p:sp>
-        <p:nvSpPr>
-          <p:cNvPr id="7" name="Text 5"/>
-          <p:cNvSpPr/>
-          <p:nvPr/>
-        </p:nvSpPr>
-        <p:spPr>
-          <a:xfrm>
-            <a:off x="7439376" y="2578608"/>
-            <a:ext cx="3965936" cy="457200"/>
-          </a:xfrm>
-          <a:prstGeom prst="rect">
-            <a:avLst/>
-          </a:prstGeom>
-          <a:noFill/>
-          <a:ln/>
-        </p:spPr>
-        <p:txBody>
-          <a:bodyPr wrap="square" lIns="0" tIns="0" rIns="0" bIns="0" rtlCol="0" anchor="ctr"/>
-          <a:lstStyle/>
-          <a:p>
-            <a:pPr indent="0" marL="0">
-              <a:buNone/>
-            </a:pPr>
-            <a:r>
-              <a:rPr lang="en-US" sz="1500" b="1" dirty="0">
-                <a:solidFill>
-                  <a:srgbClr val="1565C0"/>
-                </a:solidFill>
-                <a:latin typeface="Calibri" pitchFamily="34" charset="0"/>
-                <a:ea typeface="Calibri" pitchFamily="34" charset="-122"/>
-                <a:cs typeface="Calibri" pitchFamily="34" charset="-120"/>
-              </a:rPr>
-              <a:t>ANSWER  </a:t>
-            </a:r>
-            <a:pPr indent="0" marL="0">
-              <a:buNone/>
-            </a:pPr>
-            <a:r>
-              <a:rPr lang="en-US" sz="1500" b="1" dirty="0">
-                <a:solidFill>
-                  <a:srgbClr val="1B2A38"/>
-                </a:solidFill>
-                <a:latin typeface="Calibri" pitchFamily="34" charset="0"/>
-                <a:ea typeface="Calibri" pitchFamily="34" charset="-122"/>
-                <a:cs typeface="Calibri" pitchFamily="34" charset="-120"/>
-              </a:rPr>
-              <a:t>B — Elevated free phenytoin</a:t>
-            </a:r>
-            <a:endParaRPr lang="en-US" sz="1500" dirty="0"/>
-          </a:p>
-        </p:txBody>
-      </p:sp>
-      <p:sp>
-        <p:nvSpPr>
-          <p:cNvPr id="8" name="Text 6"/>
-          <p:cNvSpPr/>
-          <p:nvPr/>
-        </p:nvSpPr>
-        <p:spPr>
-          <a:xfrm>
-            <a:off x="7439376" y="3127248"/>
-            <a:ext cx="3947648" cy="2377440"/>
-          </a:xfrm>
-          <a:prstGeom prst="rect">
-            <a:avLst/>
-          </a:prstGeom>
-          <a:noFill/>
-          <a:ln/>
-        </p:spPr>
-        <p:txBody>
-          <a:bodyPr wrap="square" lIns="0" tIns="0" rIns="0" bIns="0" rtlCol="0" anchor="t"/>
-          <a:lstStyle/>
-          <a:p>
-            <a:pPr algn="l" indent="0" marL="0">
-              <a:lnSpc>
-                <a:spcPct val="108000"/>
-              </a:lnSpc>
-              <a:buNone/>
-            </a:pPr>
-            <a:r>
-              <a:rPr lang="en-US" sz="1250" dirty="0">
-                <a:solidFill>
-                  <a:srgbClr val="33444F"/>
-                </a:solidFill>
-                <a:latin typeface="Calibri" pitchFamily="34" charset="0"/>
-                <a:ea typeface="Calibri" pitchFamily="34" charset="-122"/>
-                <a:cs typeface="Calibri" pitchFamily="34" charset="-120"/>
-              </a:rPr>
-              <a:t>Low albumin raises the unbound active fraction; total level underestimates the effective concentration. Measure free phenytoin.</a:t>
-            </a:r>
-            <a:endParaRPr lang="en-US" sz="1250" dirty="0"/>
           </a:p>
         </p:txBody>
       </p:sp>
@@ -11612,6 +11212,10 @@
           </a:solidFill>
           <a:ln/>
         </p:spPr>
+        <p:txBody>
+          <a:bodyPr/>
+          <a:p/>
+        </p:txBody>
       </p:sp>
       <p:sp>
         <p:nvSpPr>
@@ -11639,6 +11243,10 @@
             </a:outerShdw>
           </a:effectLst>
         </p:spPr>
+        <p:txBody>
+          <a:bodyPr/>
+          <a:p/>
+        </p:txBody>
       </p:sp>
       <p:sp>
         <p:nvSpPr>
@@ -11739,6 +11347,10 @@
           </a:solidFill>
           <a:ln/>
         </p:spPr>
+        <p:txBody>
+          <a:bodyPr/>
+          <a:p/>
+        </p:txBody>
       </p:sp>
       <p:sp>
         <p:nvSpPr>
@@ -11766,6 +11378,10 @@
             </a:outerShdw>
           </a:effectLst>
         </p:spPr>
+        <p:txBody>
+          <a:bodyPr/>
+          <a:p/>
+        </p:txBody>
       </p:sp>
       <p:sp>
         <p:nvSpPr>
@@ -11866,6 +11482,10 @@
           </a:solidFill>
           <a:ln/>
         </p:spPr>
+        <p:txBody>
+          <a:bodyPr/>
+          <a:p/>
+        </p:txBody>
       </p:sp>
       <p:sp>
         <p:nvSpPr>
@@ -11893,6 +11513,10 @@
             </a:outerShdw>
           </a:effectLst>
         </p:spPr>
+        <p:txBody>
+          <a:bodyPr/>
+          <a:p/>
+        </p:txBody>
       </p:sp>
       <p:sp>
         <p:nvSpPr>
@@ -11993,6 +11617,10 @@
           </a:solidFill>
           <a:ln/>
         </p:spPr>
+        <p:txBody>
+          <a:bodyPr/>
+          <a:p/>
+        </p:txBody>
       </p:sp>
       <p:sp>
         <p:nvSpPr>
@@ -12020,6 +11648,10 @@
             </a:outerShdw>
           </a:effectLst>
         </p:spPr>
+        <p:txBody>
+          <a:bodyPr/>
+          <a:p/>
+        </p:txBody>
       </p:sp>
       <p:sp>
         <p:nvSpPr>
@@ -12120,6 +11752,10 @@
           </a:solidFill>
           <a:ln/>
         </p:spPr>
+        <p:txBody>
+          <a:bodyPr/>
+          <a:p/>
+        </p:txBody>
       </p:sp>
       <p:sp>
         <p:nvSpPr>
@@ -12147,6 +11783,10 @@
             </a:outerShdw>
           </a:effectLst>
         </p:spPr>
+        <p:txBody>
+          <a:bodyPr/>
+          <a:p/>
+        </p:txBody>
       </p:sp>
       <p:sp>
         <p:nvSpPr>
@@ -12630,6 +12270,1982 @@
 </p:sld>
 </file>
 
+<file path=ppt/slides/slide26.xml><?xml version="1.0" encoding="utf-8"?>
+<p:sld xmlns:a="http://schemas.openxmlformats.org/drawingml/2006/main" xmlns:p="http://schemas.openxmlformats.org/presentationml/2006/main" xmlns:r="http://schemas.openxmlformats.org/officeDocument/2006/relationships">
+  <p:cSld>
+    <p:spTree>
+      <p:nvGrpSpPr>
+        <p:cNvPr id="1" name=""/>
+        <p:cNvGrpSpPr/>
+        <p:nvPr/>
+      </p:nvGrpSpPr>
+      <p:grpSpPr/>
+      <p:sp>
+        <p:nvSpPr>
+          <p:cNvPr id="2" name="Text 0"/>
+          <p:cNvSpPr/>
+          <p:nvPr/>
+        </p:nvSpPr>
+        <p:spPr>
+          <a:xfrm>
+            <a:off x="566928" y="329184"/>
+            <a:ext cx="10515600" cy="310896"/>
+          </a:xfrm>
+          <a:prstGeom prst="rect">
+            <a:avLst/>
+          </a:prstGeom>
+          <a:noFill/>
+          <a:ln/>
+        </p:spPr>
+        <p:txBody>
+          <a:bodyPr wrap="square" lIns="0" tIns="0" rIns="0" bIns="0" rtlCol="0" anchor="ctr"/>
+          <a:lstStyle/>
+          <a:p>
+            <a:pPr algn="l" indent="0" marL="0">
+              <a:buNone/>
+            </a:pPr>
+            <a:r>
+              <a:rPr lang="en-US" sz="1100" b="1" spc="150" kern="0" dirty="0">
+                <a:solidFill>
+                  <a:srgbClr val="1565C0"/>
+                </a:solidFill>
+                <a:latin typeface="Calibri" pitchFamily="34" charset="0"/>
+                <a:ea typeface="Calibri" pitchFamily="34" charset="-122"/>
+                <a:cs typeface="Calibri" pitchFamily="34" charset="-120"/>
+              </a:rPr>
+              <a:t>CLINICAL CHEMISTRY   ·   BOARD REVIEW  ·  Q4</a:t>
+            </a:r>
+            <a:endParaRPr lang="en-US" sz="1100" dirty="0"/>
+          </a:p>
+        </p:txBody>
+      </p:sp>
+      <p:sp>
+        <p:nvSpPr>
+          <p:cNvPr id="3" name="Text 1"/>
+          <p:cNvSpPr/>
+          <p:nvPr/>
+        </p:nvSpPr>
+        <p:spPr>
+          <a:xfrm>
+            <a:off x="566928" y="713232"/>
+            <a:ext cx="11064240" cy="749808"/>
+          </a:xfrm>
+          <a:prstGeom prst="rect">
+            <a:avLst/>
+          </a:prstGeom>
+          <a:noFill/>
+          <a:ln/>
+        </p:spPr>
+        <p:txBody>
+          <a:bodyPr wrap="square" lIns="0" tIns="0" rIns="0" bIns="0" rtlCol="0" anchor="ctr"/>
+          <a:lstStyle/>
+          <a:p>
+            <a:pPr algn="l" indent="0" marL="0">
+              <a:buNone/>
+            </a:pPr>
+            <a:r>
+              <a:rPr lang="en-US" sz="2600" b="1" dirty="0">
+                <a:solidFill>
+                  <a:srgbClr val="0E3A5F"/>
+                </a:solidFill>
+                <a:latin typeface="Calibri" pitchFamily="34" charset="0"/>
+                <a:ea typeface="Calibri" pitchFamily="34" charset="-122"/>
+                <a:cs typeface="Calibri" pitchFamily="34" charset="-120"/>
+              </a:rPr>
+              <a:t>Board-Style Review</a:t>
+            </a:r>
+            <a:endParaRPr lang="en-US" sz="2600" dirty="0"/>
+          </a:p>
+        </p:txBody>
+      </p:sp>
+      <p:sp>
+        <p:nvSpPr>
+          <p:cNvPr id="4" name="Text 2"/>
+          <p:cNvSpPr/>
+          <p:nvPr/>
+        </p:nvSpPr>
+        <p:spPr>
+          <a:xfrm>
+            <a:off x="566928" y="1417320"/>
+            <a:ext cx="11057839" cy="914400"/>
+          </a:xfrm>
+          <a:prstGeom prst="rect">
+            <a:avLst/>
+          </a:prstGeom>
+          <a:noFill/>
+          <a:ln/>
+        </p:spPr>
+        <p:txBody>
+          <a:bodyPr wrap="square" lIns="0" tIns="0" rIns="0" bIns="0" rtlCol="0" anchor="t"/>
+          <a:lstStyle/>
+          <a:p>
+            <a:pPr algn="l" indent="0" marL="0">
+              <a:lnSpc>
+                <a:spcPct val="105000"/>
+              </a:lnSpc>
+              <a:buNone/>
+            </a:pPr>
+            <a:r>
+              <a:rPr lang="en-US" sz="1450" b="1" dirty="0">
+                <a:solidFill>
+                  <a:srgbClr val="1B2A38"/>
+                </a:solidFill>
+                <a:latin typeface="Calibri" pitchFamily="34" charset="0"/>
+                <a:ea typeface="Calibri" pitchFamily="34" charset="-122"/>
+                <a:cs typeface="Calibri" pitchFamily="34" charset="-120"/>
+              </a:rPr>
+              <a:t>A toxic phenytoin effect with a normal TOTAL level in a hypoalbuminemic patient is best explained by:</a:t>
+            </a:r>
+            <a:endParaRPr lang="en-US" sz="1450" dirty="0"/>
+          </a:p>
+        </p:txBody>
+      </p:sp>
+      <p:sp>
+        <p:nvSpPr>
+          <p:cNvPr id="5" name="Text 3"/>
+          <p:cNvSpPr/>
+          <p:nvPr/>
+        </p:nvSpPr>
+        <p:spPr>
+          <a:xfrm>
+            <a:off x="658368" y="2395728"/>
+            <a:ext cx="6192390" cy="3017520"/>
+          </a:xfrm>
+          <a:prstGeom prst="rect">
+            <a:avLst/>
+          </a:prstGeom>
+          <a:noFill/>
+          <a:ln/>
+        </p:spPr>
+        <p:txBody>
+          <a:bodyPr wrap="square" lIns="0" tIns="0" rIns="0" bIns="0" rtlCol="0" anchor="t"/>
+          <a:lstStyle/>
+          <a:p>
+            <a:pPr algn="l" indent="0" marL="0">
+              <a:spcAft>
+                <a:spcPts val="600"/>
+              </a:spcAft>
+              <a:buNone/>
+            </a:pPr>
+            <a:r>
+              <a:rPr lang="en-US" sz="1350" dirty="0">
+                <a:solidFill>
+                  <a:srgbClr val="33444F"/>
+                </a:solidFill>
+                <a:latin typeface="Calibri" pitchFamily="34" charset="0"/>
+                <a:ea typeface="Calibri" pitchFamily="34" charset="-122"/>
+                <a:cs typeface="Calibri" pitchFamily="34" charset="-120"/>
+              </a:rPr>
+              <a:t>A. Assay interference</a:t>
+            </a:r>
+            <a:endParaRPr lang="en-US" sz="1350" dirty="0"/>
+          </a:p>
+          <a:p>
+            <a:pPr algn="l" indent="0" marL="0">
+              <a:spcAft>
+                <a:spcPts val="600"/>
+              </a:spcAft>
+              <a:buNone/>
+            </a:pPr>
+            <a:r>
+              <a:rPr lang="en-US" sz="1350" b="1" dirty="0">
+                <a:solidFill>
+                  <a:srgbClr val="0D4A92"/>
+                </a:solidFill>
+                <a:latin typeface="Calibri" pitchFamily="34" charset="0"/>
+                <a:ea typeface="Calibri" pitchFamily="34" charset="-122"/>
+                <a:cs typeface="Calibri" pitchFamily="34" charset="-120"/>
+              </a:rPr>
+              <a:t>B. Elevated FREE (unbound) phenytoin</a:t>
+            </a:r>
+            <a:endParaRPr lang="en-US" sz="1350" dirty="0"/>
+          </a:p>
+          <a:p>
+            <a:pPr algn="l" indent="0" marL="0">
+              <a:spcAft>
+                <a:spcPts val="600"/>
+              </a:spcAft>
+              <a:buNone/>
+            </a:pPr>
+            <a:r>
+              <a:rPr lang="en-US" sz="1350" dirty="0">
+                <a:solidFill>
+                  <a:srgbClr val="33444F"/>
+                </a:solidFill>
+                <a:latin typeface="Calibri" pitchFamily="34" charset="0"/>
+                <a:ea typeface="Calibri" pitchFamily="34" charset="-122"/>
+                <a:cs typeface="Calibri" pitchFamily="34" charset="-120"/>
+              </a:rPr>
+              <a:t>C. Hook effect</a:t>
+            </a:r>
+            <a:endParaRPr lang="en-US" sz="1350" dirty="0"/>
+          </a:p>
+          <a:p>
+            <a:pPr algn="l" indent="0" marL="0">
+              <a:spcAft>
+                <a:spcPts val="600"/>
+              </a:spcAft>
+              <a:buNone/>
+            </a:pPr>
+            <a:r>
+              <a:rPr lang="en-US" sz="1350" dirty="0">
+                <a:solidFill>
+                  <a:srgbClr val="33444F"/>
+                </a:solidFill>
+                <a:latin typeface="Calibri" pitchFamily="34" charset="0"/>
+                <a:ea typeface="Calibri" pitchFamily="34" charset="-122"/>
+                <a:cs typeface="Calibri" pitchFamily="34" charset="-120"/>
+              </a:rPr>
+              <a:t>D. Wrong sampling time</a:t>
+            </a:r>
+            <a:endParaRPr lang="en-US" sz="1350" dirty="0"/>
+          </a:p>
+          <a:p>
+            <a:pPr algn="l" indent="0" marL="0">
+              <a:spcAft>
+                <a:spcPts val="600"/>
+              </a:spcAft>
+              <a:buNone/>
+            </a:pPr>
+            <a:r>
+              <a:rPr lang="en-US" sz="1350" dirty="0">
+                <a:solidFill>
+                  <a:srgbClr val="33444F"/>
+                </a:solidFill>
+                <a:latin typeface="Calibri" pitchFamily="34" charset="0"/>
+                <a:ea typeface="Calibri" pitchFamily="34" charset="-122"/>
+                <a:cs typeface="Calibri" pitchFamily="34" charset="-120"/>
+              </a:rPr>
+              <a:t>E. Macro-analyte</a:t>
+            </a:r>
+            <a:endParaRPr lang="en-US" sz="1350" dirty="0"/>
+          </a:p>
+        </p:txBody>
+      </p:sp>
+      <p:sp>
+        <p:nvSpPr>
+          <p:cNvPr id="6" name="Shape 4"/>
+          <p:cNvSpPr/>
+          <p:nvPr/>
+        </p:nvSpPr>
+        <p:spPr>
+          <a:xfrm>
+            <a:off x="7201632" y="2395728"/>
+            <a:ext cx="4423136" cy="3246120"/>
+          </a:xfrm>
+          <a:prstGeom prst="roundRect">
+            <a:avLst>
+              <a:gd name="adj" fmla="val 2535"/>
+            </a:avLst>
+          </a:prstGeom>
+          <a:solidFill>
+            <a:srgbClr val="E7EFFA"/>
+          </a:solidFill>
+          <a:ln/>
+          <a:effectLst>
+            <a:outerShdw sx="100000" sy="100000" kx="0" ky="0" algn="bl" rotWithShape="0" blurRad="88900" dist="25400" dir="5400000">
+              <a:srgbClr val="22303C">
+                <a:alpha val="12000"/>
+              </a:srgbClr>
+            </a:outerShdw>
+          </a:effectLst>
+        </p:spPr>
+        <p:txBody>
+          <a:bodyPr/>
+          <a:p/>
+        </p:txBody>
+      </p:sp>
+      <p:sp>
+        <p:nvSpPr>
+          <p:cNvPr id="7" name="Text 5"/>
+          <p:cNvSpPr/>
+          <p:nvPr/>
+        </p:nvSpPr>
+        <p:spPr>
+          <a:xfrm>
+            <a:off x="7439376" y="2578608"/>
+            <a:ext cx="3965936" cy="457200"/>
+          </a:xfrm>
+          <a:prstGeom prst="rect">
+            <a:avLst/>
+          </a:prstGeom>
+          <a:noFill/>
+          <a:ln/>
+        </p:spPr>
+        <p:txBody>
+          <a:bodyPr wrap="square" lIns="0" tIns="0" rIns="0" bIns="0" rtlCol="0" anchor="ctr"/>
+          <a:lstStyle/>
+          <a:p>
+            <a:pPr indent="0" marL="0">
+              <a:buNone/>
+            </a:pPr>
+            <a:r>
+              <a:rPr lang="en-US" sz="1500" b="1" dirty="0">
+                <a:solidFill>
+                  <a:srgbClr val="1565C0"/>
+                </a:solidFill>
+                <a:latin typeface="Calibri" pitchFamily="34" charset="0"/>
+                <a:ea typeface="Calibri" pitchFamily="34" charset="-122"/>
+                <a:cs typeface="Calibri" pitchFamily="34" charset="-120"/>
+              </a:rPr>
+              <a:t>ANSWER  </a:t>
+            </a:r>
+            <a:pPr indent="0" marL="0">
+              <a:buNone/>
+            </a:pPr>
+            <a:r>
+              <a:rPr lang="en-US" sz="1500" b="1" dirty="0">
+                <a:solidFill>
+                  <a:srgbClr val="1B2A38"/>
+                </a:solidFill>
+                <a:latin typeface="Calibri" pitchFamily="34" charset="0"/>
+                <a:ea typeface="Calibri" pitchFamily="34" charset="-122"/>
+                <a:cs typeface="Calibri" pitchFamily="34" charset="-120"/>
+              </a:rPr>
+              <a:t>B — Elevated free phenytoin</a:t>
+            </a:r>
+            <a:endParaRPr lang="en-US" sz="1500" dirty="0"/>
+          </a:p>
+        </p:txBody>
+      </p:sp>
+      <p:sp>
+        <p:nvSpPr>
+          <p:cNvPr id="8" name="Text 6"/>
+          <p:cNvSpPr/>
+          <p:nvPr/>
+        </p:nvSpPr>
+        <p:spPr>
+          <a:xfrm>
+            <a:off x="7439376" y="3127248"/>
+            <a:ext cx="3947648" cy="2377440"/>
+          </a:xfrm>
+          <a:prstGeom prst="rect">
+            <a:avLst/>
+          </a:prstGeom>
+          <a:noFill/>
+          <a:ln/>
+        </p:spPr>
+        <p:txBody>
+          <a:bodyPr wrap="square" lIns="0" tIns="0" rIns="0" bIns="0" rtlCol="0" anchor="t"/>
+          <a:lstStyle/>
+          <a:p>
+            <a:pPr algn="l" indent="0" marL="0">
+              <a:lnSpc>
+                <a:spcPct val="108000"/>
+              </a:lnSpc>
+              <a:buNone/>
+            </a:pPr>
+            <a:r>
+              <a:rPr lang="en-US" sz="1250" dirty="0">
+                <a:solidFill>
+                  <a:srgbClr val="33444F"/>
+                </a:solidFill>
+                <a:latin typeface="Calibri" pitchFamily="34" charset="0"/>
+                <a:ea typeface="Calibri" pitchFamily="34" charset="-122"/>
+                <a:cs typeface="Calibri" pitchFamily="34" charset="-120"/>
+              </a:rPr>
+              <a:t>Low albumin raises the unbound active fraction; total level underestimates the effective concentration. Measure free phenytoin.</a:t>
+            </a:r>
+            <a:endParaRPr lang="en-US" sz="1250" dirty="0"/>
+          </a:p>
+        </p:txBody>
+      </p:sp>
+      <p:sp>
+        <p:nvSpPr>
+          <p:cNvPr id="9" name="Text 7"/>
+          <p:cNvSpPr/>
+          <p:nvPr/>
+        </p:nvSpPr>
+        <p:spPr>
+          <a:xfrm>
+            <a:off x="566928" y="6473952"/>
+            <a:ext cx="7772400" cy="274320"/>
+          </a:xfrm>
+          <a:prstGeom prst="rect">
+            <a:avLst/>
+          </a:prstGeom>
+          <a:noFill/>
+          <a:ln/>
+        </p:spPr>
+        <p:txBody>
+          <a:bodyPr wrap="square" lIns="0" tIns="0" rIns="0" bIns="0" rtlCol="0" anchor="ctr"/>
+          <a:lstStyle/>
+          <a:p>
+            <a:pPr algn="l" indent="0" marL="0">
+              <a:buNone/>
+            </a:pPr>
+            <a:r>
+              <a:rPr lang="en-US" sz="850" dirty="0">
+                <a:solidFill>
+                  <a:srgbClr val="9AA8B4"/>
+                </a:solidFill>
+                <a:latin typeface="Calibri" pitchFamily="34" charset="0"/>
+                <a:ea typeface="Calibri" pitchFamily="34" charset="-122"/>
+                <a:cs typeface="Calibri" pitchFamily="34" charset="-120"/>
+              </a:rPr>
+              <a:t>Makassed General Hospital  ·  Department of Laboratory Medicine</a:t>
+            </a:r>
+            <a:endParaRPr lang="en-US" sz="850" dirty="0"/>
+          </a:p>
+        </p:txBody>
+      </p:sp>
+      <p:sp>
+        <p:nvSpPr>
+          <p:cNvPr id="10" name="Text 8"/>
+          <p:cNvSpPr/>
+          <p:nvPr/>
+        </p:nvSpPr>
+        <p:spPr>
+          <a:xfrm>
+            <a:off x="9814255" y="6473952"/>
+            <a:ext cx="1828800" cy="274320"/>
+          </a:xfrm>
+          <a:prstGeom prst="rect">
+            <a:avLst/>
+          </a:prstGeom>
+          <a:noFill/>
+          <a:ln/>
+        </p:spPr>
+        <p:txBody>
+          <a:bodyPr wrap="square" lIns="0" tIns="0" rIns="0" bIns="0" rtlCol="0" anchor="ctr"/>
+          <a:lstStyle/>
+          <a:p>
+            <a:pPr algn="r" indent="0" marL="0">
+              <a:buNone/>
+            </a:pPr>
+            <a:r>
+              <a:rPr lang="en-US" sz="850" dirty="0">
+                <a:solidFill>
+                  <a:srgbClr val="9AA8B4"/>
+                </a:solidFill>
+                <a:latin typeface="Calibri" pitchFamily="34" charset="0"/>
+                <a:ea typeface="Calibri" pitchFamily="34" charset="-122"/>
+                <a:cs typeface="Calibri" pitchFamily="34" charset="-120"/>
+              </a:rPr>
+              <a:t>CP Lecture Series</a:t>
+            </a:r>
+            <a:pPr algn="r" indent="0" marL="0">
+              <a:buNone/>
+            </a:pPr>
+            <a:r>
+              <a:rPr lang="en-US" sz="850" dirty="0">
+                <a:solidFill>
+                  <a:srgbClr val="DCE4EC"/>
+                </a:solidFill>
+                <a:latin typeface="Calibri" pitchFamily="34" charset="0"/>
+                <a:ea typeface="Calibri" pitchFamily="34" charset="-122"/>
+                <a:cs typeface="Calibri" pitchFamily="34" charset="-120"/>
+              </a:rPr>
+              <a:t>   ·   </a:t>
+            </a:r>
+            <a:pPr algn="r" indent="0" marL="0">
+              <a:buNone/>
+            </a:pPr>
+            <a:r>
+              <a:rPr lang="en-US" sz="850" b="1" dirty="0">
+                <a:solidFill>
+                  <a:srgbClr val="1565C0"/>
+                </a:solidFill>
+                <a:latin typeface="Calibri" pitchFamily="34" charset="0"/>
+                <a:ea typeface="Calibri" pitchFamily="34" charset="-122"/>
+                <a:cs typeface="Calibri" pitchFamily="34" charset="-120"/>
+              </a:rPr>
+              <a:t>20</a:t>
+            </a:r>
+            <a:endParaRPr lang="en-US" sz="850" dirty="0"/>
+          </a:p>
+        </p:txBody>
+      </p:sp>
+    </p:spTree>
+  </p:cSld>
+  <p:clrMapOvr>
+    <a:masterClrMapping/>
+  </p:clrMapOvr>
+</p:sld>
+</file>
+
+<file path=ppt/slides/slide27.xml><?xml version="1.0" encoding="utf-8"?>
+<p:sld xmlns:a="http://schemas.openxmlformats.org/drawingml/2006/main" xmlns:p="http://schemas.openxmlformats.org/presentationml/2006/main" xmlns:r="http://schemas.openxmlformats.org/officeDocument/2006/relationships">
+  <p:cSld>
+    <p:spTree>
+      <p:nvGrpSpPr>
+        <p:cNvPr id="1" name=""/>
+        <p:cNvGrpSpPr/>
+        <p:nvPr/>
+      </p:nvGrpSpPr>
+      <p:grpSpPr/>
+      <p:sp>
+        <p:nvSpPr>
+          <p:cNvPr id="2" name="Text 0"/>
+          <p:cNvSpPr/>
+          <p:nvPr/>
+        </p:nvSpPr>
+        <p:spPr>
+          <a:xfrm>
+            <a:off x="566928" y="329184"/>
+            <a:ext cx="10515600" cy="310896"/>
+          </a:xfrm>
+          <a:prstGeom prst="rect">
+            <a:avLst/>
+          </a:prstGeom>
+          <a:noFill/>
+          <a:ln/>
+        </p:spPr>
+        <p:txBody>
+          <a:bodyPr wrap="square" lIns="0" tIns="0" rIns="0" bIns="0" rtlCol="0" anchor="ctr"/>
+          <a:lstStyle/>
+          <a:p>
+            <a:pPr algn="l" indent="0" marL="0">
+              <a:buNone/>
+            </a:pPr>
+            <a:r>
+              <a:rPr lang="en-US" sz="1100" b="1" spc="150" kern="0" dirty="0">
+                <a:solidFill>
+                  <a:srgbClr val="1565C0"/>
+                </a:solidFill>
+                <a:latin typeface="Calibri" pitchFamily="34" charset="0"/>
+                <a:ea typeface="Calibri" pitchFamily="34" charset="-122"/>
+                <a:cs typeface="Calibri" pitchFamily="34" charset="-120"/>
+              </a:rPr>
+              <a:t>CLINICAL CHEMISTRY   ·   BOARD REVIEW  ·  Q3</a:t>
+            </a:r>
+            <a:endParaRPr lang="en-US" sz="1100" dirty="0"/>
+          </a:p>
+        </p:txBody>
+      </p:sp>
+      <p:sp>
+        <p:nvSpPr>
+          <p:cNvPr id="3" name="Text 1"/>
+          <p:cNvSpPr/>
+          <p:nvPr/>
+        </p:nvSpPr>
+        <p:spPr>
+          <a:xfrm>
+            <a:off x="566928" y="713232"/>
+            <a:ext cx="11064240" cy="749808"/>
+          </a:xfrm>
+          <a:prstGeom prst="rect">
+            <a:avLst/>
+          </a:prstGeom>
+          <a:noFill/>
+          <a:ln/>
+        </p:spPr>
+        <p:txBody>
+          <a:bodyPr wrap="square" lIns="0" tIns="0" rIns="0" bIns="0" rtlCol="0" anchor="ctr"/>
+          <a:lstStyle/>
+          <a:p>
+            <a:pPr algn="l" indent="0" marL="0">
+              <a:buNone/>
+            </a:pPr>
+            <a:r>
+              <a:rPr lang="en-US" sz="2600" b="1" dirty="0">
+                <a:solidFill>
+                  <a:srgbClr val="0E3A5F"/>
+                </a:solidFill>
+                <a:latin typeface="Calibri" pitchFamily="34" charset="0"/>
+                <a:ea typeface="Calibri" pitchFamily="34" charset="-122"/>
+                <a:cs typeface="Calibri" pitchFamily="34" charset="-120"/>
+              </a:rPr>
+              <a:t>Board-Style Review</a:t>
+            </a:r>
+            <a:endParaRPr lang="en-US" sz="2600" dirty="0"/>
+          </a:p>
+        </p:txBody>
+      </p:sp>
+      <p:sp>
+        <p:nvSpPr>
+          <p:cNvPr id="4" name="Text 2"/>
+          <p:cNvSpPr/>
+          <p:nvPr/>
+        </p:nvSpPr>
+        <p:spPr>
+          <a:xfrm>
+            <a:off x="566928" y="1417320"/>
+            <a:ext cx="11057839" cy="914400"/>
+          </a:xfrm>
+          <a:prstGeom prst="rect">
+            <a:avLst/>
+          </a:prstGeom>
+          <a:noFill/>
+          <a:ln/>
+        </p:spPr>
+        <p:txBody>
+          <a:bodyPr wrap="square" lIns="0" tIns="0" rIns="0" bIns="0" rtlCol="0" anchor="t"/>
+          <a:lstStyle/>
+          <a:p>
+            <a:pPr algn="l" indent="0" marL="0">
+              <a:lnSpc>
+                <a:spcPct val="105000"/>
+              </a:lnSpc>
+              <a:buNone/>
+            </a:pPr>
+            <a:r>
+              <a:rPr lang="en-US" sz="1450" b="1" dirty="0">
+                <a:solidFill>
+                  <a:srgbClr val="1B2A38"/>
+                </a:solidFill>
+                <a:latin typeface="Calibri" pitchFamily="34" charset="0"/>
+                <a:ea typeface="Calibri" pitchFamily="34" charset="-122"/>
+                <a:cs typeface="Calibri" pitchFamily="34" charset="-120"/>
+              </a:rPr>
+              <a:t>A laboratory-developed test (not FDA-cleared) requires which before clinical use?</a:t>
+            </a:r>
+            <a:endParaRPr lang="en-US" sz="1450" dirty="0"/>
+          </a:p>
+        </p:txBody>
+      </p:sp>
+      <p:sp>
+        <p:nvSpPr>
+          <p:cNvPr id="5" name="Text 3"/>
+          <p:cNvSpPr/>
+          <p:nvPr/>
+        </p:nvSpPr>
+        <p:spPr>
+          <a:xfrm>
+            <a:off x="658368" y="2395728"/>
+            <a:ext cx="6192390" cy="3017520"/>
+          </a:xfrm>
+          <a:prstGeom prst="rect">
+            <a:avLst/>
+          </a:prstGeom>
+          <a:noFill/>
+          <a:ln/>
+        </p:spPr>
+        <p:txBody>
+          <a:bodyPr wrap="square" lIns="0" tIns="0" rIns="0" bIns="0" rtlCol="0" anchor="t"/>
+          <a:lstStyle/>
+          <a:p>
+            <a:pPr algn="l" indent="0" marL="0">
+              <a:spcAft>
+                <a:spcPts val="600"/>
+              </a:spcAft>
+              <a:buNone/>
+            </a:pPr>
+            <a:r>
+              <a:rPr lang="en-US" sz="1350" dirty="0">
+                <a:solidFill>
+                  <a:srgbClr val="33444F"/>
+                </a:solidFill>
+                <a:latin typeface="Calibri" pitchFamily="34" charset="0"/>
+                <a:ea typeface="Calibri" pitchFamily="34" charset="-122"/>
+                <a:cs typeface="Calibri" pitchFamily="34" charset="-120"/>
+              </a:rPr>
+              <a:t>A. Verification of manufacturer claims only</a:t>
+            </a:r>
+            <a:endParaRPr lang="en-US" sz="1350" dirty="0"/>
+          </a:p>
+          <a:p>
+            <a:pPr algn="l" indent="0" marL="0">
+              <a:spcAft>
+                <a:spcPts val="600"/>
+              </a:spcAft>
+              <a:buNone/>
+            </a:pPr>
+            <a:r>
+              <a:rPr lang="en-US" sz="1350" b="1" dirty="0">
+                <a:solidFill>
+                  <a:srgbClr val="0D4A92"/>
+                </a:solidFill>
+                <a:latin typeface="Calibri" pitchFamily="34" charset="0"/>
+                <a:ea typeface="Calibri" pitchFamily="34" charset="-122"/>
+                <a:cs typeface="Calibri" pitchFamily="34" charset="-120"/>
+              </a:rPr>
+              <a:t>B. Full validation of accuracy, precision, sensitivity, specificity, linearity, reference interval</a:t>
+            </a:r>
+            <a:endParaRPr lang="en-US" sz="1350" dirty="0"/>
+          </a:p>
+          <a:p>
+            <a:pPr algn="l" indent="0" marL="0">
+              <a:spcAft>
+                <a:spcPts val="600"/>
+              </a:spcAft>
+              <a:buNone/>
+            </a:pPr>
+            <a:r>
+              <a:rPr lang="en-US" sz="1350" dirty="0">
+                <a:solidFill>
+                  <a:srgbClr val="33444F"/>
+                </a:solidFill>
+                <a:latin typeface="Calibri" pitchFamily="34" charset="0"/>
+                <a:ea typeface="Calibri" pitchFamily="34" charset="-122"/>
+                <a:cs typeface="Calibri" pitchFamily="34" charset="-120"/>
+              </a:rPr>
+              <a:t>C. No additional study</a:t>
+            </a:r>
+            <a:endParaRPr lang="en-US" sz="1350" dirty="0"/>
+          </a:p>
+          <a:p>
+            <a:pPr algn="l" indent="0" marL="0">
+              <a:spcAft>
+                <a:spcPts val="600"/>
+              </a:spcAft>
+              <a:buNone/>
+            </a:pPr>
+            <a:r>
+              <a:rPr lang="en-US" sz="1350" dirty="0">
+                <a:solidFill>
+                  <a:srgbClr val="33444F"/>
+                </a:solidFill>
+                <a:latin typeface="Calibri" pitchFamily="34" charset="0"/>
+                <a:ea typeface="Calibri" pitchFamily="34" charset="-122"/>
+                <a:cs typeface="Calibri" pitchFamily="34" charset="-120"/>
+              </a:rPr>
+              <a:t>D. Only a reference interval</a:t>
+            </a:r>
+            <a:endParaRPr lang="en-US" sz="1350" dirty="0"/>
+          </a:p>
+          <a:p>
+            <a:pPr algn="l" indent="0" marL="0">
+              <a:spcAft>
+                <a:spcPts val="600"/>
+              </a:spcAft>
+              <a:buNone/>
+            </a:pPr>
+            <a:r>
+              <a:rPr lang="en-US" sz="1350" dirty="0">
+                <a:solidFill>
+                  <a:srgbClr val="33444F"/>
+                </a:solidFill>
+                <a:latin typeface="Calibri" pitchFamily="34" charset="0"/>
+                <a:ea typeface="Calibri" pitchFamily="34" charset="-122"/>
+                <a:cs typeface="Calibri" pitchFamily="34" charset="-120"/>
+              </a:rPr>
+              <a:t>E. Only proficiency testing</a:t>
+            </a:r>
+            <a:endParaRPr lang="en-US" sz="1350" dirty="0"/>
+          </a:p>
+        </p:txBody>
+      </p:sp>
+      <p:sp>
+        <p:nvSpPr>
+          <p:cNvPr id="6" name="Shape 4"/>
+          <p:cNvSpPr/>
+          <p:nvPr/>
+        </p:nvSpPr>
+        <p:spPr>
+          <a:xfrm>
+            <a:off x="7201632" y="2395728"/>
+            <a:ext cx="4423136" cy="3246120"/>
+          </a:xfrm>
+          <a:prstGeom prst="roundRect">
+            <a:avLst>
+              <a:gd name="adj" fmla="val 2535"/>
+            </a:avLst>
+          </a:prstGeom>
+          <a:solidFill>
+            <a:srgbClr val="E7EFFA"/>
+          </a:solidFill>
+          <a:ln/>
+          <a:effectLst>
+            <a:outerShdw sx="100000" sy="100000" kx="0" ky="0" algn="bl" rotWithShape="0" blurRad="88900" dist="25400" dir="5400000">
+              <a:srgbClr val="22303C">
+                <a:alpha val="12000"/>
+              </a:srgbClr>
+            </a:outerShdw>
+          </a:effectLst>
+        </p:spPr>
+        <p:txBody>
+          <a:bodyPr/>
+          <a:p/>
+        </p:txBody>
+      </p:sp>
+      <p:sp>
+        <p:nvSpPr>
+          <p:cNvPr id="7" name="Text 5"/>
+          <p:cNvSpPr/>
+          <p:nvPr/>
+        </p:nvSpPr>
+        <p:spPr>
+          <a:xfrm>
+            <a:off x="7439376" y="2578608"/>
+            <a:ext cx="3965936" cy="457200"/>
+          </a:xfrm>
+          <a:prstGeom prst="rect">
+            <a:avLst/>
+          </a:prstGeom>
+          <a:noFill/>
+          <a:ln/>
+        </p:spPr>
+        <p:txBody>
+          <a:bodyPr wrap="square" lIns="0" tIns="0" rIns="0" bIns="0" rtlCol="0" anchor="ctr"/>
+          <a:lstStyle/>
+          <a:p>
+            <a:pPr indent="0" marL="0">
+              <a:buNone/>
+            </a:pPr>
+            <a:r>
+              <a:rPr lang="en-US" sz="1500" b="1" dirty="0">
+                <a:solidFill>
+                  <a:srgbClr val="1565C0"/>
+                </a:solidFill>
+                <a:latin typeface="Calibri" pitchFamily="34" charset="0"/>
+                <a:ea typeface="Calibri" pitchFamily="34" charset="-122"/>
+                <a:cs typeface="Calibri" pitchFamily="34" charset="-120"/>
+              </a:rPr>
+              <a:t>ANSWER  </a:t>
+            </a:r>
+            <a:pPr indent="0" marL="0">
+              <a:buNone/>
+            </a:pPr>
+            <a:r>
+              <a:rPr lang="en-US" sz="1500" b="1" dirty="0">
+                <a:solidFill>
+                  <a:srgbClr val="1B2A38"/>
+                </a:solidFill>
+                <a:latin typeface="Calibri" pitchFamily="34" charset="0"/>
+                <a:ea typeface="Calibri" pitchFamily="34" charset="-122"/>
+                <a:cs typeface="Calibri" pitchFamily="34" charset="-120"/>
+              </a:rPr>
+              <a:t>B — Full validation</a:t>
+            </a:r>
+            <a:endParaRPr lang="en-US" sz="1500" dirty="0"/>
+          </a:p>
+        </p:txBody>
+      </p:sp>
+      <p:sp>
+        <p:nvSpPr>
+          <p:cNvPr id="8" name="Text 6"/>
+          <p:cNvSpPr/>
+          <p:nvPr/>
+        </p:nvSpPr>
+        <p:spPr>
+          <a:xfrm>
+            <a:off x="7439376" y="3127248"/>
+            <a:ext cx="3947648" cy="2377440"/>
+          </a:xfrm>
+          <a:prstGeom prst="rect">
+            <a:avLst/>
+          </a:prstGeom>
+          <a:noFill/>
+          <a:ln/>
+        </p:spPr>
+        <p:txBody>
+          <a:bodyPr wrap="square" lIns="0" tIns="0" rIns="0" bIns="0" rtlCol="0" anchor="t"/>
+          <a:lstStyle/>
+          <a:p>
+            <a:pPr algn="l" indent="0" marL="0">
+              <a:lnSpc>
+                <a:spcPct val="108000"/>
+              </a:lnSpc>
+              <a:buNone/>
+            </a:pPr>
+            <a:r>
+              <a:rPr lang="en-US" sz="1250" dirty="0">
+                <a:solidFill>
+                  <a:srgbClr val="33444F"/>
+                </a:solidFill>
+                <a:latin typeface="Calibri" pitchFamily="34" charset="0"/>
+                <a:ea typeface="Calibri" pitchFamily="34" charset="-122"/>
+                <a:cs typeface="Calibri" pitchFamily="34" charset="-120"/>
+              </a:rPr>
+              <a:t>FDA-cleared assays require verification; laboratory-developed tests require full validation of all performance characteristics.</a:t>
+            </a:r>
+            <a:endParaRPr lang="en-US" sz="1250" dirty="0"/>
+          </a:p>
+        </p:txBody>
+      </p:sp>
+      <p:sp>
+        <p:nvSpPr>
+          <p:cNvPr id="9" name="Text 7"/>
+          <p:cNvSpPr/>
+          <p:nvPr/>
+        </p:nvSpPr>
+        <p:spPr>
+          <a:xfrm>
+            <a:off x="566928" y="6473952"/>
+            <a:ext cx="7772400" cy="274320"/>
+          </a:xfrm>
+          <a:prstGeom prst="rect">
+            <a:avLst/>
+          </a:prstGeom>
+          <a:noFill/>
+          <a:ln/>
+        </p:spPr>
+        <p:txBody>
+          <a:bodyPr wrap="square" lIns="0" tIns="0" rIns="0" bIns="0" rtlCol="0" anchor="ctr"/>
+          <a:lstStyle/>
+          <a:p>
+            <a:pPr algn="l" indent="0" marL="0">
+              <a:buNone/>
+            </a:pPr>
+            <a:r>
+              <a:rPr lang="en-US" sz="850" dirty="0">
+                <a:solidFill>
+                  <a:srgbClr val="9AA8B4"/>
+                </a:solidFill>
+                <a:latin typeface="Calibri" pitchFamily="34" charset="0"/>
+                <a:ea typeface="Calibri" pitchFamily="34" charset="-122"/>
+                <a:cs typeface="Calibri" pitchFamily="34" charset="-120"/>
+              </a:rPr>
+              <a:t>Makassed General Hospital  ·  Department of Laboratory Medicine</a:t>
+            </a:r>
+            <a:endParaRPr lang="en-US" sz="850" dirty="0"/>
+          </a:p>
+        </p:txBody>
+      </p:sp>
+      <p:sp>
+        <p:nvSpPr>
+          <p:cNvPr id="10" name="Text 8"/>
+          <p:cNvSpPr/>
+          <p:nvPr/>
+        </p:nvSpPr>
+        <p:spPr>
+          <a:xfrm>
+            <a:off x="9814255" y="6473952"/>
+            <a:ext cx="1828800" cy="274320"/>
+          </a:xfrm>
+          <a:prstGeom prst="rect">
+            <a:avLst/>
+          </a:prstGeom>
+          <a:noFill/>
+          <a:ln/>
+        </p:spPr>
+        <p:txBody>
+          <a:bodyPr wrap="square" lIns="0" tIns="0" rIns="0" bIns="0" rtlCol="0" anchor="ctr"/>
+          <a:lstStyle/>
+          <a:p>
+            <a:pPr algn="r" indent="0" marL="0">
+              <a:buNone/>
+            </a:pPr>
+            <a:r>
+              <a:rPr lang="en-US" sz="850" dirty="0">
+                <a:solidFill>
+                  <a:srgbClr val="9AA8B4"/>
+                </a:solidFill>
+                <a:latin typeface="Calibri" pitchFamily="34" charset="0"/>
+                <a:ea typeface="Calibri" pitchFamily="34" charset="-122"/>
+                <a:cs typeface="Calibri" pitchFamily="34" charset="-120"/>
+              </a:rPr>
+              <a:t>CP Lecture Series</a:t>
+            </a:r>
+            <a:pPr algn="r" indent="0" marL="0">
+              <a:buNone/>
+            </a:pPr>
+            <a:r>
+              <a:rPr lang="en-US" sz="850" dirty="0">
+                <a:solidFill>
+                  <a:srgbClr val="DCE4EC"/>
+                </a:solidFill>
+                <a:latin typeface="Calibri" pitchFamily="34" charset="0"/>
+                <a:ea typeface="Calibri" pitchFamily="34" charset="-122"/>
+                <a:cs typeface="Calibri" pitchFamily="34" charset="-120"/>
+              </a:rPr>
+              <a:t>   ·   </a:t>
+            </a:r>
+            <a:pPr algn="r" indent="0" marL="0">
+              <a:buNone/>
+            </a:pPr>
+            <a:r>
+              <a:rPr lang="en-US" sz="850" b="1" dirty="0">
+                <a:solidFill>
+                  <a:srgbClr val="1565C0"/>
+                </a:solidFill>
+                <a:latin typeface="Calibri" pitchFamily="34" charset="0"/>
+                <a:ea typeface="Calibri" pitchFamily="34" charset="-122"/>
+                <a:cs typeface="Calibri" pitchFamily="34" charset="-120"/>
+              </a:rPr>
+              <a:t>19</a:t>
+            </a:r>
+            <a:endParaRPr lang="en-US" sz="850" dirty="0"/>
+          </a:p>
+        </p:txBody>
+      </p:sp>
+    </p:spTree>
+  </p:cSld>
+  <p:clrMapOvr>
+    <a:masterClrMapping/>
+  </p:clrMapOvr>
+</p:sld>
+</file>
+
+<file path=ppt/slides/slide28.xml><?xml version="1.0" encoding="utf-8"?>
+<p:sld xmlns:a="http://schemas.openxmlformats.org/drawingml/2006/main" xmlns:p="http://schemas.openxmlformats.org/presentationml/2006/main" xmlns:r="http://schemas.openxmlformats.org/officeDocument/2006/relationships">
+  <p:cSld>
+    <p:spTree>
+      <p:nvGrpSpPr>
+        <p:cNvPr id="1" name=""/>
+        <p:cNvGrpSpPr/>
+        <p:nvPr/>
+      </p:nvGrpSpPr>
+      <p:grpSpPr/>
+      <p:sp>
+        <p:nvSpPr>
+          <p:cNvPr id="2" name="Text 0"/>
+          <p:cNvSpPr/>
+          <p:nvPr/>
+        </p:nvSpPr>
+        <p:spPr>
+          <a:xfrm>
+            <a:off x="566928" y="329184"/>
+            <a:ext cx="10515600" cy="310896"/>
+          </a:xfrm>
+          <a:prstGeom prst="rect">
+            <a:avLst/>
+          </a:prstGeom>
+          <a:noFill/>
+          <a:ln/>
+        </p:spPr>
+        <p:txBody>
+          <a:bodyPr wrap="square" lIns="0" tIns="0" rIns="0" bIns="0" rtlCol="0" anchor="ctr"/>
+          <a:lstStyle/>
+          <a:p>
+            <a:pPr algn="l" indent="0" marL="0">
+              <a:buNone/>
+            </a:pPr>
+            <a:r>
+              <a:rPr lang="en-US" sz="1100" b="1" spc="150" kern="0" dirty="0">
+                <a:solidFill>
+                  <a:srgbClr val="1565C0"/>
+                </a:solidFill>
+                <a:latin typeface="Calibri" pitchFamily="34" charset="0"/>
+                <a:ea typeface="Calibri" pitchFamily="34" charset="-122"/>
+                <a:cs typeface="Calibri" pitchFamily="34" charset="-120"/>
+              </a:rPr>
+              <a:t>CLINICAL CHEMISTRY   ·   BOARD REVIEW  ·  Q2</a:t>
+            </a:r>
+            <a:endParaRPr lang="en-US" sz="1100" dirty="0"/>
+          </a:p>
+        </p:txBody>
+      </p:sp>
+      <p:sp>
+        <p:nvSpPr>
+          <p:cNvPr id="3" name="Text 1"/>
+          <p:cNvSpPr/>
+          <p:nvPr/>
+        </p:nvSpPr>
+        <p:spPr>
+          <a:xfrm>
+            <a:off x="566928" y="713232"/>
+            <a:ext cx="11064240" cy="749808"/>
+          </a:xfrm>
+          <a:prstGeom prst="rect">
+            <a:avLst/>
+          </a:prstGeom>
+          <a:noFill/>
+          <a:ln/>
+        </p:spPr>
+        <p:txBody>
+          <a:bodyPr wrap="square" lIns="0" tIns="0" rIns="0" bIns="0" rtlCol="0" anchor="ctr"/>
+          <a:lstStyle/>
+          <a:p>
+            <a:pPr algn="l" indent="0" marL="0">
+              <a:buNone/>
+            </a:pPr>
+            <a:r>
+              <a:rPr lang="en-US" sz="2600" b="1" dirty="0">
+                <a:solidFill>
+                  <a:srgbClr val="0E3A5F"/>
+                </a:solidFill>
+                <a:latin typeface="Calibri" pitchFamily="34" charset="0"/>
+                <a:ea typeface="Calibri" pitchFamily="34" charset="-122"/>
+                <a:cs typeface="Calibri" pitchFamily="34" charset="-120"/>
+              </a:rPr>
+              <a:t>Board-Style Review</a:t>
+            </a:r>
+            <a:endParaRPr lang="en-US" sz="2600" dirty="0"/>
+          </a:p>
+        </p:txBody>
+      </p:sp>
+      <p:sp>
+        <p:nvSpPr>
+          <p:cNvPr id="4" name="Text 2"/>
+          <p:cNvSpPr/>
+          <p:nvPr/>
+        </p:nvSpPr>
+        <p:spPr>
+          <a:xfrm>
+            <a:off x="566928" y="1417320"/>
+            <a:ext cx="11057839" cy="914400"/>
+          </a:xfrm>
+          <a:prstGeom prst="rect">
+            <a:avLst/>
+          </a:prstGeom>
+          <a:noFill/>
+          <a:ln/>
+        </p:spPr>
+        <p:txBody>
+          <a:bodyPr wrap="square" lIns="0" tIns="0" rIns="0" bIns="0" rtlCol="0" anchor="t"/>
+          <a:lstStyle/>
+          <a:p>
+            <a:pPr algn="l" indent="0" marL="0">
+              <a:lnSpc>
+                <a:spcPct val="105000"/>
+              </a:lnSpc>
+              <a:buNone/>
+            </a:pPr>
+            <a:r>
+              <a:rPr lang="en-US" sz="1450" b="1" dirty="0">
+                <a:solidFill>
+                  <a:srgbClr val="1B2A38"/>
+                </a:solidFill>
+                <a:latin typeface="Calibri" pitchFamily="34" charset="0"/>
+                <a:ea typeface="Calibri" pitchFamily="34" charset="-122"/>
+                <a:cs typeface="Calibri" pitchFamily="34" charset="-120"/>
+              </a:rPr>
+              <a:t>When should a trough be drawn for routine TDM?</a:t>
+            </a:r>
+            <a:endParaRPr lang="en-US" sz="1450" dirty="0"/>
+          </a:p>
+        </p:txBody>
+      </p:sp>
+      <p:sp>
+        <p:nvSpPr>
+          <p:cNvPr id="5" name="Text 3"/>
+          <p:cNvSpPr/>
+          <p:nvPr/>
+        </p:nvSpPr>
+        <p:spPr>
+          <a:xfrm>
+            <a:off x="658368" y="2395728"/>
+            <a:ext cx="6192390" cy="3017520"/>
+          </a:xfrm>
+          <a:prstGeom prst="rect">
+            <a:avLst/>
+          </a:prstGeom>
+          <a:noFill/>
+          <a:ln/>
+        </p:spPr>
+        <p:txBody>
+          <a:bodyPr wrap="square" lIns="0" tIns="0" rIns="0" bIns="0" rtlCol="0" anchor="t"/>
+          <a:lstStyle/>
+          <a:p>
+            <a:pPr algn="l" indent="0" marL="0">
+              <a:spcAft>
+                <a:spcPts val="600"/>
+              </a:spcAft>
+              <a:buNone/>
+            </a:pPr>
+            <a:r>
+              <a:rPr lang="en-US" sz="1350" dirty="0">
+                <a:solidFill>
+                  <a:srgbClr val="33444F"/>
+                </a:solidFill>
+                <a:latin typeface="Calibri" pitchFamily="34" charset="0"/>
+                <a:ea typeface="Calibri" pitchFamily="34" charset="-122"/>
+                <a:cs typeface="Calibri" pitchFamily="34" charset="-120"/>
+              </a:rPr>
+              <a:t>A. Immediately after the first dose</a:t>
+            </a:r>
+            <a:endParaRPr lang="en-US" sz="1350" dirty="0"/>
+          </a:p>
+          <a:p>
+            <a:pPr algn="l" indent="0" marL="0">
+              <a:spcAft>
+                <a:spcPts val="600"/>
+              </a:spcAft>
+              <a:buNone/>
+            </a:pPr>
+            <a:r>
+              <a:rPr lang="en-US" sz="1350" dirty="0">
+                <a:solidFill>
+                  <a:srgbClr val="33444F"/>
+                </a:solidFill>
+                <a:latin typeface="Calibri" pitchFamily="34" charset="0"/>
+                <a:ea typeface="Calibri" pitchFamily="34" charset="-122"/>
+                <a:cs typeface="Calibri" pitchFamily="34" charset="-120"/>
+              </a:rPr>
+              <a:t>B. At the peak after any dose</a:t>
+            </a:r>
+            <a:endParaRPr lang="en-US" sz="1350" dirty="0"/>
+          </a:p>
+          <a:p>
+            <a:pPr algn="l" indent="0" marL="0">
+              <a:spcAft>
+                <a:spcPts val="600"/>
+              </a:spcAft>
+              <a:buNone/>
+            </a:pPr>
+            <a:r>
+              <a:rPr lang="en-US" sz="1350" b="1" dirty="0">
+                <a:solidFill>
+                  <a:srgbClr val="0D4A92"/>
+                </a:solidFill>
+                <a:latin typeface="Calibri" pitchFamily="34" charset="0"/>
+                <a:ea typeface="Calibri" pitchFamily="34" charset="-122"/>
+                <a:cs typeface="Calibri" pitchFamily="34" charset="-120"/>
+              </a:rPr>
+              <a:t>C. At steady state, just before the next dose</a:t>
+            </a:r>
+            <a:endParaRPr lang="en-US" sz="1350" dirty="0"/>
+          </a:p>
+          <a:p>
+            <a:pPr algn="l" indent="0" marL="0">
+              <a:spcAft>
+                <a:spcPts val="600"/>
+              </a:spcAft>
+              <a:buNone/>
+            </a:pPr>
+            <a:r>
+              <a:rPr lang="en-US" sz="1350" dirty="0">
+                <a:solidFill>
+                  <a:srgbClr val="33444F"/>
+                </a:solidFill>
+                <a:latin typeface="Calibri" pitchFamily="34" charset="0"/>
+                <a:ea typeface="Calibri" pitchFamily="34" charset="-122"/>
+                <a:cs typeface="Calibri" pitchFamily="34" charset="-120"/>
+              </a:rPr>
+              <a:t>D. Randomly</a:t>
+            </a:r>
+            <a:endParaRPr lang="en-US" sz="1350" dirty="0"/>
+          </a:p>
+          <a:p>
+            <a:pPr algn="l" indent="0" marL="0">
+              <a:spcAft>
+                <a:spcPts val="600"/>
+              </a:spcAft>
+              <a:buNone/>
+            </a:pPr>
+            <a:r>
+              <a:rPr lang="en-US" sz="1350" dirty="0">
+                <a:solidFill>
+                  <a:srgbClr val="33444F"/>
+                </a:solidFill>
+                <a:latin typeface="Calibri" pitchFamily="34" charset="0"/>
+                <a:ea typeface="Calibri" pitchFamily="34" charset="-122"/>
+                <a:cs typeface="Calibri" pitchFamily="34" charset="-120"/>
+              </a:rPr>
+              <a:t>E. Only when toxicity is suspected</a:t>
+            </a:r>
+            <a:endParaRPr lang="en-US" sz="1350" dirty="0"/>
+          </a:p>
+        </p:txBody>
+      </p:sp>
+      <p:sp>
+        <p:nvSpPr>
+          <p:cNvPr id="6" name="Shape 4"/>
+          <p:cNvSpPr/>
+          <p:nvPr/>
+        </p:nvSpPr>
+        <p:spPr>
+          <a:xfrm>
+            <a:off x="7201632" y="2395728"/>
+            <a:ext cx="4423136" cy="3246120"/>
+          </a:xfrm>
+          <a:prstGeom prst="roundRect">
+            <a:avLst>
+              <a:gd name="adj" fmla="val 2535"/>
+            </a:avLst>
+          </a:prstGeom>
+          <a:solidFill>
+            <a:srgbClr val="E7EFFA"/>
+          </a:solidFill>
+          <a:ln/>
+          <a:effectLst>
+            <a:outerShdw sx="100000" sy="100000" kx="0" ky="0" algn="bl" rotWithShape="0" blurRad="88900" dist="25400" dir="5400000">
+              <a:srgbClr val="22303C">
+                <a:alpha val="12000"/>
+              </a:srgbClr>
+            </a:outerShdw>
+          </a:effectLst>
+        </p:spPr>
+        <p:txBody>
+          <a:bodyPr/>
+          <a:p/>
+        </p:txBody>
+      </p:sp>
+      <p:sp>
+        <p:nvSpPr>
+          <p:cNvPr id="7" name="Text 5"/>
+          <p:cNvSpPr/>
+          <p:nvPr/>
+        </p:nvSpPr>
+        <p:spPr>
+          <a:xfrm>
+            <a:off x="7439376" y="2578608"/>
+            <a:ext cx="3965936" cy="457200"/>
+          </a:xfrm>
+          <a:prstGeom prst="rect">
+            <a:avLst/>
+          </a:prstGeom>
+          <a:noFill/>
+          <a:ln/>
+        </p:spPr>
+        <p:txBody>
+          <a:bodyPr wrap="square" lIns="0" tIns="0" rIns="0" bIns="0" rtlCol="0" anchor="ctr"/>
+          <a:lstStyle/>
+          <a:p>
+            <a:pPr indent="0" marL="0">
+              <a:buNone/>
+            </a:pPr>
+            <a:r>
+              <a:rPr lang="en-US" sz="1500" b="1" dirty="0">
+                <a:solidFill>
+                  <a:srgbClr val="1565C0"/>
+                </a:solidFill>
+                <a:latin typeface="Calibri" pitchFamily="34" charset="0"/>
+                <a:ea typeface="Calibri" pitchFamily="34" charset="-122"/>
+                <a:cs typeface="Calibri" pitchFamily="34" charset="-120"/>
+              </a:rPr>
+              <a:t>ANSWER  </a:t>
+            </a:r>
+            <a:pPr indent="0" marL="0">
+              <a:buNone/>
+            </a:pPr>
+            <a:r>
+              <a:rPr lang="en-US" sz="1500" b="1" dirty="0">
+                <a:solidFill>
+                  <a:srgbClr val="1B2A38"/>
+                </a:solidFill>
+                <a:latin typeface="Calibri" pitchFamily="34" charset="0"/>
+                <a:ea typeface="Calibri" pitchFamily="34" charset="-122"/>
+                <a:cs typeface="Calibri" pitchFamily="34" charset="-120"/>
+              </a:rPr>
+              <a:t>C — At steady state, pre-dose (trough)</a:t>
+            </a:r>
+            <a:endParaRPr lang="en-US" sz="1500" dirty="0"/>
+          </a:p>
+        </p:txBody>
+      </p:sp>
+      <p:sp>
+        <p:nvSpPr>
+          <p:cNvPr id="8" name="Text 6"/>
+          <p:cNvSpPr/>
+          <p:nvPr/>
+        </p:nvSpPr>
+        <p:spPr>
+          <a:xfrm>
+            <a:off x="7439376" y="3127248"/>
+            <a:ext cx="3947648" cy="2377440"/>
+          </a:xfrm>
+          <a:prstGeom prst="rect">
+            <a:avLst/>
+          </a:prstGeom>
+          <a:noFill/>
+          <a:ln/>
+        </p:spPr>
+        <p:txBody>
+          <a:bodyPr wrap="square" lIns="0" tIns="0" rIns="0" bIns="0" rtlCol="0" anchor="t"/>
+          <a:lstStyle/>
+          <a:p>
+            <a:pPr algn="l" indent="0" marL="0">
+              <a:lnSpc>
+                <a:spcPct val="108000"/>
+              </a:lnSpc>
+              <a:buNone/>
+            </a:pPr>
+            <a:r>
+              <a:rPr lang="en-US" sz="1250" dirty="0">
+                <a:solidFill>
+                  <a:srgbClr val="33444F"/>
+                </a:solidFill>
+                <a:latin typeface="Calibri" pitchFamily="34" charset="0"/>
+                <a:ea typeface="Calibri" pitchFamily="34" charset="-122"/>
+                <a:cs typeface="Calibri" pitchFamily="34" charset="-120"/>
+              </a:rPr>
+              <a:t>Steady state (~5 half-lives) with a pre-dose trough gives the most interpretable, reproducible level for most monitored drugs.</a:t>
+            </a:r>
+            <a:endParaRPr lang="en-US" sz="1250" dirty="0"/>
+          </a:p>
+        </p:txBody>
+      </p:sp>
+      <p:sp>
+        <p:nvSpPr>
+          <p:cNvPr id="9" name="Text 7"/>
+          <p:cNvSpPr/>
+          <p:nvPr/>
+        </p:nvSpPr>
+        <p:spPr>
+          <a:xfrm>
+            <a:off x="566928" y="6473952"/>
+            <a:ext cx="7772400" cy="274320"/>
+          </a:xfrm>
+          <a:prstGeom prst="rect">
+            <a:avLst/>
+          </a:prstGeom>
+          <a:noFill/>
+          <a:ln/>
+        </p:spPr>
+        <p:txBody>
+          <a:bodyPr wrap="square" lIns="0" tIns="0" rIns="0" bIns="0" rtlCol="0" anchor="ctr"/>
+          <a:lstStyle/>
+          <a:p>
+            <a:pPr algn="l" indent="0" marL="0">
+              <a:buNone/>
+            </a:pPr>
+            <a:r>
+              <a:rPr lang="en-US" sz="850" dirty="0">
+                <a:solidFill>
+                  <a:srgbClr val="9AA8B4"/>
+                </a:solidFill>
+                <a:latin typeface="Calibri" pitchFamily="34" charset="0"/>
+                <a:ea typeface="Calibri" pitchFamily="34" charset="-122"/>
+                <a:cs typeface="Calibri" pitchFamily="34" charset="-120"/>
+              </a:rPr>
+              <a:t>Makassed General Hospital  ·  Department of Laboratory Medicine</a:t>
+            </a:r>
+            <a:endParaRPr lang="en-US" sz="850" dirty="0"/>
+          </a:p>
+        </p:txBody>
+      </p:sp>
+      <p:sp>
+        <p:nvSpPr>
+          <p:cNvPr id="10" name="Text 8"/>
+          <p:cNvSpPr/>
+          <p:nvPr/>
+        </p:nvSpPr>
+        <p:spPr>
+          <a:xfrm>
+            <a:off x="9814255" y="6473952"/>
+            <a:ext cx="1828800" cy="274320"/>
+          </a:xfrm>
+          <a:prstGeom prst="rect">
+            <a:avLst/>
+          </a:prstGeom>
+          <a:noFill/>
+          <a:ln/>
+        </p:spPr>
+        <p:txBody>
+          <a:bodyPr wrap="square" lIns="0" tIns="0" rIns="0" bIns="0" rtlCol="0" anchor="ctr"/>
+          <a:lstStyle/>
+          <a:p>
+            <a:pPr algn="r" indent="0" marL="0">
+              <a:buNone/>
+            </a:pPr>
+            <a:r>
+              <a:rPr lang="en-US" sz="850" dirty="0">
+                <a:solidFill>
+                  <a:srgbClr val="9AA8B4"/>
+                </a:solidFill>
+                <a:latin typeface="Calibri" pitchFamily="34" charset="0"/>
+                <a:ea typeface="Calibri" pitchFamily="34" charset="-122"/>
+                <a:cs typeface="Calibri" pitchFamily="34" charset="-120"/>
+              </a:rPr>
+              <a:t>CP Lecture Series</a:t>
+            </a:r>
+            <a:pPr algn="r" indent="0" marL="0">
+              <a:buNone/>
+            </a:pPr>
+            <a:r>
+              <a:rPr lang="en-US" sz="850" dirty="0">
+                <a:solidFill>
+                  <a:srgbClr val="DCE4EC"/>
+                </a:solidFill>
+                <a:latin typeface="Calibri" pitchFamily="34" charset="0"/>
+                <a:ea typeface="Calibri" pitchFamily="34" charset="-122"/>
+                <a:cs typeface="Calibri" pitchFamily="34" charset="-120"/>
+              </a:rPr>
+              <a:t>   ·   </a:t>
+            </a:r>
+            <a:pPr algn="r" indent="0" marL="0">
+              <a:buNone/>
+            </a:pPr>
+            <a:r>
+              <a:rPr lang="en-US" sz="850" b="1" dirty="0">
+                <a:solidFill>
+                  <a:srgbClr val="1565C0"/>
+                </a:solidFill>
+                <a:latin typeface="Calibri" pitchFamily="34" charset="0"/>
+                <a:ea typeface="Calibri" pitchFamily="34" charset="-122"/>
+                <a:cs typeface="Calibri" pitchFamily="34" charset="-120"/>
+              </a:rPr>
+              <a:t>18</a:t>
+            </a:r>
+            <a:endParaRPr lang="en-US" sz="850" dirty="0"/>
+          </a:p>
+        </p:txBody>
+      </p:sp>
+    </p:spTree>
+  </p:cSld>
+  <p:clrMapOvr>
+    <a:masterClrMapping/>
+  </p:clrMapOvr>
+</p:sld>
+</file>
+
+<file path=ppt/slides/slide29.xml><?xml version="1.0" encoding="utf-8"?>
+<p:sld xmlns:a="http://schemas.openxmlformats.org/drawingml/2006/main" xmlns:p="http://schemas.openxmlformats.org/presentationml/2006/main" xmlns:r="http://schemas.openxmlformats.org/officeDocument/2006/relationships">
+  <p:cSld>
+    <p:spTree>
+      <p:nvGrpSpPr>
+        <p:cNvPr id="1" name=""/>
+        <p:cNvGrpSpPr/>
+        <p:nvPr/>
+      </p:nvGrpSpPr>
+      <p:grpSpPr/>
+      <p:sp>
+        <p:nvSpPr>
+          <p:cNvPr id="2" name="Text 0"/>
+          <p:cNvSpPr/>
+          <p:nvPr/>
+        </p:nvSpPr>
+        <p:spPr>
+          <a:xfrm>
+            <a:off x="566928" y="329184"/>
+            <a:ext cx="10515600" cy="310896"/>
+          </a:xfrm>
+          <a:prstGeom prst="rect">
+            <a:avLst/>
+          </a:prstGeom>
+          <a:noFill/>
+          <a:ln/>
+        </p:spPr>
+        <p:txBody>
+          <a:bodyPr wrap="square" lIns="0" tIns="0" rIns="0" bIns="0" rtlCol="0" anchor="ctr"/>
+          <a:lstStyle/>
+          <a:p>
+            <a:pPr algn="l" indent="0" marL="0">
+              <a:buNone/>
+            </a:pPr>
+            <a:r>
+              <a:rPr lang="en-US" sz="1100" b="1" spc="150" kern="0" dirty="0">
+                <a:solidFill>
+                  <a:srgbClr val="1565C0"/>
+                </a:solidFill>
+                <a:latin typeface="Calibri" pitchFamily="34" charset="0"/>
+                <a:ea typeface="Calibri" pitchFamily="34" charset="-122"/>
+                <a:cs typeface="Calibri" pitchFamily="34" charset="-120"/>
+              </a:rPr>
+              <a:t>CLINICAL CHEMISTRY   ·   BOARD REVIEW  ·  Q1</a:t>
+            </a:r>
+            <a:endParaRPr lang="en-US" sz="1100" dirty="0"/>
+          </a:p>
+        </p:txBody>
+      </p:sp>
+      <p:sp>
+        <p:nvSpPr>
+          <p:cNvPr id="3" name="Text 1"/>
+          <p:cNvSpPr/>
+          <p:nvPr/>
+        </p:nvSpPr>
+        <p:spPr>
+          <a:xfrm>
+            <a:off x="566928" y="713232"/>
+            <a:ext cx="11064240" cy="749808"/>
+          </a:xfrm>
+          <a:prstGeom prst="rect">
+            <a:avLst/>
+          </a:prstGeom>
+          <a:noFill/>
+          <a:ln/>
+        </p:spPr>
+        <p:txBody>
+          <a:bodyPr wrap="square" lIns="0" tIns="0" rIns="0" bIns="0" rtlCol="0" anchor="ctr"/>
+          <a:lstStyle/>
+          <a:p>
+            <a:pPr algn="l" indent="0" marL="0">
+              <a:buNone/>
+            </a:pPr>
+            <a:r>
+              <a:rPr lang="en-US" sz="2600" b="1" dirty="0">
+                <a:solidFill>
+                  <a:srgbClr val="0E3A5F"/>
+                </a:solidFill>
+                <a:latin typeface="Calibri" pitchFamily="34" charset="0"/>
+                <a:ea typeface="Calibri" pitchFamily="34" charset="-122"/>
+                <a:cs typeface="Calibri" pitchFamily="34" charset="-120"/>
+              </a:rPr>
+              <a:t>Board-Style Review</a:t>
+            </a:r>
+            <a:endParaRPr lang="en-US" sz="2600" dirty="0"/>
+          </a:p>
+        </p:txBody>
+      </p:sp>
+      <p:sp>
+        <p:nvSpPr>
+          <p:cNvPr id="4" name="Text 2"/>
+          <p:cNvSpPr/>
+          <p:nvPr/>
+        </p:nvSpPr>
+        <p:spPr>
+          <a:xfrm>
+            <a:off x="566928" y="1417320"/>
+            <a:ext cx="11057839" cy="914400"/>
+          </a:xfrm>
+          <a:prstGeom prst="rect">
+            <a:avLst/>
+          </a:prstGeom>
+          <a:noFill/>
+          <a:ln/>
+        </p:spPr>
+        <p:txBody>
+          <a:bodyPr wrap="square" lIns="0" tIns="0" rIns="0" bIns="0" rtlCol="0" anchor="t"/>
+          <a:lstStyle/>
+          <a:p>
+            <a:pPr algn="l" indent="0" marL="0">
+              <a:lnSpc>
+                <a:spcPct val="105000"/>
+              </a:lnSpc>
+              <a:buNone/>
+            </a:pPr>
+            <a:r>
+              <a:rPr lang="en-US" sz="1450" b="1" dirty="0">
+                <a:solidFill>
+                  <a:srgbClr val="1B2A38"/>
+                </a:solidFill>
+                <a:latin typeface="Calibri" pitchFamily="34" charset="0"/>
+                <a:ea typeface="Calibri" pitchFamily="34" charset="-122"/>
+                <a:cs typeface="Calibri" pitchFamily="34" charset="-120"/>
+              </a:rPr>
+              <a:t>A urine immunoassay is positive for opiates but the patient only takes oxycodone. The likely explanation is:</a:t>
+            </a:r>
+            <a:endParaRPr lang="en-US" sz="1450" dirty="0"/>
+          </a:p>
+        </p:txBody>
+      </p:sp>
+      <p:sp>
+        <p:nvSpPr>
+          <p:cNvPr id="5" name="Text 3"/>
+          <p:cNvSpPr/>
+          <p:nvPr/>
+        </p:nvSpPr>
+        <p:spPr>
+          <a:xfrm>
+            <a:off x="658368" y="2395728"/>
+            <a:ext cx="6192390" cy="3017520"/>
+          </a:xfrm>
+          <a:prstGeom prst="rect">
+            <a:avLst/>
+          </a:prstGeom>
+          <a:noFill/>
+          <a:ln/>
+        </p:spPr>
+        <p:txBody>
+          <a:bodyPr wrap="square" lIns="0" tIns="0" rIns="0" bIns="0" rtlCol="0" anchor="t"/>
+          <a:lstStyle/>
+          <a:p>
+            <a:pPr algn="l" indent="0" marL="0">
+              <a:spcAft>
+                <a:spcPts val="600"/>
+              </a:spcAft>
+              <a:buNone/>
+            </a:pPr>
+            <a:r>
+              <a:rPr lang="en-US" sz="1350" dirty="0">
+                <a:solidFill>
+                  <a:srgbClr val="33444F"/>
+                </a:solidFill>
+                <a:latin typeface="Calibri" pitchFamily="34" charset="0"/>
+                <a:ea typeface="Calibri" pitchFamily="34" charset="-122"/>
+                <a:cs typeface="Calibri" pitchFamily="34" charset="-120"/>
+              </a:rPr>
+              <a:t>A. A true positive for morphine</a:t>
+            </a:r>
+            <a:endParaRPr lang="en-US" sz="1350" dirty="0"/>
+          </a:p>
+          <a:p>
+            <a:pPr algn="l" indent="0" marL="0">
+              <a:spcAft>
+                <a:spcPts val="600"/>
+              </a:spcAft>
+              <a:buNone/>
+            </a:pPr>
+            <a:r>
+              <a:rPr lang="en-US" sz="1350" b="1" dirty="0">
+                <a:solidFill>
+                  <a:srgbClr val="0D4A92"/>
+                </a:solidFill>
+                <a:latin typeface="Calibri" pitchFamily="34" charset="0"/>
+                <a:ea typeface="Calibri" pitchFamily="34" charset="-122"/>
+                <a:cs typeface="Calibri" pitchFamily="34" charset="-120"/>
+              </a:rPr>
+              <a:t>B. Opiate screens may not reliably detect semisynthetic/synthetic opioids; targeted testing is needed</a:t>
+            </a:r>
+            <a:endParaRPr lang="en-US" sz="1350" dirty="0"/>
+          </a:p>
+          <a:p>
+            <a:pPr algn="l" indent="0" marL="0">
+              <a:spcAft>
+                <a:spcPts val="600"/>
+              </a:spcAft>
+              <a:buNone/>
+            </a:pPr>
+            <a:r>
+              <a:rPr lang="en-US" sz="1350" dirty="0">
+                <a:solidFill>
+                  <a:srgbClr val="33444F"/>
+                </a:solidFill>
+                <a:latin typeface="Calibri" pitchFamily="34" charset="0"/>
+                <a:ea typeface="Calibri" pitchFamily="34" charset="-122"/>
+                <a:cs typeface="Calibri" pitchFamily="34" charset="-120"/>
+              </a:rPr>
+              <a:t>C. Sample adulteration</a:t>
+            </a:r>
+            <a:endParaRPr lang="en-US" sz="1350" dirty="0"/>
+          </a:p>
+          <a:p>
+            <a:pPr algn="l" indent="0" marL="0">
+              <a:spcAft>
+                <a:spcPts val="600"/>
+              </a:spcAft>
+              <a:buNone/>
+            </a:pPr>
+            <a:r>
+              <a:rPr lang="en-US" sz="1350" dirty="0">
+                <a:solidFill>
+                  <a:srgbClr val="33444F"/>
+                </a:solidFill>
+                <a:latin typeface="Calibri" pitchFamily="34" charset="0"/>
+                <a:ea typeface="Calibri" pitchFamily="34" charset="-122"/>
+                <a:cs typeface="Calibri" pitchFamily="34" charset="-120"/>
+              </a:rPr>
+              <a:t>D. The hook effect</a:t>
+            </a:r>
+            <a:endParaRPr lang="en-US" sz="1350" dirty="0"/>
+          </a:p>
+          <a:p>
+            <a:pPr algn="l" indent="0" marL="0">
+              <a:spcAft>
+                <a:spcPts val="600"/>
+              </a:spcAft>
+              <a:buNone/>
+            </a:pPr>
+            <a:r>
+              <a:rPr lang="en-US" sz="1350" dirty="0">
+                <a:solidFill>
+                  <a:srgbClr val="33444F"/>
+                </a:solidFill>
+                <a:latin typeface="Calibri" pitchFamily="34" charset="0"/>
+                <a:ea typeface="Calibri" pitchFamily="34" charset="-122"/>
+                <a:cs typeface="Calibri" pitchFamily="34" charset="-120"/>
+              </a:rPr>
+              <a:t>E. Heterophile antibody</a:t>
+            </a:r>
+            <a:endParaRPr lang="en-US" sz="1350" dirty="0"/>
+          </a:p>
+        </p:txBody>
+      </p:sp>
+      <p:sp>
+        <p:nvSpPr>
+          <p:cNvPr id="6" name="Shape 4"/>
+          <p:cNvSpPr/>
+          <p:nvPr/>
+        </p:nvSpPr>
+        <p:spPr>
+          <a:xfrm>
+            <a:off x="7201632" y="2395728"/>
+            <a:ext cx="4423136" cy="3246120"/>
+          </a:xfrm>
+          <a:prstGeom prst="roundRect">
+            <a:avLst>
+              <a:gd name="adj" fmla="val 2535"/>
+            </a:avLst>
+          </a:prstGeom>
+          <a:solidFill>
+            <a:srgbClr val="E7EFFA"/>
+          </a:solidFill>
+          <a:ln/>
+          <a:effectLst>
+            <a:outerShdw sx="100000" sy="100000" kx="0" ky="0" algn="bl" rotWithShape="0" blurRad="88900" dist="25400" dir="5400000">
+              <a:srgbClr val="22303C">
+                <a:alpha val="12000"/>
+              </a:srgbClr>
+            </a:outerShdw>
+          </a:effectLst>
+        </p:spPr>
+        <p:txBody>
+          <a:bodyPr/>
+          <a:p/>
+        </p:txBody>
+      </p:sp>
+      <p:sp>
+        <p:nvSpPr>
+          <p:cNvPr id="7" name="Text 5"/>
+          <p:cNvSpPr/>
+          <p:nvPr/>
+        </p:nvSpPr>
+        <p:spPr>
+          <a:xfrm>
+            <a:off x="7439376" y="2578608"/>
+            <a:ext cx="3965936" cy="457200"/>
+          </a:xfrm>
+          <a:prstGeom prst="rect">
+            <a:avLst/>
+          </a:prstGeom>
+          <a:noFill/>
+          <a:ln/>
+        </p:spPr>
+        <p:txBody>
+          <a:bodyPr wrap="square" lIns="0" tIns="0" rIns="0" bIns="0" rtlCol="0" anchor="ctr"/>
+          <a:lstStyle/>
+          <a:p>
+            <a:pPr indent="0" marL="0">
+              <a:buNone/>
+            </a:pPr>
+            <a:r>
+              <a:rPr lang="en-US" sz="1500" b="1" dirty="0">
+                <a:solidFill>
+                  <a:srgbClr val="1565C0"/>
+                </a:solidFill>
+                <a:latin typeface="Calibri" pitchFamily="34" charset="0"/>
+                <a:ea typeface="Calibri" pitchFamily="34" charset="-122"/>
+                <a:cs typeface="Calibri" pitchFamily="34" charset="-120"/>
+              </a:rPr>
+              <a:t>ANSWER  </a:t>
+            </a:r>
+            <a:pPr indent="0" marL="0">
+              <a:buNone/>
+            </a:pPr>
+            <a:r>
+              <a:rPr lang="en-US" sz="1500" b="1" dirty="0">
+                <a:solidFill>
+                  <a:srgbClr val="1B2A38"/>
+                </a:solidFill>
+                <a:latin typeface="Calibri" pitchFamily="34" charset="0"/>
+                <a:ea typeface="Calibri" pitchFamily="34" charset="-122"/>
+                <a:cs typeface="Calibri" pitchFamily="34" charset="-120"/>
+              </a:rPr>
+              <a:t>B — Screens may miss semisynthetic/synthetic opioids</a:t>
+            </a:r>
+            <a:endParaRPr lang="en-US" sz="1500" dirty="0"/>
+          </a:p>
+        </p:txBody>
+      </p:sp>
+      <p:sp>
+        <p:nvSpPr>
+          <p:cNvPr id="8" name="Text 6"/>
+          <p:cNvSpPr/>
+          <p:nvPr/>
+        </p:nvSpPr>
+        <p:spPr>
+          <a:xfrm>
+            <a:off x="7439376" y="3127248"/>
+            <a:ext cx="3947648" cy="2377440"/>
+          </a:xfrm>
+          <a:prstGeom prst="rect">
+            <a:avLst/>
+          </a:prstGeom>
+          <a:noFill/>
+          <a:ln/>
+        </p:spPr>
+        <p:txBody>
+          <a:bodyPr wrap="square" lIns="0" tIns="0" rIns="0" bIns="0" rtlCol="0" anchor="t"/>
+          <a:lstStyle/>
+          <a:p>
+            <a:pPr algn="l" indent="0" marL="0">
+              <a:lnSpc>
+                <a:spcPct val="108000"/>
+              </a:lnSpc>
+              <a:buNone/>
+            </a:pPr>
+            <a:r>
+              <a:rPr lang="en-US" sz="1250" dirty="0">
+                <a:solidFill>
+                  <a:srgbClr val="33444F"/>
+                </a:solidFill>
+                <a:latin typeface="Calibri" pitchFamily="34" charset="0"/>
+                <a:ea typeface="Calibri" pitchFamily="34" charset="-122"/>
+                <a:cs typeface="Calibri" pitchFamily="34" charset="-120"/>
+              </a:rPr>
+              <a:t>Standard opiate immunoassays are calibrated to morphine/codeine and can under-detect oxycodone/fentanyl; targeted assays or LC-MS/MS are required.</a:t>
+            </a:r>
+            <a:endParaRPr lang="en-US" sz="1250" dirty="0"/>
+          </a:p>
+        </p:txBody>
+      </p:sp>
+      <p:sp>
+        <p:nvSpPr>
+          <p:cNvPr id="9" name="Text 7"/>
+          <p:cNvSpPr/>
+          <p:nvPr/>
+        </p:nvSpPr>
+        <p:spPr>
+          <a:xfrm>
+            <a:off x="566928" y="6473952"/>
+            <a:ext cx="7772400" cy="274320"/>
+          </a:xfrm>
+          <a:prstGeom prst="rect">
+            <a:avLst/>
+          </a:prstGeom>
+          <a:noFill/>
+          <a:ln/>
+        </p:spPr>
+        <p:txBody>
+          <a:bodyPr wrap="square" lIns="0" tIns="0" rIns="0" bIns="0" rtlCol="0" anchor="ctr"/>
+          <a:lstStyle/>
+          <a:p>
+            <a:pPr algn="l" indent="0" marL="0">
+              <a:buNone/>
+            </a:pPr>
+            <a:r>
+              <a:rPr lang="en-US" sz="850" dirty="0">
+                <a:solidFill>
+                  <a:srgbClr val="9AA8B4"/>
+                </a:solidFill>
+                <a:latin typeface="Calibri" pitchFamily="34" charset="0"/>
+                <a:ea typeface="Calibri" pitchFamily="34" charset="-122"/>
+                <a:cs typeface="Calibri" pitchFamily="34" charset="-120"/>
+              </a:rPr>
+              <a:t>Makassed General Hospital  ·  Department of Laboratory Medicine</a:t>
+            </a:r>
+            <a:endParaRPr lang="en-US" sz="850" dirty="0"/>
+          </a:p>
+        </p:txBody>
+      </p:sp>
+      <p:sp>
+        <p:nvSpPr>
+          <p:cNvPr id="10" name="Text 8"/>
+          <p:cNvSpPr/>
+          <p:nvPr/>
+        </p:nvSpPr>
+        <p:spPr>
+          <a:xfrm>
+            <a:off x="9814255" y="6473952"/>
+            <a:ext cx="1828800" cy="274320"/>
+          </a:xfrm>
+          <a:prstGeom prst="rect">
+            <a:avLst/>
+          </a:prstGeom>
+          <a:noFill/>
+          <a:ln/>
+        </p:spPr>
+        <p:txBody>
+          <a:bodyPr wrap="square" lIns="0" tIns="0" rIns="0" bIns="0" rtlCol="0" anchor="ctr"/>
+          <a:lstStyle/>
+          <a:p>
+            <a:pPr algn="r" indent="0" marL="0">
+              <a:buNone/>
+            </a:pPr>
+            <a:r>
+              <a:rPr lang="en-US" sz="850" dirty="0">
+                <a:solidFill>
+                  <a:srgbClr val="9AA8B4"/>
+                </a:solidFill>
+                <a:latin typeface="Calibri" pitchFamily="34" charset="0"/>
+                <a:ea typeface="Calibri" pitchFamily="34" charset="-122"/>
+                <a:cs typeface="Calibri" pitchFamily="34" charset="-120"/>
+              </a:rPr>
+              <a:t>CP Lecture Series</a:t>
+            </a:r>
+            <a:pPr algn="r" indent="0" marL="0">
+              <a:buNone/>
+            </a:pPr>
+            <a:r>
+              <a:rPr lang="en-US" sz="850" dirty="0">
+                <a:solidFill>
+                  <a:srgbClr val="DCE4EC"/>
+                </a:solidFill>
+                <a:latin typeface="Calibri" pitchFamily="34" charset="0"/>
+                <a:ea typeface="Calibri" pitchFamily="34" charset="-122"/>
+                <a:cs typeface="Calibri" pitchFamily="34" charset="-120"/>
+              </a:rPr>
+              <a:t>   ·   </a:t>
+            </a:r>
+            <a:pPr algn="r" indent="0" marL="0">
+              <a:buNone/>
+            </a:pPr>
+            <a:r>
+              <a:rPr lang="en-US" sz="850" b="1" dirty="0">
+                <a:solidFill>
+                  <a:srgbClr val="1565C0"/>
+                </a:solidFill>
+                <a:latin typeface="Calibri" pitchFamily="34" charset="0"/>
+                <a:ea typeface="Calibri" pitchFamily="34" charset="-122"/>
+                <a:cs typeface="Calibri" pitchFamily="34" charset="-120"/>
+              </a:rPr>
+              <a:t>17</a:t>
+            </a:r>
+            <a:endParaRPr lang="en-US" sz="850" dirty="0"/>
+          </a:p>
+        </p:txBody>
+      </p:sp>
+    </p:spTree>
+  </p:cSld>
+  <p:clrMapOvr>
+    <a:masterClrMapping/>
+  </p:clrMapOvr>
+</p:sld>
+</file>
+
 <file path=ppt/slides/slide3.xml><?xml version="1.0" encoding="utf-8"?>
 <p:sld xmlns:a="http://schemas.openxmlformats.org/drawingml/2006/main" xmlns:r="http://schemas.openxmlformats.org/officeDocument/2006/relationships" xmlns:p="http://schemas.openxmlformats.org/presentationml/2006/main">
   <p:cSld name="Slide 3">
@@ -12760,6 +14376,10 @@
             </a:outerShdw>
           </a:effectLst>
         </p:spPr>
+        <p:txBody>
+          <a:bodyPr/>
+          <a:p/>
+        </p:txBody>
       </p:sp>
       <p:sp>
         <p:nvSpPr>
@@ -12787,6 +14407,10 @@
             </a:outerShdw>
           </a:effectLst>
         </p:spPr>
+        <p:txBody>
+          <a:bodyPr/>
+          <a:p/>
+        </p:txBody>
       </p:sp>
       <p:sp>
         <p:nvSpPr>
@@ -12894,6 +14518,10 @@
             </a:outerShdw>
           </a:effectLst>
         </p:spPr>
+        <p:txBody>
+          <a:bodyPr/>
+          <a:p/>
+        </p:txBody>
       </p:sp>
       <p:sp>
         <p:nvSpPr>
@@ -12921,6 +14549,10 @@
             </a:outerShdw>
           </a:effectLst>
         </p:spPr>
+        <p:txBody>
+          <a:bodyPr/>
+          <a:p/>
+        </p:txBody>
       </p:sp>
       <p:sp>
         <p:nvSpPr>
@@ -13028,6 +14660,10 @@
             </a:outerShdw>
           </a:effectLst>
         </p:spPr>
+        <p:txBody>
+          <a:bodyPr/>
+          <a:p/>
+        </p:txBody>
       </p:sp>
       <p:sp>
         <p:nvSpPr>
@@ -13055,6 +14691,10 @@
             </a:outerShdw>
           </a:effectLst>
         </p:spPr>
+        <p:txBody>
+          <a:bodyPr/>
+          <a:p/>
+        </p:txBody>
       </p:sp>
       <p:sp>
         <p:nvSpPr>
@@ -13162,6 +14802,10 @@
             </a:outerShdw>
           </a:effectLst>
         </p:spPr>
+        <p:txBody>
+          <a:bodyPr/>
+          <a:p/>
+        </p:txBody>
       </p:sp>
       <p:sp>
         <p:nvSpPr>
@@ -13189,6 +14833,10 @@
             </a:outerShdw>
           </a:effectLst>
         </p:spPr>
+        <p:txBody>
+          <a:bodyPr/>
+          <a:p/>
+        </p:txBody>
       </p:sp>
       <p:sp>
         <p:nvSpPr>
@@ -13296,6 +14944,10 @@
             </a:outerShdw>
           </a:effectLst>
         </p:spPr>
+        <p:txBody>
+          <a:bodyPr/>
+          <a:p/>
+        </p:txBody>
       </p:sp>
       <p:sp>
         <p:nvSpPr>
@@ -13323,6 +14975,10 @@
             </a:outerShdw>
           </a:effectLst>
         </p:spPr>
+        <p:txBody>
+          <a:bodyPr/>
+          <a:p/>
+        </p:txBody>
       </p:sp>
       <p:sp>
         <p:nvSpPr>
@@ -13430,6 +15086,10 @@
             </a:outerShdw>
           </a:effectLst>
         </p:spPr>
+        <p:txBody>
+          <a:bodyPr/>
+          <a:p/>
+        </p:txBody>
       </p:sp>
       <p:sp>
         <p:nvSpPr>
@@ -13457,6 +15117,10 @@
             </a:outerShdw>
           </a:effectLst>
         </p:spPr>
+        <p:txBody>
+          <a:bodyPr/>
+          <a:p/>
+        </p:txBody>
       </p:sp>
       <p:sp>
         <p:nvSpPr>
@@ -13780,6 +15444,10 @@
             </a:outerShdw>
           </a:effectLst>
         </p:spPr>
+        <p:txBody>
+          <a:bodyPr/>
+          <a:p/>
+        </p:txBody>
       </p:sp>
       <p:sp>
         <p:nvSpPr>
@@ -13807,6 +15475,10 @@
             </a:outerShdw>
           </a:effectLst>
         </p:spPr>
+        <p:txBody>
+          <a:bodyPr/>
+          <a:p/>
+        </p:txBody>
       </p:sp>
       <p:sp>
         <p:nvSpPr>
@@ -13921,6 +15593,10 @@
           </a:solidFill>
           <a:ln/>
         </p:spPr>
+        <p:txBody>
+          <a:bodyPr/>
+          <a:p/>
+        </p:txBody>
       </p:sp>
       <p:sp>
         <p:nvSpPr>
@@ -13948,6 +15624,10 @@
             </a:outerShdw>
           </a:effectLst>
         </p:spPr>
+        <p:txBody>
+          <a:bodyPr/>
+          <a:p/>
+        </p:txBody>
       </p:sp>
       <p:sp>
         <p:nvSpPr>
@@ -14069,6 +15749,10 @@
             </a:outerShdw>
           </a:effectLst>
         </p:spPr>
+        <p:txBody>
+          <a:bodyPr/>
+          <a:p/>
+        </p:txBody>
       </p:sp>
       <p:sp>
         <p:nvSpPr>
@@ -14096,6 +15780,10 @@
             </a:outerShdw>
           </a:effectLst>
         </p:spPr>
+        <p:txBody>
+          <a:bodyPr/>
+          <a:p/>
+        </p:txBody>
       </p:sp>
       <p:sp>
         <p:nvSpPr>
@@ -14210,6 +15898,10 @@
           </a:solidFill>
           <a:ln/>
         </p:spPr>
+        <p:txBody>
+          <a:bodyPr/>
+          <a:p/>
+        </p:txBody>
       </p:sp>
       <p:sp>
         <p:nvSpPr>
@@ -14237,6 +15929,10 @@
             </a:outerShdw>
           </a:effectLst>
         </p:spPr>
+        <p:txBody>
+          <a:bodyPr/>
+          <a:p/>
+        </p:txBody>
       </p:sp>
       <p:sp>
         <p:nvSpPr>
@@ -14358,6 +16054,10 @@
             </a:outerShdw>
           </a:effectLst>
         </p:spPr>
+        <p:txBody>
+          <a:bodyPr/>
+          <a:p/>
+        </p:txBody>
       </p:sp>
       <p:sp>
         <p:nvSpPr>
@@ -14385,6 +16085,10 @@
             </a:outerShdw>
           </a:effectLst>
         </p:spPr>
+        <p:txBody>
+          <a:bodyPr/>
+          <a:p/>
+        </p:txBody>
       </p:sp>
       <p:sp>
         <p:nvSpPr>
@@ -14623,6 +16327,10 @@
           </a:solidFill>
           <a:ln/>
         </p:spPr>
+        <p:txBody>
+          <a:bodyPr/>
+          <a:p/>
+        </p:txBody>
       </p:sp>
       <p:sp>
         <p:nvSpPr>
@@ -14645,6 +16353,10 @@
           </a:solidFill>
           <a:ln/>
         </p:spPr>
+        <p:txBody>
+          <a:bodyPr/>
+          <a:p/>
+        </p:txBody>
       </p:sp>
       <p:sp>
         <p:nvSpPr>
@@ -14906,6 +16618,10 @@
             </a:outerShdw>
           </a:effectLst>
         </p:spPr>
+        <p:txBody>
+          <a:bodyPr/>
+          <a:p/>
+        </p:txBody>
       </p:sp>
       <p:pic>
         <p:nvPicPr>
@@ -15214,6 +16930,10 @@
             </a:outerShdw>
           </a:effectLst>
         </p:spPr>
+        <p:txBody>
+          <a:bodyPr/>
+          <a:p/>
+        </p:txBody>
       </p:sp>
       <p:sp>
         <p:nvSpPr>
@@ -15388,6 +17108,10 @@
             </a:outerShdw>
           </a:effectLst>
         </p:spPr>
+        <p:txBody>
+          <a:bodyPr/>
+          <a:p/>
+        </p:txBody>
       </p:sp>
       <p:sp>
         <p:nvSpPr>
@@ -15693,6 +17417,10 @@
           </a:solidFill>
           <a:ln/>
         </p:spPr>
+        <p:txBody>
+          <a:bodyPr/>
+          <a:p/>
+        </p:txBody>
       </p:sp>
       <p:sp>
         <p:nvSpPr>
@@ -15715,6 +17443,10 @@
           </a:solidFill>
           <a:ln/>
         </p:spPr>
+        <p:txBody>
+          <a:bodyPr/>
+          <a:p/>
+        </p:txBody>
       </p:sp>
       <p:sp>
         <p:nvSpPr>
@@ -15976,6 +17708,10 @@
             </a:outerShdw>
           </a:effectLst>
         </p:spPr>
+        <p:txBody>
+          <a:bodyPr/>
+          <a:p/>
+        </p:txBody>
       </p:sp>
       <p:pic>
         <p:nvPicPr>
